--- a/ECCE-2025/Simulation/Simulation.pptx
+++ b/ECCE-2025/Simulation/Simulation.pptx
@@ -8,7 +8,14 @@
     <p:sldId id="256" r:id="rId2"/>
     <p:sldId id="257" r:id="rId3"/>
     <p:sldId id="258" r:id="rId4"/>
-    <p:sldId id="259" r:id="rId5"/>
+    <p:sldId id="260" r:id="rId5"/>
+    <p:sldId id="261" r:id="rId6"/>
+    <p:sldId id="263" r:id="rId7"/>
+    <p:sldId id="264" r:id="rId8"/>
+    <p:sldId id="265" r:id="rId9"/>
+    <p:sldId id="266" r:id="rId10"/>
+    <p:sldId id="262" r:id="rId11"/>
+    <p:sldId id="259" r:id="rId12"/>
   </p:sldIdLst>
   <p:sldSz cx="12192000" cy="6858000"/>
   <p:notesSz cx="6858000" cy="9144000"/>
@@ -107,6 +114,11 @@
       </a:defRPr>
     </a:lvl9pPr>
   </p:defaultTextStyle>
+  <p:extLst>
+    <p:ext uri="{EFAFB233-063F-42B5-8137-9DF3F51BA10A}">
+      <p15:sldGuideLst xmlns:p15="http://schemas.microsoft.com/office/powerpoint/2012/main"/>
+    </p:ext>
+  </p:extLst>
 </p:presentation>
 </file>
 
@@ -241,7 +253,7 @@
           <a:p>
             <a:fld id="{95061327-8FAF-49B9-B6A5-2BC6F2697F94}" type="datetimeFigureOut">
               <a:rPr lang="sv-SE" smtClean="0"/>
-              <a:t>2025-02-19</a:t>
+              <a:t>2025-05-12</a:t>
             </a:fld>
             <a:endParaRPr lang="sv-SE"/>
           </a:p>
@@ -411,7 +423,7 @@
           <a:p>
             <a:fld id="{95061327-8FAF-49B9-B6A5-2BC6F2697F94}" type="datetimeFigureOut">
               <a:rPr lang="sv-SE" smtClean="0"/>
-              <a:t>2025-02-19</a:t>
+              <a:t>2025-05-12</a:t>
             </a:fld>
             <a:endParaRPr lang="sv-SE"/>
           </a:p>
@@ -591,7 +603,7 @@
           <a:p>
             <a:fld id="{95061327-8FAF-49B9-B6A5-2BC6F2697F94}" type="datetimeFigureOut">
               <a:rPr lang="sv-SE" smtClean="0"/>
-              <a:t>2025-02-19</a:t>
+              <a:t>2025-05-12</a:t>
             </a:fld>
             <a:endParaRPr lang="sv-SE"/>
           </a:p>
@@ -761,7 +773,7 @@
           <a:p>
             <a:fld id="{95061327-8FAF-49B9-B6A5-2BC6F2697F94}" type="datetimeFigureOut">
               <a:rPr lang="sv-SE" smtClean="0"/>
-              <a:t>2025-02-19</a:t>
+              <a:t>2025-05-12</a:t>
             </a:fld>
             <a:endParaRPr lang="sv-SE"/>
           </a:p>
@@ -1007,7 +1019,7 @@
           <a:p>
             <a:fld id="{95061327-8FAF-49B9-B6A5-2BC6F2697F94}" type="datetimeFigureOut">
               <a:rPr lang="sv-SE" smtClean="0"/>
-              <a:t>2025-02-19</a:t>
+              <a:t>2025-05-12</a:t>
             </a:fld>
             <a:endParaRPr lang="sv-SE"/>
           </a:p>
@@ -1239,7 +1251,7 @@
           <a:p>
             <a:fld id="{95061327-8FAF-49B9-B6A5-2BC6F2697F94}" type="datetimeFigureOut">
               <a:rPr lang="sv-SE" smtClean="0"/>
-              <a:t>2025-02-19</a:t>
+              <a:t>2025-05-12</a:t>
             </a:fld>
             <a:endParaRPr lang="sv-SE"/>
           </a:p>
@@ -1606,7 +1618,7 @@
           <a:p>
             <a:fld id="{95061327-8FAF-49B9-B6A5-2BC6F2697F94}" type="datetimeFigureOut">
               <a:rPr lang="sv-SE" smtClean="0"/>
-              <a:t>2025-02-19</a:t>
+              <a:t>2025-05-12</a:t>
             </a:fld>
             <a:endParaRPr lang="sv-SE"/>
           </a:p>
@@ -1724,7 +1736,7 @@
           <a:p>
             <a:fld id="{95061327-8FAF-49B9-B6A5-2BC6F2697F94}" type="datetimeFigureOut">
               <a:rPr lang="sv-SE" smtClean="0"/>
-              <a:t>2025-02-19</a:t>
+              <a:t>2025-05-12</a:t>
             </a:fld>
             <a:endParaRPr lang="sv-SE"/>
           </a:p>
@@ -1819,7 +1831,7 @@
           <a:p>
             <a:fld id="{95061327-8FAF-49B9-B6A5-2BC6F2697F94}" type="datetimeFigureOut">
               <a:rPr lang="sv-SE" smtClean="0"/>
-              <a:t>2025-02-19</a:t>
+              <a:t>2025-05-12</a:t>
             </a:fld>
             <a:endParaRPr lang="sv-SE"/>
           </a:p>
@@ -2096,7 +2108,7 @@
           <a:p>
             <a:fld id="{95061327-8FAF-49B9-B6A5-2BC6F2697F94}" type="datetimeFigureOut">
               <a:rPr lang="sv-SE" smtClean="0"/>
-              <a:t>2025-02-19</a:t>
+              <a:t>2025-05-12</a:t>
             </a:fld>
             <a:endParaRPr lang="sv-SE"/>
           </a:p>
@@ -2349,7 +2361,7 @@
           <a:p>
             <a:fld id="{95061327-8FAF-49B9-B6A5-2BC6F2697F94}" type="datetimeFigureOut">
               <a:rPr lang="sv-SE" smtClean="0"/>
-              <a:t>2025-02-19</a:t>
+              <a:t>2025-05-12</a:t>
             </a:fld>
             <a:endParaRPr lang="sv-SE"/>
           </a:p>
@@ -2562,7 +2574,7 @@
           <a:p>
             <a:fld id="{95061327-8FAF-49B9-B6A5-2BC6F2697F94}" type="datetimeFigureOut">
               <a:rPr lang="sv-SE" smtClean="0"/>
-              <a:t>2025-02-19</a:t>
+              <a:t>2025-05-12</a:t>
             </a:fld>
             <a:endParaRPr lang="sv-SE"/>
           </a:p>
@@ -3597,7 +3609,7 @@
 </p:sld>
 </file>
 
-<file path=ppt/slides/slide2.xml><?xml version="1.0" encoding="utf-8"?>
+<file path=ppt/slides/slide10.xml><?xml version="1.0" encoding="utf-8"?>
 <p:sld xmlns:a="http://schemas.openxmlformats.org/drawingml/2006/main" xmlns:r="http://schemas.openxmlformats.org/officeDocument/2006/relationships" xmlns:p="http://schemas.openxmlformats.org/presentationml/2006/main">
   <p:cSld>
     <p:spTree>
@@ -3616,7 +3628,7 @@
       </p:grpSpPr>
       <p:pic>
         <p:nvPicPr>
-          <p:cNvPr id="6" name="Picture 5"/>
+          <p:cNvPr id="4" name="Picture 3"/>
           <p:cNvPicPr>
             <a:picLocks noChangeAspect="1"/>
           </p:cNvPicPr>
@@ -3624,58 +3636,22 @@
         </p:nvPicPr>
         <p:blipFill rotWithShape="1">
           <a:blip r:embed="rId2"/>
-          <a:srcRect l="12286" t="6953" r="8857" b="9619"/>
+          <a:srcRect l="11275" t="5113"/>
           <a:stretch/>
         </p:blipFill>
         <p:spPr>
           <a:xfrm>
-            <a:off x="1432560" y="1059180"/>
-            <a:ext cx="4206240" cy="3337560"/>
+            <a:off x="1181099" y="-3752851"/>
+            <a:ext cx="4732589" cy="3795969"/>
           </a:xfrm>
           <a:prstGeom prst="rect">
             <a:avLst/>
           </a:prstGeom>
         </p:spPr>
       </p:pic>
-      <p:sp>
-        <p:nvSpPr>
-          <p:cNvPr id="7" name="TextBox 6"/>
-          <p:cNvSpPr txBox="1"/>
-          <p:nvPr/>
-        </p:nvSpPr>
-        <p:spPr>
-          <a:xfrm>
-            <a:off x="2975611" y="4375151"/>
-            <a:ext cx="2089150" cy="307777"/>
-          </a:xfrm>
-          <a:prstGeom prst="rect">
-            <a:avLst/>
-          </a:prstGeom>
-          <a:noFill/>
-        </p:spPr>
-        <p:txBody>
-          <a:bodyPr wrap="square" rtlCol="0">
-            <a:spAutoFit/>
-          </a:bodyPr>
-          <a:lstStyle/>
-          <a:p>
-            <a:r>
-              <a:rPr lang="en-US" sz="1400" dirty="0" smtClean="0">
-                <a:latin typeface="Times New Roman" panose="02020603050405020304" pitchFamily="18" charset="0"/>
-                <a:cs typeface="Times New Roman" panose="02020603050405020304" pitchFamily="18" charset="0"/>
-              </a:rPr>
-              <a:t>Time: 2ms/div</a:t>
-            </a:r>
-            <a:endParaRPr lang="sv-SE" sz="1400" dirty="0">
-              <a:latin typeface="Times New Roman" panose="02020603050405020304" pitchFamily="18" charset="0"/>
-              <a:cs typeface="Times New Roman" panose="02020603050405020304" pitchFamily="18" charset="0"/>
-            </a:endParaRPr>
-          </a:p>
-        </p:txBody>
-      </p:sp>
       <p:pic>
         <p:nvPicPr>
-          <p:cNvPr id="9" name="Picture 8"/>
+          <p:cNvPr id="5" name="Picture 4"/>
           <p:cNvPicPr>
             <a:picLocks noChangeAspect="1"/>
           </p:cNvPicPr>
@@ -3683,19 +3659,155 @@
         </p:nvPicPr>
         <p:blipFill rotWithShape="1">
           <a:blip r:embed="rId3"/>
-          <a:srcRect l="12714" t="6572" r="8714" b="9809"/>
+          <a:srcRect t="3017"/>
           <a:stretch/>
         </p:blipFill>
         <p:spPr>
           <a:xfrm>
-            <a:off x="6705600" y="1043940"/>
-            <a:ext cx="4191000" cy="3345180"/>
+            <a:off x="5584731" y="-3771901"/>
+            <a:ext cx="5334000" cy="3879813"/>
           </a:xfrm>
           <a:prstGeom prst="rect">
             <a:avLst/>
           </a:prstGeom>
         </p:spPr>
       </p:pic>
+      <p:sp>
+        <p:nvSpPr>
+          <p:cNvPr id="6" name="TextBox 5"/>
+          <p:cNvSpPr txBox="1"/>
+          <p:nvPr/>
+        </p:nvSpPr>
+        <p:spPr>
+          <a:xfrm>
+            <a:off x="2558353" y="-326213"/>
+            <a:ext cx="2089150" cy="369332"/>
+          </a:xfrm>
+          <a:prstGeom prst="rect">
+            <a:avLst/>
+          </a:prstGeom>
+          <a:noFill/>
+        </p:spPr>
+        <p:txBody>
+          <a:bodyPr wrap="square" rtlCol="0">
+            <a:spAutoFit/>
+          </a:bodyPr>
+          <a:lstStyle/>
+          <a:p>
+            <a:r>
+              <a:rPr lang="en-US" dirty="0" smtClean="0">
+                <a:latin typeface="Times New Roman" panose="02020603050405020304" pitchFamily="18" charset="0"/>
+                <a:cs typeface="Times New Roman" panose="02020603050405020304" pitchFamily="18" charset="0"/>
+              </a:rPr>
+              <a:t>Time: 2ms/div</a:t>
+            </a:r>
+            <a:endParaRPr lang="sv-SE" dirty="0">
+              <a:latin typeface="Times New Roman" panose="02020603050405020304" pitchFamily="18" charset="0"/>
+              <a:cs typeface="Times New Roman" panose="02020603050405020304" pitchFamily="18" charset="0"/>
+            </a:endParaRPr>
+          </a:p>
+        </p:txBody>
+      </p:sp>
+      <p:sp>
+        <p:nvSpPr>
+          <p:cNvPr id="7" name="TextBox 6"/>
+          <p:cNvSpPr txBox="1"/>
+          <p:nvPr/>
+        </p:nvSpPr>
+        <p:spPr>
+          <a:xfrm rot="16200000">
+            <a:off x="-597822" y="-2160142"/>
+            <a:ext cx="3301523" cy="369332"/>
+          </a:xfrm>
+          <a:prstGeom prst="rect">
+            <a:avLst/>
+          </a:prstGeom>
+          <a:noFill/>
+        </p:spPr>
+        <p:txBody>
+          <a:bodyPr wrap="square" rtlCol="0">
+            <a:spAutoFit/>
+          </a:bodyPr>
+          <a:lstStyle/>
+          <a:p>
+            <a:r>
+              <a:rPr lang="en-US" dirty="0" smtClean="0">
+                <a:latin typeface="Times New Roman" panose="02020603050405020304" pitchFamily="18" charset="0"/>
+                <a:cs typeface="Times New Roman" panose="02020603050405020304" pitchFamily="18" charset="0"/>
+              </a:rPr>
+              <a:t>Normalized Voltage: </a:t>
+            </a:r>
+            <a:r>
+              <a:rPr lang="en-US" dirty="0" smtClean="0">
+                <a:latin typeface="Times New Roman" panose="02020603050405020304" pitchFamily="18" charset="0"/>
+                <a:cs typeface="Times New Roman" panose="02020603050405020304" pitchFamily="18" charset="0"/>
+              </a:rPr>
+              <a:t>0.16 </a:t>
+            </a:r>
+            <a:r>
+              <a:rPr lang="en-US" dirty="0" err="1" smtClean="0">
+                <a:latin typeface="Times New Roman" panose="02020603050405020304" pitchFamily="18" charset="0"/>
+                <a:cs typeface="Times New Roman" panose="02020603050405020304" pitchFamily="18" charset="0"/>
+              </a:rPr>
+              <a:t>p.u</a:t>
+            </a:r>
+            <a:r>
+              <a:rPr lang="en-US" dirty="0" smtClean="0">
+                <a:latin typeface="Times New Roman" panose="02020603050405020304" pitchFamily="18" charset="0"/>
+                <a:cs typeface="Times New Roman" panose="02020603050405020304" pitchFamily="18" charset="0"/>
+              </a:rPr>
+              <a:t>./div</a:t>
+            </a:r>
+            <a:endParaRPr lang="sv-SE" dirty="0">
+              <a:latin typeface="Times New Roman" panose="02020603050405020304" pitchFamily="18" charset="0"/>
+              <a:cs typeface="Times New Roman" panose="02020603050405020304" pitchFamily="18" charset="0"/>
+            </a:endParaRPr>
+          </a:p>
+        </p:txBody>
+      </p:sp>
+      <p:sp>
+        <p:nvSpPr>
+          <p:cNvPr id="9" name="TextBox 8"/>
+          <p:cNvSpPr txBox="1"/>
+          <p:nvPr/>
+        </p:nvSpPr>
+        <p:spPr>
+          <a:xfrm rot="16200000">
+            <a:off x="4544747" y="-2325714"/>
+            <a:ext cx="2368551" cy="369332"/>
+          </a:xfrm>
+          <a:prstGeom prst="rect">
+            <a:avLst/>
+          </a:prstGeom>
+          <a:noFill/>
+        </p:spPr>
+        <p:txBody>
+          <a:bodyPr wrap="square" rtlCol="0">
+            <a:spAutoFit/>
+          </a:bodyPr>
+          <a:lstStyle/>
+          <a:p>
+            <a:r>
+              <a:rPr lang="en-US" dirty="0" smtClean="0">
+                <a:latin typeface="Times New Roman" panose="02020603050405020304" pitchFamily="18" charset="0"/>
+                <a:cs typeface="Times New Roman" panose="02020603050405020304" pitchFamily="18" charset="0"/>
+              </a:rPr>
+              <a:t>Normalized </a:t>
+            </a:r>
+            <a:r>
+              <a:rPr lang="en-US" dirty="0" smtClean="0">
+                <a:latin typeface="Times New Roman" panose="02020603050405020304" pitchFamily="18" charset="0"/>
+                <a:cs typeface="Times New Roman" panose="02020603050405020304" pitchFamily="18" charset="0"/>
+              </a:rPr>
+              <a:t>Voltage</a:t>
+            </a:r>
+            <a:endParaRPr lang="sv-SE" dirty="0">
+              <a:latin typeface="Times New Roman" panose="02020603050405020304" pitchFamily="18" charset="0"/>
+              <a:cs typeface="Times New Roman" panose="02020603050405020304" pitchFamily="18" charset="0"/>
+            </a:endParaRPr>
+          </a:p>
+        </p:txBody>
+      </p:sp>
       <p:sp>
         <p:nvSpPr>
           <p:cNvPr id="10" name="TextBox 9"/>
@@ -3704,8 +3816,8 @@
         </p:nvSpPr>
         <p:spPr>
           <a:xfrm>
-            <a:off x="8362951" y="4324351"/>
-            <a:ext cx="2089150" cy="307777"/>
+            <a:off x="5311755" y="-326213"/>
+            <a:ext cx="2089150" cy="369332"/>
           </a:xfrm>
           <a:prstGeom prst="rect">
             <a:avLst/>
@@ -3719,29 +3831,557 @@
           <a:lstStyle/>
           <a:p>
             <a:r>
-              <a:rPr lang="en-US" sz="1400" dirty="0" smtClean="0">
-                <a:latin typeface="Times New Roman" panose="02020603050405020304" pitchFamily="18" charset="0"/>
-                <a:cs typeface="Times New Roman" panose="02020603050405020304" pitchFamily="18" charset="0"/>
-              </a:rPr>
-              <a:t>Time: 2ms/div</a:t>
-            </a:r>
-            <a:endParaRPr lang="sv-SE" sz="1400" dirty="0">
+              <a:rPr lang="en-US" dirty="0" smtClean="0">
+                <a:latin typeface="Times New Roman" panose="02020603050405020304" pitchFamily="18" charset="0"/>
+                <a:cs typeface="Times New Roman" panose="02020603050405020304" pitchFamily="18" charset="0"/>
+              </a:rPr>
+              <a:t>Frequency</a:t>
+            </a:r>
+            <a:endParaRPr lang="sv-SE" dirty="0">
               <a:latin typeface="Times New Roman" panose="02020603050405020304" pitchFamily="18" charset="0"/>
               <a:cs typeface="Times New Roman" panose="02020603050405020304" pitchFamily="18" charset="0"/>
             </a:endParaRPr>
           </a:p>
         </p:txBody>
       </p:sp>
-      <p:sp>
-        <p:nvSpPr>
-          <p:cNvPr id="11" name="TextBox 10"/>
+      <mc:AlternateContent xmlns:mc="http://schemas.openxmlformats.org/markup-compatibility/2006">
+        <mc:Choice xmlns:a14="http://schemas.microsoft.com/office/drawing/2010/main" Requires="a14">
+          <p:sp>
+            <p:nvSpPr>
+              <p:cNvPr id="11" name="TextBox 10"/>
+              <p:cNvSpPr txBox="1"/>
+              <p:nvPr/>
+            </p:nvSpPr>
+            <p:spPr>
+              <a:xfrm>
+                <a:off x="6511802" y="-3626238"/>
+                <a:ext cx="3110524" cy="397994"/>
+              </a:xfrm>
+              <a:prstGeom prst="rect">
+                <a:avLst/>
+              </a:prstGeom>
+              <a:noFill/>
+            </p:spPr>
+            <p:txBody>
+              <a:bodyPr wrap="square" rtlCol="0">
+                <a:spAutoFit/>
+              </a:bodyPr>
+              <a:lstStyle/>
+              <a:p>
+                <a14:m>
+                  <m:oMath xmlns:m="http://schemas.openxmlformats.org/officeDocument/2006/math">
+                    <m:sSub>
+                      <m:sSubPr>
+                        <m:ctrlPr>
+                          <a:rPr lang="en-US" i="1" dirty="0" smtClean="0">
+                            <a:solidFill>
+                              <a:srgbClr val="A71993"/>
+                            </a:solidFill>
+                            <a:latin typeface="Cambria Math" panose="02040503050406030204" pitchFamily="18" charset="0"/>
+                            <a:cs typeface="Times New Roman" panose="02020603050405020304" pitchFamily="18" charset="0"/>
+                          </a:rPr>
+                        </m:ctrlPr>
+                      </m:sSubPr>
+                      <m:e>
+                        <m:sSub>
+                          <m:sSubPr>
+                            <m:ctrlPr>
+                              <a:rPr lang="en-US" i="1" dirty="0" smtClean="0">
+                                <a:solidFill>
+                                  <a:srgbClr val="A71993"/>
+                                </a:solidFill>
+                                <a:latin typeface="Cambria Math" panose="02040503050406030204" pitchFamily="18" charset="0"/>
+                                <a:cs typeface="Times New Roman" panose="02020603050405020304" pitchFamily="18" charset="0"/>
+                              </a:rPr>
+                            </m:ctrlPr>
+                          </m:sSubPr>
+                          <m:e>
+                            <m:r>
+                              <a:rPr lang="en-US" i="1" dirty="0" smtClean="0">
+                                <a:solidFill>
+                                  <a:srgbClr val="A71993"/>
+                                </a:solidFill>
+                                <a:latin typeface="Cambria Math" panose="02040503050406030204" pitchFamily="18" charset="0"/>
+                                <a:cs typeface="Times New Roman" panose="02020603050405020304" pitchFamily="18" charset="0"/>
+                              </a:rPr>
+                              <m:t>𝑉</m:t>
+                            </m:r>
+                          </m:e>
+                          <m:sub>
+                            <m:r>
+                              <a:rPr lang="en-US" i="1" dirty="0" smtClean="0">
+                                <a:solidFill>
+                                  <a:srgbClr val="A71993"/>
+                                </a:solidFill>
+                                <a:latin typeface="Cambria Math" panose="02040503050406030204" pitchFamily="18" charset="0"/>
+                                <a:cs typeface="Times New Roman" panose="02020603050405020304" pitchFamily="18" charset="0"/>
+                              </a:rPr>
+                              <m:t>𝐶𝑀</m:t>
+                            </m:r>
+                          </m:sub>
+                        </m:sSub>
+                      </m:e>
+                      <m:sub>
+                        <m:r>
+                          <a:rPr lang="en-US" i="1" dirty="0" smtClean="0">
+                            <a:solidFill>
+                              <a:srgbClr val="A71993"/>
+                            </a:solidFill>
+                            <a:latin typeface="Cambria Math" panose="02040503050406030204" pitchFamily="18" charset="0"/>
+                            <a:cs typeface="Times New Roman" panose="02020603050405020304" pitchFamily="18" charset="0"/>
+                          </a:rPr>
+                          <m:t>𝑊</m:t>
+                        </m:r>
+                        <m:r>
+                          <a:rPr lang="en-US" b="0" i="1" dirty="0" smtClean="0">
+                            <a:solidFill>
+                              <a:srgbClr val="A71993"/>
+                            </a:solidFill>
+                            <a:latin typeface="Cambria Math" panose="02040503050406030204" pitchFamily="18" charset="0"/>
+                            <a:cs typeface="Times New Roman" panose="02020603050405020304" pitchFamily="18" charset="0"/>
+                          </a:rPr>
+                          <m:t>−</m:t>
+                        </m:r>
+                        <m:r>
+                          <a:rPr lang="en-US" b="0" i="1" dirty="0" smtClean="0">
+                            <a:solidFill>
+                              <a:srgbClr val="A71993"/>
+                            </a:solidFill>
+                            <a:latin typeface="Cambria Math" panose="02040503050406030204" pitchFamily="18" charset="0"/>
+                            <a:cs typeface="Times New Roman" panose="02020603050405020304" pitchFamily="18" charset="0"/>
+                          </a:rPr>
+                          <m:t>𝑅𝑀𝑆</m:t>
+                        </m:r>
+                      </m:sub>
+                    </m:sSub>
+                    <m:r>
+                      <a:rPr lang="en-US" b="0" i="1" dirty="0" smtClean="0">
+                        <a:solidFill>
+                          <a:srgbClr val="A71993"/>
+                        </a:solidFill>
+                        <a:latin typeface="Cambria Math" panose="02040503050406030204" pitchFamily="18" charset="0"/>
+                        <a:cs typeface="Times New Roman" panose="02020603050405020304" pitchFamily="18" charset="0"/>
+                      </a:rPr>
+                      <m:t> </m:t>
+                    </m:r>
+                  </m:oMath>
+                </a14:m>
+                <a:r>
+                  <a:rPr lang="en-US" dirty="0" smtClean="0">
+                    <a:solidFill>
+                      <a:srgbClr val="A71993"/>
+                    </a:solidFill>
+                    <a:latin typeface="Times New Roman" panose="02020603050405020304" pitchFamily="18" charset="0"/>
+                    <a:cs typeface="Times New Roman" panose="02020603050405020304" pitchFamily="18" charset="0"/>
+                  </a:rPr>
+                  <a:t>=0.0023</a:t>
+                </a:r>
+                <a:endParaRPr lang="sv-SE" sz="1400" dirty="0">
+                  <a:solidFill>
+                    <a:srgbClr val="A71993"/>
+                  </a:solidFill>
+                  <a:latin typeface="Times New Roman" panose="02020603050405020304" pitchFamily="18" charset="0"/>
+                  <a:cs typeface="Times New Roman" panose="02020603050405020304" pitchFamily="18" charset="0"/>
+                </a:endParaRPr>
+              </a:p>
+            </p:txBody>
+          </p:sp>
+        </mc:Choice>
+        <mc:Fallback>
+          <p:sp>
+            <p:nvSpPr>
+              <p:cNvPr id="11" name="TextBox 10"/>
+              <p:cNvSpPr txBox="1">
+                <a:spLocks noRot="1" noChangeAspect="1" noMove="1" noResize="1" noEditPoints="1" noAdjustHandles="1" noChangeArrowheads="1" noChangeShapeType="1" noTextEdit="1"/>
+              </p:cNvSpPr>
+              <p:nvPr/>
+            </p:nvSpPr>
+            <p:spPr>
+              <a:xfrm>
+                <a:off x="6511802" y="-3626238"/>
+                <a:ext cx="3110524" cy="397994"/>
+              </a:xfrm>
+              <a:prstGeom prst="rect">
+                <a:avLst/>
+              </a:prstGeom>
+              <a:blipFill>
+                <a:blip r:embed="rId4"/>
+                <a:stretch>
+                  <a:fillRect t="-7692" b="-16923"/>
+                </a:stretch>
+              </a:blipFill>
+            </p:spPr>
+            <p:txBody>
+              <a:bodyPr/>
+              <a:lstStyle/>
+              <a:p>
+                <a:r>
+                  <a:rPr lang="sv-SE">
+                    <a:noFill/>
+                  </a:rPr>
+                  <a:t> </a:t>
+                </a:r>
+              </a:p>
+            </p:txBody>
+          </p:sp>
+        </mc:Fallback>
+      </mc:AlternateContent>
+      <mc:AlternateContent xmlns:mc="http://schemas.openxmlformats.org/markup-compatibility/2006">
+        <mc:Choice xmlns:a14="http://schemas.microsoft.com/office/drawing/2010/main" Requires="a14">
+          <p:sp>
+            <p:nvSpPr>
+              <p:cNvPr id="12" name="TextBox 11"/>
+              <p:cNvSpPr txBox="1"/>
+              <p:nvPr/>
+            </p:nvSpPr>
+            <p:spPr>
+              <a:xfrm>
+                <a:off x="8067064" y="-2566984"/>
+                <a:ext cx="1320444" cy="400110"/>
+              </a:xfrm>
+              <a:prstGeom prst="rect">
+                <a:avLst/>
+              </a:prstGeom>
+              <a:noFill/>
+            </p:spPr>
+            <p:txBody>
+              <a:bodyPr wrap="square" rtlCol="0">
+                <a:spAutoFit/>
+              </a:bodyPr>
+              <a:lstStyle/>
+              <a:p>
+                <a14:m>
+                  <m:oMath xmlns:m="http://schemas.openxmlformats.org/officeDocument/2006/math">
+                    <m:sSub>
+                      <m:sSubPr>
+                        <m:ctrlPr>
+                          <a:rPr lang="en-US" sz="2000" b="0" i="1" dirty="0" smtClean="0">
+                            <a:latin typeface="Cambria Math" panose="02040503050406030204" pitchFamily="18" charset="0"/>
+                            <a:cs typeface="Times New Roman" panose="02020603050405020304" pitchFamily="18" charset="0"/>
+                          </a:rPr>
+                        </m:ctrlPr>
+                      </m:sSubPr>
+                      <m:e>
+                        <m:r>
+                          <m:rPr>
+                            <m:sty m:val="p"/>
+                          </m:rPr>
+                          <a:rPr lang="en-US" sz="2000" b="0" i="0" dirty="0" smtClean="0">
+                            <a:latin typeface="Cambria Math" panose="02040503050406030204" pitchFamily="18" charset="0"/>
+                            <a:cs typeface="Times New Roman" panose="02020603050405020304" pitchFamily="18" charset="0"/>
+                          </a:rPr>
+                          <m:t>m</m:t>
+                        </m:r>
+                      </m:e>
+                      <m:sub>
+                        <m:r>
+                          <a:rPr lang="en-US" sz="2000" i="1" dirty="0" smtClean="0">
+                            <a:latin typeface="Cambria Math" panose="02040503050406030204" pitchFamily="18" charset="0"/>
+                            <a:cs typeface="Times New Roman" panose="02020603050405020304" pitchFamily="18" charset="0"/>
+                          </a:rPr>
+                          <m:t>𝑎</m:t>
+                        </m:r>
+                      </m:sub>
+                    </m:sSub>
+                    <m:r>
+                      <a:rPr lang="en-US" sz="2000" b="0" i="1" dirty="0" smtClean="0">
+                        <a:latin typeface="Cambria Math" panose="02040503050406030204" pitchFamily="18" charset="0"/>
+                        <a:cs typeface="Times New Roman" panose="02020603050405020304" pitchFamily="18" charset="0"/>
+                      </a:rPr>
+                      <m:t> </m:t>
+                    </m:r>
+                    <m:r>
+                      <a:rPr lang="en-US" sz="2000" b="0" i="1" dirty="0" smtClean="0">
+                        <a:latin typeface="Cambria Math" panose="02040503050406030204" pitchFamily="18" charset="0"/>
+                        <a:cs typeface="Times New Roman" panose="02020603050405020304" pitchFamily="18" charset="0"/>
+                      </a:rPr>
+                      <m:t> </m:t>
+                    </m:r>
+                  </m:oMath>
+                </a14:m>
+                <a:r>
+                  <a:rPr lang="en-US" sz="2000" dirty="0" smtClean="0">
+                    <a:latin typeface="Times New Roman" panose="02020603050405020304" pitchFamily="18" charset="0"/>
+                    <a:cs typeface="Times New Roman" panose="02020603050405020304" pitchFamily="18" charset="0"/>
+                  </a:rPr>
+                  <a:t>= 0.4</a:t>
+                </a:r>
+                <a:endParaRPr lang="sv-SE" sz="1600" dirty="0">
+                  <a:latin typeface="Times New Roman" panose="02020603050405020304" pitchFamily="18" charset="0"/>
+                  <a:cs typeface="Times New Roman" panose="02020603050405020304" pitchFamily="18" charset="0"/>
+                </a:endParaRPr>
+              </a:p>
+            </p:txBody>
+          </p:sp>
+        </mc:Choice>
+        <mc:Fallback>
+          <p:sp>
+            <p:nvSpPr>
+              <p:cNvPr id="12" name="TextBox 11"/>
+              <p:cNvSpPr txBox="1">
+                <a:spLocks noRot="1" noChangeAspect="1" noMove="1" noResize="1" noEditPoints="1" noAdjustHandles="1" noChangeArrowheads="1" noChangeShapeType="1" noTextEdit="1"/>
+              </p:cNvSpPr>
+              <p:nvPr/>
+            </p:nvSpPr>
+            <p:spPr>
+              <a:xfrm>
+                <a:off x="8067064" y="-2566984"/>
+                <a:ext cx="1320444" cy="400110"/>
+              </a:xfrm>
+              <a:prstGeom prst="rect">
+                <a:avLst/>
+              </a:prstGeom>
+              <a:blipFill>
+                <a:blip r:embed="rId5"/>
+                <a:stretch>
+                  <a:fillRect t="-9091" b="-25758"/>
+                </a:stretch>
+              </a:blipFill>
+            </p:spPr>
+            <p:txBody>
+              <a:bodyPr/>
+              <a:lstStyle/>
+              <a:p>
+                <a:r>
+                  <a:rPr lang="sv-SE">
+                    <a:noFill/>
+                  </a:rPr>
+                  <a:t> </a:t>
+                </a:r>
+              </a:p>
+            </p:txBody>
+          </p:sp>
+        </mc:Fallback>
+      </mc:AlternateContent>
+      <mc:AlternateContent xmlns:mc="http://schemas.openxmlformats.org/markup-compatibility/2006">
+        <mc:Choice xmlns:a14="http://schemas.microsoft.com/office/drawing/2010/main" Requires="a14">
+          <p:sp>
+            <p:nvSpPr>
+              <p:cNvPr id="13" name="TextBox 12"/>
+              <p:cNvSpPr txBox="1"/>
+              <p:nvPr/>
+            </p:nvSpPr>
+            <p:spPr>
+              <a:xfrm>
+                <a:off x="8490455" y="-3626750"/>
+                <a:ext cx="2069099" cy="398507"/>
+              </a:xfrm>
+              <a:prstGeom prst="rect">
+                <a:avLst/>
+              </a:prstGeom>
+              <a:noFill/>
+            </p:spPr>
+            <p:txBody>
+              <a:bodyPr wrap="square" rtlCol="0">
+                <a:spAutoFit/>
+              </a:bodyPr>
+              <a:lstStyle/>
+              <a:p>
+                <a14:m>
+                  <m:oMath xmlns:m="http://schemas.openxmlformats.org/officeDocument/2006/math">
+                    <m:sSub>
+                      <m:sSubPr>
+                        <m:ctrlPr>
+                          <a:rPr lang="en-US" i="1" dirty="0" smtClean="0">
+                            <a:solidFill>
+                              <a:srgbClr val="249C8E"/>
+                            </a:solidFill>
+                            <a:latin typeface="Cambria Math" panose="02040503050406030204" pitchFamily="18" charset="0"/>
+                            <a:cs typeface="Times New Roman" panose="02020603050405020304" pitchFamily="18" charset="0"/>
+                          </a:rPr>
+                        </m:ctrlPr>
+                      </m:sSubPr>
+                      <m:e>
+                        <m:sSub>
+                          <m:sSubPr>
+                            <m:ctrlPr>
+                              <a:rPr lang="en-US" i="1" dirty="0">
+                                <a:solidFill>
+                                  <a:srgbClr val="249C8E"/>
+                                </a:solidFill>
+                                <a:latin typeface="Cambria Math" panose="02040503050406030204" pitchFamily="18" charset="0"/>
+                                <a:cs typeface="Times New Roman" panose="02020603050405020304" pitchFamily="18" charset="0"/>
+                              </a:rPr>
+                            </m:ctrlPr>
+                          </m:sSubPr>
+                          <m:e>
+                            <m:r>
+                              <a:rPr lang="en-US" i="1" dirty="0">
+                                <a:solidFill>
+                                  <a:srgbClr val="249C8E"/>
+                                </a:solidFill>
+                                <a:latin typeface="Cambria Math" panose="02040503050406030204" pitchFamily="18" charset="0"/>
+                                <a:cs typeface="Times New Roman" panose="02020603050405020304" pitchFamily="18" charset="0"/>
+                              </a:rPr>
+                              <m:t>𝑉</m:t>
+                            </m:r>
+                          </m:e>
+                          <m:sub>
+                            <m:r>
+                              <a:rPr lang="en-US" i="1" dirty="0">
+                                <a:solidFill>
+                                  <a:srgbClr val="249C8E"/>
+                                </a:solidFill>
+                                <a:latin typeface="Cambria Math" panose="02040503050406030204" pitchFamily="18" charset="0"/>
+                                <a:cs typeface="Times New Roman" panose="02020603050405020304" pitchFamily="18" charset="0"/>
+                              </a:rPr>
+                              <m:t>𝐶𝑀</m:t>
+                            </m:r>
+                          </m:sub>
+                        </m:sSub>
+                      </m:e>
+                      <m:sub>
+                        <m:r>
+                          <a:rPr lang="en-US" i="1" dirty="0">
+                            <a:solidFill>
+                              <a:srgbClr val="249C8E"/>
+                            </a:solidFill>
+                            <a:latin typeface="Cambria Math" panose="02040503050406030204" pitchFamily="18" charset="0"/>
+                            <a:cs typeface="Times New Roman" panose="02020603050405020304" pitchFamily="18" charset="0"/>
+                          </a:rPr>
+                          <m:t>𝑊</m:t>
+                        </m:r>
+                        <m:r>
+                          <a:rPr lang="en-US" i="1" dirty="0">
+                            <a:solidFill>
+                              <a:srgbClr val="249C8E"/>
+                            </a:solidFill>
+                            <a:latin typeface="Cambria Math" panose="02040503050406030204" pitchFamily="18" charset="0"/>
+                            <a:cs typeface="Times New Roman" panose="02020603050405020304" pitchFamily="18" charset="0"/>
+                          </a:rPr>
+                          <m:t>−</m:t>
+                        </m:r>
+                        <m:r>
+                          <a:rPr lang="en-US" i="1" dirty="0">
+                            <a:solidFill>
+                              <a:srgbClr val="249C8E"/>
+                            </a:solidFill>
+                            <a:latin typeface="Cambria Math" panose="02040503050406030204" pitchFamily="18" charset="0"/>
+                            <a:cs typeface="Times New Roman" panose="02020603050405020304" pitchFamily="18" charset="0"/>
+                          </a:rPr>
+                          <m:t>𝑅𝑀𝑆</m:t>
+                        </m:r>
+                      </m:sub>
+                    </m:sSub>
+                  </m:oMath>
+                </a14:m>
+                <a:r>
+                  <a:rPr lang="en-US" dirty="0" smtClean="0">
+                    <a:solidFill>
+                      <a:srgbClr val="249C8E"/>
+                    </a:solidFill>
+                    <a:latin typeface="Times New Roman" panose="02020603050405020304" pitchFamily="18" charset="0"/>
+                    <a:cs typeface="Times New Roman" panose="02020603050405020304" pitchFamily="18" charset="0"/>
+                  </a:rPr>
+                  <a:t>=0.0127</a:t>
+                </a:r>
+                <a:endParaRPr lang="sv-SE" sz="1400" dirty="0">
+                  <a:solidFill>
+                    <a:srgbClr val="249C8E"/>
+                  </a:solidFill>
+                  <a:latin typeface="Times New Roman" panose="02020603050405020304" pitchFamily="18" charset="0"/>
+                  <a:cs typeface="Times New Roman" panose="02020603050405020304" pitchFamily="18" charset="0"/>
+                </a:endParaRPr>
+              </a:p>
+            </p:txBody>
+          </p:sp>
+        </mc:Choice>
+        <mc:Fallback>
+          <p:sp>
+            <p:nvSpPr>
+              <p:cNvPr id="13" name="TextBox 12"/>
+              <p:cNvSpPr txBox="1">
+                <a:spLocks noRot="1" noChangeAspect="1" noMove="1" noResize="1" noEditPoints="1" noAdjustHandles="1" noChangeArrowheads="1" noChangeShapeType="1" noTextEdit="1"/>
+              </p:cNvSpPr>
+              <p:nvPr/>
+            </p:nvSpPr>
+            <p:spPr>
+              <a:xfrm>
+                <a:off x="8490455" y="-3626750"/>
+                <a:ext cx="2069099" cy="398507"/>
+              </a:xfrm>
+              <a:prstGeom prst="rect">
+                <a:avLst/>
+              </a:prstGeom>
+              <a:blipFill>
+                <a:blip r:embed="rId6"/>
+                <a:stretch>
+                  <a:fillRect t="-7692" b="-16923"/>
+                </a:stretch>
+              </a:blipFill>
+            </p:spPr>
+            <p:txBody>
+              <a:bodyPr/>
+              <a:lstStyle/>
+              <a:p>
+                <a:r>
+                  <a:rPr lang="sv-SE">
+                    <a:noFill/>
+                  </a:rPr>
+                  <a:t> </a:t>
+                </a:r>
+              </a:p>
+            </p:txBody>
+          </p:sp>
+        </mc:Fallback>
+      </mc:AlternateContent>
+      <p:pic>
+        <p:nvPicPr>
+          <p:cNvPr id="14" name="Picture 13"/>
+          <p:cNvPicPr>
+            <a:picLocks noChangeAspect="1"/>
+          </p:cNvPicPr>
+          <p:nvPr/>
+        </p:nvPicPr>
+        <p:blipFill>
+          <a:blip r:embed="rId7"/>
+          <a:stretch>
+            <a:fillRect/>
+          </a:stretch>
+        </p:blipFill>
+        <p:spPr>
+          <a:xfrm>
+            <a:off x="5606813" y="103238"/>
+            <a:ext cx="5334000" cy="4000500"/>
+          </a:xfrm>
+          <a:prstGeom prst="rect">
+            <a:avLst/>
+          </a:prstGeom>
+        </p:spPr>
+      </p:pic>
+      <p:pic>
+        <p:nvPicPr>
+          <p:cNvPr id="15" name="Picture 14"/>
+          <p:cNvPicPr>
+            <a:picLocks noChangeAspect="1"/>
+          </p:cNvPicPr>
+          <p:nvPr/>
+        </p:nvPicPr>
+        <p:blipFill rotWithShape="1">
+          <a:blip r:embed="rId8"/>
+          <a:srcRect l="11091"/>
+          <a:stretch/>
+        </p:blipFill>
+        <p:spPr>
+          <a:xfrm>
+            <a:off x="1219199" y="110091"/>
+            <a:ext cx="4742427" cy="4000500"/>
+          </a:xfrm>
+          <a:prstGeom prst="rect">
+            <a:avLst/>
+          </a:prstGeom>
+        </p:spPr>
+      </p:pic>
+      <p:sp>
+        <p:nvSpPr>
+          <p:cNvPr id="16" name="TextBox 15"/>
           <p:cNvSpPr txBox="1"/>
           <p:nvPr/>
         </p:nvSpPr>
         <p:spPr>
-          <a:xfrm rot="16200000">
-            <a:off x="5218116" y="2540050"/>
-            <a:ext cx="2575560" cy="307777"/>
+          <a:xfrm>
+            <a:off x="2558353" y="3759604"/>
+            <a:ext cx="2089150" cy="369332"/>
           </a:xfrm>
           <a:prstGeom prst="rect">
             <a:avLst/>
@@ -3755,27 +4395,13 @@
           <a:lstStyle/>
           <a:p>
             <a:r>
-              <a:rPr lang="en-US" sz="1400" dirty="0" smtClean="0">
-                <a:latin typeface="Times New Roman" panose="02020603050405020304" pitchFamily="18" charset="0"/>
-                <a:cs typeface="Times New Roman" panose="02020603050405020304" pitchFamily="18" charset="0"/>
-              </a:rPr>
-              <a:t>Normalized Voltage: 0.5 </a:t>
-            </a:r>
-            <a:r>
-              <a:rPr lang="en-US" sz="1400" dirty="0" err="1" smtClean="0">
-                <a:latin typeface="Times New Roman" panose="02020603050405020304" pitchFamily="18" charset="0"/>
-                <a:cs typeface="Times New Roman" panose="02020603050405020304" pitchFamily="18" charset="0"/>
-              </a:rPr>
-              <a:t>p.u</a:t>
-            </a:r>
-            <a:r>
-              <a:rPr lang="en-US" sz="1400" dirty="0" smtClean="0">
-                <a:latin typeface="Times New Roman" panose="02020603050405020304" pitchFamily="18" charset="0"/>
-                <a:cs typeface="Times New Roman" panose="02020603050405020304" pitchFamily="18" charset="0"/>
-              </a:rPr>
-              <a:t>./div</a:t>
-            </a:r>
-            <a:endParaRPr lang="sv-SE" sz="1400" dirty="0">
+              <a:rPr lang="en-US" dirty="0" smtClean="0">
+                <a:latin typeface="Times New Roman" panose="02020603050405020304" pitchFamily="18" charset="0"/>
+                <a:cs typeface="Times New Roman" panose="02020603050405020304" pitchFamily="18" charset="0"/>
+              </a:rPr>
+              <a:t>Time: 2ms/div</a:t>
+            </a:r>
+            <a:endParaRPr lang="sv-SE" dirty="0">
               <a:latin typeface="Times New Roman" panose="02020603050405020304" pitchFamily="18" charset="0"/>
               <a:cs typeface="Times New Roman" panose="02020603050405020304" pitchFamily="18" charset="0"/>
             </a:endParaRPr>
@@ -3784,14 +4410,14 @@
       </p:sp>
       <p:sp>
         <p:nvSpPr>
-          <p:cNvPr id="12" name="TextBox 11"/>
+          <p:cNvPr id="17" name="TextBox 16"/>
           <p:cNvSpPr txBox="1"/>
           <p:nvPr/>
         </p:nvSpPr>
         <p:spPr>
           <a:xfrm rot="16200000">
-            <a:off x="-47304" y="2540050"/>
-            <a:ext cx="2575560" cy="307777"/>
+            <a:off x="-597822" y="1925675"/>
+            <a:ext cx="3301523" cy="369332"/>
           </a:xfrm>
           <a:prstGeom prst="rect">
             <a:avLst/>
@@ -3805,27 +4431,34 @@
           <a:lstStyle/>
           <a:p>
             <a:r>
-              <a:rPr lang="en-US" sz="1400" dirty="0" smtClean="0">
-                <a:latin typeface="Times New Roman" panose="02020603050405020304" pitchFamily="18" charset="0"/>
-                <a:cs typeface="Times New Roman" panose="02020603050405020304" pitchFamily="18" charset="0"/>
-              </a:rPr>
-              <a:t>Normalized Voltage: 0.5 </a:t>
-            </a:r>
-            <a:r>
-              <a:rPr lang="en-US" sz="1400" dirty="0" err="1" smtClean="0">
+              <a:rPr lang="en-US" dirty="0" smtClean="0">
+                <a:latin typeface="Times New Roman" panose="02020603050405020304" pitchFamily="18" charset="0"/>
+                <a:cs typeface="Times New Roman" panose="02020603050405020304" pitchFamily="18" charset="0"/>
+              </a:rPr>
+              <a:t>Normalized Voltage: </a:t>
+            </a:r>
+            <a:r>
+              <a:rPr lang="en-US" dirty="0" smtClean="0">
+                <a:latin typeface="Times New Roman" panose="02020603050405020304" pitchFamily="18" charset="0"/>
+                <a:cs typeface="Times New Roman" panose="02020603050405020304" pitchFamily="18" charset="0"/>
+              </a:rPr>
+              <a:t>0.16 </a:t>
+            </a:r>
+            <a:r>
+              <a:rPr lang="en-US" dirty="0" err="1" smtClean="0">
                 <a:latin typeface="Times New Roman" panose="02020603050405020304" pitchFamily="18" charset="0"/>
                 <a:cs typeface="Times New Roman" panose="02020603050405020304" pitchFamily="18" charset="0"/>
               </a:rPr>
               <a:t>p.u</a:t>
             </a:r>
             <a:r>
-              <a:rPr lang="en-US" sz="1400" dirty="0" smtClean="0">
+              <a:rPr lang="en-US" dirty="0" smtClean="0">
                 <a:latin typeface="Times New Roman" panose="02020603050405020304" pitchFamily="18" charset="0"/>
                 <a:cs typeface="Times New Roman" panose="02020603050405020304" pitchFamily="18" charset="0"/>
               </a:rPr>
               <a:t>./div</a:t>
             </a:r>
-            <a:endParaRPr lang="sv-SE" sz="1400" dirty="0">
+            <a:endParaRPr lang="sv-SE" dirty="0">
               <a:latin typeface="Times New Roman" panose="02020603050405020304" pitchFamily="18" charset="0"/>
               <a:cs typeface="Times New Roman" panose="02020603050405020304" pitchFamily="18" charset="0"/>
             </a:endParaRPr>
@@ -3834,14 +4467,14 @@
       </p:sp>
       <p:sp>
         <p:nvSpPr>
-          <p:cNvPr id="13" name="TextBox 12"/>
+          <p:cNvPr id="19" name="TextBox 18"/>
           <p:cNvSpPr txBox="1"/>
           <p:nvPr/>
         </p:nvSpPr>
         <p:spPr>
-          <a:xfrm>
-            <a:off x="3319779" y="1953312"/>
-            <a:ext cx="455930" cy="307777"/>
+          <a:xfrm rot="16200000">
+            <a:off x="4544747" y="1760103"/>
+            <a:ext cx="2368551" cy="369332"/>
           </a:xfrm>
           <a:prstGeom prst="rect">
             <a:avLst/>
@@ -3855,29 +4488,20 @@
           <a:lstStyle/>
           <a:p>
             <a:r>
-              <a:rPr lang="en-US" sz="1400" dirty="0" smtClean="0">
-                <a:solidFill>
-                  <a:srgbClr val="FF00FF"/>
-                </a:solidFill>
-                <a:latin typeface="Times New Roman" panose="02020603050405020304" pitchFamily="18" charset="0"/>
-                <a:cs typeface="Times New Roman" panose="02020603050405020304" pitchFamily="18" charset="0"/>
-              </a:rPr>
-              <a:t>V</a:t>
-            </a:r>
-            <a:r>
-              <a:rPr lang="en-US" sz="1100" dirty="0" smtClean="0">
-                <a:solidFill>
-                  <a:srgbClr val="FF00FF"/>
-                </a:solidFill>
-                <a:latin typeface="Times New Roman" panose="02020603050405020304" pitchFamily="18" charset="0"/>
-                <a:cs typeface="Times New Roman" panose="02020603050405020304" pitchFamily="18" charset="0"/>
-              </a:rPr>
-              <a:t>B</a:t>
-            </a:r>
-            <a:endParaRPr lang="sv-SE" sz="1100" dirty="0">
-              <a:solidFill>
-                <a:srgbClr val="FF00FF"/>
-              </a:solidFill>
+              <a:rPr lang="en-US" dirty="0" smtClean="0">
+                <a:latin typeface="Times New Roman" panose="02020603050405020304" pitchFamily="18" charset="0"/>
+                <a:cs typeface="Times New Roman" panose="02020603050405020304" pitchFamily="18" charset="0"/>
+              </a:rPr>
+              <a:t>Normalized </a:t>
+            </a:r>
+            <a:r>
+              <a:rPr lang="en-US" dirty="0" smtClean="0">
+                <a:latin typeface="Times New Roman" panose="02020603050405020304" pitchFamily="18" charset="0"/>
+                <a:cs typeface="Times New Roman" panose="02020603050405020304" pitchFamily="18" charset="0"/>
+              </a:rPr>
+              <a:t>Voltage</a:t>
+            </a:r>
+            <a:endParaRPr lang="sv-SE" dirty="0">
               <a:latin typeface="Times New Roman" panose="02020603050405020304" pitchFamily="18" charset="0"/>
               <a:cs typeface="Times New Roman" panose="02020603050405020304" pitchFamily="18" charset="0"/>
             </a:endParaRPr>
@@ -3886,14 +4510,14 @@
       </p:sp>
       <p:sp>
         <p:nvSpPr>
-          <p:cNvPr id="14" name="TextBox 13"/>
+          <p:cNvPr id="20" name="TextBox 19"/>
           <p:cNvSpPr txBox="1"/>
           <p:nvPr/>
         </p:nvSpPr>
         <p:spPr>
           <a:xfrm>
-            <a:off x="3319779" y="1252269"/>
-            <a:ext cx="455930" cy="307777"/>
+            <a:off x="5311755" y="3759604"/>
+            <a:ext cx="2089150" cy="369332"/>
           </a:xfrm>
           <a:prstGeom prst="rect">
             <a:avLst/>
@@ -3907,45 +4531,557 @@
           <a:lstStyle/>
           <a:p>
             <a:r>
-              <a:rPr lang="en-US" sz="1400" dirty="0" smtClean="0">
-                <a:solidFill>
-                  <a:srgbClr val="002060"/>
-                </a:solidFill>
-                <a:latin typeface="Times New Roman" panose="02020603050405020304" pitchFamily="18" charset="0"/>
-                <a:cs typeface="Times New Roman" panose="02020603050405020304" pitchFamily="18" charset="0"/>
-              </a:rPr>
-              <a:t>V</a:t>
-            </a:r>
-            <a:r>
-              <a:rPr lang="en-US" sz="1100" dirty="0" smtClean="0">
-                <a:solidFill>
-                  <a:srgbClr val="002060"/>
-                </a:solidFill>
-                <a:latin typeface="Times New Roman" panose="02020603050405020304" pitchFamily="18" charset="0"/>
-                <a:cs typeface="Times New Roman" panose="02020603050405020304" pitchFamily="18" charset="0"/>
-              </a:rPr>
-              <a:t>A</a:t>
-            </a:r>
-            <a:endParaRPr lang="sv-SE" sz="1100" dirty="0">
-              <a:solidFill>
-                <a:srgbClr val="002060"/>
-              </a:solidFill>
+              <a:rPr lang="en-US" dirty="0" smtClean="0">
+                <a:latin typeface="Times New Roman" panose="02020603050405020304" pitchFamily="18" charset="0"/>
+                <a:cs typeface="Times New Roman" panose="02020603050405020304" pitchFamily="18" charset="0"/>
+              </a:rPr>
+              <a:t>Frequency</a:t>
+            </a:r>
+            <a:endParaRPr lang="sv-SE" dirty="0">
               <a:latin typeface="Times New Roman" panose="02020603050405020304" pitchFamily="18" charset="0"/>
               <a:cs typeface="Times New Roman" panose="02020603050405020304" pitchFamily="18" charset="0"/>
             </a:endParaRPr>
           </a:p>
         </p:txBody>
       </p:sp>
-      <p:sp>
-        <p:nvSpPr>
-          <p:cNvPr id="15" name="TextBox 14"/>
+      <mc:AlternateContent xmlns:mc="http://schemas.openxmlformats.org/markup-compatibility/2006">
+        <mc:Choice xmlns:a14="http://schemas.microsoft.com/office/drawing/2010/main" Requires="a14">
+          <p:sp>
+            <p:nvSpPr>
+              <p:cNvPr id="21" name="TextBox 20"/>
+              <p:cNvSpPr txBox="1"/>
+              <p:nvPr/>
+            </p:nvSpPr>
+            <p:spPr>
+              <a:xfrm>
+                <a:off x="6424945" y="459579"/>
+                <a:ext cx="3110524" cy="397994"/>
+              </a:xfrm>
+              <a:prstGeom prst="rect">
+                <a:avLst/>
+              </a:prstGeom>
+              <a:noFill/>
+            </p:spPr>
+            <p:txBody>
+              <a:bodyPr wrap="square" rtlCol="0">
+                <a:spAutoFit/>
+              </a:bodyPr>
+              <a:lstStyle/>
+              <a:p>
+                <a14:m>
+                  <m:oMath xmlns:m="http://schemas.openxmlformats.org/officeDocument/2006/math">
+                    <m:sSub>
+                      <m:sSubPr>
+                        <m:ctrlPr>
+                          <a:rPr lang="en-US" i="1" dirty="0" smtClean="0">
+                            <a:solidFill>
+                              <a:srgbClr val="A71993"/>
+                            </a:solidFill>
+                            <a:latin typeface="Cambria Math" panose="02040503050406030204" pitchFamily="18" charset="0"/>
+                            <a:cs typeface="Times New Roman" panose="02020603050405020304" pitchFamily="18" charset="0"/>
+                          </a:rPr>
+                        </m:ctrlPr>
+                      </m:sSubPr>
+                      <m:e>
+                        <m:sSub>
+                          <m:sSubPr>
+                            <m:ctrlPr>
+                              <a:rPr lang="en-US" i="1" dirty="0" smtClean="0">
+                                <a:solidFill>
+                                  <a:srgbClr val="A71993"/>
+                                </a:solidFill>
+                                <a:latin typeface="Cambria Math" panose="02040503050406030204" pitchFamily="18" charset="0"/>
+                                <a:cs typeface="Times New Roman" panose="02020603050405020304" pitchFamily="18" charset="0"/>
+                              </a:rPr>
+                            </m:ctrlPr>
+                          </m:sSubPr>
+                          <m:e>
+                            <m:r>
+                              <a:rPr lang="en-US" i="1" dirty="0" smtClean="0">
+                                <a:solidFill>
+                                  <a:srgbClr val="A71993"/>
+                                </a:solidFill>
+                                <a:latin typeface="Cambria Math" panose="02040503050406030204" pitchFamily="18" charset="0"/>
+                                <a:cs typeface="Times New Roman" panose="02020603050405020304" pitchFamily="18" charset="0"/>
+                              </a:rPr>
+                              <m:t>𝑉</m:t>
+                            </m:r>
+                          </m:e>
+                          <m:sub>
+                            <m:r>
+                              <a:rPr lang="en-US" i="1" dirty="0" smtClean="0">
+                                <a:solidFill>
+                                  <a:srgbClr val="A71993"/>
+                                </a:solidFill>
+                                <a:latin typeface="Cambria Math" panose="02040503050406030204" pitchFamily="18" charset="0"/>
+                                <a:cs typeface="Times New Roman" panose="02020603050405020304" pitchFamily="18" charset="0"/>
+                              </a:rPr>
+                              <m:t>𝐶𝑀</m:t>
+                            </m:r>
+                          </m:sub>
+                        </m:sSub>
+                      </m:e>
+                      <m:sub>
+                        <m:r>
+                          <a:rPr lang="en-US" i="1" dirty="0" smtClean="0">
+                            <a:solidFill>
+                              <a:srgbClr val="A71993"/>
+                            </a:solidFill>
+                            <a:latin typeface="Cambria Math" panose="02040503050406030204" pitchFamily="18" charset="0"/>
+                            <a:cs typeface="Times New Roman" panose="02020603050405020304" pitchFamily="18" charset="0"/>
+                          </a:rPr>
+                          <m:t>𝑊</m:t>
+                        </m:r>
+                        <m:r>
+                          <a:rPr lang="en-US" b="0" i="1" dirty="0" smtClean="0">
+                            <a:solidFill>
+                              <a:srgbClr val="A71993"/>
+                            </a:solidFill>
+                            <a:latin typeface="Cambria Math" panose="02040503050406030204" pitchFamily="18" charset="0"/>
+                            <a:cs typeface="Times New Roman" panose="02020603050405020304" pitchFamily="18" charset="0"/>
+                          </a:rPr>
+                          <m:t>−</m:t>
+                        </m:r>
+                        <m:r>
+                          <a:rPr lang="en-US" b="0" i="1" dirty="0" smtClean="0">
+                            <a:solidFill>
+                              <a:srgbClr val="A71993"/>
+                            </a:solidFill>
+                            <a:latin typeface="Cambria Math" panose="02040503050406030204" pitchFamily="18" charset="0"/>
+                            <a:cs typeface="Times New Roman" panose="02020603050405020304" pitchFamily="18" charset="0"/>
+                          </a:rPr>
+                          <m:t>𝑅𝑀𝑆</m:t>
+                        </m:r>
+                      </m:sub>
+                    </m:sSub>
+                    <m:r>
+                      <a:rPr lang="en-US" b="0" i="1" dirty="0" smtClean="0">
+                        <a:solidFill>
+                          <a:srgbClr val="A71993"/>
+                        </a:solidFill>
+                        <a:latin typeface="Cambria Math" panose="02040503050406030204" pitchFamily="18" charset="0"/>
+                        <a:cs typeface="Times New Roman" panose="02020603050405020304" pitchFamily="18" charset="0"/>
+                      </a:rPr>
+                      <m:t> </m:t>
+                    </m:r>
+                  </m:oMath>
+                </a14:m>
+                <a:r>
+                  <a:rPr lang="en-US" dirty="0" smtClean="0">
+                    <a:solidFill>
+                      <a:srgbClr val="A71993"/>
+                    </a:solidFill>
+                    <a:latin typeface="Times New Roman" panose="02020603050405020304" pitchFamily="18" charset="0"/>
+                    <a:cs typeface="Times New Roman" panose="02020603050405020304" pitchFamily="18" charset="0"/>
+                  </a:rPr>
+                  <a:t>=0.0051</a:t>
+                </a:r>
+                <a:endParaRPr lang="sv-SE" sz="1400" dirty="0">
+                  <a:solidFill>
+                    <a:srgbClr val="A71993"/>
+                  </a:solidFill>
+                  <a:latin typeface="Times New Roman" panose="02020603050405020304" pitchFamily="18" charset="0"/>
+                  <a:cs typeface="Times New Roman" panose="02020603050405020304" pitchFamily="18" charset="0"/>
+                </a:endParaRPr>
+              </a:p>
+            </p:txBody>
+          </p:sp>
+        </mc:Choice>
+        <mc:Fallback>
+          <p:sp>
+            <p:nvSpPr>
+              <p:cNvPr id="21" name="TextBox 20"/>
+              <p:cNvSpPr txBox="1">
+                <a:spLocks noRot="1" noChangeAspect="1" noMove="1" noResize="1" noEditPoints="1" noAdjustHandles="1" noChangeArrowheads="1" noChangeShapeType="1" noTextEdit="1"/>
+              </p:cNvSpPr>
+              <p:nvPr/>
+            </p:nvSpPr>
+            <p:spPr>
+              <a:xfrm>
+                <a:off x="6424945" y="459579"/>
+                <a:ext cx="3110524" cy="397994"/>
+              </a:xfrm>
+              <a:prstGeom prst="rect">
+                <a:avLst/>
+              </a:prstGeom>
+              <a:blipFill>
+                <a:blip r:embed="rId9"/>
+                <a:stretch>
+                  <a:fillRect t="-7576" b="-15152"/>
+                </a:stretch>
+              </a:blipFill>
+            </p:spPr>
+            <p:txBody>
+              <a:bodyPr/>
+              <a:lstStyle/>
+              <a:p>
+                <a:r>
+                  <a:rPr lang="sv-SE">
+                    <a:noFill/>
+                  </a:rPr>
+                  <a:t> </a:t>
+                </a:r>
+              </a:p>
+            </p:txBody>
+          </p:sp>
+        </mc:Fallback>
+      </mc:AlternateContent>
+      <mc:AlternateContent xmlns:mc="http://schemas.openxmlformats.org/markup-compatibility/2006">
+        <mc:Choice xmlns:a14="http://schemas.microsoft.com/office/drawing/2010/main" Requires="a14">
+          <p:sp>
+            <p:nvSpPr>
+              <p:cNvPr id="22" name="TextBox 21"/>
+              <p:cNvSpPr txBox="1"/>
+              <p:nvPr/>
+            </p:nvSpPr>
+            <p:spPr>
+              <a:xfrm>
+                <a:off x="7815910" y="1697959"/>
+                <a:ext cx="1320444" cy="400110"/>
+              </a:xfrm>
+              <a:prstGeom prst="rect">
+                <a:avLst/>
+              </a:prstGeom>
+              <a:noFill/>
+            </p:spPr>
+            <p:txBody>
+              <a:bodyPr wrap="square" rtlCol="0">
+                <a:spAutoFit/>
+              </a:bodyPr>
+              <a:lstStyle/>
+              <a:p>
+                <a14:m>
+                  <m:oMath xmlns:m="http://schemas.openxmlformats.org/officeDocument/2006/math">
+                    <m:sSub>
+                      <m:sSubPr>
+                        <m:ctrlPr>
+                          <a:rPr lang="en-US" sz="2000" b="0" i="1" dirty="0" smtClean="0">
+                            <a:latin typeface="Cambria Math" panose="02040503050406030204" pitchFamily="18" charset="0"/>
+                            <a:cs typeface="Times New Roman" panose="02020603050405020304" pitchFamily="18" charset="0"/>
+                          </a:rPr>
+                        </m:ctrlPr>
+                      </m:sSubPr>
+                      <m:e>
+                        <m:r>
+                          <m:rPr>
+                            <m:sty m:val="p"/>
+                          </m:rPr>
+                          <a:rPr lang="en-US" sz="2000" b="0" i="0" dirty="0" smtClean="0">
+                            <a:latin typeface="Cambria Math" panose="02040503050406030204" pitchFamily="18" charset="0"/>
+                            <a:cs typeface="Times New Roman" panose="02020603050405020304" pitchFamily="18" charset="0"/>
+                          </a:rPr>
+                          <m:t>m</m:t>
+                        </m:r>
+                      </m:e>
+                      <m:sub>
+                        <m:r>
+                          <a:rPr lang="en-US" sz="2000" i="1" dirty="0" smtClean="0">
+                            <a:latin typeface="Cambria Math" panose="02040503050406030204" pitchFamily="18" charset="0"/>
+                            <a:cs typeface="Times New Roman" panose="02020603050405020304" pitchFamily="18" charset="0"/>
+                          </a:rPr>
+                          <m:t>𝑎</m:t>
+                        </m:r>
+                      </m:sub>
+                    </m:sSub>
+                    <m:r>
+                      <a:rPr lang="en-US" sz="2000" b="0" i="1" dirty="0" smtClean="0">
+                        <a:latin typeface="Cambria Math" panose="02040503050406030204" pitchFamily="18" charset="0"/>
+                        <a:cs typeface="Times New Roman" panose="02020603050405020304" pitchFamily="18" charset="0"/>
+                      </a:rPr>
+                      <m:t> </m:t>
+                    </m:r>
+                    <m:r>
+                      <a:rPr lang="en-US" sz="2000" b="0" i="1" dirty="0" smtClean="0">
+                        <a:latin typeface="Cambria Math" panose="02040503050406030204" pitchFamily="18" charset="0"/>
+                        <a:cs typeface="Times New Roman" panose="02020603050405020304" pitchFamily="18" charset="0"/>
+                      </a:rPr>
+                      <m:t> </m:t>
+                    </m:r>
+                  </m:oMath>
+                </a14:m>
+                <a:r>
+                  <a:rPr lang="en-US" sz="2000" dirty="0" smtClean="0">
+                    <a:latin typeface="Times New Roman" panose="02020603050405020304" pitchFamily="18" charset="0"/>
+                    <a:cs typeface="Times New Roman" panose="02020603050405020304" pitchFamily="18" charset="0"/>
+                  </a:rPr>
+                  <a:t>= 0.8</a:t>
+                </a:r>
+                <a:endParaRPr lang="sv-SE" sz="1600" dirty="0">
+                  <a:latin typeface="Times New Roman" panose="02020603050405020304" pitchFamily="18" charset="0"/>
+                  <a:cs typeface="Times New Roman" panose="02020603050405020304" pitchFamily="18" charset="0"/>
+                </a:endParaRPr>
+              </a:p>
+            </p:txBody>
+          </p:sp>
+        </mc:Choice>
+        <mc:Fallback>
+          <p:sp>
+            <p:nvSpPr>
+              <p:cNvPr id="22" name="TextBox 21"/>
+              <p:cNvSpPr txBox="1">
+                <a:spLocks noRot="1" noChangeAspect="1" noMove="1" noResize="1" noEditPoints="1" noAdjustHandles="1" noChangeArrowheads="1" noChangeShapeType="1" noTextEdit="1"/>
+              </p:cNvSpPr>
+              <p:nvPr/>
+            </p:nvSpPr>
+            <p:spPr>
+              <a:xfrm>
+                <a:off x="7815910" y="1697959"/>
+                <a:ext cx="1320444" cy="400110"/>
+              </a:xfrm>
+              <a:prstGeom prst="rect">
+                <a:avLst/>
+              </a:prstGeom>
+              <a:blipFill>
+                <a:blip r:embed="rId10"/>
+                <a:stretch>
+                  <a:fillRect t="-9231" b="-27692"/>
+                </a:stretch>
+              </a:blipFill>
+            </p:spPr>
+            <p:txBody>
+              <a:bodyPr/>
+              <a:lstStyle/>
+              <a:p>
+                <a:r>
+                  <a:rPr lang="sv-SE">
+                    <a:noFill/>
+                  </a:rPr>
+                  <a:t> </a:t>
+                </a:r>
+              </a:p>
+            </p:txBody>
+          </p:sp>
+        </mc:Fallback>
+      </mc:AlternateContent>
+      <mc:AlternateContent xmlns:mc="http://schemas.openxmlformats.org/markup-compatibility/2006">
+        <mc:Choice xmlns:a14="http://schemas.microsoft.com/office/drawing/2010/main" Requires="a14">
+          <p:sp>
+            <p:nvSpPr>
+              <p:cNvPr id="23" name="TextBox 22"/>
+              <p:cNvSpPr txBox="1"/>
+              <p:nvPr/>
+            </p:nvSpPr>
+            <p:spPr>
+              <a:xfrm>
+                <a:off x="8443525" y="448602"/>
+                <a:ext cx="2051254" cy="398507"/>
+              </a:xfrm>
+              <a:prstGeom prst="rect">
+                <a:avLst/>
+              </a:prstGeom>
+              <a:noFill/>
+            </p:spPr>
+            <p:txBody>
+              <a:bodyPr wrap="square" rtlCol="0">
+                <a:spAutoFit/>
+              </a:bodyPr>
+              <a:lstStyle/>
+              <a:p>
+                <a14:m>
+                  <m:oMath xmlns:m="http://schemas.openxmlformats.org/officeDocument/2006/math">
+                    <m:sSub>
+                      <m:sSubPr>
+                        <m:ctrlPr>
+                          <a:rPr lang="en-US" i="1" dirty="0" smtClean="0">
+                            <a:solidFill>
+                              <a:srgbClr val="249C8E"/>
+                            </a:solidFill>
+                            <a:latin typeface="Cambria Math" panose="02040503050406030204" pitchFamily="18" charset="0"/>
+                            <a:cs typeface="Times New Roman" panose="02020603050405020304" pitchFamily="18" charset="0"/>
+                          </a:rPr>
+                        </m:ctrlPr>
+                      </m:sSubPr>
+                      <m:e>
+                        <m:sSub>
+                          <m:sSubPr>
+                            <m:ctrlPr>
+                              <a:rPr lang="en-US" i="1" dirty="0">
+                                <a:solidFill>
+                                  <a:srgbClr val="249C8E"/>
+                                </a:solidFill>
+                                <a:latin typeface="Cambria Math" panose="02040503050406030204" pitchFamily="18" charset="0"/>
+                                <a:cs typeface="Times New Roman" panose="02020603050405020304" pitchFamily="18" charset="0"/>
+                              </a:rPr>
+                            </m:ctrlPr>
+                          </m:sSubPr>
+                          <m:e>
+                            <m:r>
+                              <a:rPr lang="en-US" i="1" dirty="0">
+                                <a:solidFill>
+                                  <a:srgbClr val="249C8E"/>
+                                </a:solidFill>
+                                <a:latin typeface="Cambria Math" panose="02040503050406030204" pitchFamily="18" charset="0"/>
+                                <a:cs typeface="Times New Roman" panose="02020603050405020304" pitchFamily="18" charset="0"/>
+                              </a:rPr>
+                              <m:t>𝑉</m:t>
+                            </m:r>
+                          </m:e>
+                          <m:sub>
+                            <m:r>
+                              <a:rPr lang="en-US" i="1" dirty="0">
+                                <a:solidFill>
+                                  <a:srgbClr val="249C8E"/>
+                                </a:solidFill>
+                                <a:latin typeface="Cambria Math" panose="02040503050406030204" pitchFamily="18" charset="0"/>
+                                <a:cs typeface="Times New Roman" panose="02020603050405020304" pitchFamily="18" charset="0"/>
+                              </a:rPr>
+                              <m:t>𝐶𝑀</m:t>
+                            </m:r>
+                          </m:sub>
+                        </m:sSub>
+                      </m:e>
+                      <m:sub>
+                        <m:r>
+                          <a:rPr lang="en-US" i="1" dirty="0">
+                            <a:solidFill>
+                              <a:srgbClr val="249C8E"/>
+                            </a:solidFill>
+                            <a:latin typeface="Cambria Math" panose="02040503050406030204" pitchFamily="18" charset="0"/>
+                            <a:cs typeface="Times New Roman" panose="02020603050405020304" pitchFamily="18" charset="0"/>
+                          </a:rPr>
+                          <m:t>𝑊</m:t>
+                        </m:r>
+                        <m:r>
+                          <a:rPr lang="en-US" i="1" dirty="0">
+                            <a:solidFill>
+                              <a:srgbClr val="249C8E"/>
+                            </a:solidFill>
+                            <a:latin typeface="Cambria Math" panose="02040503050406030204" pitchFamily="18" charset="0"/>
+                            <a:cs typeface="Times New Roman" panose="02020603050405020304" pitchFamily="18" charset="0"/>
+                          </a:rPr>
+                          <m:t>−</m:t>
+                        </m:r>
+                        <m:r>
+                          <a:rPr lang="en-US" i="1" dirty="0">
+                            <a:solidFill>
+                              <a:srgbClr val="249C8E"/>
+                            </a:solidFill>
+                            <a:latin typeface="Cambria Math" panose="02040503050406030204" pitchFamily="18" charset="0"/>
+                            <a:cs typeface="Times New Roman" panose="02020603050405020304" pitchFamily="18" charset="0"/>
+                          </a:rPr>
+                          <m:t>𝑅𝑀𝑆</m:t>
+                        </m:r>
+                      </m:sub>
+                    </m:sSub>
+                  </m:oMath>
+                </a14:m>
+                <a:r>
+                  <a:rPr lang="en-US" dirty="0" smtClean="0">
+                    <a:solidFill>
+                      <a:srgbClr val="249C8E"/>
+                    </a:solidFill>
+                    <a:latin typeface="Times New Roman" panose="02020603050405020304" pitchFamily="18" charset="0"/>
+                    <a:cs typeface="Times New Roman" panose="02020603050405020304" pitchFamily="18" charset="0"/>
+                  </a:rPr>
+                  <a:t>=0.0014</a:t>
+                </a:r>
+                <a:endParaRPr lang="sv-SE" sz="1400" dirty="0">
+                  <a:solidFill>
+                    <a:srgbClr val="249C8E"/>
+                  </a:solidFill>
+                  <a:latin typeface="Times New Roman" panose="02020603050405020304" pitchFamily="18" charset="0"/>
+                  <a:cs typeface="Times New Roman" panose="02020603050405020304" pitchFamily="18" charset="0"/>
+                </a:endParaRPr>
+              </a:p>
+            </p:txBody>
+          </p:sp>
+        </mc:Choice>
+        <mc:Fallback>
+          <p:sp>
+            <p:nvSpPr>
+              <p:cNvPr id="23" name="TextBox 22"/>
+              <p:cNvSpPr txBox="1">
+                <a:spLocks noRot="1" noChangeAspect="1" noMove="1" noResize="1" noEditPoints="1" noAdjustHandles="1" noChangeArrowheads="1" noChangeShapeType="1" noTextEdit="1"/>
+              </p:cNvSpPr>
+              <p:nvPr/>
+            </p:nvSpPr>
+            <p:spPr>
+              <a:xfrm>
+                <a:off x="8443525" y="448602"/>
+                <a:ext cx="2051254" cy="398507"/>
+              </a:xfrm>
+              <a:prstGeom prst="rect">
+                <a:avLst/>
+              </a:prstGeom>
+              <a:blipFill>
+                <a:blip r:embed="rId11"/>
+                <a:stretch>
+                  <a:fillRect t="-9231" b="-16923"/>
+                </a:stretch>
+              </a:blipFill>
+            </p:spPr>
+            <p:txBody>
+              <a:bodyPr/>
+              <a:lstStyle/>
+              <a:p>
+                <a:r>
+                  <a:rPr lang="sv-SE">
+                    <a:noFill/>
+                  </a:rPr>
+                  <a:t> </a:t>
+                </a:r>
+              </a:p>
+            </p:txBody>
+          </p:sp>
+        </mc:Fallback>
+      </mc:AlternateContent>
+      <p:pic>
+        <p:nvPicPr>
+          <p:cNvPr id="24" name="Picture 23"/>
+          <p:cNvPicPr>
+            <a:picLocks noChangeAspect="1"/>
+          </p:cNvPicPr>
+          <p:nvPr/>
+        </p:nvPicPr>
+        <p:blipFill rotWithShape="1">
+          <a:blip r:embed="rId12"/>
+          <a:srcRect l="13060"/>
+          <a:stretch/>
+        </p:blipFill>
+        <p:spPr>
+          <a:xfrm>
+            <a:off x="1276349" y="4198550"/>
+            <a:ext cx="4637339" cy="4000500"/>
+          </a:xfrm>
+          <a:prstGeom prst="rect">
+            <a:avLst/>
+          </a:prstGeom>
+        </p:spPr>
+      </p:pic>
+      <p:pic>
+        <p:nvPicPr>
+          <p:cNvPr id="25" name="Picture 24"/>
+          <p:cNvPicPr>
+            <a:picLocks noChangeAspect="1"/>
+          </p:cNvPicPr>
+          <p:nvPr/>
+        </p:nvPicPr>
+        <p:blipFill>
+          <a:blip r:embed="rId13"/>
+          <a:stretch>
+            <a:fillRect/>
+          </a:stretch>
+        </p:blipFill>
+        <p:spPr>
+          <a:xfrm>
+            <a:off x="5606813" y="4146166"/>
+            <a:ext cx="5334000" cy="4000500"/>
+          </a:xfrm>
+          <a:prstGeom prst="rect">
+            <a:avLst/>
+          </a:prstGeom>
+        </p:spPr>
+      </p:pic>
+      <p:sp>
+        <p:nvSpPr>
+          <p:cNvPr id="26" name="TextBox 25"/>
           <p:cNvSpPr txBox="1"/>
           <p:nvPr/>
         </p:nvSpPr>
         <p:spPr>
           <a:xfrm>
-            <a:off x="3319779" y="2654355"/>
-            <a:ext cx="455930" cy="307777"/>
+            <a:off x="2558353" y="7795679"/>
+            <a:ext cx="2089150" cy="369332"/>
           </a:xfrm>
           <a:prstGeom prst="rect">
             <a:avLst/>
@@ -3959,29 +5095,13 @@
           <a:lstStyle/>
           <a:p>
             <a:r>
-              <a:rPr lang="en-US" sz="1400" dirty="0" smtClean="0">
-                <a:solidFill>
-                  <a:srgbClr val="00FF00"/>
-                </a:solidFill>
-                <a:latin typeface="Times New Roman" panose="02020603050405020304" pitchFamily="18" charset="0"/>
-                <a:cs typeface="Times New Roman" panose="02020603050405020304" pitchFamily="18" charset="0"/>
-              </a:rPr>
-              <a:t>V</a:t>
-            </a:r>
-            <a:r>
-              <a:rPr lang="en-US" sz="1100" dirty="0">
-                <a:solidFill>
-                  <a:srgbClr val="00FF00"/>
-                </a:solidFill>
-                <a:latin typeface="Times New Roman" panose="02020603050405020304" pitchFamily="18" charset="0"/>
-                <a:cs typeface="Times New Roman" panose="02020603050405020304" pitchFamily="18" charset="0"/>
-              </a:rPr>
-              <a:t>C</a:t>
-            </a:r>
-            <a:endParaRPr lang="sv-SE" sz="1100" dirty="0">
-              <a:solidFill>
-                <a:srgbClr val="00FF00"/>
-              </a:solidFill>
+              <a:rPr lang="en-US" dirty="0" smtClean="0">
+                <a:latin typeface="Times New Roman" panose="02020603050405020304" pitchFamily="18" charset="0"/>
+                <a:cs typeface="Times New Roman" panose="02020603050405020304" pitchFamily="18" charset="0"/>
+              </a:rPr>
+              <a:t>Time: 2ms/div</a:t>
+            </a:r>
+            <a:endParaRPr lang="sv-SE" dirty="0">
               <a:latin typeface="Times New Roman" panose="02020603050405020304" pitchFamily="18" charset="0"/>
               <a:cs typeface="Times New Roman" panose="02020603050405020304" pitchFamily="18" charset="0"/>
             </a:endParaRPr>
@@ -3990,14 +5110,14 @@
       </p:sp>
       <p:sp>
         <p:nvSpPr>
-          <p:cNvPr id="16" name="TextBox 15"/>
+          <p:cNvPr id="27" name="TextBox 26"/>
           <p:cNvSpPr txBox="1"/>
           <p:nvPr/>
         </p:nvSpPr>
         <p:spPr>
-          <a:xfrm>
-            <a:off x="3249294" y="3355398"/>
-            <a:ext cx="586739" cy="307777"/>
+          <a:xfrm rot="16200000">
+            <a:off x="-597822" y="5961750"/>
+            <a:ext cx="3301523" cy="369332"/>
           </a:xfrm>
           <a:prstGeom prst="rect">
             <a:avLst/>
@@ -4011,20 +5131,34 @@
           <a:lstStyle/>
           <a:p>
             <a:r>
-              <a:rPr lang="en-US" sz="1400" dirty="0" smtClean="0">
-                <a:latin typeface="Times New Roman" panose="02020603050405020304" pitchFamily="18" charset="0"/>
-                <a:cs typeface="Times New Roman" panose="02020603050405020304" pitchFamily="18" charset="0"/>
-              </a:rPr>
-              <a:t>V</a:t>
-            </a:r>
-            <a:r>
-              <a:rPr lang="en-US" sz="1100" dirty="0" smtClean="0">
-                <a:latin typeface="Times New Roman" panose="02020603050405020304" pitchFamily="18" charset="0"/>
-                <a:cs typeface="Times New Roman" panose="02020603050405020304" pitchFamily="18" charset="0"/>
-              </a:rPr>
-              <a:t>CM</a:t>
-            </a:r>
-            <a:endParaRPr lang="sv-SE" sz="1100" dirty="0">
+              <a:rPr lang="en-US" dirty="0" smtClean="0">
+                <a:latin typeface="Times New Roman" panose="02020603050405020304" pitchFamily="18" charset="0"/>
+                <a:cs typeface="Times New Roman" panose="02020603050405020304" pitchFamily="18" charset="0"/>
+              </a:rPr>
+              <a:t>Normalized Voltage: </a:t>
+            </a:r>
+            <a:r>
+              <a:rPr lang="en-US" dirty="0" smtClean="0">
+                <a:latin typeface="Times New Roman" panose="02020603050405020304" pitchFamily="18" charset="0"/>
+                <a:cs typeface="Times New Roman" panose="02020603050405020304" pitchFamily="18" charset="0"/>
+              </a:rPr>
+              <a:t>0.16 </a:t>
+            </a:r>
+            <a:r>
+              <a:rPr lang="en-US" dirty="0" err="1" smtClean="0">
+                <a:latin typeface="Times New Roman" panose="02020603050405020304" pitchFamily="18" charset="0"/>
+                <a:cs typeface="Times New Roman" panose="02020603050405020304" pitchFamily="18" charset="0"/>
+              </a:rPr>
+              <a:t>p.u</a:t>
+            </a:r>
+            <a:r>
+              <a:rPr lang="en-US" dirty="0" smtClean="0">
+                <a:latin typeface="Times New Roman" panose="02020603050405020304" pitchFamily="18" charset="0"/>
+                <a:cs typeface="Times New Roman" panose="02020603050405020304" pitchFamily="18" charset="0"/>
+              </a:rPr>
+              <a:t>./div</a:t>
+            </a:r>
+            <a:endParaRPr lang="sv-SE" dirty="0">
               <a:latin typeface="Times New Roman" panose="02020603050405020304" pitchFamily="18" charset="0"/>
               <a:cs typeface="Times New Roman" panose="02020603050405020304" pitchFamily="18" charset="0"/>
             </a:endParaRPr>
@@ -4033,14 +5167,14 @@
       </p:sp>
       <p:sp>
         <p:nvSpPr>
-          <p:cNvPr id="17" name="TextBox 16"/>
+          <p:cNvPr id="29" name="TextBox 28"/>
           <p:cNvSpPr txBox="1"/>
           <p:nvPr/>
         </p:nvSpPr>
         <p:spPr>
-          <a:xfrm>
-            <a:off x="8623207" y="1953312"/>
-            <a:ext cx="455930" cy="307777"/>
+          <a:xfrm rot="16200000">
+            <a:off x="4544747" y="5796178"/>
+            <a:ext cx="2368551" cy="369332"/>
           </a:xfrm>
           <a:prstGeom prst="rect">
             <a:avLst/>
@@ -4054,29 +5188,20 @@
           <a:lstStyle/>
           <a:p>
             <a:r>
-              <a:rPr lang="en-US" sz="1400" dirty="0" smtClean="0">
-                <a:solidFill>
-                  <a:srgbClr val="FF00FF"/>
-                </a:solidFill>
-                <a:latin typeface="Times New Roman" panose="02020603050405020304" pitchFamily="18" charset="0"/>
-                <a:cs typeface="Times New Roman" panose="02020603050405020304" pitchFamily="18" charset="0"/>
-              </a:rPr>
-              <a:t>V</a:t>
-            </a:r>
-            <a:r>
-              <a:rPr lang="en-US" sz="1100" dirty="0" smtClean="0">
-                <a:solidFill>
-                  <a:srgbClr val="FF00FF"/>
-                </a:solidFill>
-                <a:latin typeface="Times New Roman" panose="02020603050405020304" pitchFamily="18" charset="0"/>
-                <a:cs typeface="Times New Roman" panose="02020603050405020304" pitchFamily="18" charset="0"/>
-              </a:rPr>
-              <a:t>B</a:t>
-            </a:r>
-            <a:endParaRPr lang="sv-SE" sz="1100" dirty="0">
-              <a:solidFill>
-                <a:srgbClr val="FF00FF"/>
-              </a:solidFill>
+              <a:rPr lang="en-US" dirty="0" smtClean="0">
+                <a:latin typeface="Times New Roman" panose="02020603050405020304" pitchFamily="18" charset="0"/>
+                <a:cs typeface="Times New Roman" panose="02020603050405020304" pitchFamily="18" charset="0"/>
+              </a:rPr>
+              <a:t>Normalized </a:t>
+            </a:r>
+            <a:r>
+              <a:rPr lang="en-US" dirty="0" smtClean="0">
+                <a:latin typeface="Times New Roman" panose="02020603050405020304" pitchFamily="18" charset="0"/>
+                <a:cs typeface="Times New Roman" panose="02020603050405020304" pitchFamily="18" charset="0"/>
+              </a:rPr>
+              <a:t>Voltage</a:t>
+            </a:r>
+            <a:endParaRPr lang="sv-SE" dirty="0">
               <a:latin typeface="Times New Roman" panose="02020603050405020304" pitchFamily="18" charset="0"/>
               <a:cs typeface="Times New Roman" panose="02020603050405020304" pitchFamily="18" charset="0"/>
             </a:endParaRPr>
@@ -4085,14 +5210,14 @@
       </p:sp>
       <p:sp>
         <p:nvSpPr>
-          <p:cNvPr id="18" name="TextBox 17"/>
+          <p:cNvPr id="30" name="TextBox 29"/>
           <p:cNvSpPr txBox="1"/>
           <p:nvPr/>
         </p:nvSpPr>
         <p:spPr>
           <a:xfrm>
-            <a:off x="8623207" y="1252269"/>
-            <a:ext cx="455930" cy="307777"/>
+            <a:off x="5311755" y="7795679"/>
+            <a:ext cx="2089150" cy="369332"/>
           </a:xfrm>
           <a:prstGeom prst="rect">
             <a:avLst/>
@@ -4106,45 +5231,510 @@
           <a:lstStyle/>
           <a:p>
             <a:r>
-              <a:rPr lang="en-US" sz="1400" dirty="0" smtClean="0">
-                <a:solidFill>
-                  <a:srgbClr val="002060"/>
-                </a:solidFill>
-                <a:latin typeface="Times New Roman" panose="02020603050405020304" pitchFamily="18" charset="0"/>
-                <a:cs typeface="Times New Roman" panose="02020603050405020304" pitchFamily="18" charset="0"/>
-              </a:rPr>
-              <a:t>V</a:t>
-            </a:r>
-            <a:r>
-              <a:rPr lang="en-US" sz="1100" dirty="0" smtClean="0">
-                <a:solidFill>
-                  <a:srgbClr val="002060"/>
-                </a:solidFill>
-                <a:latin typeface="Times New Roman" panose="02020603050405020304" pitchFamily="18" charset="0"/>
-                <a:cs typeface="Times New Roman" panose="02020603050405020304" pitchFamily="18" charset="0"/>
-              </a:rPr>
-              <a:t>A</a:t>
-            </a:r>
-            <a:endParaRPr lang="sv-SE" sz="1100" dirty="0">
-              <a:solidFill>
-                <a:srgbClr val="002060"/>
-              </a:solidFill>
+              <a:rPr lang="en-US" dirty="0" smtClean="0">
+                <a:latin typeface="Times New Roman" panose="02020603050405020304" pitchFamily="18" charset="0"/>
+                <a:cs typeface="Times New Roman" panose="02020603050405020304" pitchFamily="18" charset="0"/>
+              </a:rPr>
+              <a:t>Frequency</a:t>
+            </a:r>
+            <a:endParaRPr lang="sv-SE" dirty="0">
               <a:latin typeface="Times New Roman" panose="02020603050405020304" pitchFamily="18" charset="0"/>
               <a:cs typeface="Times New Roman" panose="02020603050405020304" pitchFamily="18" charset="0"/>
             </a:endParaRPr>
           </a:p>
         </p:txBody>
       </p:sp>
-      <p:sp>
-        <p:nvSpPr>
-          <p:cNvPr id="19" name="TextBox 18"/>
+      <mc:AlternateContent xmlns:mc="http://schemas.openxmlformats.org/markup-compatibility/2006">
+        <mc:Choice xmlns:a14="http://schemas.microsoft.com/office/drawing/2010/main" Requires="a14">
+          <p:sp>
+            <p:nvSpPr>
+              <p:cNvPr id="31" name="TextBox 30"/>
+              <p:cNvSpPr txBox="1"/>
+              <p:nvPr/>
+            </p:nvSpPr>
+            <p:spPr>
+              <a:xfrm>
+                <a:off x="6356330" y="4493253"/>
+                <a:ext cx="3110524" cy="397994"/>
+              </a:xfrm>
+              <a:prstGeom prst="rect">
+                <a:avLst/>
+              </a:prstGeom>
+              <a:noFill/>
+            </p:spPr>
+            <p:txBody>
+              <a:bodyPr wrap="square" rtlCol="0">
+                <a:spAutoFit/>
+              </a:bodyPr>
+              <a:lstStyle/>
+              <a:p>
+                <a14:m>
+                  <m:oMath xmlns:m="http://schemas.openxmlformats.org/officeDocument/2006/math">
+                    <m:sSub>
+                      <m:sSubPr>
+                        <m:ctrlPr>
+                          <a:rPr lang="en-US" i="1" dirty="0" smtClean="0">
+                            <a:solidFill>
+                              <a:srgbClr val="A71993"/>
+                            </a:solidFill>
+                            <a:latin typeface="Cambria Math" panose="02040503050406030204" pitchFamily="18" charset="0"/>
+                            <a:cs typeface="Times New Roman" panose="02020603050405020304" pitchFamily="18" charset="0"/>
+                          </a:rPr>
+                        </m:ctrlPr>
+                      </m:sSubPr>
+                      <m:e>
+                        <m:sSub>
+                          <m:sSubPr>
+                            <m:ctrlPr>
+                              <a:rPr lang="en-US" i="1" dirty="0" smtClean="0">
+                                <a:solidFill>
+                                  <a:srgbClr val="A71993"/>
+                                </a:solidFill>
+                                <a:latin typeface="Cambria Math" panose="02040503050406030204" pitchFamily="18" charset="0"/>
+                                <a:cs typeface="Times New Roman" panose="02020603050405020304" pitchFamily="18" charset="0"/>
+                              </a:rPr>
+                            </m:ctrlPr>
+                          </m:sSubPr>
+                          <m:e>
+                            <m:r>
+                              <a:rPr lang="en-US" i="1" dirty="0" smtClean="0">
+                                <a:solidFill>
+                                  <a:srgbClr val="A71993"/>
+                                </a:solidFill>
+                                <a:latin typeface="Cambria Math" panose="02040503050406030204" pitchFamily="18" charset="0"/>
+                                <a:cs typeface="Times New Roman" panose="02020603050405020304" pitchFamily="18" charset="0"/>
+                              </a:rPr>
+                              <m:t>𝑉</m:t>
+                            </m:r>
+                          </m:e>
+                          <m:sub>
+                            <m:r>
+                              <a:rPr lang="en-US" i="1" dirty="0" smtClean="0">
+                                <a:solidFill>
+                                  <a:srgbClr val="A71993"/>
+                                </a:solidFill>
+                                <a:latin typeface="Cambria Math" panose="02040503050406030204" pitchFamily="18" charset="0"/>
+                                <a:cs typeface="Times New Roman" panose="02020603050405020304" pitchFamily="18" charset="0"/>
+                              </a:rPr>
+                              <m:t>𝐶𝑀</m:t>
+                            </m:r>
+                          </m:sub>
+                        </m:sSub>
+                      </m:e>
+                      <m:sub>
+                        <m:r>
+                          <a:rPr lang="en-US" i="1" dirty="0" smtClean="0">
+                            <a:solidFill>
+                              <a:srgbClr val="A71993"/>
+                            </a:solidFill>
+                            <a:latin typeface="Cambria Math" panose="02040503050406030204" pitchFamily="18" charset="0"/>
+                            <a:cs typeface="Times New Roman" panose="02020603050405020304" pitchFamily="18" charset="0"/>
+                          </a:rPr>
+                          <m:t>𝑊</m:t>
+                        </m:r>
+                        <m:r>
+                          <a:rPr lang="en-US" b="0" i="1" dirty="0" smtClean="0">
+                            <a:solidFill>
+                              <a:srgbClr val="A71993"/>
+                            </a:solidFill>
+                            <a:latin typeface="Cambria Math" panose="02040503050406030204" pitchFamily="18" charset="0"/>
+                            <a:cs typeface="Times New Roman" panose="02020603050405020304" pitchFamily="18" charset="0"/>
+                          </a:rPr>
+                          <m:t>−</m:t>
+                        </m:r>
+                        <m:r>
+                          <a:rPr lang="en-US" b="0" i="1" dirty="0" smtClean="0">
+                            <a:solidFill>
+                              <a:srgbClr val="A71993"/>
+                            </a:solidFill>
+                            <a:latin typeface="Cambria Math" panose="02040503050406030204" pitchFamily="18" charset="0"/>
+                            <a:cs typeface="Times New Roman" panose="02020603050405020304" pitchFamily="18" charset="0"/>
+                          </a:rPr>
+                          <m:t>𝑅𝑀𝑆</m:t>
+                        </m:r>
+                      </m:sub>
+                    </m:sSub>
+                    <m:r>
+                      <a:rPr lang="en-US" b="0" i="1" dirty="0" smtClean="0">
+                        <a:solidFill>
+                          <a:srgbClr val="A71993"/>
+                        </a:solidFill>
+                        <a:latin typeface="Cambria Math" panose="02040503050406030204" pitchFamily="18" charset="0"/>
+                        <a:cs typeface="Times New Roman" panose="02020603050405020304" pitchFamily="18" charset="0"/>
+                      </a:rPr>
+                      <m:t> </m:t>
+                    </m:r>
+                  </m:oMath>
+                </a14:m>
+                <a:r>
+                  <a:rPr lang="en-US" dirty="0" smtClean="0">
+                    <a:solidFill>
+                      <a:srgbClr val="A71993"/>
+                    </a:solidFill>
+                    <a:latin typeface="Times New Roman" panose="02020603050405020304" pitchFamily="18" charset="0"/>
+                    <a:cs typeface="Times New Roman" panose="02020603050405020304" pitchFamily="18" charset="0"/>
+                  </a:rPr>
+                  <a:t>=0.0047</a:t>
+                </a:r>
+                <a:endParaRPr lang="sv-SE" sz="1400" dirty="0">
+                  <a:solidFill>
+                    <a:srgbClr val="A71993"/>
+                  </a:solidFill>
+                  <a:latin typeface="Times New Roman" panose="02020603050405020304" pitchFamily="18" charset="0"/>
+                  <a:cs typeface="Times New Roman" panose="02020603050405020304" pitchFamily="18" charset="0"/>
+                </a:endParaRPr>
+              </a:p>
+            </p:txBody>
+          </p:sp>
+        </mc:Choice>
+        <mc:Fallback>
+          <p:sp>
+            <p:nvSpPr>
+              <p:cNvPr id="31" name="TextBox 30"/>
+              <p:cNvSpPr txBox="1">
+                <a:spLocks noRot="1" noChangeAspect="1" noMove="1" noResize="1" noEditPoints="1" noAdjustHandles="1" noChangeArrowheads="1" noChangeShapeType="1" noTextEdit="1"/>
+              </p:cNvSpPr>
+              <p:nvPr/>
+            </p:nvSpPr>
+            <p:spPr>
+              <a:xfrm>
+                <a:off x="6356330" y="4493253"/>
+                <a:ext cx="3110524" cy="397994"/>
+              </a:xfrm>
+              <a:prstGeom prst="rect">
+                <a:avLst/>
+              </a:prstGeom>
+              <a:blipFill>
+                <a:blip r:embed="rId14"/>
+                <a:stretch>
+                  <a:fillRect t="-7692" b="-16923"/>
+                </a:stretch>
+              </a:blipFill>
+            </p:spPr>
+            <p:txBody>
+              <a:bodyPr/>
+              <a:lstStyle/>
+              <a:p>
+                <a:r>
+                  <a:rPr lang="sv-SE">
+                    <a:noFill/>
+                  </a:rPr>
+                  <a:t> </a:t>
+                </a:r>
+              </a:p>
+            </p:txBody>
+          </p:sp>
+        </mc:Fallback>
+      </mc:AlternateContent>
+      <mc:AlternateContent xmlns:mc="http://schemas.openxmlformats.org/markup-compatibility/2006">
+        <mc:Choice xmlns:a14="http://schemas.microsoft.com/office/drawing/2010/main" Requires="a14">
+          <p:sp>
+            <p:nvSpPr>
+              <p:cNvPr id="32" name="TextBox 31"/>
+              <p:cNvSpPr txBox="1"/>
+              <p:nvPr/>
+            </p:nvSpPr>
+            <p:spPr>
+              <a:xfrm>
+                <a:off x="7911592" y="5652501"/>
+                <a:ext cx="1320444" cy="400110"/>
+              </a:xfrm>
+              <a:prstGeom prst="rect">
+                <a:avLst/>
+              </a:prstGeom>
+              <a:noFill/>
+            </p:spPr>
+            <p:txBody>
+              <a:bodyPr wrap="square" rtlCol="0">
+                <a:spAutoFit/>
+              </a:bodyPr>
+              <a:lstStyle/>
+              <a:p>
+                <a14:m>
+                  <m:oMath xmlns:m="http://schemas.openxmlformats.org/officeDocument/2006/math">
+                    <m:sSub>
+                      <m:sSubPr>
+                        <m:ctrlPr>
+                          <a:rPr lang="en-US" sz="2000" b="0" i="1" dirty="0" smtClean="0">
+                            <a:latin typeface="Cambria Math" panose="02040503050406030204" pitchFamily="18" charset="0"/>
+                            <a:cs typeface="Times New Roman" panose="02020603050405020304" pitchFamily="18" charset="0"/>
+                          </a:rPr>
+                        </m:ctrlPr>
+                      </m:sSubPr>
+                      <m:e>
+                        <m:r>
+                          <m:rPr>
+                            <m:sty m:val="p"/>
+                          </m:rPr>
+                          <a:rPr lang="en-US" sz="2000" b="0" i="0" dirty="0" smtClean="0">
+                            <a:latin typeface="Cambria Math" panose="02040503050406030204" pitchFamily="18" charset="0"/>
+                            <a:cs typeface="Times New Roman" panose="02020603050405020304" pitchFamily="18" charset="0"/>
+                          </a:rPr>
+                          <m:t>m</m:t>
+                        </m:r>
+                      </m:e>
+                      <m:sub>
+                        <m:r>
+                          <a:rPr lang="en-US" sz="2000" i="1" dirty="0" smtClean="0">
+                            <a:latin typeface="Cambria Math" panose="02040503050406030204" pitchFamily="18" charset="0"/>
+                            <a:cs typeface="Times New Roman" panose="02020603050405020304" pitchFamily="18" charset="0"/>
+                          </a:rPr>
+                          <m:t>𝑎</m:t>
+                        </m:r>
+                      </m:sub>
+                    </m:sSub>
+                    <m:r>
+                      <a:rPr lang="en-US" sz="2000" b="0" i="1" dirty="0" smtClean="0">
+                        <a:latin typeface="Cambria Math" panose="02040503050406030204" pitchFamily="18" charset="0"/>
+                        <a:cs typeface="Times New Roman" panose="02020603050405020304" pitchFamily="18" charset="0"/>
+                      </a:rPr>
+                      <m:t> </m:t>
+                    </m:r>
+                    <m:r>
+                      <a:rPr lang="en-US" sz="2000" b="0" i="1" dirty="0" smtClean="0">
+                        <a:latin typeface="Cambria Math" panose="02040503050406030204" pitchFamily="18" charset="0"/>
+                        <a:cs typeface="Times New Roman" panose="02020603050405020304" pitchFamily="18" charset="0"/>
+                      </a:rPr>
+                      <m:t> </m:t>
+                    </m:r>
+                  </m:oMath>
+                </a14:m>
+                <a:r>
+                  <a:rPr lang="en-US" sz="2000" dirty="0" smtClean="0">
+                    <a:latin typeface="Times New Roman" panose="02020603050405020304" pitchFamily="18" charset="0"/>
+                    <a:cs typeface="Times New Roman" panose="02020603050405020304" pitchFamily="18" charset="0"/>
+                  </a:rPr>
+                  <a:t>= 1</a:t>
+                </a:r>
+                <a:endParaRPr lang="sv-SE" sz="1600" dirty="0">
+                  <a:latin typeface="Times New Roman" panose="02020603050405020304" pitchFamily="18" charset="0"/>
+                  <a:cs typeface="Times New Roman" panose="02020603050405020304" pitchFamily="18" charset="0"/>
+                </a:endParaRPr>
+              </a:p>
+            </p:txBody>
+          </p:sp>
+        </mc:Choice>
+        <mc:Fallback>
+          <p:sp>
+            <p:nvSpPr>
+              <p:cNvPr id="32" name="TextBox 31"/>
+              <p:cNvSpPr txBox="1">
+                <a:spLocks noRot="1" noChangeAspect="1" noMove="1" noResize="1" noEditPoints="1" noAdjustHandles="1" noChangeArrowheads="1" noChangeShapeType="1" noTextEdit="1"/>
+              </p:cNvSpPr>
+              <p:nvPr/>
+            </p:nvSpPr>
+            <p:spPr>
+              <a:xfrm>
+                <a:off x="7911592" y="5652501"/>
+                <a:ext cx="1320444" cy="400110"/>
+              </a:xfrm>
+              <a:prstGeom prst="rect">
+                <a:avLst/>
+              </a:prstGeom>
+              <a:blipFill>
+                <a:blip r:embed="rId15"/>
+                <a:stretch>
+                  <a:fillRect t="-7576" b="-25758"/>
+                </a:stretch>
+              </a:blipFill>
+            </p:spPr>
+            <p:txBody>
+              <a:bodyPr/>
+              <a:lstStyle/>
+              <a:p>
+                <a:r>
+                  <a:rPr lang="sv-SE">
+                    <a:noFill/>
+                  </a:rPr>
+                  <a:t> </a:t>
+                </a:r>
+              </a:p>
+            </p:txBody>
+          </p:sp>
+        </mc:Fallback>
+      </mc:AlternateContent>
+      <mc:AlternateContent xmlns:mc="http://schemas.openxmlformats.org/markup-compatibility/2006">
+        <mc:Choice xmlns:a14="http://schemas.microsoft.com/office/drawing/2010/main" Requires="a14">
+          <p:sp>
+            <p:nvSpPr>
+              <p:cNvPr id="33" name="TextBox 32"/>
+              <p:cNvSpPr txBox="1"/>
+              <p:nvPr/>
+            </p:nvSpPr>
+            <p:spPr>
+              <a:xfrm>
+                <a:off x="8354233" y="4474908"/>
+                <a:ext cx="2071931" cy="398507"/>
+              </a:xfrm>
+              <a:prstGeom prst="rect">
+                <a:avLst/>
+              </a:prstGeom>
+              <a:noFill/>
+            </p:spPr>
+            <p:txBody>
+              <a:bodyPr wrap="square" rtlCol="0">
+                <a:spAutoFit/>
+              </a:bodyPr>
+              <a:lstStyle/>
+              <a:p>
+                <a14:m>
+                  <m:oMath xmlns:m="http://schemas.openxmlformats.org/officeDocument/2006/math">
+                    <m:sSub>
+                      <m:sSubPr>
+                        <m:ctrlPr>
+                          <a:rPr lang="en-US" i="1" dirty="0" smtClean="0">
+                            <a:solidFill>
+                              <a:srgbClr val="249C8E"/>
+                            </a:solidFill>
+                            <a:latin typeface="Cambria Math" panose="02040503050406030204" pitchFamily="18" charset="0"/>
+                            <a:cs typeface="Times New Roman" panose="02020603050405020304" pitchFamily="18" charset="0"/>
+                          </a:rPr>
+                        </m:ctrlPr>
+                      </m:sSubPr>
+                      <m:e>
+                        <m:sSub>
+                          <m:sSubPr>
+                            <m:ctrlPr>
+                              <a:rPr lang="en-US" i="1" dirty="0">
+                                <a:solidFill>
+                                  <a:srgbClr val="249C8E"/>
+                                </a:solidFill>
+                                <a:latin typeface="Cambria Math" panose="02040503050406030204" pitchFamily="18" charset="0"/>
+                                <a:cs typeface="Times New Roman" panose="02020603050405020304" pitchFamily="18" charset="0"/>
+                              </a:rPr>
+                            </m:ctrlPr>
+                          </m:sSubPr>
+                          <m:e>
+                            <m:r>
+                              <a:rPr lang="en-US" i="1" dirty="0">
+                                <a:solidFill>
+                                  <a:srgbClr val="249C8E"/>
+                                </a:solidFill>
+                                <a:latin typeface="Cambria Math" panose="02040503050406030204" pitchFamily="18" charset="0"/>
+                                <a:cs typeface="Times New Roman" panose="02020603050405020304" pitchFamily="18" charset="0"/>
+                              </a:rPr>
+                              <m:t>𝑉</m:t>
+                            </m:r>
+                          </m:e>
+                          <m:sub>
+                            <m:r>
+                              <a:rPr lang="en-US" i="1" dirty="0">
+                                <a:solidFill>
+                                  <a:srgbClr val="249C8E"/>
+                                </a:solidFill>
+                                <a:latin typeface="Cambria Math" panose="02040503050406030204" pitchFamily="18" charset="0"/>
+                                <a:cs typeface="Times New Roman" panose="02020603050405020304" pitchFamily="18" charset="0"/>
+                              </a:rPr>
+                              <m:t>𝐶𝑀</m:t>
+                            </m:r>
+                          </m:sub>
+                        </m:sSub>
+                      </m:e>
+                      <m:sub>
+                        <m:r>
+                          <a:rPr lang="en-US" i="1" dirty="0">
+                            <a:solidFill>
+                              <a:srgbClr val="249C8E"/>
+                            </a:solidFill>
+                            <a:latin typeface="Cambria Math" panose="02040503050406030204" pitchFamily="18" charset="0"/>
+                            <a:cs typeface="Times New Roman" panose="02020603050405020304" pitchFamily="18" charset="0"/>
+                          </a:rPr>
+                          <m:t>𝑊</m:t>
+                        </m:r>
+                        <m:r>
+                          <a:rPr lang="en-US" i="1" dirty="0">
+                            <a:solidFill>
+                              <a:srgbClr val="249C8E"/>
+                            </a:solidFill>
+                            <a:latin typeface="Cambria Math" panose="02040503050406030204" pitchFamily="18" charset="0"/>
+                            <a:cs typeface="Times New Roman" panose="02020603050405020304" pitchFamily="18" charset="0"/>
+                          </a:rPr>
+                          <m:t>−</m:t>
+                        </m:r>
+                        <m:r>
+                          <a:rPr lang="en-US" i="1" dirty="0">
+                            <a:solidFill>
+                              <a:srgbClr val="249C8E"/>
+                            </a:solidFill>
+                            <a:latin typeface="Cambria Math" panose="02040503050406030204" pitchFamily="18" charset="0"/>
+                            <a:cs typeface="Times New Roman" panose="02020603050405020304" pitchFamily="18" charset="0"/>
+                          </a:rPr>
+                          <m:t>𝑅𝑀𝑆</m:t>
+                        </m:r>
+                      </m:sub>
+                    </m:sSub>
+                  </m:oMath>
+                </a14:m>
+                <a:r>
+                  <a:rPr lang="en-US" dirty="0" smtClean="0">
+                    <a:solidFill>
+                      <a:srgbClr val="249C8E"/>
+                    </a:solidFill>
+                    <a:latin typeface="Times New Roman" panose="02020603050405020304" pitchFamily="18" charset="0"/>
+                    <a:cs typeface="Times New Roman" panose="02020603050405020304" pitchFamily="18" charset="0"/>
+                  </a:rPr>
+                  <a:t>=0.0063</a:t>
+                </a:r>
+                <a:endParaRPr lang="sv-SE" sz="1400" dirty="0">
+                  <a:solidFill>
+                    <a:srgbClr val="249C8E"/>
+                  </a:solidFill>
+                  <a:latin typeface="Times New Roman" panose="02020603050405020304" pitchFamily="18" charset="0"/>
+                  <a:cs typeface="Times New Roman" panose="02020603050405020304" pitchFamily="18" charset="0"/>
+                </a:endParaRPr>
+              </a:p>
+            </p:txBody>
+          </p:sp>
+        </mc:Choice>
+        <mc:Fallback>
+          <p:sp>
+            <p:nvSpPr>
+              <p:cNvPr id="33" name="TextBox 32"/>
+              <p:cNvSpPr txBox="1">
+                <a:spLocks noRot="1" noChangeAspect="1" noMove="1" noResize="1" noEditPoints="1" noAdjustHandles="1" noChangeArrowheads="1" noChangeShapeType="1" noTextEdit="1"/>
+              </p:cNvSpPr>
+              <p:nvPr/>
+            </p:nvSpPr>
+            <p:spPr>
+              <a:xfrm>
+                <a:off x="8354233" y="4474908"/>
+                <a:ext cx="2071931" cy="398507"/>
+              </a:xfrm>
+              <a:prstGeom prst="rect">
+                <a:avLst/>
+              </a:prstGeom>
+              <a:blipFill>
+                <a:blip r:embed="rId16"/>
+                <a:stretch>
+                  <a:fillRect t="-7692" b="-16923"/>
+                </a:stretch>
+              </a:blipFill>
+            </p:spPr>
+            <p:txBody>
+              <a:bodyPr/>
+              <a:lstStyle/>
+              <a:p>
+                <a:r>
+                  <a:rPr lang="sv-SE">
+                    <a:noFill/>
+                  </a:rPr>
+                  <a:t> </a:t>
+                </a:r>
+              </a:p>
+            </p:txBody>
+          </p:sp>
+        </mc:Fallback>
+      </mc:AlternateContent>
+      <p:sp>
+        <p:nvSpPr>
+          <p:cNvPr id="34" name="TextBox 33"/>
           <p:cNvSpPr txBox="1"/>
           <p:nvPr/>
         </p:nvSpPr>
         <p:spPr>
           <a:xfrm>
-            <a:off x="8623207" y="2654355"/>
-            <a:ext cx="455930" cy="307777"/>
+            <a:off x="3060362" y="-87349"/>
+            <a:ext cx="841829" cy="461665"/>
           </a:xfrm>
           <a:prstGeom prst="rect">
             <a:avLst/>
@@ -4158,29 +5748,13 @@
           <a:lstStyle/>
           <a:p>
             <a:r>
-              <a:rPr lang="en-US" sz="1400" dirty="0" smtClean="0">
-                <a:solidFill>
-                  <a:srgbClr val="00FF00"/>
-                </a:solidFill>
-                <a:latin typeface="Times New Roman" panose="02020603050405020304" pitchFamily="18" charset="0"/>
-                <a:cs typeface="Times New Roman" panose="02020603050405020304" pitchFamily="18" charset="0"/>
-              </a:rPr>
-              <a:t>V</a:t>
-            </a:r>
-            <a:r>
-              <a:rPr lang="en-US" sz="1100" dirty="0">
-                <a:solidFill>
-                  <a:srgbClr val="00FF00"/>
-                </a:solidFill>
-                <a:latin typeface="Times New Roman" panose="02020603050405020304" pitchFamily="18" charset="0"/>
-                <a:cs typeface="Times New Roman" panose="02020603050405020304" pitchFamily="18" charset="0"/>
-              </a:rPr>
-              <a:t>C</a:t>
-            </a:r>
-            <a:endParaRPr lang="sv-SE" sz="1100" dirty="0">
-              <a:solidFill>
-                <a:srgbClr val="00FF00"/>
-              </a:solidFill>
+              <a:rPr lang="en-US" sz="2400" dirty="0" smtClean="0">
+                <a:latin typeface="Times New Roman" panose="02020603050405020304" pitchFamily="18" charset="0"/>
+                <a:cs typeface="Times New Roman" panose="02020603050405020304" pitchFamily="18" charset="0"/>
+              </a:rPr>
+              <a:t>(a)</a:t>
+            </a:r>
+            <a:endParaRPr lang="sv-SE" sz="2400" dirty="0">
               <a:latin typeface="Times New Roman" panose="02020603050405020304" pitchFamily="18" charset="0"/>
               <a:cs typeface="Times New Roman" panose="02020603050405020304" pitchFamily="18" charset="0"/>
             </a:endParaRPr>
@@ -4189,14 +5763,14 @@
       </p:sp>
       <p:sp>
         <p:nvSpPr>
-          <p:cNvPr id="20" name="TextBox 19"/>
+          <p:cNvPr id="35" name="TextBox 34"/>
           <p:cNvSpPr txBox="1"/>
           <p:nvPr/>
         </p:nvSpPr>
         <p:spPr>
           <a:xfrm>
-            <a:off x="8552722" y="3355398"/>
-            <a:ext cx="586739" cy="307777"/>
+            <a:off x="8061204" y="-92009"/>
+            <a:ext cx="841829" cy="461665"/>
           </a:xfrm>
           <a:prstGeom prst="rect">
             <a:avLst/>
@@ -4210,30 +5784,236 @@
           <a:lstStyle/>
           <a:p>
             <a:r>
-              <a:rPr lang="en-US" sz="1400" dirty="0" smtClean="0">
-                <a:latin typeface="Times New Roman" panose="02020603050405020304" pitchFamily="18" charset="0"/>
-                <a:cs typeface="Times New Roman" panose="02020603050405020304" pitchFamily="18" charset="0"/>
-              </a:rPr>
-              <a:t>V</a:t>
-            </a:r>
-            <a:r>
-              <a:rPr lang="en-US" sz="1100" dirty="0" smtClean="0">
-                <a:latin typeface="Times New Roman" panose="02020603050405020304" pitchFamily="18" charset="0"/>
-                <a:cs typeface="Times New Roman" panose="02020603050405020304" pitchFamily="18" charset="0"/>
-              </a:rPr>
-              <a:t>CM</a:t>
-            </a:r>
-            <a:endParaRPr lang="sv-SE" sz="1100" dirty="0">
+              <a:rPr lang="en-US" sz="2400" dirty="0" smtClean="0">
+                <a:latin typeface="Times New Roman" panose="02020603050405020304" pitchFamily="18" charset="0"/>
+                <a:cs typeface="Times New Roman" panose="02020603050405020304" pitchFamily="18" charset="0"/>
+              </a:rPr>
+              <a:t>(b)</a:t>
+            </a:r>
+            <a:endParaRPr lang="sv-SE" sz="2400" dirty="0">
               <a:latin typeface="Times New Roman" panose="02020603050405020304" pitchFamily="18" charset="0"/>
               <a:cs typeface="Times New Roman" panose="02020603050405020304" pitchFamily="18" charset="0"/>
             </a:endParaRPr>
           </a:p>
         </p:txBody>
       </p:sp>
+      <p:sp>
+        <p:nvSpPr>
+          <p:cNvPr id="38" name="TextBox 37"/>
+          <p:cNvSpPr txBox="1"/>
+          <p:nvPr/>
+        </p:nvSpPr>
+        <p:spPr>
+          <a:xfrm>
+            <a:off x="3060362" y="3966164"/>
+            <a:ext cx="841829" cy="461665"/>
+          </a:xfrm>
+          <a:prstGeom prst="rect">
+            <a:avLst/>
+          </a:prstGeom>
+          <a:noFill/>
+        </p:spPr>
+        <p:txBody>
+          <a:bodyPr wrap="square" rtlCol="0">
+            <a:spAutoFit/>
+          </a:bodyPr>
+          <a:lstStyle/>
+          <a:p>
+            <a:r>
+              <a:rPr lang="en-US" sz="2400" dirty="0" smtClean="0">
+                <a:latin typeface="Times New Roman" panose="02020603050405020304" pitchFamily="18" charset="0"/>
+                <a:cs typeface="Times New Roman" panose="02020603050405020304" pitchFamily="18" charset="0"/>
+              </a:rPr>
+              <a:t>(c)</a:t>
+            </a:r>
+            <a:endParaRPr lang="sv-SE" sz="2400" dirty="0">
+              <a:latin typeface="Times New Roman" panose="02020603050405020304" pitchFamily="18" charset="0"/>
+              <a:cs typeface="Times New Roman" panose="02020603050405020304" pitchFamily="18" charset="0"/>
+            </a:endParaRPr>
+          </a:p>
+        </p:txBody>
+      </p:sp>
+      <p:sp>
+        <p:nvSpPr>
+          <p:cNvPr id="39" name="TextBox 38"/>
+          <p:cNvSpPr txBox="1"/>
+          <p:nvPr/>
+        </p:nvSpPr>
+        <p:spPr>
+          <a:xfrm>
+            <a:off x="8061204" y="3961504"/>
+            <a:ext cx="841829" cy="461665"/>
+          </a:xfrm>
+          <a:prstGeom prst="rect">
+            <a:avLst/>
+          </a:prstGeom>
+          <a:noFill/>
+        </p:spPr>
+        <p:txBody>
+          <a:bodyPr wrap="square" rtlCol="0">
+            <a:spAutoFit/>
+          </a:bodyPr>
+          <a:lstStyle/>
+          <a:p>
+            <a:r>
+              <a:rPr lang="en-US" sz="2400" dirty="0" smtClean="0">
+                <a:latin typeface="Times New Roman" panose="02020603050405020304" pitchFamily="18" charset="0"/>
+                <a:cs typeface="Times New Roman" panose="02020603050405020304" pitchFamily="18" charset="0"/>
+              </a:rPr>
+              <a:t>(d)</a:t>
+            </a:r>
+            <a:endParaRPr lang="sv-SE" sz="2400" dirty="0">
+              <a:latin typeface="Times New Roman" panose="02020603050405020304" pitchFamily="18" charset="0"/>
+              <a:cs typeface="Times New Roman" panose="02020603050405020304" pitchFamily="18" charset="0"/>
+            </a:endParaRPr>
+          </a:p>
+        </p:txBody>
+      </p:sp>
+      <p:sp>
+        <p:nvSpPr>
+          <p:cNvPr id="40" name="TextBox 39"/>
+          <p:cNvSpPr txBox="1"/>
+          <p:nvPr/>
+        </p:nvSpPr>
+        <p:spPr>
+          <a:xfrm>
+            <a:off x="3060362" y="8010854"/>
+            <a:ext cx="841829" cy="461665"/>
+          </a:xfrm>
+          <a:prstGeom prst="rect">
+            <a:avLst/>
+          </a:prstGeom>
+          <a:noFill/>
+        </p:spPr>
+        <p:txBody>
+          <a:bodyPr wrap="square" rtlCol="0">
+            <a:spAutoFit/>
+          </a:bodyPr>
+          <a:lstStyle/>
+          <a:p>
+            <a:r>
+              <a:rPr lang="en-US" sz="2400" dirty="0" smtClean="0">
+                <a:latin typeface="Times New Roman" panose="02020603050405020304" pitchFamily="18" charset="0"/>
+                <a:cs typeface="Times New Roman" panose="02020603050405020304" pitchFamily="18" charset="0"/>
+              </a:rPr>
+              <a:t>(e)</a:t>
+            </a:r>
+            <a:endParaRPr lang="sv-SE" sz="2400" dirty="0">
+              <a:latin typeface="Times New Roman" panose="02020603050405020304" pitchFamily="18" charset="0"/>
+              <a:cs typeface="Times New Roman" panose="02020603050405020304" pitchFamily="18" charset="0"/>
+            </a:endParaRPr>
+          </a:p>
+        </p:txBody>
+      </p:sp>
+      <p:sp>
+        <p:nvSpPr>
+          <p:cNvPr id="41" name="TextBox 40"/>
+          <p:cNvSpPr txBox="1"/>
+          <p:nvPr/>
+        </p:nvSpPr>
+        <p:spPr>
+          <a:xfrm>
+            <a:off x="8061204" y="8006194"/>
+            <a:ext cx="841829" cy="461665"/>
+          </a:xfrm>
+          <a:prstGeom prst="rect">
+            <a:avLst/>
+          </a:prstGeom>
+          <a:noFill/>
+        </p:spPr>
+        <p:txBody>
+          <a:bodyPr wrap="square" rtlCol="0">
+            <a:spAutoFit/>
+          </a:bodyPr>
+          <a:lstStyle/>
+          <a:p>
+            <a:r>
+              <a:rPr lang="en-US" sz="2400" dirty="0" smtClean="0">
+                <a:latin typeface="Times New Roman" panose="02020603050405020304" pitchFamily="18" charset="0"/>
+                <a:cs typeface="Times New Roman" panose="02020603050405020304" pitchFamily="18" charset="0"/>
+              </a:rPr>
+              <a:t>(f)</a:t>
+            </a:r>
+            <a:endParaRPr lang="sv-SE" sz="2400" dirty="0">
+              <a:latin typeface="Times New Roman" panose="02020603050405020304" pitchFamily="18" charset="0"/>
+              <a:cs typeface="Times New Roman" panose="02020603050405020304" pitchFamily="18" charset="0"/>
+            </a:endParaRPr>
+          </a:p>
+        </p:txBody>
+      </p:sp>
+      <p:pic>
+        <p:nvPicPr>
+          <p:cNvPr id="43" name="Picture 42"/>
+          <p:cNvPicPr>
+            <a:picLocks noChangeAspect="1"/>
+          </p:cNvPicPr>
+          <p:nvPr/>
+        </p:nvPicPr>
+        <p:blipFill rotWithShape="1">
+          <a:blip r:embed="rId17"/>
+          <a:srcRect l="24694" t="9287" r="11088" b="77653"/>
+          <a:stretch/>
+        </p:blipFill>
+        <p:spPr>
+          <a:xfrm>
+            <a:off x="6561127" y="-3187071"/>
+            <a:ext cx="3425371" cy="522464"/>
+          </a:xfrm>
+          <a:prstGeom prst="rect">
+            <a:avLst/>
+          </a:prstGeom>
+        </p:spPr>
+      </p:pic>
+      <p:pic>
+        <p:nvPicPr>
+          <p:cNvPr id="44" name="Picture 43"/>
+          <p:cNvPicPr>
+            <a:picLocks noChangeAspect="1"/>
+          </p:cNvPicPr>
+          <p:nvPr/>
+        </p:nvPicPr>
+        <p:blipFill rotWithShape="1">
+          <a:blip r:embed="rId17"/>
+          <a:srcRect l="24694" t="9287" r="11088" b="77653"/>
+          <a:stretch/>
+        </p:blipFill>
+        <p:spPr>
+          <a:xfrm>
+            <a:off x="6641547" y="986159"/>
+            <a:ext cx="3425371" cy="522464"/>
+          </a:xfrm>
+          <a:prstGeom prst="rect">
+            <a:avLst/>
+          </a:prstGeom>
+        </p:spPr>
+      </p:pic>
+      <p:pic>
+        <p:nvPicPr>
+          <p:cNvPr id="45" name="Picture 44"/>
+          <p:cNvPicPr>
+            <a:picLocks noChangeAspect="1"/>
+          </p:cNvPicPr>
+          <p:nvPr/>
+        </p:nvPicPr>
+        <p:blipFill rotWithShape="1">
+          <a:blip r:embed="rId17"/>
+          <a:srcRect l="24694" t="9287" r="11088" b="77653"/>
+          <a:stretch/>
+        </p:blipFill>
+        <p:spPr>
+          <a:xfrm>
+            <a:off x="6561127" y="5075990"/>
+            <a:ext cx="3425371" cy="522464"/>
+          </a:xfrm>
+          <a:prstGeom prst="rect">
+            <a:avLst/>
+          </a:prstGeom>
+        </p:spPr>
+      </p:pic>
     </p:spTree>
     <p:extLst>
       <p:ext uri="{BB962C8B-B14F-4D97-AF65-F5344CB8AC3E}">
-        <p14:creationId xmlns:p14="http://schemas.microsoft.com/office/powerpoint/2010/main" val="3823764463"/>
+        <p14:creationId xmlns:p14="http://schemas.microsoft.com/office/powerpoint/2010/main" val="2557026095"/>
       </p:ext>
     </p:extLst>
   </p:cSld>
@@ -4243,345 +6023,7 @@
 </p:sld>
 </file>
 
-<file path=ppt/slides/slide3.xml><?xml version="1.0" encoding="utf-8"?>
-<p:sld xmlns:a="http://schemas.openxmlformats.org/drawingml/2006/main" xmlns:r="http://schemas.openxmlformats.org/officeDocument/2006/relationships" xmlns:p="http://schemas.openxmlformats.org/presentationml/2006/main">
-  <p:cSld>
-    <p:spTree>
-      <p:nvGrpSpPr>
-        <p:cNvPr id="1" name=""/>
-        <p:cNvGrpSpPr/>
-        <p:nvPr/>
-      </p:nvGrpSpPr>
-      <p:grpSpPr>
-        <a:xfrm>
-          <a:off x="0" y="0"/>
-          <a:ext cx="0" cy="0"/>
-          <a:chOff x="0" y="0"/>
-          <a:chExt cx="0" cy="0"/>
-        </a:xfrm>
-      </p:grpSpPr>
-      <p:sp>
-        <p:nvSpPr>
-          <p:cNvPr id="4" name="TextBox 3"/>
-          <p:cNvSpPr txBox="1"/>
-          <p:nvPr/>
-        </p:nvSpPr>
-        <p:spPr>
-          <a:xfrm>
-            <a:off x="2686050" y="4032250"/>
-            <a:ext cx="2089150" cy="307777"/>
-          </a:xfrm>
-          <a:prstGeom prst="rect">
-            <a:avLst/>
-          </a:prstGeom>
-          <a:noFill/>
-        </p:spPr>
-        <p:txBody>
-          <a:bodyPr wrap="square" rtlCol="0">
-            <a:spAutoFit/>
-          </a:bodyPr>
-          <a:lstStyle/>
-          <a:p>
-            <a:r>
-              <a:rPr lang="en-US" sz="1400" dirty="0" smtClean="0">
-                <a:latin typeface="Times New Roman" panose="02020603050405020304" pitchFamily="18" charset="0"/>
-                <a:cs typeface="Times New Roman" panose="02020603050405020304" pitchFamily="18" charset="0"/>
-              </a:rPr>
-              <a:t>Time: 2ms/div</a:t>
-            </a:r>
-            <a:endParaRPr lang="sv-SE" sz="1400" dirty="0">
-              <a:latin typeface="Times New Roman" panose="02020603050405020304" pitchFamily="18" charset="0"/>
-              <a:cs typeface="Times New Roman" panose="02020603050405020304" pitchFamily="18" charset="0"/>
-            </a:endParaRPr>
-          </a:p>
-        </p:txBody>
-      </p:sp>
-      <p:pic>
-        <p:nvPicPr>
-          <p:cNvPr id="5" name="Picture 4"/>
-          <p:cNvPicPr>
-            <a:picLocks noChangeAspect="1"/>
-          </p:cNvPicPr>
-          <p:nvPr/>
-        </p:nvPicPr>
-        <p:blipFill rotWithShape="1">
-          <a:blip r:embed="rId2"/>
-          <a:srcRect l="11976" t="6254" r="8309" b="9936"/>
-          <a:stretch/>
-        </p:blipFill>
-        <p:spPr>
-          <a:xfrm>
-            <a:off x="1051560" y="739140"/>
-            <a:ext cx="4251960" cy="3352800"/>
-          </a:xfrm>
-          <a:prstGeom prst="rect">
-            <a:avLst/>
-          </a:prstGeom>
-        </p:spPr>
-      </p:pic>
-      <p:sp>
-        <p:nvSpPr>
-          <p:cNvPr id="6" name="TextBox 5"/>
-          <p:cNvSpPr txBox="1"/>
-          <p:nvPr/>
-        </p:nvSpPr>
-        <p:spPr>
-          <a:xfrm rot="16200000">
-            <a:off x="-390203" y="2258110"/>
-            <a:ext cx="2575560" cy="307777"/>
-          </a:xfrm>
-          <a:prstGeom prst="rect">
-            <a:avLst/>
-          </a:prstGeom>
-          <a:noFill/>
-        </p:spPr>
-        <p:txBody>
-          <a:bodyPr wrap="square" rtlCol="0">
-            <a:spAutoFit/>
-          </a:bodyPr>
-          <a:lstStyle/>
-          <a:p>
-            <a:r>
-              <a:rPr lang="en-US" sz="1400" dirty="0" smtClean="0">
-                <a:latin typeface="Times New Roman" panose="02020603050405020304" pitchFamily="18" charset="0"/>
-                <a:cs typeface="Times New Roman" panose="02020603050405020304" pitchFamily="18" charset="0"/>
-              </a:rPr>
-              <a:t>Normalized Voltage: 0.5 </a:t>
-            </a:r>
-            <a:r>
-              <a:rPr lang="en-US" sz="1400" dirty="0" err="1" smtClean="0">
-                <a:latin typeface="Times New Roman" panose="02020603050405020304" pitchFamily="18" charset="0"/>
-                <a:cs typeface="Times New Roman" panose="02020603050405020304" pitchFamily="18" charset="0"/>
-              </a:rPr>
-              <a:t>p.u</a:t>
-            </a:r>
-            <a:r>
-              <a:rPr lang="en-US" sz="1400" dirty="0" smtClean="0">
-                <a:latin typeface="Times New Roman" panose="02020603050405020304" pitchFamily="18" charset="0"/>
-                <a:cs typeface="Times New Roman" panose="02020603050405020304" pitchFamily="18" charset="0"/>
-              </a:rPr>
-              <a:t>./div</a:t>
-            </a:r>
-            <a:endParaRPr lang="sv-SE" sz="1400" dirty="0">
-              <a:latin typeface="Times New Roman" panose="02020603050405020304" pitchFamily="18" charset="0"/>
-              <a:cs typeface="Times New Roman" panose="02020603050405020304" pitchFamily="18" charset="0"/>
-            </a:endParaRPr>
-          </a:p>
-        </p:txBody>
-      </p:sp>
-      <p:sp>
-        <p:nvSpPr>
-          <p:cNvPr id="7" name="TextBox 6"/>
-          <p:cNvSpPr txBox="1"/>
-          <p:nvPr/>
-        </p:nvSpPr>
-        <p:spPr>
-          <a:xfrm>
-            <a:off x="2851785" y="1671372"/>
-            <a:ext cx="455930" cy="307777"/>
-          </a:xfrm>
-          <a:prstGeom prst="rect">
-            <a:avLst/>
-          </a:prstGeom>
-          <a:noFill/>
-        </p:spPr>
-        <p:txBody>
-          <a:bodyPr wrap="square" rtlCol="0">
-            <a:spAutoFit/>
-          </a:bodyPr>
-          <a:lstStyle/>
-          <a:p>
-            <a:r>
-              <a:rPr lang="en-US" sz="1400" dirty="0" smtClean="0">
-                <a:solidFill>
-                  <a:srgbClr val="FF00FF"/>
-                </a:solidFill>
-                <a:latin typeface="Times New Roman" panose="02020603050405020304" pitchFamily="18" charset="0"/>
-                <a:cs typeface="Times New Roman" panose="02020603050405020304" pitchFamily="18" charset="0"/>
-              </a:rPr>
-              <a:t>V</a:t>
-            </a:r>
-            <a:r>
-              <a:rPr lang="en-US" sz="1100" dirty="0" smtClean="0">
-                <a:solidFill>
-                  <a:srgbClr val="FF00FF"/>
-                </a:solidFill>
-                <a:latin typeface="Times New Roman" panose="02020603050405020304" pitchFamily="18" charset="0"/>
-                <a:cs typeface="Times New Roman" panose="02020603050405020304" pitchFamily="18" charset="0"/>
-              </a:rPr>
-              <a:t>B</a:t>
-            </a:r>
-            <a:endParaRPr lang="sv-SE" sz="1100" dirty="0">
-              <a:solidFill>
-                <a:srgbClr val="FF00FF"/>
-              </a:solidFill>
-              <a:latin typeface="Times New Roman" panose="02020603050405020304" pitchFamily="18" charset="0"/>
-              <a:cs typeface="Times New Roman" panose="02020603050405020304" pitchFamily="18" charset="0"/>
-            </a:endParaRPr>
-          </a:p>
-        </p:txBody>
-      </p:sp>
-      <p:sp>
-        <p:nvSpPr>
-          <p:cNvPr id="8" name="TextBox 7"/>
-          <p:cNvSpPr txBox="1"/>
-          <p:nvPr/>
-        </p:nvSpPr>
-        <p:spPr>
-          <a:xfrm>
-            <a:off x="2851785" y="970329"/>
-            <a:ext cx="455930" cy="307777"/>
-          </a:xfrm>
-          <a:prstGeom prst="rect">
-            <a:avLst/>
-          </a:prstGeom>
-          <a:noFill/>
-        </p:spPr>
-        <p:txBody>
-          <a:bodyPr wrap="square" rtlCol="0">
-            <a:spAutoFit/>
-          </a:bodyPr>
-          <a:lstStyle/>
-          <a:p>
-            <a:r>
-              <a:rPr lang="en-US" sz="1400" dirty="0" smtClean="0">
-                <a:solidFill>
-                  <a:srgbClr val="002060"/>
-                </a:solidFill>
-                <a:latin typeface="Times New Roman" panose="02020603050405020304" pitchFamily="18" charset="0"/>
-                <a:cs typeface="Times New Roman" panose="02020603050405020304" pitchFamily="18" charset="0"/>
-              </a:rPr>
-              <a:t>V</a:t>
-            </a:r>
-            <a:r>
-              <a:rPr lang="en-US" sz="1100" dirty="0" smtClean="0">
-                <a:solidFill>
-                  <a:srgbClr val="002060"/>
-                </a:solidFill>
-                <a:latin typeface="Times New Roman" panose="02020603050405020304" pitchFamily="18" charset="0"/>
-                <a:cs typeface="Times New Roman" panose="02020603050405020304" pitchFamily="18" charset="0"/>
-              </a:rPr>
-              <a:t>A</a:t>
-            </a:r>
-            <a:endParaRPr lang="sv-SE" sz="1100" dirty="0">
-              <a:solidFill>
-                <a:srgbClr val="002060"/>
-              </a:solidFill>
-              <a:latin typeface="Times New Roman" panose="02020603050405020304" pitchFamily="18" charset="0"/>
-              <a:cs typeface="Times New Roman" panose="02020603050405020304" pitchFamily="18" charset="0"/>
-            </a:endParaRPr>
-          </a:p>
-        </p:txBody>
-      </p:sp>
-      <p:sp>
-        <p:nvSpPr>
-          <p:cNvPr id="9" name="TextBox 8"/>
-          <p:cNvSpPr txBox="1"/>
-          <p:nvPr/>
-        </p:nvSpPr>
-        <p:spPr>
-          <a:xfrm>
-            <a:off x="2851785" y="2372415"/>
-            <a:ext cx="455930" cy="307777"/>
-          </a:xfrm>
-          <a:prstGeom prst="rect">
-            <a:avLst/>
-          </a:prstGeom>
-          <a:noFill/>
-        </p:spPr>
-        <p:txBody>
-          <a:bodyPr wrap="square" rtlCol="0">
-            <a:spAutoFit/>
-          </a:bodyPr>
-          <a:lstStyle/>
-          <a:p>
-            <a:r>
-              <a:rPr lang="en-US" sz="1400" dirty="0" smtClean="0">
-                <a:solidFill>
-                  <a:srgbClr val="00FF00"/>
-                </a:solidFill>
-                <a:latin typeface="Times New Roman" panose="02020603050405020304" pitchFamily="18" charset="0"/>
-                <a:cs typeface="Times New Roman" panose="02020603050405020304" pitchFamily="18" charset="0"/>
-              </a:rPr>
-              <a:t>V</a:t>
-            </a:r>
-            <a:r>
-              <a:rPr lang="en-US" sz="1100" dirty="0">
-                <a:solidFill>
-                  <a:srgbClr val="00FF00"/>
-                </a:solidFill>
-                <a:latin typeface="Times New Roman" panose="02020603050405020304" pitchFamily="18" charset="0"/>
-                <a:cs typeface="Times New Roman" panose="02020603050405020304" pitchFamily="18" charset="0"/>
-              </a:rPr>
-              <a:t>C</a:t>
-            </a:r>
-            <a:endParaRPr lang="sv-SE" sz="1100" dirty="0">
-              <a:solidFill>
-                <a:srgbClr val="00FF00"/>
-              </a:solidFill>
-              <a:latin typeface="Times New Roman" panose="02020603050405020304" pitchFamily="18" charset="0"/>
-              <a:cs typeface="Times New Roman" panose="02020603050405020304" pitchFamily="18" charset="0"/>
-            </a:endParaRPr>
-          </a:p>
-        </p:txBody>
-      </p:sp>
-      <p:sp>
-        <p:nvSpPr>
-          <p:cNvPr id="10" name="TextBox 9"/>
-          <p:cNvSpPr txBox="1"/>
-          <p:nvPr/>
-        </p:nvSpPr>
-        <p:spPr>
-          <a:xfrm>
-            <a:off x="2781300" y="3073458"/>
-            <a:ext cx="586739" cy="307777"/>
-          </a:xfrm>
-          <a:prstGeom prst="rect">
-            <a:avLst/>
-          </a:prstGeom>
-          <a:noFill/>
-        </p:spPr>
-        <p:txBody>
-          <a:bodyPr wrap="square" rtlCol="0">
-            <a:spAutoFit/>
-          </a:bodyPr>
-          <a:lstStyle/>
-          <a:p>
-            <a:r>
-              <a:rPr lang="en-US" sz="1400" dirty="0" smtClean="0">
-                <a:latin typeface="Times New Roman" panose="02020603050405020304" pitchFamily="18" charset="0"/>
-                <a:cs typeface="Times New Roman" panose="02020603050405020304" pitchFamily="18" charset="0"/>
-              </a:rPr>
-              <a:t>V</a:t>
-            </a:r>
-            <a:r>
-              <a:rPr lang="en-US" sz="1100" dirty="0" smtClean="0">
-                <a:latin typeface="Times New Roman" panose="02020603050405020304" pitchFamily="18" charset="0"/>
-                <a:cs typeface="Times New Roman" panose="02020603050405020304" pitchFamily="18" charset="0"/>
-              </a:rPr>
-              <a:t>CM</a:t>
-            </a:r>
-            <a:endParaRPr lang="sv-SE" sz="1100" dirty="0">
-              <a:latin typeface="Times New Roman" panose="02020603050405020304" pitchFamily="18" charset="0"/>
-              <a:cs typeface="Times New Roman" panose="02020603050405020304" pitchFamily="18" charset="0"/>
-            </a:endParaRPr>
-          </a:p>
-        </p:txBody>
-      </p:sp>
-    </p:spTree>
-    <p:extLst>
-      <p:ext uri="{BB962C8B-B14F-4D97-AF65-F5344CB8AC3E}">
-        <p14:creationId xmlns:p14="http://schemas.microsoft.com/office/powerpoint/2010/main" val="3047910387"/>
-      </p:ext>
-    </p:extLst>
-  </p:cSld>
-  <p:clrMapOvr>
-    <a:masterClrMapping/>
-  </p:clrMapOvr>
-</p:sld>
-</file>
-
-<file path=ppt/slides/slide4.xml><?xml version="1.0" encoding="utf-8"?>
+<file path=ppt/slides/slide11.xml><?xml version="1.0" encoding="utf-8"?>
 <p:sld xmlns:a="http://schemas.openxmlformats.org/drawingml/2006/main" xmlns:r="http://schemas.openxmlformats.org/officeDocument/2006/relationships" xmlns:p="http://schemas.openxmlformats.org/presentationml/2006/main">
   <p:cSld>
     <p:spTree>
@@ -4690,8 +6132,8 @@
           </a:prstGeom>
         </p:spPr>
       </p:pic>
-      <mc:AlternateContent xmlns:mc="http://schemas.openxmlformats.org/markup-compatibility/2006">
-        <mc:Choice xmlns:a14="http://schemas.microsoft.com/office/drawing/2010/main" Requires="a14">
+      <mc:AlternateContent xmlns:mc="http://schemas.openxmlformats.org/markup-compatibility/2006" xmlns:a14="http://schemas.microsoft.com/office/drawing/2010/main">
+        <mc:Choice Requires="a14">
           <p:sp>
             <p:nvSpPr>
               <p:cNvPr id="12" name="TextBox 11"/>
@@ -4714,6 +6156,7 @@
               </a:bodyPr>
               <a:lstStyle/>
               <a:p>
+                <a:pPr/>
                 <a14:m>
                   <m:oMathPara xmlns:m="http://schemas.openxmlformats.org/officeDocument/2006/math">
                     <m:oMathParaPr>
@@ -4755,19 +6198,7 @@
                         <a:rPr lang="en-US" i="1" dirty="0" smtClean="0">
                           <a:latin typeface="Cambria Math" panose="02040503050406030204" pitchFamily="18" charset="0"/>
                         </a:rPr>
-                        <m:t>=</m:t>
-                      </m:r>
-                      <m:r>
-                        <a:rPr lang="en-US" i="1" dirty="0" smtClean="0">
-                          <a:latin typeface="Cambria Math" panose="02040503050406030204" pitchFamily="18" charset="0"/>
-                        </a:rPr>
-                        <m:t>0</m:t>
-                      </m:r>
-                      <m:r>
-                        <a:rPr lang="en-US" i="1" dirty="0" smtClean="0">
-                          <a:latin typeface="Cambria Math" panose="02040503050406030204" pitchFamily="18" charset="0"/>
-                        </a:rPr>
-                        <m:t>.</m:t>
+                        <m:t>=0.</m:t>
                       </m:r>
                       <m:r>
                         <a:rPr lang="en-US" b="0" i="1" dirty="0" smtClean="0">
@@ -4783,7 +6214,7 @@
             </p:txBody>
           </p:sp>
         </mc:Choice>
-        <mc:Fallback>
+        <mc:Fallback xmlns="">
           <p:sp>
             <p:nvSpPr>
               <p:cNvPr id="12" name="TextBox 11"/>
@@ -4822,8 +6253,8 @@
           </p:sp>
         </mc:Fallback>
       </mc:AlternateContent>
-      <mc:AlternateContent xmlns:mc="http://schemas.openxmlformats.org/markup-compatibility/2006">
-        <mc:Choice xmlns:a14="http://schemas.microsoft.com/office/drawing/2010/main" Requires="a14">
+      <mc:AlternateContent xmlns:mc="http://schemas.openxmlformats.org/markup-compatibility/2006" xmlns:a14="http://schemas.microsoft.com/office/drawing/2010/main">
+        <mc:Choice Requires="a14">
           <p:sp>
             <p:nvSpPr>
               <p:cNvPr id="13" name="TextBox 12"/>
@@ -4846,6 +6277,7 @@
               </a:bodyPr>
               <a:lstStyle/>
               <a:p>
+                <a:pPr/>
                 <a14:m>
                   <m:oMathPara xmlns:m="http://schemas.openxmlformats.org/officeDocument/2006/math">
                     <m:oMathParaPr>
@@ -4887,19 +6319,7 @@
                         <a:rPr lang="en-US" i="1" dirty="0" smtClean="0">
                           <a:latin typeface="Cambria Math" panose="02040503050406030204" pitchFamily="18" charset="0"/>
                         </a:rPr>
-                        <m:t>=</m:t>
-                      </m:r>
-                      <m:r>
-                        <a:rPr lang="en-US" i="1" dirty="0" smtClean="0">
-                          <a:latin typeface="Cambria Math" panose="02040503050406030204" pitchFamily="18" charset="0"/>
-                        </a:rPr>
-                        <m:t>0</m:t>
-                      </m:r>
-                      <m:r>
-                        <a:rPr lang="en-US" i="1" dirty="0" smtClean="0">
-                          <a:latin typeface="Cambria Math" panose="02040503050406030204" pitchFamily="18" charset="0"/>
-                        </a:rPr>
-                        <m:t>.</m:t>
+                        <m:t>=0.</m:t>
                       </m:r>
                       <m:r>
                         <a:rPr lang="en-US" b="0" i="1" dirty="0" smtClean="0">
@@ -4915,7 +6335,7 @@
             </p:txBody>
           </p:sp>
         </mc:Choice>
-        <mc:Fallback>
+        <mc:Fallback xmlns="">
           <p:sp>
             <p:nvSpPr>
               <p:cNvPr id="13" name="TextBox 12"/>
@@ -4954,8 +6374,8 @@
           </p:sp>
         </mc:Fallback>
       </mc:AlternateContent>
-      <mc:AlternateContent xmlns:mc="http://schemas.openxmlformats.org/markup-compatibility/2006">
-        <mc:Choice xmlns:a14="http://schemas.microsoft.com/office/drawing/2010/main" Requires="a14">
+      <mc:AlternateContent xmlns:mc="http://schemas.openxmlformats.org/markup-compatibility/2006" xmlns:a14="http://schemas.microsoft.com/office/drawing/2010/main">
+        <mc:Choice Requires="a14">
           <p:sp>
             <p:nvSpPr>
               <p:cNvPr id="14" name="TextBox 13"/>
@@ -4978,6 +6398,7 @@
               </a:bodyPr>
               <a:lstStyle/>
               <a:p>
+                <a:pPr/>
                 <a14:m>
                   <m:oMathPara xmlns:m="http://schemas.openxmlformats.org/officeDocument/2006/math">
                     <m:oMathParaPr>
@@ -5019,19 +6440,7 @@
                         <a:rPr lang="en-US" i="1" dirty="0" smtClean="0">
                           <a:latin typeface="Cambria Math" panose="02040503050406030204" pitchFamily="18" charset="0"/>
                         </a:rPr>
-                        <m:t>=</m:t>
-                      </m:r>
-                      <m:r>
-                        <a:rPr lang="en-US" i="1" dirty="0" smtClean="0">
-                          <a:latin typeface="Cambria Math" panose="02040503050406030204" pitchFamily="18" charset="0"/>
-                        </a:rPr>
-                        <m:t>0</m:t>
-                      </m:r>
-                      <m:r>
-                        <a:rPr lang="en-US" i="1" dirty="0" smtClean="0">
-                          <a:latin typeface="Cambria Math" panose="02040503050406030204" pitchFamily="18" charset="0"/>
-                        </a:rPr>
-                        <m:t>.</m:t>
+                        <m:t>=0.</m:t>
                       </m:r>
                       <m:r>
                         <a:rPr lang="en-US" b="0" i="1" dirty="0" smtClean="0">
@@ -5047,7 +6456,7 @@
             </p:txBody>
           </p:sp>
         </mc:Choice>
-        <mc:Fallback>
+        <mc:Fallback xmlns="">
           <p:sp>
             <p:nvSpPr>
               <p:cNvPr id="14" name="TextBox 13"/>
@@ -5086,8 +6495,8 @@
           </p:sp>
         </mc:Fallback>
       </mc:AlternateContent>
-      <mc:AlternateContent xmlns:mc="http://schemas.openxmlformats.org/markup-compatibility/2006">
-        <mc:Choice xmlns:a14="http://schemas.microsoft.com/office/drawing/2010/main" Requires="a14">
+      <mc:AlternateContent xmlns:mc="http://schemas.openxmlformats.org/markup-compatibility/2006" xmlns:a14="http://schemas.microsoft.com/office/drawing/2010/main">
+        <mc:Choice Requires="a14">
           <p:sp>
             <p:nvSpPr>
               <p:cNvPr id="15" name="TextBox 14"/>
@@ -5110,6 +6519,7 @@
               </a:bodyPr>
               <a:lstStyle/>
               <a:p>
+                <a:pPr/>
                 <a14:m>
                   <m:oMathPara xmlns:m="http://schemas.openxmlformats.org/officeDocument/2006/math">
                     <m:oMathParaPr>
@@ -5167,7 +6577,7 @@
             </p:txBody>
           </p:sp>
         </mc:Choice>
-        <mc:Fallback>
+        <mc:Fallback xmlns="">
           <p:sp>
             <p:nvSpPr>
               <p:cNvPr id="15" name="TextBox 14"/>
@@ -5256,6 +6666,5268 @@
     <p:extLst>
       <p:ext uri="{BB962C8B-B14F-4D97-AF65-F5344CB8AC3E}">
         <p14:creationId xmlns:p14="http://schemas.microsoft.com/office/powerpoint/2010/main" val="1358504093"/>
+      </p:ext>
+    </p:extLst>
+  </p:cSld>
+  <p:clrMapOvr>
+    <a:masterClrMapping/>
+  </p:clrMapOvr>
+</p:sld>
+</file>
+
+<file path=ppt/slides/slide2.xml><?xml version="1.0" encoding="utf-8"?>
+<p:sld xmlns:a="http://schemas.openxmlformats.org/drawingml/2006/main" xmlns:r="http://schemas.openxmlformats.org/officeDocument/2006/relationships" xmlns:p="http://schemas.openxmlformats.org/presentationml/2006/main">
+  <p:cSld>
+    <p:spTree>
+      <p:nvGrpSpPr>
+        <p:cNvPr id="1" name=""/>
+        <p:cNvGrpSpPr/>
+        <p:nvPr/>
+      </p:nvGrpSpPr>
+      <p:grpSpPr>
+        <a:xfrm>
+          <a:off x="0" y="0"/>
+          <a:ext cx="0" cy="0"/>
+          <a:chOff x="0" y="0"/>
+          <a:chExt cx="0" cy="0"/>
+        </a:xfrm>
+      </p:grpSpPr>
+      <p:pic>
+        <p:nvPicPr>
+          <p:cNvPr id="6" name="Picture 5"/>
+          <p:cNvPicPr>
+            <a:picLocks noChangeAspect="1"/>
+          </p:cNvPicPr>
+          <p:nvPr/>
+        </p:nvPicPr>
+        <p:blipFill rotWithShape="1">
+          <a:blip r:embed="rId2"/>
+          <a:srcRect l="12286" t="6953" r="8857" b="9619"/>
+          <a:stretch/>
+        </p:blipFill>
+        <p:spPr>
+          <a:xfrm>
+            <a:off x="1432560" y="1059180"/>
+            <a:ext cx="4206240" cy="3337560"/>
+          </a:xfrm>
+          <a:prstGeom prst="rect">
+            <a:avLst/>
+          </a:prstGeom>
+        </p:spPr>
+      </p:pic>
+      <p:sp>
+        <p:nvSpPr>
+          <p:cNvPr id="7" name="TextBox 6"/>
+          <p:cNvSpPr txBox="1"/>
+          <p:nvPr/>
+        </p:nvSpPr>
+        <p:spPr>
+          <a:xfrm>
+            <a:off x="2975611" y="4375151"/>
+            <a:ext cx="2089150" cy="307777"/>
+          </a:xfrm>
+          <a:prstGeom prst="rect">
+            <a:avLst/>
+          </a:prstGeom>
+          <a:noFill/>
+        </p:spPr>
+        <p:txBody>
+          <a:bodyPr wrap="square" rtlCol="0">
+            <a:spAutoFit/>
+          </a:bodyPr>
+          <a:lstStyle/>
+          <a:p>
+            <a:r>
+              <a:rPr lang="en-US" sz="1400" dirty="0" smtClean="0">
+                <a:latin typeface="Times New Roman" panose="02020603050405020304" pitchFamily="18" charset="0"/>
+                <a:cs typeface="Times New Roman" panose="02020603050405020304" pitchFamily="18" charset="0"/>
+              </a:rPr>
+              <a:t>Time: 2ms/div</a:t>
+            </a:r>
+            <a:endParaRPr lang="sv-SE" sz="1400" dirty="0">
+              <a:latin typeface="Times New Roman" panose="02020603050405020304" pitchFamily="18" charset="0"/>
+              <a:cs typeface="Times New Roman" panose="02020603050405020304" pitchFamily="18" charset="0"/>
+            </a:endParaRPr>
+          </a:p>
+        </p:txBody>
+      </p:sp>
+      <p:pic>
+        <p:nvPicPr>
+          <p:cNvPr id="9" name="Picture 8"/>
+          <p:cNvPicPr>
+            <a:picLocks noChangeAspect="1"/>
+          </p:cNvPicPr>
+          <p:nvPr/>
+        </p:nvPicPr>
+        <p:blipFill rotWithShape="1">
+          <a:blip r:embed="rId3"/>
+          <a:srcRect l="12714" t="6572" r="8714" b="9809"/>
+          <a:stretch/>
+        </p:blipFill>
+        <p:spPr>
+          <a:xfrm>
+            <a:off x="6705600" y="1043940"/>
+            <a:ext cx="4191000" cy="3345180"/>
+          </a:xfrm>
+          <a:prstGeom prst="rect">
+            <a:avLst/>
+          </a:prstGeom>
+        </p:spPr>
+      </p:pic>
+      <p:sp>
+        <p:nvSpPr>
+          <p:cNvPr id="10" name="TextBox 9"/>
+          <p:cNvSpPr txBox="1"/>
+          <p:nvPr/>
+        </p:nvSpPr>
+        <p:spPr>
+          <a:xfrm>
+            <a:off x="8362951" y="4324351"/>
+            <a:ext cx="2089150" cy="307777"/>
+          </a:xfrm>
+          <a:prstGeom prst="rect">
+            <a:avLst/>
+          </a:prstGeom>
+          <a:noFill/>
+        </p:spPr>
+        <p:txBody>
+          <a:bodyPr wrap="square" rtlCol="0">
+            <a:spAutoFit/>
+          </a:bodyPr>
+          <a:lstStyle/>
+          <a:p>
+            <a:r>
+              <a:rPr lang="en-US" sz="1400" dirty="0" smtClean="0">
+                <a:latin typeface="Times New Roman" panose="02020603050405020304" pitchFamily="18" charset="0"/>
+                <a:cs typeface="Times New Roman" panose="02020603050405020304" pitchFamily="18" charset="0"/>
+              </a:rPr>
+              <a:t>Time: 2ms/div</a:t>
+            </a:r>
+            <a:endParaRPr lang="sv-SE" sz="1400" dirty="0">
+              <a:latin typeface="Times New Roman" panose="02020603050405020304" pitchFamily="18" charset="0"/>
+              <a:cs typeface="Times New Roman" panose="02020603050405020304" pitchFamily="18" charset="0"/>
+            </a:endParaRPr>
+          </a:p>
+        </p:txBody>
+      </p:sp>
+      <p:sp>
+        <p:nvSpPr>
+          <p:cNvPr id="11" name="TextBox 10"/>
+          <p:cNvSpPr txBox="1"/>
+          <p:nvPr/>
+        </p:nvSpPr>
+        <p:spPr>
+          <a:xfrm rot="16200000">
+            <a:off x="5218116" y="2540050"/>
+            <a:ext cx="2575560" cy="307777"/>
+          </a:xfrm>
+          <a:prstGeom prst="rect">
+            <a:avLst/>
+          </a:prstGeom>
+          <a:noFill/>
+        </p:spPr>
+        <p:txBody>
+          <a:bodyPr wrap="square" rtlCol="0">
+            <a:spAutoFit/>
+          </a:bodyPr>
+          <a:lstStyle/>
+          <a:p>
+            <a:r>
+              <a:rPr lang="en-US" sz="1400" dirty="0" smtClean="0">
+                <a:latin typeface="Times New Roman" panose="02020603050405020304" pitchFamily="18" charset="0"/>
+                <a:cs typeface="Times New Roman" panose="02020603050405020304" pitchFamily="18" charset="0"/>
+              </a:rPr>
+              <a:t>Normalized Voltage: 0.5 </a:t>
+            </a:r>
+            <a:r>
+              <a:rPr lang="en-US" sz="1400" dirty="0" err="1" smtClean="0">
+                <a:latin typeface="Times New Roman" panose="02020603050405020304" pitchFamily="18" charset="0"/>
+                <a:cs typeface="Times New Roman" panose="02020603050405020304" pitchFamily="18" charset="0"/>
+              </a:rPr>
+              <a:t>p.u</a:t>
+            </a:r>
+            <a:r>
+              <a:rPr lang="en-US" sz="1400" dirty="0" smtClean="0">
+                <a:latin typeface="Times New Roman" panose="02020603050405020304" pitchFamily="18" charset="0"/>
+                <a:cs typeface="Times New Roman" panose="02020603050405020304" pitchFamily="18" charset="0"/>
+              </a:rPr>
+              <a:t>./div</a:t>
+            </a:r>
+            <a:endParaRPr lang="sv-SE" sz="1400" dirty="0">
+              <a:latin typeface="Times New Roman" panose="02020603050405020304" pitchFamily="18" charset="0"/>
+              <a:cs typeface="Times New Roman" panose="02020603050405020304" pitchFamily="18" charset="0"/>
+            </a:endParaRPr>
+          </a:p>
+        </p:txBody>
+      </p:sp>
+      <p:sp>
+        <p:nvSpPr>
+          <p:cNvPr id="12" name="TextBox 11"/>
+          <p:cNvSpPr txBox="1"/>
+          <p:nvPr/>
+        </p:nvSpPr>
+        <p:spPr>
+          <a:xfrm rot="16200000">
+            <a:off x="-47304" y="2540050"/>
+            <a:ext cx="2575560" cy="307777"/>
+          </a:xfrm>
+          <a:prstGeom prst="rect">
+            <a:avLst/>
+          </a:prstGeom>
+          <a:noFill/>
+        </p:spPr>
+        <p:txBody>
+          <a:bodyPr wrap="square" rtlCol="0">
+            <a:spAutoFit/>
+          </a:bodyPr>
+          <a:lstStyle/>
+          <a:p>
+            <a:r>
+              <a:rPr lang="en-US" sz="1400" dirty="0" smtClean="0">
+                <a:latin typeface="Times New Roman" panose="02020603050405020304" pitchFamily="18" charset="0"/>
+                <a:cs typeface="Times New Roman" panose="02020603050405020304" pitchFamily="18" charset="0"/>
+              </a:rPr>
+              <a:t>Normalized Voltage: 0.5 </a:t>
+            </a:r>
+            <a:r>
+              <a:rPr lang="en-US" sz="1400" dirty="0" err="1" smtClean="0">
+                <a:latin typeface="Times New Roman" panose="02020603050405020304" pitchFamily="18" charset="0"/>
+                <a:cs typeface="Times New Roman" panose="02020603050405020304" pitchFamily="18" charset="0"/>
+              </a:rPr>
+              <a:t>p.u</a:t>
+            </a:r>
+            <a:r>
+              <a:rPr lang="en-US" sz="1400" dirty="0" smtClean="0">
+                <a:latin typeface="Times New Roman" panose="02020603050405020304" pitchFamily="18" charset="0"/>
+                <a:cs typeface="Times New Roman" panose="02020603050405020304" pitchFamily="18" charset="0"/>
+              </a:rPr>
+              <a:t>./div</a:t>
+            </a:r>
+            <a:endParaRPr lang="sv-SE" sz="1400" dirty="0">
+              <a:latin typeface="Times New Roman" panose="02020603050405020304" pitchFamily="18" charset="0"/>
+              <a:cs typeface="Times New Roman" panose="02020603050405020304" pitchFamily="18" charset="0"/>
+            </a:endParaRPr>
+          </a:p>
+        </p:txBody>
+      </p:sp>
+      <p:sp>
+        <p:nvSpPr>
+          <p:cNvPr id="13" name="TextBox 12"/>
+          <p:cNvSpPr txBox="1"/>
+          <p:nvPr/>
+        </p:nvSpPr>
+        <p:spPr>
+          <a:xfrm>
+            <a:off x="3319779" y="1953312"/>
+            <a:ext cx="455930" cy="307777"/>
+          </a:xfrm>
+          <a:prstGeom prst="rect">
+            <a:avLst/>
+          </a:prstGeom>
+          <a:noFill/>
+        </p:spPr>
+        <p:txBody>
+          <a:bodyPr wrap="square" rtlCol="0">
+            <a:spAutoFit/>
+          </a:bodyPr>
+          <a:lstStyle/>
+          <a:p>
+            <a:r>
+              <a:rPr lang="en-US" sz="1400" dirty="0" smtClean="0">
+                <a:solidFill>
+                  <a:srgbClr val="FF00FF"/>
+                </a:solidFill>
+                <a:latin typeface="Times New Roman" panose="02020603050405020304" pitchFamily="18" charset="0"/>
+                <a:cs typeface="Times New Roman" panose="02020603050405020304" pitchFamily="18" charset="0"/>
+              </a:rPr>
+              <a:t>V</a:t>
+            </a:r>
+            <a:r>
+              <a:rPr lang="en-US" sz="1100" dirty="0" smtClean="0">
+                <a:solidFill>
+                  <a:srgbClr val="FF00FF"/>
+                </a:solidFill>
+                <a:latin typeface="Times New Roman" panose="02020603050405020304" pitchFamily="18" charset="0"/>
+                <a:cs typeface="Times New Roman" panose="02020603050405020304" pitchFamily="18" charset="0"/>
+              </a:rPr>
+              <a:t>B</a:t>
+            </a:r>
+            <a:endParaRPr lang="sv-SE" sz="1100" dirty="0">
+              <a:solidFill>
+                <a:srgbClr val="FF00FF"/>
+              </a:solidFill>
+              <a:latin typeface="Times New Roman" panose="02020603050405020304" pitchFamily="18" charset="0"/>
+              <a:cs typeface="Times New Roman" panose="02020603050405020304" pitchFamily="18" charset="0"/>
+            </a:endParaRPr>
+          </a:p>
+        </p:txBody>
+      </p:sp>
+      <p:sp>
+        <p:nvSpPr>
+          <p:cNvPr id="14" name="TextBox 13"/>
+          <p:cNvSpPr txBox="1"/>
+          <p:nvPr/>
+        </p:nvSpPr>
+        <p:spPr>
+          <a:xfrm>
+            <a:off x="3319779" y="1252269"/>
+            <a:ext cx="455930" cy="307777"/>
+          </a:xfrm>
+          <a:prstGeom prst="rect">
+            <a:avLst/>
+          </a:prstGeom>
+          <a:noFill/>
+        </p:spPr>
+        <p:txBody>
+          <a:bodyPr wrap="square" rtlCol="0">
+            <a:spAutoFit/>
+          </a:bodyPr>
+          <a:lstStyle/>
+          <a:p>
+            <a:r>
+              <a:rPr lang="en-US" sz="1400" dirty="0" smtClean="0">
+                <a:solidFill>
+                  <a:srgbClr val="002060"/>
+                </a:solidFill>
+                <a:latin typeface="Times New Roman" panose="02020603050405020304" pitchFamily="18" charset="0"/>
+                <a:cs typeface="Times New Roman" panose="02020603050405020304" pitchFamily="18" charset="0"/>
+              </a:rPr>
+              <a:t>V</a:t>
+            </a:r>
+            <a:r>
+              <a:rPr lang="en-US" sz="1100" dirty="0" smtClean="0">
+                <a:solidFill>
+                  <a:srgbClr val="002060"/>
+                </a:solidFill>
+                <a:latin typeface="Times New Roman" panose="02020603050405020304" pitchFamily="18" charset="0"/>
+                <a:cs typeface="Times New Roman" panose="02020603050405020304" pitchFamily="18" charset="0"/>
+              </a:rPr>
+              <a:t>A</a:t>
+            </a:r>
+            <a:endParaRPr lang="sv-SE" sz="1100" dirty="0">
+              <a:solidFill>
+                <a:srgbClr val="002060"/>
+              </a:solidFill>
+              <a:latin typeface="Times New Roman" panose="02020603050405020304" pitchFamily="18" charset="0"/>
+              <a:cs typeface="Times New Roman" panose="02020603050405020304" pitchFamily="18" charset="0"/>
+            </a:endParaRPr>
+          </a:p>
+        </p:txBody>
+      </p:sp>
+      <p:sp>
+        <p:nvSpPr>
+          <p:cNvPr id="15" name="TextBox 14"/>
+          <p:cNvSpPr txBox="1"/>
+          <p:nvPr/>
+        </p:nvSpPr>
+        <p:spPr>
+          <a:xfrm>
+            <a:off x="3319779" y="2654355"/>
+            <a:ext cx="455930" cy="307777"/>
+          </a:xfrm>
+          <a:prstGeom prst="rect">
+            <a:avLst/>
+          </a:prstGeom>
+          <a:noFill/>
+        </p:spPr>
+        <p:txBody>
+          <a:bodyPr wrap="square" rtlCol="0">
+            <a:spAutoFit/>
+          </a:bodyPr>
+          <a:lstStyle/>
+          <a:p>
+            <a:r>
+              <a:rPr lang="en-US" sz="1400" dirty="0" smtClean="0">
+                <a:solidFill>
+                  <a:srgbClr val="00FF00"/>
+                </a:solidFill>
+                <a:latin typeface="Times New Roman" panose="02020603050405020304" pitchFamily="18" charset="0"/>
+                <a:cs typeface="Times New Roman" panose="02020603050405020304" pitchFamily="18" charset="0"/>
+              </a:rPr>
+              <a:t>V</a:t>
+            </a:r>
+            <a:r>
+              <a:rPr lang="en-US" sz="1100" dirty="0">
+                <a:solidFill>
+                  <a:srgbClr val="00FF00"/>
+                </a:solidFill>
+                <a:latin typeface="Times New Roman" panose="02020603050405020304" pitchFamily="18" charset="0"/>
+                <a:cs typeface="Times New Roman" panose="02020603050405020304" pitchFamily="18" charset="0"/>
+              </a:rPr>
+              <a:t>C</a:t>
+            </a:r>
+            <a:endParaRPr lang="sv-SE" sz="1100" dirty="0">
+              <a:solidFill>
+                <a:srgbClr val="00FF00"/>
+              </a:solidFill>
+              <a:latin typeface="Times New Roman" panose="02020603050405020304" pitchFamily="18" charset="0"/>
+              <a:cs typeface="Times New Roman" panose="02020603050405020304" pitchFamily="18" charset="0"/>
+            </a:endParaRPr>
+          </a:p>
+        </p:txBody>
+      </p:sp>
+      <p:sp>
+        <p:nvSpPr>
+          <p:cNvPr id="16" name="TextBox 15"/>
+          <p:cNvSpPr txBox="1"/>
+          <p:nvPr/>
+        </p:nvSpPr>
+        <p:spPr>
+          <a:xfrm>
+            <a:off x="3249294" y="3355398"/>
+            <a:ext cx="586739" cy="307777"/>
+          </a:xfrm>
+          <a:prstGeom prst="rect">
+            <a:avLst/>
+          </a:prstGeom>
+          <a:noFill/>
+        </p:spPr>
+        <p:txBody>
+          <a:bodyPr wrap="square" rtlCol="0">
+            <a:spAutoFit/>
+          </a:bodyPr>
+          <a:lstStyle/>
+          <a:p>
+            <a:r>
+              <a:rPr lang="en-US" sz="1400" dirty="0" smtClean="0">
+                <a:latin typeface="Times New Roman" panose="02020603050405020304" pitchFamily="18" charset="0"/>
+                <a:cs typeface="Times New Roman" panose="02020603050405020304" pitchFamily="18" charset="0"/>
+              </a:rPr>
+              <a:t>V</a:t>
+            </a:r>
+            <a:r>
+              <a:rPr lang="en-US" sz="1100" dirty="0" smtClean="0">
+                <a:latin typeface="Times New Roman" panose="02020603050405020304" pitchFamily="18" charset="0"/>
+                <a:cs typeface="Times New Roman" panose="02020603050405020304" pitchFamily="18" charset="0"/>
+              </a:rPr>
+              <a:t>CM</a:t>
+            </a:r>
+            <a:endParaRPr lang="sv-SE" sz="1100" dirty="0">
+              <a:latin typeface="Times New Roman" panose="02020603050405020304" pitchFamily="18" charset="0"/>
+              <a:cs typeface="Times New Roman" panose="02020603050405020304" pitchFamily="18" charset="0"/>
+            </a:endParaRPr>
+          </a:p>
+        </p:txBody>
+      </p:sp>
+      <p:sp>
+        <p:nvSpPr>
+          <p:cNvPr id="17" name="TextBox 16"/>
+          <p:cNvSpPr txBox="1"/>
+          <p:nvPr/>
+        </p:nvSpPr>
+        <p:spPr>
+          <a:xfrm>
+            <a:off x="8623207" y="1953312"/>
+            <a:ext cx="455930" cy="307777"/>
+          </a:xfrm>
+          <a:prstGeom prst="rect">
+            <a:avLst/>
+          </a:prstGeom>
+          <a:noFill/>
+        </p:spPr>
+        <p:txBody>
+          <a:bodyPr wrap="square" rtlCol="0">
+            <a:spAutoFit/>
+          </a:bodyPr>
+          <a:lstStyle/>
+          <a:p>
+            <a:r>
+              <a:rPr lang="en-US" sz="1400" dirty="0" smtClean="0">
+                <a:solidFill>
+                  <a:srgbClr val="FF00FF"/>
+                </a:solidFill>
+                <a:latin typeface="Times New Roman" panose="02020603050405020304" pitchFamily="18" charset="0"/>
+                <a:cs typeface="Times New Roman" panose="02020603050405020304" pitchFamily="18" charset="0"/>
+              </a:rPr>
+              <a:t>V</a:t>
+            </a:r>
+            <a:r>
+              <a:rPr lang="en-US" sz="1100" dirty="0" smtClean="0">
+                <a:solidFill>
+                  <a:srgbClr val="FF00FF"/>
+                </a:solidFill>
+                <a:latin typeface="Times New Roman" panose="02020603050405020304" pitchFamily="18" charset="0"/>
+                <a:cs typeface="Times New Roman" panose="02020603050405020304" pitchFamily="18" charset="0"/>
+              </a:rPr>
+              <a:t>B</a:t>
+            </a:r>
+            <a:endParaRPr lang="sv-SE" sz="1100" dirty="0">
+              <a:solidFill>
+                <a:srgbClr val="FF00FF"/>
+              </a:solidFill>
+              <a:latin typeface="Times New Roman" panose="02020603050405020304" pitchFamily="18" charset="0"/>
+              <a:cs typeface="Times New Roman" panose="02020603050405020304" pitchFamily="18" charset="0"/>
+            </a:endParaRPr>
+          </a:p>
+        </p:txBody>
+      </p:sp>
+      <p:sp>
+        <p:nvSpPr>
+          <p:cNvPr id="18" name="TextBox 17"/>
+          <p:cNvSpPr txBox="1"/>
+          <p:nvPr/>
+        </p:nvSpPr>
+        <p:spPr>
+          <a:xfrm>
+            <a:off x="8623207" y="1252269"/>
+            <a:ext cx="455930" cy="307777"/>
+          </a:xfrm>
+          <a:prstGeom prst="rect">
+            <a:avLst/>
+          </a:prstGeom>
+          <a:noFill/>
+        </p:spPr>
+        <p:txBody>
+          <a:bodyPr wrap="square" rtlCol="0">
+            <a:spAutoFit/>
+          </a:bodyPr>
+          <a:lstStyle/>
+          <a:p>
+            <a:r>
+              <a:rPr lang="en-US" sz="1400" dirty="0" smtClean="0">
+                <a:solidFill>
+                  <a:srgbClr val="002060"/>
+                </a:solidFill>
+                <a:latin typeface="Times New Roman" panose="02020603050405020304" pitchFamily="18" charset="0"/>
+                <a:cs typeface="Times New Roman" panose="02020603050405020304" pitchFamily="18" charset="0"/>
+              </a:rPr>
+              <a:t>V</a:t>
+            </a:r>
+            <a:r>
+              <a:rPr lang="en-US" sz="1100" dirty="0" smtClean="0">
+                <a:solidFill>
+                  <a:srgbClr val="002060"/>
+                </a:solidFill>
+                <a:latin typeface="Times New Roman" panose="02020603050405020304" pitchFamily="18" charset="0"/>
+                <a:cs typeface="Times New Roman" panose="02020603050405020304" pitchFamily="18" charset="0"/>
+              </a:rPr>
+              <a:t>A</a:t>
+            </a:r>
+            <a:endParaRPr lang="sv-SE" sz="1100" dirty="0">
+              <a:solidFill>
+                <a:srgbClr val="002060"/>
+              </a:solidFill>
+              <a:latin typeface="Times New Roman" panose="02020603050405020304" pitchFamily="18" charset="0"/>
+              <a:cs typeface="Times New Roman" panose="02020603050405020304" pitchFamily="18" charset="0"/>
+            </a:endParaRPr>
+          </a:p>
+        </p:txBody>
+      </p:sp>
+      <p:sp>
+        <p:nvSpPr>
+          <p:cNvPr id="19" name="TextBox 18"/>
+          <p:cNvSpPr txBox="1"/>
+          <p:nvPr/>
+        </p:nvSpPr>
+        <p:spPr>
+          <a:xfrm>
+            <a:off x="8623207" y="2654355"/>
+            <a:ext cx="455930" cy="307777"/>
+          </a:xfrm>
+          <a:prstGeom prst="rect">
+            <a:avLst/>
+          </a:prstGeom>
+          <a:noFill/>
+        </p:spPr>
+        <p:txBody>
+          <a:bodyPr wrap="square" rtlCol="0">
+            <a:spAutoFit/>
+          </a:bodyPr>
+          <a:lstStyle/>
+          <a:p>
+            <a:r>
+              <a:rPr lang="en-US" sz="1400" dirty="0" smtClean="0">
+                <a:solidFill>
+                  <a:srgbClr val="00FF00"/>
+                </a:solidFill>
+                <a:latin typeface="Times New Roman" panose="02020603050405020304" pitchFamily="18" charset="0"/>
+                <a:cs typeface="Times New Roman" panose="02020603050405020304" pitchFamily="18" charset="0"/>
+              </a:rPr>
+              <a:t>V</a:t>
+            </a:r>
+            <a:r>
+              <a:rPr lang="en-US" sz="1100" dirty="0">
+                <a:solidFill>
+                  <a:srgbClr val="00FF00"/>
+                </a:solidFill>
+                <a:latin typeface="Times New Roman" panose="02020603050405020304" pitchFamily="18" charset="0"/>
+                <a:cs typeface="Times New Roman" panose="02020603050405020304" pitchFamily="18" charset="0"/>
+              </a:rPr>
+              <a:t>C</a:t>
+            </a:r>
+            <a:endParaRPr lang="sv-SE" sz="1100" dirty="0">
+              <a:solidFill>
+                <a:srgbClr val="00FF00"/>
+              </a:solidFill>
+              <a:latin typeface="Times New Roman" panose="02020603050405020304" pitchFamily="18" charset="0"/>
+              <a:cs typeface="Times New Roman" panose="02020603050405020304" pitchFamily="18" charset="0"/>
+            </a:endParaRPr>
+          </a:p>
+        </p:txBody>
+      </p:sp>
+      <p:sp>
+        <p:nvSpPr>
+          <p:cNvPr id="20" name="TextBox 19"/>
+          <p:cNvSpPr txBox="1"/>
+          <p:nvPr/>
+        </p:nvSpPr>
+        <p:spPr>
+          <a:xfrm>
+            <a:off x="8552722" y="3355398"/>
+            <a:ext cx="586739" cy="307777"/>
+          </a:xfrm>
+          <a:prstGeom prst="rect">
+            <a:avLst/>
+          </a:prstGeom>
+          <a:noFill/>
+        </p:spPr>
+        <p:txBody>
+          <a:bodyPr wrap="square" rtlCol="0">
+            <a:spAutoFit/>
+          </a:bodyPr>
+          <a:lstStyle/>
+          <a:p>
+            <a:r>
+              <a:rPr lang="en-US" sz="1400" dirty="0" smtClean="0">
+                <a:latin typeface="Times New Roman" panose="02020603050405020304" pitchFamily="18" charset="0"/>
+                <a:cs typeface="Times New Roman" panose="02020603050405020304" pitchFamily="18" charset="0"/>
+              </a:rPr>
+              <a:t>V</a:t>
+            </a:r>
+            <a:r>
+              <a:rPr lang="en-US" sz="1100" dirty="0" smtClean="0">
+                <a:latin typeface="Times New Roman" panose="02020603050405020304" pitchFamily="18" charset="0"/>
+                <a:cs typeface="Times New Roman" panose="02020603050405020304" pitchFamily="18" charset="0"/>
+              </a:rPr>
+              <a:t>CM</a:t>
+            </a:r>
+            <a:endParaRPr lang="sv-SE" sz="1100" dirty="0">
+              <a:latin typeface="Times New Roman" panose="02020603050405020304" pitchFamily="18" charset="0"/>
+              <a:cs typeface="Times New Roman" panose="02020603050405020304" pitchFamily="18" charset="0"/>
+            </a:endParaRPr>
+          </a:p>
+        </p:txBody>
+      </p:sp>
+    </p:spTree>
+    <p:extLst>
+      <p:ext uri="{BB962C8B-B14F-4D97-AF65-F5344CB8AC3E}">
+        <p14:creationId xmlns:p14="http://schemas.microsoft.com/office/powerpoint/2010/main" val="3823764463"/>
+      </p:ext>
+    </p:extLst>
+  </p:cSld>
+  <p:clrMapOvr>
+    <a:masterClrMapping/>
+  </p:clrMapOvr>
+</p:sld>
+</file>
+
+<file path=ppt/slides/slide3.xml><?xml version="1.0" encoding="utf-8"?>
+<p:sld xmlns:a="http://schemas.openxmlformats.org/drawingml/2006/main" xmlns:r="http://schemas.openxmlformats.org/officeDocument/2006/relationships" xmlns:p="http://schemas.openxmlformats.org/presentationml/2006/main">
+  <p:cSld>
+    <p:spTree>
+      <p:nvGrpSpPr>
+        <p:cNvPr id="1" name=""/>
+        <p:cNvGrpSpPr/>
+        <p:nvPr/>
+      </p:nvGrpSpPr>
+      <p:grpSpPr>
+        <a:xfrm>
+          <a:off x="0" y="0"/>
+          <a:ext cx="0" cy="0"/>
+          <a:chOff x="0" y="0"/>
+          <a:chExt cx="0" cy="0"/>
+        </a:xfrm>
+      </p:grpSpPr>
+      <p:sp>
+        <p:nvSpPr>
+          <p:cNvPr id="4" name="TextBox 3"/>
+          <p:cNvSpPr txBox="1"/>
+          <p:nvPr/>
+        </p:nvSpPr>
+        <p:spPr>
+          <a:xfrm>
+            <a:off x="2686050" y="4032250"/>
+            <a:ext cx="2089150" cy="307777"/>
+          </a:xfrm>
+          <a:prstGeom prst="rect">
+            <a:avLst/>
+          </a:prstGeom>
+          <a:noFill/>
+        </p:spPr>
+        <p:txBody>
+          <a:bodyPr wrap="square" rtlCol="0">
+            <a:spAutoFit/>
+          </a:bodyPr>
+          <a:lstStyle/>
+          <a:p>
+            <a:r>
+              <a:rPr lang="en-US" sz="1400" dirty="0" smtClean="0">
+                <a:latin typeface="Times New Roman" panose="02020603050405020304" pitchFamily="18" charset="0"/>
+                <a:cs typeface="Times New Roman" panose="02020603050405020304" pitchFamily="18" charset="0"/>
+              </a:rPr>
+              <a:t>Time: 2ms/div</a:t>
+            </a:r>
+            <a:endParaRPr lang="sv-SE" sz="1400" dirty="0">
+              <a:latin typeface="Times New Roman" panose="02020603050405020304" pitchFamily="18" charset="0"/>
+              <a:cs typeface="Times New Roman" panose="02020603050405020304" pitchFamily="18" charset="0"/>
+            </a:endParaRPr>
+          </a:p>
+        </p:txBody>
+      </p:sp>
+      <p:pic>
+        <p:nvPicPr>
+          <p:cNvPr id="5" name="Picture 4"/>
+          <p:cNvPicPr>
+            <a:picLocks noChangeAspect="1"/>
+          </p:cNvPicPr>
+          <p:nvPr/>
+        </p:nvPicPr>
+        <p:blipFill rotWithShape="1">
+          <a:blip r:embed="rId2"/>
+          <a:srcRect l="11976" t="6254" r="8309" b="9936"/>
+          <a:stretch/>
+        </p:blipFill>
+        <p:spPr>
+          <a:xfrm>
+            <a:off x="1051560" y="739140"/>
+            <a:ext cx="4251960" cy="3352800"/>
+          </a:xfrm>
+          <a:prstGeom prst="rect">
+            <a:avLst/>
+          </a:prstGeom>
+        </p:spPr>
+      </p:pic>
+      <p:sp>
+        <p:nvSpPr>
+          <p:cNvPr id="6" name="TextBox 5"/>
+          <p:cNvSpPr txBox="1"/>
+          <p:nvPr/>
+        </p:nvSpPr>
+        <p:spPr>
+          <a:xfrm rot="16200000">
+            <a:off x="-390203" y="2258110"/>
+            <a:ext cx="2575560" cy="307777"/>
+          </a:xfrm>
+          <a:prstGeom prst="rect">
+            <a:avLst/>
+          </a:prstGeom>
+          <a:noFill/>
+        </p:spPr>
+        <p:txBody>
+          <a:bodyPr wrap="square" rtlCol="0">
+            <a:spAutoFit/>
+          </a:bodyPr>
+          <a:lstStyle/>
+          <a:p>
+            <a:r>
+              <a:rPr lang="en-US" sz="1400" dirty="0" smtClean="0">
+                <a:latin typeface="Times New Roman" panose="02020603050405020304" pitchFamily="18" charset="0"/>
+                <a:cs typeface="Times New Roman" panose="02020603050405020304" pitchFamily="18" charset="0"/>
+              </a:rPr>
+              <a:t>Normalized Voltage: 0.5 </a:t>
+            </a:r>
+            <a:r>
+              <a:rPr lang="en-US" sz="1400" dirty="0" err="1" smtClean="0">
+                <a:latin typeface="Times New Roman" panose="02020603050405020304" pitchFamily="18" charset="0"/>
+                <a:cs typeface="Times New Roman" panose="02020603050405020304" pitchFamily="18" charset="0"/>
+              </a:rPr>
+              <a:t>p.u</a:t>
+            </a:r>
+            <a:r>
+              <a:rPr lang="en-US" sz="1400" dirty="0" smtClean="0">
+                <a:latin typeface="Times New Roman" panose="02020603050405020304" pitchFamily="18" charset="0"/>
+                <a:cs typeface="Times New Roman" panose="02020603050405020304" pitchFamily="18" charset="0"/>
+              </a:rPr>
+              <a:t>./div</a:t>
+            </a:r>
+            <a:endParaRPr lang="sv-SE" sz="1400" dirty="0">
+              <a:latin typeface="Times New Roman" panose="02020603050405020304" pitchFamily="18" charset="0"/>
+              <a:cs typeface="Times New Roman" panose="02020603050405020304" pitchFamily="18" charset="0"/>
+            </a:endParaRPr>
+          </a:p>
+        </p:txBody>
+      </p:sp>
+      <p:sp>
+        <p:nvSpPr>
+          <p:cNvPr id="7" name="TextBox 6"/>
+          <p:cNvSpPr txBox="1"/>
+          <p:nvPr/>
+        </p:nvSpPr>
+        <p:spPr>
+          <a:xfrm>
+            <a:off x="2851785" y="1671372"/>
+            <a:ext cx="455930" cy="307777"/>
+          </a:xfrm>
+          <a:prstGeom prst="rect">
+            <a:avLst/>
+          </a:prstGeom>
+          <a:noFill/>
+        </p:spPr>
+        <p:txBody>
+          <a:bodyPr wrap="square" rtlCol="0">
+            <a:spAutoFit/>
+          </a:bodyPr>
+          <a:lstStyle/>
+          <a:p>
+            <a:r>
+              <a:rPr lang="en-US" sz="1400" dirty="0" smtClean="0">
+                <a:solidFill>
+                  <a:srgbClr val="FF00FF"/>
+                </a:solidFill>
+                <a:latin typeface="Times New Roman" panose="02020603050405020304" pitchFamily="18" charset="0"/>
+                <a:cs typeface="Times New Roman" panose="02020603050405020304" pitchFamily="18" charset="0"/>
+              </a:rPr>
+              <a:t>V</a:t>
+            </a:r>
+            <a:r>
+              <a:rPr lang="en-US" sz="1100" dirty="0" smtClean="0">
+                <a:solidFill>
+                  <a:srgbClr val="FF00FF"/>
+                </a:solidFill>
+                <a:latin typeface="Times New Roman" panose="02020603050405020304" pitchFamily="18" charset="0"/>
+                <a:cs typeface="Times New Roman" panose="02020603050405020304" pitchFamily="18" charset="0"/>
+              </a:rPr>
+              <a:t>B</a:t>
+            </a:r>
+            <a:endParaRPr lang="sv-SE" sz="1100" dirty="0">
+              <a:solidFill>
+                <a:srgbClr val="FF00FF"/>
+              </a:solidFill>
+              <a:latin typeface="Times New Roman" panose="02020603050405020304" pitchFamily="18" charset="0"/>
+              <a:cs typeface="Times New Roman" panose="02020603050405020304" pitchFamily="18" charset="0"/>
+            </a:endParaRPr>
+          </a:p>
+        </p:txBody>
+      </p:sp>
+      <p:sp>
+        <p:nvSpPr>
+          <p:cNvPr id="8" name="TextBox 7"/>
+          <p:cNvSpPr txBox="1"/>
+          <p:nvPr/>
+        </p:nvSpPr>
+        <p:spPr>
+          <a:xfrm>
+            <a:off x="2851785" y="970329"/>
+            <a:ext cx="455930" cy="307777"/>
+          </a:xfrm>
+          <a:prstGeom prst="rect">
+            <a:avLst/>
+          </a:prstGeom>
+          <a:noFill/>
+        </p:spPr>
+        <p:txBody>
+          <a:bodyPr wrap="square" rtlCol="0">
+            <a:spAutoFit/>
+          </a:bodyPr>
+          <a:lstStyle/>
+          <a:p>
+            <a:r>
+              <a:rPr lang="en-US" sz="1400" dirty="0" smtClean="0">
+                <a:solidFill>
+                  <a:srgbClr val="002060"/>
+                </a:solidFill>
+                <a:latin typeface="Times New Roman" panose="02020603050405020304" pitchFamily="18" charset="0"/>
+                <a:cs typeface="Times New Roman" panose="02020603050405020304" pitchFamily="18" charset="0"/>
+              </a:rPr>
+              <a:t>V</a:t>
+            </a:r>
+            <a:r>
+              <a:rPr lang="en-US" sz="1100" dirty="0" smtClean="0">
+                <a:solidFill>
+                  <a:srgbClr val="002060"/>
+                </a:solidFill>
+                <a:latin typeface="Times New Roman" panose="02020603050405020304" pitchFamily="18" charset="0"/>
+                <a:cs typeface="Times New Roman" panose="02020603050405020304" pitchFamily="18" charset="0"/>
+              </a:rPr>
+              <a:t>A</a:t>
+            </a:r>
+            <a:endParaRPr lang="sv-SE" sz="1100" dirty="0">
+              <a:solidFill>
+                <a:srgbClr val="002060"/>
+              </a:solidFill>
+              <a:latin typeface="Times New Roman" panose="02020603050405020304" pitchFamily="18" charset="0"/>
+              <a:cs typeface="Times New Roman" panose="02020603050405020304" pitchFamily="18" charset="0"/>
+            </a:endParaRPr>
+          </a:p>
+        </p:txBody>
+      </p:sp>
+      <p:sp>
+        <p:nvSpPr>
+          <p:cNvPr id="9" name="TextBox 8"/>
+          <p:cNvSpPr txBox="1"/>
+          <p:nvPr/>
+        </p:nvSpPr>
+        <p:spPr>
+          <a:xfrm>
+            <a:off x="2851785" y="2372415"/>
+            <a:ext cx="455930" cy="307777"/>
+          </a:xfrm>
+          <a:prstGeom prst="rect">
+            <a:avLst/>
+          </a:prstGeom>
+          <a:noFill/>
+        </p:spPr>
+        <p:txBody>
+          <a:bodyPr wrap="square" rtlCol="0">
+            <a:spAutoFit/>
+          </a:bodyPr>
+          <a:lstStyle/>
+          <a:p>
+            <a:r>
+              <a:rPr lang="en-US" sz="1400" dirty="0" smtClean="0">
+                <a:solidFill>
+                  <a:srgbClr val="00FF00"/>
+                </a:solidFill>
+                <a:latin typeface="Times New Roman" panose="02020603050405020304" pitchFamily="18" charset="0"/>
+                <a:cs typeface="Times New Roman" panose="02020603050405020304" pitchFamily="18" charset="0"/>
+              </a:rPr>
+              <a:t>V</a:t>
+            </a:r>
+            <a:r>
+              <a:rPr lang="en-US" sz="1100" dirty="0">
+                <a:solidFill>
+                  <a:srgbClr val="00FF00"/>
+                </a:solidFill>
+                <a:latin typeface="Times New Roman" panose="02020603050405020304" pitchFamily="18" charset="0"/>
+                <a:cs typeface="Times New Roman" panose="02020603050405020304" pitchFamily="18" charset="0"/>
+              </a:rPr>
+              <a:t>C</a:t>
+            </a:r>
+            <a:endParaRPr lang="sv-SE" sz="1100" dirty="0">
+              <a:solidFill>
+                <a:srgbClr val="00FF00"/>
+              </a:solidFill>
+              <a:latin typeface="Times New Roman" panose="02020603050405020304" pitchFamily="18" charset="0"/>
+              <a:cs typeface="Times New Roman" panose="02020603050405020304" pitchFamily="18" charset="0"/>
+            </a:endParaRPr>
+          </a:p>
+        </p:txBody>
+      </p:sp>
+      <p:sp>
+        <p:nvSpPr>
+          <p:cNvPr id="10" name="TextBox 9"/>
+          <p:cNvSpPr txBox="1"/>
+          <p:nvPr/>
+        </p:nvSpPr>
+        <p:spPr>
+          <a:xfrm>
+            <a:off x="2781300" y="3073458"/>
+            <a:ext cx="586739" cy="307777"/>
+          </a:xfrm>
+          <a:prstGeom prst="rect">
+            <a:avLst/>
+          </a:prstGeom>
+          <a:noFill/>
+        </p:spPr>
+        <p:txBody>
+          <a:bodyPr wrap="square" rtlCol="0">
+            <a:spAutoFit/>
+          </a:bodyPr>
+          <a:lstStyle/>
+          <a:p>
+            <a:r>
+              <a:rPr lang="en-US" sz="1400" dirty="0" smtClean="0">
+                <a:latin typeface="Times New Roman" panose="02020603050405020304" pitchFamily="18" charset="0"/>
+                <a:cs typeface="Times New Roman" panose="02020603050405020304" pitchFamily="18" charset="0"/>
+              </a:rPr>
+              <a:t>V</a:t>
+            </a:r>
+            <a:r>
+              <a:rPr lang="en-US" sz="1100" dirty="0" smtClean="0">
+                <a:latin typeface="Times New Roman" panose="02020603050405020304" pitchFamily="18" charset="0"/>
+                <a:cs typeface="Times New Roman" panose="02020603050405020304" pitchFamily="18" charset="0"/>
+              </a:rPr>
+              <a:t>CM</a:t>
+            </a:r>
+            <a:endParaRPr lang="sv-SE" sz="1100" dirty="0">
+              <a:latin typeface="Times New Roman" panose="02020603050405020304" pitchFamily="18" charset="0"/>
+              <a:cs typeface="Times New Roman" panose="02020603050405020304" pitchFamily="18" charset="0"/>
+            </a:endParaRPr>
+          </a:p>
+        </p:txBody>
+      </p:sp>
+    </p:spTree>
+    <p:extLst>
+      <p:ext uri="{BB962C8B-B14F-4D97-AF65-F5344CB8AC3E}">
+        <p14:creationId xmlns:p14="http://schemas.microsoft.com/office/powerpoint/2010/main" val="3047910387"/>
+      </p:ext>
+    </p:extLst>
+  </p:cSld>
+  <p:clrMapOvr>
+    <a:masterClrMapping/>
+  </p:clrMapOvr>
+</p:sld>
+</file>
+
+<file path=ppt/slides/slide4.xml><?xml version="1.0" encoding="utf-8"?>
+<p:sld xmlns:a="http://schemas.openxmlformats.org/drawingml/2006/main" xmlns:r="http://schemas.openxmlformats.org/officeDocument/2006/relationships" xmlns:p="http://schemas.openxmlformats.org/presentationml/2006/main">
+  <p:cSld>
+    <p:spTree>
+      <p:nvGrpSpPr>
+        <p:cNvPr id="1" name=""/>
+        <p:cNvGrpSpPr/>
+        <p:nvPr/>
+      </p:nvGrpSpPr>
+      <p:grpSpPr>
+        <a:xfrm>
+          <a:off x="0" y="0"/>
+          <a:ext cx="0" cy="0"/>
+          <a:chOff x="0" y="0"/>
+          <a:chExt cx="0" cy="0"/>
+        </a:xfrm>
+      </p:grpSpPr>
+      <p:pic>
+        <p:nvPicPr>
+          <p:cNvPr id="19" name="Picture 18"/>
+          <p:cNvPicPr>
+            <a:picLocks noChangeAspect="1"/>
+          </p:cNvPicPr>
+          <p:nvPr/>
+        </p:nvPicPr>
+        <p:blipFill>
+          <a:blip r:embed="rId2"/>
+          <a:stretch>
+            <a:fillRect/>
+          </a:stretch>
+        </p:blipFill>
+        <p:spPr>
+          <a:xfrm>
+            <a:off x="508000" y="314127"/>
+            <a:ext cx="5334000" cy="4000500"/>
+          </a:xfrm>
+          <a:prstGeom prst="rect">
+            <a:avLst/>
+          </a:prstGeom>
+        </p:spPr>
+      </p:pic>
+      <p:pic>
+        <p:nvPicPr>
+          <p:cNvPr id="12" name="Picture 11"/>
+          <p:cNvPicPr>
+            <a:picLocks noChangeAspect="1"/>
+          </p:cNvPicPr>
+          <p:nvPr/>
+        </p:nvPicPr>
+        <p:blipFill>
+          <a:blip r:embed="rId3"/>
+          <a:stretch>
+            <a:fillRect/>
+          </a:stretch>
+        </p:blipFill>
+        <p:spPr>
+          <a:xfrm>
+            <a:off x="5495385" y="314127"/>
+            <a:ext cx="5334000" cy="4000500"/>
+          </a:xfrm>
+          <a:prstGeom prst="rect">
+            <a:avLst/>
+          </a:prstGeom>
+        </p:spPr>
+      </p:pic>
+      <p:sp>
+        <p:nvSpPr>
+          <p:cNvPr id="4" name="TextBox 3"/>
+          <p:cNvSpPr txBox="1"/>
+          <p:nvPr/>
+        </p:nvSpPr>
+        <p:spPr>
+          <a:xfrm>
+            <a:off x="2546350" y="3966920"/>
+            <a:ext cx="2089150" cy="307777"/>
+          </a:xfrm>
+          <a:prstGeom prst="rect">
+            <a:avLst/>
+          </a:prstGeom>
+          <a:noFill/>
+        </p:spPr>
+        <p:txBody>
+          <a:bodyPr wrap="square" rtlCol="0">
+            <a:spAutoFit/>
+          </a:bodyPr>
+          <a:lstStyle/>
+          <a:p>
+            <a:r>
+              <a:rPr lang="en-US" sz="1400" dirty="0" smtClean="0">
+                <a:latin typeface="Times New Roman" panose="02020603050405020304" pitchFamily="18" charset="0"/>
+                <a:cs typeface="Times New Roman" panose="02020603050405020304" pitchFamily="18" charset="0"/>
+              </a:rPr>
+              <a:t>Time: 2ms/div</a:t>
+            </a:r>
+            <a:endParaRPr lang="sv-SE" sz="1400" dirty="0">
+              <a:latin typeface="Times New Roman" panose="02020603050405020304" pitchFamily="18" charset="0"/>
+              <a:cs typeface="Times New Roman" panose="02020603050405020304" pitchFamily="18" charset="0"/>
+            </a:endParaRPr>
+          </a:p>
+        </p:txBody>
+      </p:sp>
+      <p:sp>
+        <p:nvSpPr>
+          <p:cNvPr id="6" name="TextBox 5"/>
+          <p:cNvSpPr txBox="1"/>
+          <p:nvPr/>
+        </p:nvSpPr>
+        <p:spPr>
+          <a:xfrm rot="16200000">
+            <a:off x="-488223" y="2078750"/>
+            <a:ext cx="2817129" cy="307777"/>
+          </a:xfrm>
+          <a:prstGeom prst="rect">
+            <a:avLst/>
+          </a:prstGeom>
+          <a:noFill/>
+        </p:spPr>
+        <p:txBody>
+          <a:bodyPr wrap="square" rtlCol="0">
+            <a:spAutoFit/>
+          </a:bodyPr>
+          <a:lstStyle/>
+          <a:p>
+            <a:r>
+              <a:rPr lang="en-US" sz="1400" dirty="0" smtClean="0">
+                <a:latin typeface="Times New Roman" panose="02020603050405020304" pitchFamily="18" charset="0"/>
+                <a:cs typeface="Times New Roman" panose="02020603050405020304" pitchFamily="18" charset="0"/>
+              </a:rPr>
+              <a:t>Normalized Voltage: </a:t>
+            </a:r>
+            <a:r>
+              <a:rPr lang="en-US" sz="1400" dirty="0" smtClean="0">
+                <a:latin typeface="Times New Roman" panose="02020603050405020304" pitchFamily="18" charset="0"/>
+                <a:cs typeface="Times New Roman" panose="02020603050405020304" pitchFamily="18" charset="0"/>
+              </a:rPr>
+              <a:t>0.16 </a:t>
+            </a:r>
+            <a:r>
+              <a:rPr lang="en-US" sz="1400" dirty="0" err="1" smtClean="0">
+                <a:latin typeface="Times New Roman" panose="02020603050405020304" pitchFamily="18" charset="0"/>
+                <a:cs typeface="Times New Roman" panose="02020603050405020304" pitchFamily="18" charset="0"/>
+              </a:rPr>
+              <a:t>p.u</a:t>
+            </a:r>
+            <a:r>
+              <a:rPr lang="en-US" sz="1400" dirty="0" smtClean="0">
+                <a:latin typeface="Times New Roman" panose="02020603050405020304" pitchFamily="18" charset="0"/>
+                <a:cs typeface="Times New Roman" panose="02020603050405020304" pitchFamily="18" charset="0"/>
+              </a:rPr>
+              <a:t>./div</a:t>
+            </a:r>
+            <a:endParaRPr lang="sv-SE" sz="1400" dirty="0">
+              <a:latin typeface="Times New Roman" panose="02020603050405020304" pitchFamily="18" charset="0"/>
+              <a:cs typeface="Times New Roman" panose="02020603050405020304" pitchFamily="18" charset="0"/>
+            </a:endParaRPr>
+          </a:p>
+        </p:txBody>
+      </p:sp>
+      <p:pic>
+        <p:nvPicPr>
+          <p:cNvPr id="3" name="Picture 2"/>
+          <p:cNvPicPr>
+            <a:picLocks noChangeAspect="1"/>
+          </p:cNvPicPr>
+          <p:nvPr/>
+        </p:nvPicPr>
+        <p:blipFill rotWithShape="1">
+          <a:blip r:embed="rId4"/>
+          <a:srcRect l="23691" t="8768" r="12500" b="78058"/>
+          <a:stretch/>
+        </p:blipFill>
+        <p:spPr>
+          <a:xfrm>
+            <a:off x="3793585" y="14601"/>
+            <a:ext cx="3403600" cy="527050"/>
+          </a:xfrm>
+          <a:prstGeom prst="rect">
+            <a:avLst/>
+          </a:prstGeom>
+        </p:spPr>
+      </p:pic>
+      <p:sp>
+        <p:nvSpPr>
+          <p:cNvPr id="13" name="TextBox 12"/>
+          <p:cNvSpPr txBox="1"/>
+          <p:nvPr/>
+        </p:nvSpPr>
+        <p:spPr>
+          <a:xfrm rot="16200000">
+            <a:off x="4805130" y="2018142"/>
+            <a:ext cx="1613564" cy="307777"/>
+          </a:xfrm>
+          <a:prstGeom prst="rect">
+            <a:avLst/>
+          </a:prstGeom>
+          <a:noFill/>
+        </p:spPr>
+        <p:txBody>
+          <a:bodyPr wrap="square" rtlCol="0">
+            <a:spAutoFit/>
+          </a:bodyPr>
+          <a:lstStyle/>
+          <a:p>
+            <a:r>
+              <a:rPr lang="en-US" sz="1400" dirty="0" smtClean="0">
+                <a:latin typeface="Times New Roman" panose="02020603050405020304" pitchFamily="18" charset="0"/>
+                <a:cs typeface="Times New Roman" panose="02020603050405020304" pitchFamily="18" charset="0"/>
+              </a:rPr>
+              <a:t>Normalized </a:t>
+            </a:r>
+            <a:r>
+              <a:rPr lang="en-US" sz="1400" dirty="0" smtClean="0">
+                <a:latin typeface="Times New Roman" panose="02020603050405020304" pitchFamily="18" charset="0"/>
+                <a:cs typeface="Times New Roman" panose="02020603050405020304" pitchFamily="18" charset="0"/>
+              </a:rPr>
+              <a:t>Voltage</a:t>
+            </a:r>
+            <a:endParaRPr lang="sv-SE" sz="1400" dirty="0">
+              <a:latin typeface="Times New Roman" panose="02020603050405020304" pitchFamily="18" charset="0"/>
+              <a:cs typeface="Times New Roman" panose="02020603050405020304" pitchFamily="18" charset="0"/>
+            </a:endParaRPr>
+          </a:p>
+        </p:txBody>
+      </p:sp>
+      <p:sp>
+        <p:nvSpPr>
+          <p:cNvPr id="14" name="TextBox 13"/>
+          <p:cNvSpPr txBox="1"/>
+          <p:nvPr/>
+        </p:nvSpPr>
+        <p:spPr>
+          <a:xfrm>
+            <a:off x="5458023" y="3941520"/>
+            <a:ext cx="2089150" cy="307777"/>
+          </a:xfrm>
+          <a:prstGeom prst="rect">
+            <a:avLst/>
+          </a:prstGeom>
+          <a:noFill/>
+        </p:spPr>
+        <p:txBody>
+          <a:bodyPr wrap="square" rtlCol="0">
+            <a:spAutoFit/>
+          </a:bodyPr>
+          <a:lstStyle/>
+          <a:p>
+            <a:r>
+              <a:rPr lang="en-US" sz="1400" dirty="0" smtClean="0">
+                <a:latin typeface="Times New Roman" panose="02020603050405020304" pitchFamily="18" charset="0"/>
+                <a:cs typeface="Times New Roman" panose="02020603050405020304" pitchFamily="18" charset="0"/>
+              </a:rPr>
+              <a:t>Frequency</a:t>
+            </a:r>
+            <a:endParaRPr lang="sv-SE" sz="1400" dirty="0">
+              <a:latin typeface="Times New Roman" panose="02020603050405020304" pitchFamily="18" charset="0"/>
+              <a:cs typeface="Times New Roman" panose="02020603050405020304" pitchFamily="18" charset="0"/>
+            </a:endParaRPr>
+          </a:p>
+        </p:txBody>
+      </p:sp>
+      <p:sp>
+        <p:nvSpPr>
+          <p:cNvPr id="15" name="TextBox 14"/>
+          <p:cNvSpPr txBox="1"/>
+          <p:nvPr/>
+        </p:nvSpPr>
+        <p:spPr>
+          <a:xfrm>
+            <a:off x="7474628" y="-29652"/>
+            <a:ext cx="3110524" cy="307777"/>
+          </a:xfrm>
+          <a:prstGeom prst="rect">
+            <a:avLst/>
+          </a:prstGeom>
+          <a:noFill/>
+        </p:spPr>
+        <p:txBody>
+          <a:bodyPr wrap="square" rtlCol="0">
+            <a:spAutoFit/>
+          </a:bodyPr>
+          <a:lstStyle/>
+          <a:p>
+            <a:r>
+              <a:rPr lang="en-US" sz="1400" dirty="0" smtClean="0">
+                <a:solidFill>
+                  <a:srgbClr val="A71993"/>
+                </a:solidFill>
+                <a:latin typeface="Times New Roman" panose="02020603050405020304" pitchFamily="18" charset="0"/>
+                <a:cs typeface="Times New Roman" panose="02020603050405020304" pitchFamily="18" charset="0"/>
+              </a:rPr>
+              <a:t>WTHD=0.0041</a:t>
+            </a:r>
+            <a:endParaRPr lang="sv-SE" sz="1100" dirty="0">
+              <a:solidFill>
+                <a:srgbClr val="A71993"/>
+              </a:solidFill>
+              <a:latin typeface="Times New Roman" panose="02020603050405020304" pitchFamily="18" charset="0"/>
+              <a:cs typeface="Times New Roman" panose="02020603050405020304" pitchFamily="18" charset="0"/>
+            </a:endParaRPr>
+          </a:p>
+        </p:txBody>
+      </p:sp>
+      <p:sp>
+        <p:nvSpPr>
+          <p:cNvPr id="16" name="TextBox 15"/>
+          <p:cNvSpPr txBox="1"/>
+          <p:nvPr/>
+        </p:nvSpPr>
+        <p:spPr>
+          <a:xfrm>
+            <a:off x="1760387" y="124237"/>
+            <a:ext cx="1922732" cy="307777"/>
+          </a:xfrm>
+          <a:prstGeom prst="rect">
+            <a:avLst/>
+          </a:prstGeom>
+          <a:noFill/>
+        </p:spPr>
+        <p:txBody>
+          <a:bodyPr wrap="square" rtlCol="0">
+            <a:spAutoFit/>
+          </a:bodyPr>
+          <a:lstStyle/>
+          <a:p>
+            <a:r>
+              <a:rPr lang="en-US" sz="1400" dirty="0" smtClean="0">
+                <a:latin typeface="Times New Roman" panose="02020603050405020304" pitchFamily="18" charset="0"/>
+                <a:cs typeface="Times New Roman" panose="02020603050405020304" pitchFamily="18" charset="0"/>
+              </a:rPr>
+              <a:t>Modulation index= 0.6</a:t>
+            </a:r>
+            <a:endParaRPr lang="sv-SE" sz="1100" dirty="0">
+              <a:latin typeface="Times New Roman" panose="02020603050405020304" pitchFamily="18" charset="0"/>
+              <a:cs typeface="Times New Roman" panose="02020603050405020304" pitchFamily="18" charset="0"/>
+            </a:endParaRPr>
+          </a:p>
+        </p:txBody>
+      </p:sp>
+      <p:sp>
+        <p:nvSpPr>
+          <p:cNvPr id="18" name="TextBox 17"/>
+          <p:cNvSpPr txBox="1"/>
+          <p:nvPr/>
+        </p:nvSpPr>
+        <p:spPr>
+          <a:xfrm>
+            <a:off x="7474628" y="278125"/>
+            <a:ext cx="3110524" cy="307777"/>
+          </a:xfrm>
+          <a:prstGeom prst="rect">
+            <a:avLst/>
+          </a:prstGeom>
+          <a:noFill/>
+        </p:spPr>
+        <p:txBody>
+          <a:bodyPr wrap="square" rtlCol="0">
+            <a:spAutoFit/>
+          </a:bodyPr>
+          <a:lstStyle/>
+          <a:p>
+            <a:r>
+              <a:rPr lang="en-US" sz="1400" dirty="0" smtClean="0">
+                <a:solidFill>
+                  <a:srgbClr val="249C8E"/>
+                </a:solidFill>
+                <a:latin typeface="Times New Roman" panose="02020603050405020304" pitchFamily="18" charset="0"/>
+                <a:cs typeface="Times New Roman" panose="02020603050405020304" pitchFamily="18" charset="0"/>
+              </a:rPr>
+              <a:t>WTHD=0.0221</a:t>
+            </a:r>
+            <a:endParaRPr lang="sv-SE" sz="1100" dirty="0">
+              <a:solidFill>
+                <a:srgbClr val="249C8E"/>
+              </a:solidFill>
+              <a:latin typeface="Times New Roman" panose="02020603050405020304" pitchFamily="18" charset="0"/>
+              <a:cs typeface="Times New Roman" panose="02020603050405020304" pitchFamily="18" charset="0"/>
+            </a:endParaRPr>
+          </a:p>
+        </p:txBody>
+      </p:sp>
+      <p:pic>
+        <p:nvPicPr>
+          <p:cNvPr id="20" name="Picture 19"/>
+          <p:cNvPicPr>
+            <a:picLocks noChangeAspect="1"/>
+          </p:cNvPicPr>
+          <p:nvPr/>
+        </p:nvPicPr>
+        <p:blipFill rotWithShape="1">
+          <a:blip r:embed="rId5"/>
+          <a:srcRect l="24694" t="9287" r="11088" b="77653"/>
+          <a:stretch/>
+        </p:blipFill>
+        <p:spPr>
+          <a:xfrm>
+            <a:off x="3658384" y="4979177"/>
+            <a:ext cx="3425371" cy="522464"/>
+          </a:xfrm>
+          <a:prstGeom prst="rect">
+            <a:avLst/>
+          </a:prstGeom>
+        </p:spPr>
+      </p:pic>
+    </p:spTree>
+    <p:extLst>
+      <p:ext uri="{BB962C8B-B14F-4D97-AF65-F5344CB8AC3E}">
+        <p14:creationId xmlns:p14="http://schemas.microsoft.com/office/powerpoint/2010/main" val="3227815554"/>
+      </p:ext>
+    </p:extLst>
+  </p:cSld>
+  <p:clrMapOvr>
+    <a:masterClrMapping/>
+  </p:clrMapOvr>
+</p:sld>
+</file>
+
+<file path=ppt/slides/slide5.xml><?xml version="1.0" encoding="utf-8"?>
+<p:sld xmlns:a="http://schemas.openxmlformats.org/drawingml/2006/main" xmlns:r="http://schemas.openxmlformats.org/officeDocument/2006/relationships" xmlns:p="http://schemas.openxmlformats.org/presentationml/2006/main">
+  <p:cSld>
+    <p:spTree>
+      <p:nvGrpSpPr>
+        <p:cNvPr id="1" name=""/>
+        <p:cNvGrpSpPr/>
+        <p:nvPr/>
+      </p:nvGrpSpPr>
+      <p:grpSpPr>
+        <a:xfrm>
+          <a:off x="0" y="0"/>
+          <a:ext cx="0" cy="0"/>
+          <a:chOff x="0" y="0"/>
+          <a:chExt cx="0" cy="0"/>
+        </a:xfrm>
+      </p:grpSpPr>
+      <p:pic>
+        <p:nvPicPr>
+          <p:cNvPr id="7" name="Picture 6"/>
+          <p:cNvPicPr>
+            <a:picLocks noChangeAspect="1"/>
+          </p:cNvPicPr>
+          <p:nvPr/>
+        </p:nvPicPr>
+        <p:blipFill>
+          <a:blip r:embed="rId2"/>
+          <a:stretch>
+            <a:fillRect/>
+          </a:stretch>
+        </p:blipFill>
+        <p:spPr>
+          <a:xfrm>
+            <a:off x="431801" y="308854"/>
+            <a:ext cx="5334000" cy="4000500"/>
+          </a:xfrm>
+          <a:prstGeom prst="rect">
+            <a:avLst/>
+          </a:prstGeom>
+        </p:spPr>
+      </p:pic>
+      <p:pic>
+        <p:nvPicPr>
+          <p:cNvPr id="8" name="Picture 7"/>
+          <p:cNvPicPr>
+            <a:picLocks noChangeAspect="1"/>
+          </p:cNvPicPr>
+          <p:nvPr/>
+        </p:nvPicPr>
+        <p:blipFill>
+          <a:blip r:embed="rId3"/>
+          <a:stretch>
+            <a:fillRect/>
+          </a:stretch>
+        </p:blipFill>
+        <p:spPr>
+          <a:xfrm>
+            <a:off x="5444587" y="308854"/>
+            <a:ext cx="5334000" cy="4000500"/>
+          </a:xfrm>
+          <a:prstGeom prst="rect">
+            <a:avLst/>
+          </a:prstGeom>
+        </p:spPr>
+      </p:pic>
+      <p:sp>
+        <p:nvSpPr>
+          <p:cNvPr id="4" name="TextBox 3"/>
+          <p:cNvSpPr txBox="1"/>
+          <p:nvPr/>
+        </p:nvSpPr>
+        <p:spPr>
+          <a:xfrm>
+            <a:off x="2385067" y="3940022"/>
+            <a:ext cx="2089150" cy="369332"/>
+          </a:xfrm>
+          <a:prstGeom prst="rect">
+            <a:avLst/>
+          </a:prstGeom>
+          <a:noFill/>
+        </p:spPr>
+        <p:txBody>
+          <a:bodyPr wrap="square" rtlCol="0">
+            <a:spAutoFit/>
+          </a:bodyPr>
+          <a:lstStyle/>
+          <a:p>
+            <a:r>
+              <a:rPr lang="en-US" dirty="0" smtClean="0">
+                <a:latin typeface="Times New Roman" panose="02020603050405020304" pitchFamily="18" charset="0"/>
+                <a:cs typeface="Times New Roman" panose="02020603050405020304" pitchFamily="18" charset="0"/>
+              </a:rPr>
+              <a:t>Time: 2ms/div</a:t>
+            </a:r>
+            <a:endParaRPr lang="sv-SE" dirty="0">
+              <a:latin typeface="Times New Roman" panose="02020603050405020304" pitchFamily="18" charset="0"/>
+              <a:cs typeface="Times New Roman" panose="02020603050405020304" pitchFamily="18" charset="0"/>
+            </a:endParaRPr>
+          </a:p>
+        </p:txBody>
+      </p:sp>
+      <p:sp>
+        <p:nvSpPr>
+          <p:cNvPr id="6" name="TextBox 5"/>
+          <p:cNvSpPr txBox="1"/>
+          <p:nvPr/>
+        </p:nvSpPr>
+        <p:spPr>
+          <a:xfrm rot="16200000">
+            <a:off x="-771108" y="2106093"/>
+            <a:ext cx="3301523" cy="369332"/>
+          </a:xfrm>
+          <a:prstGeom prst="rect">
+            <a:avLst/>
+          </a:prstGeom>
+          <a:noFill/>
+        </p:spPr>
+        <p:txBody>
+          <a:bodyPr wrap="square" rtlCol="0">
+            <a:spAutoFit/>
+          </a:bodyPr>
+          <a:lstStyle/>
+          <a:p>
+            <a:r>
+              <a:rPr lang="en-US" dirty="0" smtClean="0">
+                <a:latin typeface="Times New Roman" panose="02020603050405020304" pitchFamily="18" charset="0"/>
+                <a:cs typeface="Times New Roman" panose="02020603050405020304" pitchFamily="18" charset="0"/>
+              </a:rPr>
+              <a:t>Normalized Voltage: </a:t>
+            </a:r>
+            <a:r>
+              <a:rPr lang="en-US" dirty="0" smtClean="0">
+                <a:latin typeface="Times New Roman" panose="02020603050405020304" pitchFamily="18" charset="0"/>
+                <a:cs typeface="Times New Roman" panose="02020603050405020304" pitchFamily="18" charset="0"/>
+              </a:rPr>
+              <a:t>0.16 </a:t>
+            </a:r>
+            <a:r>
+              <a:rPr lang="en-US" dirty="0" err="1" smtClean="0">
+                <a:latin typeface="Times New Roman" panose="02020603050405020304" pitchFamily="18" charset="0"/>
+                <a:cs typeface="Times New Roman" panose="02020603050405020304" pitchFamily="18" charset="0"/>
+              </a:rPr>
+              <a:t>p.u</a:t>
+            </a:r>
+            <a:r>
+              <a:rPr lang="en-US" dirty="0" smtClean="0">
+                <a:latin typeface="Times New Roman" panose="02020603050405020304" pitchFamily="18" charset="0"/>
+                <a:cs typeface="Times New Roman" panose="02020603050405020304" pitchFamily="18" charset="0"/>
+              </a:rPr>
+              <a:t>./div</a:t>
+            </a:r>
+            <a:endParaRPr lang="sv-SE" dirty="0">
+              <a:latin typeface="Times New Roman" panose="02020603050405020304" pitchFamily="18" charset="0"/>
+              <a:cs typeface="Times New Roman" panose="02020603050405020304" pitchFamily="18" charset="0"/>
+            </a:endParaRPr>
+          </a:p>
+        </p:txBody>
+      </p:sp>
+      <p:pic>
+        <p:nvPicPr>
+          <p:cNvPr id="3" name="Picture 2"/>
+          <p:cNvPicPr>
+            <a:picLocks noChangeAspect="1"/>
+          </p:cNvPicPr>
+          <p:nvPr/>
+        </p:nvPicPr>
+        <p:blipFill rotWithShape="1">
+          <a:blip r:embed="rId4"/>
+          <a:srcRect l="23691" t="8768" r="12500" b="78058"/>
+          <a:stretch/>
+        </p:blipFill>
+        <p:spPr>
+          <a:xfrm>
+            <a:off x="1555802" y="1953270"/>
+            <a:ext cx="3403600" cy="527050"/>
+          </a:xfrm>
+          <a:prstGeom prst="rect">
+            <a:avLst/>
+          </a:prstGeom>
+        </p:spPr>
+      </p:pic>
+      <p:sp>
+        <p:nvSpPr>
+          <p:cNvPr id="13" name="TextBox 12"/>
+          <p:cNvSpPr txBox="1"/>
+          <p:nvPr/>
+        </p:nvSpPr>
+        <p:spPr>
+          <a:xfrm rot="16200000">
+            <a:off x="4371461" y="1940521"/>
+            <a:ext cx="2368551" cy="369332"/>
+          </a:xfrm>
+          <a:prstGeom prst="rect">
+            <a:avLst/>
+          </a:prstGeom>
+          <a:noFill/>
+        </p:spPr>
+        <p:txBody>
+          <a:bodyPr wrap="square" rtlCol="0">
+            <a:spAutoFit/>
+          </a:bodyPr>
+          <a:lstStyle/>
+          <a:p>
+            <a:r>
+              <a:rPr lang="en-US" dirty="0" smtClean="0">
+                <a:latin typeface="Times New Roman" panose="02020603050405020304" pitchFamily="18" charset="0"/>
+                <a:cs typeface="Times New Roman" panose="02020603050405020304" pitchFamily="18" charset="0"/>
+              </a:rPr>
+              <a:t>Normalized </a:t>
+            </a:r>
+            <a:r>
+              <a:rPr lang="en-US" dirty="0" smtClean="0">
+                <a:latin typeface="Times New Roman" panose="02020603050405020304" pitchFamily="18" charset="0"/>
+                <a:cs typeface="Times New Roman" panose="02020603050405020304" pitchFamily="18" charset="0"/>
+              </a:rPr>
+              <a:t>Voltage</a:t>
+            </a:r>
+            <a:endParaRPr lang="sv-SE" dirty="0">
+              <a:latin typeface="Times New Roman" panose="02020603050405020304" pitchFamily="18" charset="0"/>
+              <a:cs typeface="Times New Roman" panose="02020603050405020304" pitchFamily="18" charset="0"/>
+            </a:endParaRPr>
+          </a:p>
+        </p:txBody>
+      </p:sp>
+      <p:sp>
+        <p:nvSpPr>
+          <p:cNvPr id="14" name="TextBox 13"/>
+          <p:cNvSpPr txBox="1"/>
+          <p:nvPr/>
+        </p:nvSpPr>
+        <p:spPr>
+          <a:xfrm>
+            <a:off x="5138469" y="3940022"/>
+            <a:ext cx="2089150" cy="369332"/>
+          </a:xfrm>
+          <a:prstGeom prst="rect">
+            <a:avLst/>
+          </a:prstGeom>
+          <a:noFill/>
+        </p:spPr>
+        <p:txBody>
+          <a:bodyPr wrap="square" rtlCol="0">
+            <a:spAutoFit/>
+          </a:bodyPr>
+          <a:lstStyle/>
+          <a:p>
+            <a:r>
+              <a:rPr lang="en-US" dirty="0" smtClean="0">
+                <a:latin typeface="Times New Roman" panose="02020603050405020304" pitchFamily="18" charset="0"/>
+                <a:cs typeface="Times New Roman" panose="02020603050405020304" pitchFamily="18" charset="0"/>
+              </a:rPr>
+              <a:t>Frequency</a:t>
+            </a:r>
+            <a:endParaRPr lang="sv-SE" dirty="0">
+              <a:latin typeface="Times New Roman" panose="02020603050405020304" pitchFamily="18" charset="0"/>
+              <a:cs typeface="Times New Roman" panose="02020603050405020304" pitchFamily="18" charset="0"/>
+            </a:endParaRPr>
+          </a:p>
+        </p:txBody>
+      </p:sp>
+      <mc:AlternateContent xmlns:mc="http://schemas.openxmlformats.org/markup-compatibility/2006">
+        <mc:Choice xmlns:a14="http://schemas.microsoft.com/office/drawing/2010/main" Requires="a14">
+          <p:sp>
+            <p:nvSpPr>
+              <p:cNvPr id="15" name="TextBox 14"/>
+              <p:cNvSpPr txBox="1"/>
+              <p:nvPr/>
+            </p:nvSpPr>
+            <p:spPr>
+              <a:xfrm>
+                <a:off x="7449230" y="630041"/>
+                <a:ext cx="3110524" cy="397994"/>
+              </a:xfrm>
+              <a:prstGeom prst="rect">
+                <a:avLst/>
+              </a:prstGeom>
+              <a:noFill/>
+            </p:spPr>
+            <p:txBody>
+              <a:bodyPr wrap="square" rtlCol="0">
+                <a:spAutoFit/>
+              </a:bodyPr>
+              <a:lstStyle/>
+              <a:p>
+                <a14:m>
+                  <m:oMath xmlns:m="http://schemas.openxmlformats.org/officeDocument/2006/math">
+                    <m:sSub>
+                      <m:sSubPr>
+                        <m:ctrlPr>
+                          <a:rPr lang="en-US" i="1" dirty="0" smtClean="0">
+                            <a:solidFill>
+                              <a:srgbClr val="A71993"/>
+                            </a:solidFill>
+                            <a:latin typeface="Cambria Math" panose="02040503050406030204" pitchFamily="18" charset="0"/>
+                            <a:cs typeface="Times New Roman" panose="02020603050405020304" pitchFamily="18" charset="0"/>
+                          </a:rPr>
+                        </m:ctrlPr>
+                      </m:sSubPr>
+                      <m:e>
+                        <m:sSub>
+                          <m:sSubPr>
+                            <m:ctrlPr>
+                              <a:rPr lang="en-US" i="1" dirty="0" smtClean="0">
+                                <a:solidFill>
+                                  <a:srgbClr val="A71993"/>
+                                </a:solidFill>
+                                <a:latin typeface="Cambria Math" panose="02040503050406030204" pitchFamily="18" charset="0"/>
+                                <a:cs typeface="Times New Roman" panose="02020603050405020304" pitchFamily="18" charset="0"/>
+                              </a:rPr>
+                            </m:ctrlPr>
+                          </m:sSubPr>
+                          <m:e>
+                            <m:r>
+                              <a:rPr lang="en-US" i="1" dirty="0" smtClean="0">
+                                <a:solidFill>
+                                  <a:srgbClr val="A71993"/>
+                                </a:solidFill>
+                                <a:latin typeface="Cambria Math" panose="02040503050406030204" pitchFamily="18" charset="0"/>
+                                <a:cs typeface="Times New Roman" panose="02020603050405020304" pitchFamily="18" charset="0"/>
+                              </a:rPr>
+                              <m:t>𝑉</m:t>
+                            </m:r>
+                          </m:e>
+                          <m:sub>
+                            <m:r>
+                              <a:rPr lang="en-US" i="1" dirty="0" smtClean="0">
+                                <a:solidFill>
+                                  <a:srgbClr val="A71993"/>
+                                </a:solidFill>
+                                <a:latin typeface="Cambria Math" panose="02040503050406030204" pitchFamily="18" charset="0"/>
+                                <a:cs typeface="Times New Roman" panose="02020603050405020304" pitchFamily="18" charset="0"/>
+                              </a:rPr>
+                              <m:t>𝐶𝑀</m:t>
+                            </m:r>
+                          </m:sub>
+                        </m:sSub>
+                      </m:e>
+                      <m:sub>
+                        <m:r>
+                          <a:rPr lang="en-US" i="1" dirty="0" smtClean="0">
+                            <a:solidFill>
+                              <a:srgbClr val="A71993"/>
+                            </a:solidFill>
+                            <a:latin typeface="Cambria Math" panose="02040503050406030204" pitchFamily="18" charset="0"/>
+                            <a:cs typeface="Times New Roman" panose="02020603050405020304" pitchFamily="18" charset="0"/>
+                          </a:rPr>
+                          <m:t>𝑊</m:t>
+                        </m:r>
+                        <m:r>
+                          <a:rPr lang="en-US" b="0" i="1" dirty="0" smtClean="0">
+                            <a:solidFill>
+                              <a:srgbClr val="A71993"/>
+                            </a:solidFill>
+                            <a:latin typeface="Cambria Math" panose="02040503050406030204" pitchFamily="18" charset="0"/>
+                            <a:cs typeface="Times New Roman" panose="02020603050405020304" pitchFamily="18" charset="0"/>
+                          </a:rPr>
+                          <m:t>−</m:t>
+                        </m:r>
+                        <m:r>
+                          <a:rPr lang="en-US" b="0" i="1" dirty="0" smtClean="0">
+                            <a:solidFill>
+                              <a:srgbClr val="A71993"/>
+                            </a:solidFill>
+                            <a:latin typeface="Cambria Math" panose="02040503050406030204" pitchFamily="18" charset="0"/>
+                            <a:cs typeface="Times New Roman" panose="02020603050405020304" pitchFamily="18" charset="0"/>
+                          </a:rPr>
+                          <m:t>𝑅𝑀𝑆</m:t>
+                        </m:r>
+                      </m:sub>
+                    </m:sSub>
+                    <m:r>
+                      <a:rPr lang="en-US" b="0" i="1" dirty="0" smtClean="0">
+                        <a:solidFill>
+                          <a:srgbClr val="A71993"/>
+                        </a:solidFill>
+                        <a:latin typeface="Cambria Math" panose="02040503050406030204" pitchFamily="18" charset="0"/>
+                        <a:cs typeface="Times New Roman" panose="02020603050405020304" pitchFamily="18" charset="0"/>
+                      </a:rPr>
+                      <m:t> </m:t>
+                    </m:r>
+                  </m:oMath>
+                </a14:m>
+                <a:r>
+                  <a:rPr lang="en-US" dirty="0" smtClean="0">
+                    <a:solidFill>
+                      <a:srgbClr val="A71993"/>
+                    </a:solidFill>
+                    <a:latin typeface="Times New Roman" panose="02020603050405020304" pitchFamily="18" charset="0"/>
+                    <a:cs typeface="Times New Roman" panose="02020603050405020304" pitchFamily="18" charset="0"/>
+                  </a:rPr>
+                  <a:t>=0.0014</a:t>
+                </a:r>
+                <a:endParaRPr lang="sv-SE" sz="1400" dirty="0">
+                  <a:solidFill>
+                    <a:srgbClr val="A71993"/>
+                  </a:solidFill>
+                  <a:latin typeface="Times New Roman" panose="02020603050405020304" pitchFamily="18" charset="0"/>
+                  <a:cs typeface="Times New Roman" panose="02020603050405020304" pitchFamily="18" charset="0"/>
+                </a:endParaRPr>
+              </a:p>
+            </p:txBody>
+          </p:sp>
+        </mc:Choice>
+        <mc:Fallback>
+          <p:sp>
+            <p:nvSpPr>
+              <p:cNvPr id="15" name="TextBox 14"/>
+              <p:cNvSpPr txBox="1">
+                <a:spLocks noRot="1" noChangeAspect="1" noMove="1" noResize="1" noEditPoints="1" noAdjustHandles="1" noChangeArrowheads="1" noChangeShapeType="1" noTextEdit="1"/>
+              </p:cNvSpPr>
+              <p:nvPr/>
+            </p:nvSpPr>
+            <p:spPr>
+              <a:xfrm>
+                <a:off x="7449230" y="630041"/>
+                <a:ext cx="3110524" cy="397994"/>
+              </a:xfrm>
+              <a:prstGeom prst="rect">
+                <a:avLst/>
+              </a:prstGeom>
+              <a:blipFill>
+                <a:blip r:embed="rId5"/>
+                <a:stretch>
+                  <a:fillRect t="-7576" b="-15152"/>
+                </a:stretch>
+              </a:blipFill>
+            </p:spPr>
+            <p:txBody>
+              <a:bodyPr/>
+              <a:lstStyle/>
+              <a:p>
+                <a:r>
+                  <a:rPr lang="sv-SE">
+                    <a:noFill/>
+                  </a:rPr>
+                  <a:t> </a:t>
+                </a:r>
+              </a:p>
+            </p:txBody>
+          </p:sp>
+        </mc:Fallback>
+      </mc:AlternateContent>
+      <mc:AlternateContent xmlns:mc="http://schemas.openxmlformats.org/markup-compatibility/2006">
+        <mc:Choice xmlns:a14="http://schemas.microsoft.com/office/drawing/2010/main" Requires="a14">
+          <p:sp>
+            <p:nvSpPr>
+              <p:cNvPr id="16" name="TextBox 15"/>
+              <p:cNvSpPr txBox="1"/>
+              <p:nvPr/>
+            </p:nvSpPr>
+            <p:spPr>
+              <a:xfrm>
+                <a:off x="2530196" y="756245"/>
+                <a:ext cx="1320444" cy="369332"/>
+              </a:xfrm>
+              <a:prstGeom prst="rect">
+                <a:avLst/>
+              </a:prstGeom>
+              <a:noFill/>
+            </p:spPr>
+            <p:txBody>
+              <a:bodyPr wrap="square" rtlCol="0">
+                <a:spAutoFit/>
+              </a:bodyPr>
+              <a:lstStyle/>
+              <a:p>
+                <a14:m>
+                  <m:oMath xmlns:m="http://schemas.openxmlformats.org/officeDocument/2006/math">
+                    <m:sSub>
+                      <m:sSubPr>
+                        <m:ctrlPr>
+                          <a:rPr lang="en-US" b="0" i="1" dirty="0" smtClean="0">
+                            <a:latin typeface="Cambria Math" panose="02040503050406030204" pitchFamily="18" charset="0"/>
+                            <a:cs typeface="Times New Roman" panose="02020603050405020304" pitchFamily="18" charset="0"/>
+                          </a:rPr>
+                        </m:ctrlPr>
+                      </m:sSubPr>
+                      <m:e>
+                        <m:r>
+                          <m:rPr>
+                            <m:sty m:val="p"/>
+                          </m:rPr>
+                          <a:rPr lang="en-US" b="0" i="0" dirty="0" smtClean="0">
+                            <a:latin typeface="Cambria Math" panose="02040503050406030204" pitchFamily="18" charset="0"/>
+                            <a:cs typeface="Times New Roman" panose="02020603050405020304" pitchFamily="18" charset="0"/>
+                          </a:rPr>
+                          <m:t>m</m:t>
+                        </m:r>
+                      </m:e>
+                      <m:sub>
+                        <m:r>
+                          <a:rPr lang="en-US" i="1" dirty="0" smtClean="0">
+                            <a:latin typeface="Cambria Math" panose="02040503050406030204" pitchFamily="18" charset="0"/>
+                            <a:cs typeface="Times New Roman" panose="02020603050405020304" pitchFamily="18" charset="0"/>
+                          </a:rPr>
+                          <m:t>𝑎</m:t>
+                        </m:r>
+                      </m:sub>
+                    </m:sSub>
+                    <m:r>
+                      <a:rPr lang="en-US" b="0" i="1" dirty="0" smtClean="0">
+                        <a:latin typeface="Cambria Math" panose="02040503050406030204" pitchFamily="18" charset="0"/>
+                        <a:cs typeface="Times New Roman" panose="02020603050405020304" pitchFamily="18" charset="0"/>
+                      </a:rPr>
+                      <m:t> </m:t>
+                    </m:r>
+                    <m:r>
+                      <a:rPr lang="en-US" b="0" i="1" dirty="0" smtClean="0">
+                        <a:latin typeface="Cambria Math" panose="02040503050406030204" pitchFamily="18" charset="0"/>
+                        <a:cs typeface="Times New Roman" panose="02020603050405020304" pitchFamily="18" charset="0"/>
+                      </a:rPr>
+                      <m:t> </m:t>
+                    </m:r>
+                  </m:oMath>
+                </a14:m>
+                <a:r>
+                  <a:rPr lang="en-US" dirty="0" smtClean="0">
+                    <a:latin typeface="Times New Roman" panose="02020603050405020304" pitchFamily="18" charset="0"/>
+                    <a:cs typeface="Times New Roman" panose="02020603050405020304" pitchFamily="18" charset="0"/>
+                  </a:rPr>
+                  <a:t>= 0.2</a:t>
+                </a:r>
+                <a:endParaRPr lang="sv-SE" sz="1400" dirty="0">
+                  <a:latin typeface="Times New Roman" panose="02020603050405020304" pitchFamily="18" charset="0"/>
+                  <a:cs typeface="Times New Roman" panose="02020603050405020304" pitchFamily="18" charset="0"/>
+                </a:endParaRPr>
+              </a:p>
+            </p:txBody>
+          </p:sp>
+        </mc:Choice>
+        <mc:Fallback>
+          <p:sp>
+            <p:nvSpPr>
+              <p:cNvPr id="16" name="TextBox 15"/>
+              <p:cNvSpPr txBox="1">
+                <a:spLocks noRot="1" noChangeAspect="1" noMove="1" noResize="1" noEditPoints="1" noAdjustHandles="1" noChangeArrowheads="1" noChangeShapeType="1" noTextEdit="1"/>
+              </p:cNvSpPr>
+              <p:nvPr/>
+            </p:nvSpPr>
+            <p:spPr>
+              <a:xfrm>
+                <a:off x="2530196" y="756245"/>
+                <a:ext cx="1320444" cy="369332"/>
+              </a:xfrm>
+              <a:prstGeom prst="rect">
+                <a:avLst/>
+              </a:prstGeom>
+              <a:blipFill>
+                <a:blip r:embed="rId6"/>
+                <a:stretch>
+                  <a:fillRect t="-8197" b="-24590"/>
+                </a:stretch>
+              </a:blipFill>
+            </p:spPr>
+            <p:txBody>
+              <a:bodyPr/>
+              <a:lstStyle/>
+              <a:p>
+                <a:r>
+                  <a:rPr lang="sv-SE">
+                    <a:noFill/>
+                  </a:rPr>
+                  <a:t> </a:t>
+                </a:r>
+              </a:p>
+            </p:txBody>
+          </p:sp>
+        </mc:Fallback>
+      </mc:AlternateContent>
+      <mc:AlternateContent xmlns:mc="http://schemas.openxmlformats.org/markup-compatibility/2006">
+        <mc:Choice xmlns:a14="http://schemas.microsoft.com/office/drawing/2010/main" Requires="a14">
+          <p:sp>
+            <p:nvSpPr>
+              <p:cNvPr id="18" name="TextBox 17"/>
+              <p:cNvSpPr txBox="1"/>
+              <p:nvPr/>
+            </p:nvSpPr>
+            <p:spPr>
+              <a:xfrm>
+                <a:off x="7486218" y="1069629"/>
+                <a:ext cx="3110524" cy="398507"/>
+              </a:xfrm>
+              <a:prstGeom prst="rect">
+                <a:avLst/>
+              </a:prstGeom>
+              <a:noFill/>
+            </p:spPr>
+            <p:txBody>
+              <a:bodyPr wrap="square" rtlCol="0">
+                <a:spAutoFit/>
+              </a:bodyPr>
+              <a:lstStyle/>
+              <a:p>
+                <a14:m>
+                  <m:oMath xmlns:m="http://schemas.openxmlformats.org/officeDocument/2006/math">
+                    <m:sSub>
+                      <m:sSubPr>
+                        <m:ctrlPr>
+                          <a:rPr lang="en-US" i="1" dirty="0" smtClean="0">
+                            <a:solidFill>
+                              <a:srgbClr val="249C8E"/>
+                            </a:solidFill>
+                            <a:latin typeface="Cambria Math" panose="02040503050406030204" pitchFamily="18" charset="0"/>
+                            <a:cs typeface="Times New Roman" panose="02020603050405020304" pitchFamily="18" charset="0"/>
+                          </a:rPr>
+                        </m:ctrlPr>
+                      </m:sSubPr>
+                      <m:e>
+                        <m:sSub>
+                          <m:sSubPr>
+                            <m:ctrlPr>
+                              <a:rPr lang="en-US" i="1" dirty="0">
+                                <a:solidFill>
+                                  <a:srgbClr val="249C8E"/>
+                                </a:solidFill>
+                                <a:latin typeface="Cambria Math" panose="02040503050406030204" pitchFamily="18" charset="0"/>
+                                <a:cs typeface="Times New Roman" panose="02020603050405020304" pitchFamily="18" charset="0"/>
+                              </a:rPr>
+                            </m:ctrlPr>
+                          </m:sSubPr>
+                          <m:e>
+                            <m:r>
+                              <a:rPr lang="en-US" i="1" dirty="0">
+                                <a:solidFill>
+                                  <a:srgbClr val="249C8E"/>
+                                </a:solidFill>
+                                <a:latin typeface="Cambria Math" panose="02040503050406030204" pitchFamily="18" charset="0"/>
+                                <a:cs typeface="Times New Roman" panose="02020603050405020304" pitchFamily="18" charset="0"/>
+                              </a:rPr>
+                              <m:t>𝑉</m:t>
+                            </m:r>
+                          </m:e>
+                          <m:sub>
+                            <m:r>
+                              <a:rPr lang="en-US" i="1" dirty="0">
+                                <a:solidFill>
+                                  <a:srgbClr val="249C8E"/>
+                                </a:solidFill>
+                                <a:latin typeface="Cambria Math" panose="02040503050406030204" pitchFamily="18" charset="0"/>
+                                <a:cs typeface="Times New Roman" panose="02020603050405020304" pitchFamily="18" charset="0"/>
+                              </a:rPr>
+                              <m:t>𝐶𝑀</m:t>
+                            </m:r>
+                          </m:sub>
+                        </m:sSub>
+                      </m:e>
+                      <m:sub>
+                        <m:r>
+                          <a:rPr lang="en-US" i="1" dirty="0">
+                            <a:solidFill>
+                              <a:srgbClr val="249C8E"/>
+                            </a:solidFill>
+                            <a:latin typeface="Cambria Math" panose="02040503050406030204" pitchFamily="18" charset="0"/>
+                            <a:cs typeface="Times New Roman" panose="02020603050405020304" pitchFamily="18" charset="0"/>
+                          </a:rPr>
+                          <m:t>𝑊</m:t>
+                        </m:r>
+                        <m:r>
+                          <a:rPr lang="en-US" i="1" dirty="0">
+                            <a:solidFill>
+                              <a:srgbClr val="249C8E"/>
+                            </a:solidFill>
+                            <a:latin typeface="Cambria Math" panose="02040503050406030204" pitchFamily="18" charset="0"/>
+                            <a:cs typeface="Times New Roman" panose="02020603050405020304" pitchFamily="18" charset="0"/>
+                          </a:rPr>
+                          <m:t>−</m:t>
+                        </m:r>
+                        <m:r>
+                          <a:rPr lang="en-US" i="1" dirty="0">
+                            <a:solidFill>
+                              <a:srgbClr val="249C8E"/>
+                            </a:solidFill>
+                            <a:latin typeface="Cambria Math" panose="02040503050406030204" pitchFamily="18" charset="0"/>
+                            <a:cs typeface="Times New Roman" panose="02020603050405020304" pitchFamily="18" charset="0"/>
+                          </a:rPr>
+                          <m:t>𝑅𝑀𝑆</m:t>
+                        </m:r>
+                      </m:sub>
+                    </m:sSub>
+                  </m:oMath>
+                </a14:m>
+                <a:r>
+                  <a:rPr lang="en-US" dirty="0" smtClean="0">
+                    <a:solidFill>
+                      <a:srgbClr val="249C8E"/>
+                    </a:solidFill>
+                    <a:latin typeface="Times New Roman" panose="02020603050405020304" pitchFamily="18" charset="0"/>
+                    <a:cs typeface="Times New Roman" panose="02020603050405020304" pitchFamily="18" charset="0"/>
+                  </a:rPr>
+                  <a:t>=0.0048</a:t>
+                </a:r>
+                <a:endParaRPr lang="sv-SE" sz="1400" dirty="0">
+                  <a:solidFill>
+                    <a:srgbClr val="249C8E"/>
+                  </a:solidFill>
+                  <a:latin typeface="Times New Roman" panose="02020603050405020304" pitchFamily="18" charset="0"/>
+                  <a:cs typeface="Times New Roman" panose="02020603050405020304" pitchFamily="18" charset="0"/>
+                </a:endParaRPr>
+              </a:p>
+            </p:txBody>
+          </p:sp>
+        </mc:Choice>
+        <mc:Fallback>
+          <p:sp>
+            <p:nvSpPr>
+              <p:cNvPr id="18" name="TextBox 17"/>
+              <p:cNvSpPr txBox="1">
+                <a:spLocks noRot="1" noChangeAspect="1" noMove="1" noResize="1" noEditPoints="1" noAdjustHandles="1" noChangeArrowheads="1" noChangeShapeType="1" noTextEdit="1"/>
+              </p:cNvSpPr>
+              <p:nvPr/>
+            </p:nvSpPr>
+            <p:spPr>
+              <a:xfrm>
+                <a:off x="7486218" y="1069629"/>
+                <a:ext cx="3110524" cy="398507"/>
+              </a:xfrm>
+              <a:prstGeom prst="rect">
+                <a:avLst/>
+              </a:prstGeom>
+              <a:blipFill>
+                <a:blip r:embed="rId7"/>
+                <a:stretch>
+                  <a:fillRect t="-7576" b="-15152"/>
+                </a:stretch>
+              </a:blipFill>
+            </p:spPr>
+            <p:txBody>
+              <a:bodyPr/>
+              <a:lstStyle/>
+              <a:p>
+                <a:r>
+                  <a:rPr lang="sv-SE">
+                    <a:noFill/>
+                  </a:rPr>
+                  <a:t> </a:t>
+                </a:r>
+              </a:p>
+            </p:txBody>
+          </p:sp>
+        </mc:Fallback>
+      </mc:AlternateContent>
+      <p:pic>
+        <p:nvPicPr>
+          <p:cNvPr id="17" name="Picture 16"/>
+          <p:cNvPicPr>
+            <a:picLocks noChangeAspect="1"/>
+          </p:cNvPicPr>
+          <p:nvPr/>
+        </p:nvPicPr>
+        <p:blipFill rotWithShape="1">
+          <a:blip r:embed="rId8"/>
+          <a:srcRect l="24694" t="9287" r="11088" b="77653"/>
+          <a:stretch/>
+        </p:blipFill>
+        <p:spPr>
+          <a:xfrm>
+            <a:off x="3658384" y="4979177"/>
+            <a:ext cx="3425371" cy="522464"/>
+          </a:xfrm>
+          <a:prstGeom prst="rect">
+            <a:avLst/>
+          </a:prstGeom>
+        </p:spPr>
+      </p:pic>
+    </p:spTree>
+    <p:extLst>
+      <p:ext uri="{BB962C8B-B14F-4D97-AF65-F5344CB8AC3E}">
+        <p14:creationId xmlns:p14="http://schemas.microsoft.com/office/powerpoint/2010/main" val="4175987453"/>
+      </p:ext>
+    </p:extLst>
+  </p:cSld>
+  <p:clrMapOvr>
+    <a:masterClrMapping/>
+  </p:clrMapOvr>
+</p:sld>
+</file>
+
+<file path=ppt/slides/slide6.xml><?xml version="1.0" encoding="utf-8"?>
+<p:sld xmlns:a="http://schemas.openxmlformats.org/drawingml/2006/main" xmlns:r="http://schemas.openxmlformats.org/officeDocument/2006/relationships" xmlns:p="http://schemas.openxmlformats.org/presentationml/2006/main">
+  <p:cSld>
+    <p:spTree>
+      <p:nvGrpSpPr>
+        <p:cNvPr id="1" name=""/>
+        <p:cNvGrpSpPr/>
+        <p:nvPr/>
+      </p:nvGrpSpPr>
+      <p:grpSpPr>
+        <a:xfrm>
+          <a:off x="0" y="0"/>
+          <a:ext cx="0" cy="0"/>
+          <a:chOff x="0" y="0"/>
+          <a:chExt cx="0" cy="0"/>
+        </a:xfrm>
+      </p:grpSpPr>
+      <p:pic>
+        <p:nvPicPr>
+          <p:cNvPr id="5" name="Picture 4"/>
+          <p:cNvPicPr>
+            <a:picLocks noChangeAspect="1"/>
+          </p:cNvPicPr>
+          <p:nvPr/>
+        </p:nvPicPr>
+        <p:blipFill>
+          <a:blip r:embed="rId2"/>
+          <a:stretch>
+            <a:fillRect/>
+          </a:stretch>
+        </p:blipFill>
+        <p:spPr>
+          <a:xfrm>
+            <a:off x="406403" y="308854"/>
+            <a:ext cx="5334000" cy="4000500"/>
+          </a:xfrm>
+          <a:prstGeom prst="rect">
+            <a:avLst/>
+          </a:prstGeom>
+        </p:spPr>
+      </p:pic>
+      <p:pic>
+        <p:nvPicPr>
+          <p:cNvPr id="2" name="Picture 1"/>
+          <p:cNvPicPr>
+            <a:picLocks noChangeAspect="1"/>
+          </p:cNvPicPr>
+          <p:nvPr/>
+        </p:nvPicPr>
+        <p:blipFill>
+          <a:blip r:embed="rId3"/>
+          <a:stretch>
+            <a:fillRect/>
+          </a:stretch>
+        </p:blipFill>
+        <p:spPr>
+          <a:xfrm>
+            <a:off x="5623654" y="308854"/>
+            <a:ext cx="5334000" cy="4000500"/>
+          </a:xfrm>
+          <a:prstGeom prst="rect">
+            <a:avLst/>
+          </a:prstGeom>
+        </p:spPr>
+      </p:pic>
+      <p:sp>
+        <p:nvSpPr>
+          <p:cNvPr id="4" name="TextBox 3"/>
+          <p:cNvSpPr txBox="1"/>
+          <p:nvPr/>
+        </p:nvSpPr>
+        <p:spPr>
+          <a:xfrm>
+            <a:off x="2385067" y="3940022"/>
+            <a:ext cx="2089150" cy="369332"/>
+          </a:xfrm>
+          <a:prstGeom prst="rect">
+            <a:avLst/>
+          </a:prstGeom>
+          <a:noFill/>
+        </p:spPr>
+        <p:txBody>
+          <a:bodyPr wrap="square" rtlCol="0">
+            <a:spAutoFit/>
+          </a:bodyPr>
+          <a:lstStyle/>
+          <a:p>
+            <a:r>
+              <a:rPr lang="en-US" dirty="0" smtClean="0">
+                <a:latin typeface="Times New Roman" panose="02020603050405020304" pitchFamily="18" charset="0"/>
+                <a:cs typeface="Times New Roman" panose="02020603050405020304" pitchFamily="18" charset="0"/>
+              </a:rPr>
+              <a:t>Time: 2ms/div</a:t>
+            </a:r>
+            <a:endParaRPr lang="sv-SE" dirty="0">
+              <a:latin typeface="Times New Roman" panose="02020603050405020304" pitchFamily="18" charset="0"/>
+              <a:cs typeface="Times New Roman" panose="02020603050405020304" pitchFamily="18" charset="0"/>
+            </a:endParaRPr>
+          </a:p>
+        </p:txBody>
+      </p:sp>
+      <p:sp>
+        <p:nvSpPr>
+          <p:cNvPr id="6" name="TextBox 5"/>
+          <p:cNvSpPr txBox="1"/>
+          <p:nvPr/>
+        </p:nvSpPr>
+        <p:spPr>
+          <a:xfrm rot="16200000">
+            <a:off x="-771108" y="2106093"/>
+            <a:ext cx="3301523" cy="369332"/>
+          </a:xfrm>
+          <a:prstGeom prst="rect">
+            <a:avLst/>
+          </a:prstGeom>
+          <a:noFill/>
+        </p:spPr>
+        <p:txBody>
+          <a:bodyPr wrap="square" rtlCol="0">
+            <a:spAutoFit/>
+          </a:bodyPr>
+          <a:lstStyle/>
+          <a:p>
+            <a:r>
+              <a:rPr lang="en-US" dirty="0" smtClean="0">
+                <a:latin typeface="Times New Roman" panose="02020603050405020304" pitchFamily="18" charset="0"/>
+                <a:cs typeface="Times New Roman" panose="02020603050405020304" pitchFamily="18" charset="0"/>
+              </a:rPr>
+              <a:t>Normalized Voltage: </a:t>
+            </a:r>
+            <a:r>
+              <a:rPr lang="en-US" dirty="0" smtClean="0">
+                <a:latin typeface="Times New Roman" panose="02020603050405020304" pitchFamily="18" charset="0"/>
+                <a:cs typeface="Times New Roman" panose="02020603050405020304" pitchFamily="18" charset="0"/>
+              </a:rPr>
+              <a:t>0.16 </a:t>
+            </a:r>
+            <a:r>
+              <a:rPr lang="en-US" dirty="0" err="1" smtClean="0">
+                <a:latin typeface="Times New Roman" panose="02020603050405020304" pitchFamily="18" charset="0"/>
+                <a:cs typeface="Times New Roman" panose="02020603050405020304" pitchFamily="18" charset="0"/>
+              </a:rPr>
+              <a:t>p.u</a:t>
+            </a:r>
+            <a:r>
+              <a:rPr lang="en-US" dirty="0" smtClean="0">
+                <a:latin typeface="Times New Roman" panose="02020603050405020304" pitchFamily="18" charset="0"/>
+                <a:cs typeface="Times New Roman" panose="02020603050405020304" pitchFamily="18" charset="0"/>
+              </a:rPr>
+              <a:t>./div</a:t>
+            </a:r>
+            <a:endParaRPr lang="sv-SE" dirty="0">
+              <a:latin typeface="Times New Roman" panose="02020603050405020304" pitchFamily="18" charset="0"/>
+              <a:cs typeface="Times New Roman" panose="02020603050405020304" pitchFamily="18" charset="0"/>
+            </a:endParaRPr>
+          </a:p>
+        </p:txBody>
+      </p:sp>
+      <p:pic>
+        <p:nvPicPr>
+          <p:cNvPr id="3" name="Picture 2"/>
+          <p:cNvPicPr>
+            <a:picLocks noChangeAspect="1"/>
+          </p:cNvPicPr>
+          <p:nvPr/>
+        </p:nvPicPr>
+        <p:blipFill rotWithShape="1">
+          <a:blip r:embed="rId4"/>
+          <a:srcRect l="23691" t="8768" r="12500" b="78058"/>
+          <a:stretch/>
+        </p:blipFill>
+        <p:spPr>
+          <a:xfrm>
+            <a:off x="6647228" y="1105096"/>
+            <a:ext cx="3403600" cy="527050"/>
+          </a:xfrm>
+          <a:prstGeom prst="rect">
+            <a:avLst/>
+          </a:prstGeom>
+        </p:spPr>
+      </p:pic>
+      <p:sp>
+        <p:nvSpPr>
+          <p:cNvPr id="13" name="TextBox 12"/>
+          <p:cNvSpPr txBox="1"/>
+          <p:nvPr/>
+        </p:nvSpPr>
+        <p:spPr>
+          <a:xfrm rot="16200000">
+            <a:off x="4371461" y="1940521"/>
+            <a:ext cx="2368551" cy="369332"/>
+          </a:xfrm>
+          <a:prstGeom prst="rect">
+            <a:avLst/>
+          </a:prstGeom>
+          <a:noFill/>
+        </p:spPr>
+        <p:txBody>
+          <a:bodyPr wrap="square" rtlCol="0">
+            <a:spAutoFit/>
+          </a:bodyPr>
+          <a:lstStyle/>
+          <a:p>
+            <a:r>
+              <a:rPr lang="en-US" dirty="0" smtClean="0">
+                <a:latin typeface="Times New Roman" panose="02020603050405020304" pitchFamily="18" charset="0"/>
+                <a:cs typeface="Times New Roman" panose="02020603050405020304" pitchFamily="18" charset="0"/>
+              </a:rPr>
+              <a:t>Normalized </a:t>
+            </a:r>
+            <a:r>
+              <a:rPr lang="en-US" dirty="0" smtClean="0">
+                <a:latin typeface="Times New Roman" panose="02020603050405020304" pitchFamily="18" charset="0"/>
+                <a:cs typeface="Times New Roman" panose="02020603050405020304" pitchFamily="18" charset="0"/>
+              </a:rPr>
+              <a:t>Voltage</a:t>
+            </a:r>
+            <a:endParaRPr lang="sv-SE" dirty="0">
+              <a:latin typeface="Times New Roman" panose="02020603050405020304" pitchFamily="18" charset="0"/>
+              <a:cs typeface="Times New Roman" panose="02020603050405020304" pitchFamily="18" charset="0"/>
+            </a:endParaRPr>
+          </a:p>
+        </p:txBody>
+      </p:sp>
+      <p:sp>
+        <p:nvSpPr>
+          <p:cNvPr id="14" name="TextBox 13"/>
+          <p:cNvSpPr txBox="1"/>
+          <p:nvPr/>
+        </p:nvSpPr>
+        <p:spPr>
+          <a:xfrm>
+            <a:off x="5138469" y="3940022"/>
+            <a:ext cx="2089150" cy="369332"/>
+          </a:xfrm>
+          <a:prstGeom prst="rect">
+            <a:avLst/>
+          </a:prstGeom>
+          <a:noFill/>
+        </p:spPr>
+        <p:txBody>
+          <a:bodyPr wrap="square" rtlCol="0">
+            <a:spAutoFit/>
+          </a:bodyPr>
+          <a:lstStyle/>
+          <a:p>
+            <a:r>
+              <a:rPr lang="en-US" dirty="0" smtClean="0">
+                <a:latin typeface="Times New Roman" panose="02020603050405020304" pitchFamily="18" charset="0"/>
+                <a:cs typeface="Times New Roman" panose="02020603050405020304" pitchFamily="18" charset="0"/>
+              </a:rPr>
+              <a:t>Frequency</a:t>
+            </a:r>
+            <a:endParaRPr lang="sv-SE" dirty="0">
+              <a:latin typeface="Times New Roman" panose="02020603050405020304" pitchFamily="18" charset="0"/>
+              <a:cs typeface="Times New Roman" panose="02020603050405020304" pitchFamily="18" charset="0"/>
+            </a:endParaRPr>
+          </a:p>
+        </p:txBody>
+      </p:sp>
+      <mc:AlternateContent xmlns:mc="http://schemas.openxmlformats.org/markup-compatibility/2006">
+        <mc:Choice xmlns:a14="http://schemas.microsoft.com/office/drawing/2010/main" Requires="a14">
+          <p:sp>
+            <p:nvSpPr>
+              <p:cNvPr id="15" name="TextBox 14"/>
+              <p:cNvSpPr txBox="1"/>
+              <p:nvPr/>
+            </p:nvSpPr>
+            <p:spPr>
+              <a:xfrm>
+                <a:off x="6338516" y="639997"/>
+                <a:ext cx="3110524" cy="397994"/>
+              </a:xfrm>
+              <a:prstGeom prst="rect">
+                <a:avLst/>
+              </a:prstGeom>
+              <a:noFill/>
+            </p:spPr>
+            <p:txBody>
+              <a:bodyPr wrap="square" rtlCol="0">
+                <a:spAutoFit/>
+              </a:bodyPr>
+              <a:lstStyle/>
+              <a:p>
+                <a14:m>
+                  <m:oMath xmlns:m="http://schemas.openxmlformats.org/officeDocument/2006/math">
+                    <m:sSub>
+                      <m:sSubPr>
+                        <m:ctrlPr>
+                          <a:rPr lang="en-US" i="1" dirty="0" smtClean="0">
+                            <a:solidFill>
+                              <a:srgbClr val="A71993"/>
+                            </a:solidFill>
+                            <a:latin typeface="Cambria Math" panose="02040503050406030204" pitchFamily="18" charset="0"/>
+                            <a:cs typeface="Times New Roman" panose="02020603050405020304" pitchFamily="18" charset="0"/>
+                          </a:rPr>
+                        </m:ctrlPr>
+                      </m:sSubPr>
+                      <m:e>
+                        <m:sSub>
+                          <m:sSubPr>
+                            <m:ctrlPr>
+                              <a:rPr lang="en-US" i="1" dirty="0" smtClean="0">
+                                <a:solidFill>
+                                  <a:srgbClr val="A71993"/>
+                                </a:solidFill>
+                                <a:latin typeface="Cambria Math" panose="02040503050406030204" pitchFamily="18" charset="0"/>
+                                <a:cs typeface="Times New Roman" panose="02020603050405020304" pitchFamily="18" charset="0"/>
+                              </a:rPr>
+                            </m:ctrlPr>
+                          </m:sSubPr>
+                          <m:e>
+                            <m:r>
+                              <a:rPr lang="en-US" i="1" dirty="0" smtClean="0">
+                                <a:solidFill>
+                                  <a:srgbClr val="A71993"/>
+                                </a:solidFill>
+                                <a:latin typeface="Cambria Math" panose="02040503050406030204" pitchFamily="18" charset="0"/>
+                                <a:cs typeface="Times New Roman" panose="02020603050405020304" pitchFamily="18" charset="0"/>
+                              </a:rPr>
+                              <m:t>𝑉</m:t>
+                            </m:r>
+                          </m:e>
+                          <m:sub>
+                            <m:r>
+                              <a:rPr lang="en-US" i="1" dirty="0" smtClean="0">
+                                <a:solidFill>
+                                  <a:srgbClr val="A71993"/>
+                                </a:solidFill>
+                                <a:latin typeface="Cambria Math" panose="02040503050406030204" pitchFamily="18" charset="0"/>
+                                <a:cs typeface="Times New Roman" panose="02020603050405020304" pitchFamily="18" charset="0"/>
+                              </a:rPr>
+                              <m:t>𝐶𝑀</m:t>
+                            </m:r>
+                          </m:sub>
+                        </m:sSub>
+                      </m:e>
+                      <m:sub>
+                        <m:r>
+                          <a:rPr lang="en-US" i="1" dirty="0" smtClean="0">
+                            <a:solidFill>
+                              <a:srgbClr val="A71993"/>
+                            </a:solidFill>
+                            <a:latin typeface="Cambria Math" panose="02040503050406030204" pitchFamily="18" charset="0"/>
+                            <a:cs typeface="Times New Roman" panose="02020603050405020304" pitchFamily="18" charset="0"/>
+                          </a:rPr>
+                          <m:t>𝑊</m:t>
+                        </m:r>
+                        <m:r>
+                          <a:rPr lang="en-US" b="0" i="1" dirty="0" smtClean="0">
+                            <a:solidFill>
+                              <a:srgbClr val="A71993"/>
+                            </a:solidFill>
+                            <a:latin typeface="Cambria Math" panose="02040503050406030204" pitchFamily="18" charset="0"/>
+                            <a:cs typeface="Times New Roman" panose="02020603050405020304" pitchFamily="18" charset="0"/>
+                          </a:rPr>
+                          <m:t>−</m:t>
+                        </m:r>
+                        <m:r>
+                          <a:rPr lang="en-US" b="0" i="1" dirty="0" smtClean="0">
+                            <a:solidFill>
+                              <a:srgbClr val="A71993"/>
+                            </a:solidFill>
+                            <a:latin typeface="Cambria Math" panose="02040503050406030204" pitchFamily="18" charset="0"/>
+                            <a:cs typeface="Times New Roman" panose="02020603050405020304" pitchFamily="18" charset="0"/>
+                          </a:rPr>
+                          <m:t>𝑅𝑀𝑆</m:t>
+                        </m:r>
+                      </m:sub>
+                    </m:sSub>
+                    <m:r>
+                      <a:rPr lang="en-US" b="0" i="1" dirty="0" smtClean="0">
+                        <a:solidFill>
+                          <a:srgbClr val="A71993"/>
+                        </a:solidFill>
+                        <a:latin typeface="Cambria Math" panose="02040503050406030204" pitchFamily="18" charset="0"/>
+                        <a:cs typeface="Times New Roman" panose="02020603050405020304" pitchFamily="18" charset="0"/>
+                      </a:rPr>
+                      <m:t> </m:t>
+                    </m:r>
+                  </m:oMath>
+                </a14:m>
+                <a:r>
+                  <a:rPr lang="en-US" dirty="0" smtClean="0">
+                    <a:solidFill>
+                      <a:srgbClr val="A71993"/>
+                    </a:solidFill>
+                    <a:latin typeface="Times New Roman" panose="02020603050405020304" pitchFamily="18" charset="0"/>
+                    <a:cs typeface="Times New Roman" panose="02020603050405020304" pitchFamily="18" charset="0"/>
+                  </a:rPr>
+                  <a:t>=0.0023</a:t>
+                </a:r>
+                <a:endParaRPr lang="sv-SE" sz="1400" dirty="0">
+                  <a:solidFill>
+                    <a:srgbClr val="A71993"/>
+                  </a:solidFill>
+                  <a:latin typeface="Times New Roman" panose="02020603050405020304" pitchFamily="18" charset="0"/>
+                  <a:cs typeface="Times New Roman" panose="02020603050405020304" pitchFamily="18" charset="0"/>
+                </a:endParaRPr>
+              </a:p>
+            </p:txBody>
+          </p:sp>
+        </mc:Choice>
+        <mc:Fallback>
+          <p:sp>
+            <p:nvSpPr>
+              <p:cNvPr id="15" name="TextBox 14"/>
+              <p:cNvSpPr txBox="1">
+                <a:spLocks noRot="1" noChangeAspect="1" noMove="1" noResize="1" noEditPoints="1" noAdjustHandles="1" noChangeArrowheads="1" noChangeShapeType="1" noTextEdit="1"/>
+              </p:cNvSpPr>
+              <p:nvPr/>
+            </p:nvSpPr>
+            <p:spPr>
+              <a:xfrm>
+                <a:off x="6338516" y="639997"/>
+                <a:ext cx="3110524" cy="397994"/>
+              </a:xfrm>
+              <a:prstGeom prst="rect">
+                <a:avLst/>
+              </a:prstGeom>
+              <a:blipFill>
+                <a:blip r:embed="rId5"/>
+                <a:stretch>
+                  <a:fillRect t="-9231" b="-16923"/>
+                </a:stretch>
+              </a:blipFill>
+            </p:spPr>
+            <p:txBody>
+              <a:bodyPr/>
+              <a:lstStyle/>
+              <a:p>
+                <a:r>
+                  <a:rPr lang="sv-SE">
+                    <a:noFill/>
+                  </a:rPr>
+                  <a:t> </a:t>
+                </a:r>
+              </a:p>
+            </p:txBody>
+          </p:sp>
+        </mc:Fallback>
+      </mc:AlternateContent>
+      <mc:AlternateContent xmlns:mc="http://schemas.openxmlformats.org/markup-compatibility/2006">
+        <mc:Choice xmlns:a14="http://schemas.microsoft.com/office/drawing/2010/main" Requires="a14">
+          <p:sp>
+            <p:nvSpPr>
+              <p:cNvPr id="16" name="TextBox 15"/>
+              <p:cNvSpPr txBox="1"/>
+              <p:nvPr/>
+            </p:nvSpPr>
+            <p:spPr>
+              <a:xfrm>
+                <a:off x="7893778" y="1699251"/>
+                <a:ext cx="1320444" cy="400110"/>
+              </a:xfrm>
+              <a:prstGeom prst="rect">
+                <a:avLst/>
+              </a:prstGeom>
+              <a:noFill/>
+            </p:spPr>
+            <p:txBody>
+              <a:bodyPr wrap="square" rtlCol="0">
+                <a:spAutoFit/>
+              </a:bodyPr>
+              <a:lstStyle/>
+              <a:p>
+                <a14:m>
+                  <m:oMath xmlns:m="http://schemas.openxmlformats.org/officeDocument/2006/math">
+                    <m:sSub>
+                      <m:sSubPr>
+                        <m:ctrlPr>
+                          <a:rPr lang="en-US" sz="2000" b="0" i="1" dirty="0" smtClean="0">
+                            <a:latin typeface="Cambria Math" panose="02040503050406030204" pitchFamily="18" charset="0"/>
+                            <a:cs typeface="Times New Roman" panose="02020603050405020304" pitchFamily="18" charset="0"/>
+                          </a:rPr>
+                        </m:ctrlPr>
+                      </m:sSubPr>
+                      <m:e>
+                        <m:r>
+                          <m:rPr>
+                            <m:sty m:val="p"/>
+                          </m:rPr>
+                          <a:rPr lang="en-US" sz="2000" b="0" i="0" dirty="0" smtClean="0">
+                            <a:latin typeface="Cambria Math" panose="02040503050406030204" pitchFamily="18" charset="0"/>
+                            <a:cs typeface="Times New Roman" panose="02020603050405020304" pitchFamily="18" charset="0"/>
+                          </a:rPr>
+                          <m:t>m</m:t>
+                        </m:r>
+                      </m:e>
+                      <m:sub>
+                        <m:r>
+                          <a:rPr lang="en-US" sz="2000" i="1" dirty="0" smtClean="0">
+                            <a:latin typeface="Cambria Math" panose="02040503050406030204" pitchFamily="18" charset="0"/>
+                            <a:cs typeface="Times New Roman" panose="02020603050405020304" pitchFamily="18" charset="0"/>
+                          </a:rPr>
+                          <m:t>𝑎</m:t>
+                        </m:r>
+                      </m:sub>
+                    </m:sSub>
+                    <m:r>
+                      <a:rPr lang="en-US" sz="2000" b="0" i="1" dirty="0" smtClean="0">
+                        <a:latin typeface="Cambria Math" panose="02040503050406030204" pitchFamily="18" charset="0"/>
+                        <a:cs typeface="Times New Roman" panose="02020603050405020304" pitchFamily="18" charset="0"/>
+                      </a:rPr>
+                      <m:t> </m:t>
+                    </m:r>
+                    <m:r>
+                      <a:rPr lang="en-US" sz="2000" b="0" i="1" dirty="0" smtClean="0">
+                        <a:latin typeface="Cambria Math" panose="02040503050406030204" pitchFamily="18" charset="0"/>
+                        <a:cs typeface="Times New Roman" panose="02020603050405020304" pitchFamily="18" charset="0"/>
+                      </a:rPr>
+                      <m:t> </m:t>
+                    </m:r>
+                  </m:oMath>
+                </a14:m>
+                <a:r>
+                  <a:rPr lang="en-US" sz="2000" dirty="0" smtClean="0">
+                    <a:latin typeface="Times New Roman" panose="02020603050405020304" pitchFamily="18" charset="0"/>
+                    <a:cs typeface="Times New Roman" panose="02020603050405020304" pitchFamily="18" charset="0"/>
+                  </a:rPr>
+                  <a:t>= 0.4</a:t>
+                </a:r>
+                <a:endParaRPr lang="sv-SE" sz="1600" dirty="0">
+                  <a:latin typeface="Times New Roman" panose="02020603050405020304" pitchFamily="18" charset="0"/>
+                  <a:cs typeface="Times New Roman" panose="02020603050405020304" pitchFamily="18" charset="0"/>
+                </a:endParaRPr>
+              </a:p>
+            </p:txBody>
+          </p:sp>
+        </mc:Choice>
+        <mc:Fallback>
+          <p:sp>
+            <p:nvSpPr>
+              <p:cNvPr id="16" name="TextBox 15"/>
+              <p:cNvSpPr txBox="1">
+                <a:spLocks noRot="1" noChangeAspect="1" noMove="1" noResize="1" noEditPoints="1" noAdjustHandles="1" noChangeArrowheads="1" noChangeShapeType="1" noTextEdit="1"/>
+              </p:cNvSpPr>
+              <p:nvPr/>
+            </p:nvSpPr>
+            <p:spPr>
+              <a:xfrm>
+                <a:off x="7893778" y="1699251"/>
+                <a:ext cx="1320444" cy="400110"/>
+              </a:xfrm>
+              <a:prstGeom prst="rect">
+                <a:avLst/>
+              </a:prstGeom>
+              <a:blipFill>
+                <a:blip r:embed="rId6"/>
+                <a:stretch>
+                  <a:fillRect t="-9231" b="-27692"/>
+                </a:stretch>
+              </a:blipFill>
+            </p:spPr>
+            <p:txBody>
+              <a:bodyPr/>
+              <a:lstStyle/>
+              <a:p>
+                <a:r>
+                  <a:rPr lang="sv-SE">
+                    <a:noFill/>
+                  </a:rPr>
+                  <a:t> </a:t>
+                </a:r>
+              </a:p>
+            </p:txBody>
+          </p:sp>
+        </mc:Fallback>
+      </mc:AlternateContent>
+      <mc:AlternateContent xmlns:mc="http://schemas.openxmlformats.org/markup-compatibility/2006">
+        <mc:Choice xmlns:a14="http://schemas.microsoft.com/office/drawing/2010/main" Requires="a14">
+          <p:sp>
+            <p:nvSpPr>
+              <p:cNvPr id="18" name="TextBox 17"/>
+              <p:cNvSpPr txBox="1"/>
+              <p:nvPr/>
+            </p:nvSpPr>
+            <p:spPr>
+              <a:xfrm>
+                <a:off x="8317169" y="639484"/>
+                <a:ext cx="3110524" cy="398507"/>
+              </a:xfrm>
+              <a:prstGeom prst="rect">
+                <a:avLst/>
+              </a:prstGeom>
+              <a:noFill/>
+            </p:spPr>
+            <p:txBody>
+              <a:bodyPr wrap="square" rtlCol="0">
+                <a:spAutoFit/>
+              </a:bodyPr>
+              <a:lstStyle/>
+              <a:p>
+                <a14:m>
+                  <m:oMath xmlns:m="http://schemas.openxmlformats.org/officeDocument/2006/math">
+                    <m:sSub>
+                      <m:sSubPr>
+                        <m:ctrlPr>
+                          <a:rPr lang="en-US" i="1" dirty="0" smtClean="0">
+                            <a:solidFill>
+                              <a:srgbClr val="249C8E"/>
+                            </a:solidFill>
+                            <a:latin typeface="Cambria Math" panose="02040503050406030204" pitchFamily="18" charset="0"/>
+                            <a:cs typeface="Times New Roman" panose="02020603050405020304" pitchFamily="18" charset="0"/>
+                          </a:rPr>
+                        </m:ctrlPr>
+                      </m:sSubPr>
+                      <m:e>
+                        <m:sSub>
+                          <m:sSubPr>
+                            <m:ctrlPr>
+                              <a:rPr lang="en-US" i="1" dirty="0">
+                                <a:solidFill>
+                                  <a:srgbClr val="249C8E"/>
+                                </a:solidFill>
+                                <a:latin typeface="Cambria Math" panose="02040503050406030204" pitchFamily="18" charset="0"/>
+                                <a:cs typeface="Times New Roman" panose="02020603050405020304" pitchFamily="18" charset="0"/>
+                              </a:rPr>
+                            </m:ctrlPr>
+                          </m:sSubPr>
+                          <m:e>
+                            <m:r>
+                              <a:rPr lang="en-US" i="1" dirty="0">
+                                <a:solidFill>
+                                  <a:srgbClr val="249C8E"/>
+                                </a:solidFill>
+                                <a:latin typeface="Cambria Math" panose="02040503050406030204" pitchFamily="18" charset="0"/>
+                                <a:cs typeface="Times New Roman" panose="02020603050405020304" pitchFamily="18" charset="0"/>
+                              </a:rPr>
+                              <m:t>𝑉</m:t>
+                            </m:r>
+                          </m:e>
+                          <m:sub>
+                            <m:r>
+                              <a:rPr lang="en-US" i="1" dirty="0">
+                                <a:solidFill>
+                                  <a:srgbClr val="249C8E"/>
+                                </a:solidFill>
+                                <a:latin typeface="Cambria Math" panose="02040503050406030204" pitchFamily="18" charset="0"/>
+                                <a:cs typeface="Times New Roman" panose="02020603050405020304" pitchFamily="18" charset="0"/>
+                              </a:rPr>
+                              <m:t>𝐶𝑀</m:t>
+                            </m:r>
+                          </m:sub>
+                        </m:sSub>
+                      </m:e>
+                      <m:sub>
+                        <m:r>
+                          <a:rPr lang="en-US" i="1" dirty="0">
+                            <a:solidFill>
+                              <a:srgbClr val="249C8E"/>
+                            </a:solidFill>
+                            <a:latin typeface="Cambria Math" panose="02040503050406030204" pitchFamily="18" charset="0"/>
+                            <a:cs typeface="Times New Roman" panose="02020603050405020304" pitchFamily="18" charset="0"/>
+                          </a:rPr>
+                          <m:t>𝑊</m:t>
+                        </m:r>
+                        <m:r>
+                          <a:rPr lang="en-US" i="1" dirty="0">
+                            <a:solidFill>
+                              <a:srgbClr val="249C8E"/>
+                            </a:solidFill>
+                            <a:latin typeface="Cambria Math" panose="02040503050406030204" pitchFamily="18" charset="0"/>
+                            <a:cs typeface="Times New Roman" panose="02020603050405020304" pitchFamily="18" charset="0"/>
+                          </a:rPr>
+                          <m:t>−</m:t>
+                        </m:r>
+                        <m:r>
+                          <a:rPr lang="en-US" i="1" dirty="0">
+                            <a:solidFill>
+                              <a:srgbClr val="249C8E"/>
+                            </a:solidFill>
+                            <a:latin typeface="Cambria Math" panose="02040503050406030204" pitchFamily="18" charset="0"/>
+                            <a:cs typeface="Times New Roman" panose="02020603050405020304" pitchFamily="18" charset="0"/>
+                          </a:rPr>
+                          <m:t>𝑅𝑀𝑆</m:t>
+                        </m:r>
+                      </m:sub>
+                    </m:sSub>
+                  </m:oMath>
+                </a14:m>
+                <a:r>
+                  <a:rPr lang="en-US" dirty="0" smtClean="0">
+                    <a:solidFill>
+                      <a:srgbClr val="249C8E"/>
+                    </a:solidFill>
+                    <a:latin typeface="Times New Roman" panose="02020603050405020304" pitchFamily="18" charset="0"/>
+                    <a:cs typeface="Times New Roman" panose="02020603050405020304" pitchFamily="18" charset="0"/>
+                  </a:rPr>
+                  <a:t>=0.0127</a:t>
+                </a:r>
+                <a:endParaRPr lang="sv-SE" sz="1400" dirty="0">
+                  <a:solidFill>
+                    <a:srgbClr val="249C8E"/>
+                  </a:solidFill>
+                  <a:latin typeface="Times New Roman" panose="02020603050405020304" pitchFamily="18" charset="0"/>
+                  <a:cs typeface="Times New Roman" panose="02020603050405020304" pitchFamily="18" charset="0"/>
+                </a:endParaRPr>
+              </a:p>
+            </p:txBody>
+          </p:sp>
+        </mc:Choice>
+        <mc:Fallback>
+          <p:sp>
+            <p:nvSpPr>
+              <p:cNvPr id="18" name="TextBox 17"/>
+              <p:cNvSpPr txBox="1">
+                <a:spLocks noRot="1" noChangeAspect="1" noMove="1" noResize="1" noEditPoints="1" noAdjustHandles="1" noChangeArrowheads="1" noChangeShapeType="1" noTextEdit="1"/>
+              </p:cNvSpPr>
+              <p:nvPr/>
+            </p:nvSpPr>
+            <p:spPr>
+              <a:xfrm>
+                <a:off x="8317169" y="639484"/>
+                <a:ext cx="3110524" cy="398507"/>
+              </a:xfrm>
+              <a:prstGeom prst="rect">
+                <a:avLst/>
+              </a:prstGeom>
+              <a:blipFill>
+                <a:blip r:embed="rId7"/>
+                <a:stretch>
+                  <a:fillRect t="-9231" b="-16923"/>
+                </a:stretch>
+              </a:blipFill>
+            </p:spPr>
+            <p:txBody>
+              <a:bodyPr/>
+              <a:lstStyle/>
+              <a:p>
+                <a:r>
+                  <a:rPr lang="sv-SE">
+                    <a:noFill/>
+                  </a:rPr>
+                  <a:t> </a:t>
+                </a:r>
+              </a:p>
+            </p:txBody>
+          </p:sp>
+        </mc:Fallback>
+      </mc:AlternateContent>
+      <p:pic>
+        <p:nvPicPr>
+          <p:cNvPr id="17" name="Picture 16"/>
+          <p:cNvPicPr>
+            <a:picLocks noChangeAspect="1"/>
+          </p:cNvPicPr>
+          <p:nvPr/>
+        </p:nvPicPr>
+        <p:blipFill rotWithShape="1">
+          <a:blip r:embed="rId8"/>
+          <a:srcRect l="24694" t="9287" r="11088" b="77653"/>
+          <a:stretch/>
+        </p:blipFill>
+        <p:spPr>
+          <a:xfrm>
+            <a:off x="3658384" y="4979177"/>
+            <a:ext cx="3425371" cy="522464"/>
+          </a:xfrm>
+          <a:prstGeom prst="rect">
+            <a:avLst/>
+          </a:prstGeom>
+        </p:spPr>
+      </p:pic>
+    </p:spTree>
+    <p:extLst>
+      <p:ext uri="{BB962C8B-B14F-4D97-AF65-F5344CB8AC3E}">
+        <p14:creationId xmlns:p14="http://schemas.microsoft.com/office/powerpoint/2010/main" val="3286182191"/>
+      </p:ext>
+    </p:extLst>
+  </p:cSld>
+  <p:clrMapOvr>
+    <a:masterClrMapping/>
+  </p:clrMapOvr>
+</p:sld>
+</file>
+
+<file path=ppt/slides/slide7.xml><?xml version="1.0" encoding="utf-8"?>
+<p:sld xmlns:a="http://schemas.openxmlformats.org/drawingml/2006/main" xmlns:r="http://schemas.openxmlformats.org/officeDocument/2006/relationships" xmlns:p="http://schemas.openxmlformats.org/presentationml/2006/main">
+  <p:cSld>
+    <p:spTree>
+      <p:nvGrpSpPr>
+        <p:cNvPr id="1" name=""/>
+        <p:cNvGrpSpPr/>
+        <p:nvPr/>
+      </p:nvGrpSpPr>
+      <p:grpSpPr>
+        <a:xfrm>
+          <a:off x="0" y="0"/>
+          <a:ext cx="0" cy="0"/>
+          <a:chOff x="0" y="0"/>
+          <a:chExt cx="0" cy="0"/>
+        </a:xfrm>
+      </p:grpSpPr>
+      <p:pic>
+        <p:nvPicPr>
+          <p:cNvPr id="10" name="Picture 9"/>
+          <p:cNvPicPr>
+            <a:picLocks noChangeAspect="1"/>
+          </p:cNvPicPr>
+          <p:nvPr/>
+        </p:nvPicPr>
+        <p:blipFill>
+          <a:blip r:embed="rId2"/>
+          <a:stretch>
+            <a:fillRect/>
+          </a:stretch>
+        </p:blipFill>
+        <p:spPr>
+          <a:xfrm>
+            <a:off x="406403" y="400050"/>
+            <a:ext cx="5334000" cy="4000500"/>
+          </a:xfrm>
+          <a:prstGeom prst="rect">
+            <a:avLst/>
+          </a:prstGeom>
+        </p:spPr>
+      </p:pic>
+      <p:pic>
+        <p:nvPicPr>
+          <p:cNvPr id="7" name="Picture 6"/>
+          <p:cNvPicPr>
+            <a:picLocks noChangeAspect="1"/>
+          </p:cNvPicPr>
+          <p:nvPr/>
+        </p:nvPicPr>
+        <p:blipFill>
+          <a:blip r:embed="rId3"/>
+          <a:stretch>
+            <a:fillRect/>
+          </a:stretch>
+        </p:blipFill>
+        <p:spPr>
+          <a:xfrm>
+            <a:off x="5490390" y="308854"/>
+            <a:ext cx="5334000" cy="4000500"/>
+          </a:xfrm>
+          <a:prstGeom prst="rect">
+            <a:avLst/>
+          </a:prstGeom>
+        </p:spPr>
+      </p:pic>
+      <p:sp>
+        <p:nvSpPr>
+          <p:cNvPr id="4" name="TextBox 3"/>
+          <p:cNvSpPr txBox="1"/>
+          <p:nvPr/>
+        </p:nvSpPr>
+        <p:spPr>
+          <a:xfrm>
+            <a:off x="2385067" y="3940022"/>
+            <a:ext cx="2089150" cy="369332"/>
+          </a:xfrm>
+          <a:prstGeom prst="rect">
+            <a:avLst/>
+          </a:prstGeom>
+          <a:noFill/>
+        </p:spPr>
+        <p:txBody>
+          <a:bodyPr wrap="square" rtlCol="0">
+            <a:spAutoFit/>
+          </a:bodyPr>
+          <a:lstStyle/>
+          <a:p>
+            <a:r>
+              <a:rPr lang="en-US" dirty="0" smtClean="0">
+                <a:latin typeface="Times New Roman" panose="02020603050405020304" pitchFamily="18" charset="0"/>
+                <a:cs typeface="Times New Roman" panose="02020603050405020304" pitchFamily="18" charset="0"/>
+              </a:rPr>
+              <a:t>Time: 2ms/div</a:t>
+            </a:r>
+            <a:endParaRPr lang="sv-SE" dirty="0">
+              <a:latin typeface="Times New Roman" panose="02020603050405020304" pitchFamily="18" charset="0"/>
+              <a:cs typeface="Times New Roman" panose="02020603050405020304" pitchFamily="18" charset="0"/>
+            </a:endParaRPr>
+          </a:p>
+        </p:txBody>
+      </p:sp>
+      <p:sp>
+        <p:nvSpPr>
+          <p:cNvPr id="6" name="TextBox 5"/>
+          <p:cNvSpPr txBox="1"/>
+          <p:nvPr/>
+        </p:nvSpPr>
+        <p:spPr>
+          <a:xfrm rot="16200000">
+            <a:off x="-771108" y="2106093"/>
+            <a:ext cx="3301523" cy="369332"/>
+          </a:xfrm>
+          <a:prstGeom prst="rect">
+            <a:avLst/>
+          </a:prstGeom>
+          <a:noFill/>
+        </p:spPr>
+        <p:txBody>
+          <a:bodyPr wrap="square" rtlCol="0">
+            <a:spAutoFit/>
+          </a:bodyPr>
+          <a:lstStyle/>
+          <a:p>
+            <a:r>
+              <a:rPr lang="en-US" dirty="0" smtClean="0">
+                <a:latin typeface="Times New Roman" panose="02020603050405020304" pitchFamily="18" charset="0"/>
+                <a:cs typeface="Times New Roman" panose="02020603050405020304" pitchFamily="18" charset="0"/>
+              </a:rPr>
+              <a:t>Normalized Voltage: </a:t>
+            </a:r>
+            <a:r>
+              <a:rPr lang="en-US" dirty="0" smtClean="0">
+                <a:latin typeface="Times New Roman" panose="02020603050405020304" pitchFamily="18" charset="0"/>
+                <a:cs typeface="Times New Roman" panose="02020603050405020304" pitchFamily="18" charset="0"/>
+              </a:rPr>
+              <a:t>0.16 </a:t>
+            </a:r>
+            <a:r>
+              <a:rPr lang="en-US" dirty="0" err="1" smtClean="0">
+                <a:latin typeface="Times New Roman" panose="02020603050405020304" pitchFamily="18" charset="0"/>
+                <a:cs typeface="Times New Roman" panose="02020603050405020304" pitchFamily="18" charset="0"/>
+              </a:rPr>
+              <a:t>p.u</a:t>
+            </a:r>
+            <a:r>
+              <a:rPr lang="en-US" dirty="0" smtClean="0">
+                <a:latin typeface="Times New Roman" panose="02020603050405020304" pitchFamily="18" charset="0"/>
+                <a:cs typeface="Times New Roman" panose="02020603050405020304" pitchFamily="18" charset="0"/>
+              </a:rPr>
+              <a:t>./div</a:t>
+            </a:r>
+            <a:endParaRPr lang="sv-SE" dirty="0">
+              <a:latin typeface="Times New Roman" panose="02020603050405020304" pitchFamily="18" charset="0"/>
+              <a:cs typeface="Times New Roman" panose="02020603050405020304" pitchFamily="18" charset="0"/>
+            </a:endParaRPr>
+          </a:p>
+        </p:txBody>
+      </p:sp>
+      <p:pic>
+        <p:nvPicPr>
+          <p:cNvPr id="3" name="Picture 2"/>
+          <p:cNvPicPr>
+            <a:picLocks noChangeAspect="1"/>
+          </p:cNvPicPr>
+          <p:nvPr/>
+        </p:nvPicPr>
+        <p:blipFill rotWithShape="1">
+          <a:blip r:embed="rId4"/>
+          <a:srcRect l="23691" t="8768" r="12500" b="78058"/>
+          <a:stretch/>
+        </p:blipFill>
+        <p:spPr>
+          <a:xfrm>
+            <a:off x="1575555" y="2400300"/>
+            <a:ext cx="3403600" cy="527050"/>
+          </a:xfrm>
+          <a:prstGeom prst="rect">
+            <a:avLst/>
+          </a:prstGeom>
+        </p:spPr>
+      </p:pic>
+      <p:sp>
+        <p:nvSpPr>
+          <p:cNvPr id="13" name="TextBox 12"/>
+          <p:cNvSpPr txBox="1"/>
+          <p:nvPr/>
+        </p:nvSpPr>
+        <p:spPr>
+          <a:xfrm rot="16200000">
+            <a:off x="4371461" y="1940521"/>
+            <a:ext cx="2368551" cy="369332"/>
+          </a:xfrm>
+          <a:prstGeom prst="rect">
+            <a:avLst/>
+          </a:prstGeom>
+          <a:noFill/>
+        </p:spPr>
+        <p:txBody>
+          <a:bodyPr wrap="square" rtlCol="0">
+            <a:spAutoFit/>
+          </a:bodyPr>
+          <a:lstStyle/>
+          <a:p>
+            <a:r>
+              <a:rPr lang="en-US" dirty="0" smtClean="0">
+                <a:latin typeface="Times New Roman" panose="02020603050405020304" pitchFamily="18" charset="0"/>
+                <a:cs typeface="Times New Roman" panose="02020603050405020304" pitchFamily="18" charset="0"/>
+              </a:rPr>
+              <a:t>Normalized </a:t>
+            </a:r>
+            <a:r>
+              <a:rPr lang="en-US" dirty="0" smtClean="0">
+                <a:latin typeface="Times New Roman" panose="02020603050405020304" pitchFamily="18" charset="0"/>
+                <a:cs typeface="Times New Roman" panose="02020603050405020304" pitchFamily="18" charset="0"/>
+              </a:rPr>
+              <a:t>Voltage</a:t>
+            </a:r>
+            <a:endParaRPr lang="sv-SE" dirty="0">
+              <a:latin typeface="Times New Roman" panose="02020603050405020304" pitchFamily="18" charset="0"/>
+              <a:cs typeface="Times New Roman" panose="02020603050405020304" pitchFamily="18" charset="0"/>
+            </a:endParaRPr>
+          </a:p>
+        </p:txBody>
+      </p:sp>
+      <p:sp>
+        <p:nvSpPr>
+          <p:cNvPr id="14" name="TextBox 13"/>
+          <p:cNvSpPr txBox="1"/>
+          <p:nvPr/>
+        </p:nvSpPr>
+        <p:spPr>
+          <a:xfrm>
+            <a:off x="5138469" y="3940022"/>
+            <a:ext cx="2089150" cy="369332"/>
+          </a:xfrm>
+          <a:prstGeom prst="rect">
+            <a:avLst/>
+          </a:prstGeom>
+          <a:noFill/>
+        </p:spPr>
+        <p:txBody>
+          <a:bodyPr wrap="square" rtlCol="0">
+            <a:spAutoFit/>
+          </a:bodyPr>
+          <a:lstStyle/>
+          <a:p>
+            <a:r>
+              <a:rPr lang="en-US" dirty="0" smtClean="0">
+                <a:latin typeface="Times New Roman" panose="02020603050405020304" pitchFamily="18" charset="0"/>
+                <a:cs typeface="Times New Roman" panose="02020603050405020304" pitchFamily="18" charset="0"/>
+              </a:rPr>
+              <a:t>Frequency</a:t>
+            </a:r>
+            <a:endParaRPr lang="sv-SE" dirty="0">
+              <a:latin typeface="Times New Roman" panose="02020603050405020304" pitchFamily="18" charset="0"/>
+              <a:cs typeface="Times New Roman" panose="02020603050405020304" pitchFamily="18" charset="0"/>
+            </a:endParaRPr>
+          </a:p>
+        </p:txBody>
+      </p:sp>
+      <mc:AlternateContent xmlns:mc="http://schemas.openxmlformats.org/markup-compatibility/2006">
+        <mc:Choice xmlns:a14="http://schemas.microsoft.com/office/drawing/2010/main" Requires="a14">
+          <p:sp>
+            <p:nvSpPr>
+              <p:cNvPr id="15" name="TextBox 14"/>
+              <p:cNvSpPr txBox="1"/>
+              <p:nvPr/>
+            </p:nvSpPr>
+            <p:spPr>
+              <a:xfrm>
+                <a:off x="7449230" y="630041"/>
+                <a:ext cx="3110524" cy="397994"/>
+              </a:xfrm>
+              <a:prstGeom prst="rect">
+                <a:avLst/>
+              </a:prstGeom>
+              <a:noFill/>
+            </p:spPr>
+            <p:txBody>
+              <a:bodyPr wrap="square" rtlCol="0">
+                <a:spAutoFit/>
+              </a:bodyPr>
+              <a:lstStyle/>
+              <a:p>
+                <a14:m>
+                  <m:oMath xmlns:m="http://schemas.openxmlformats.org/officeDocument/2006/math">
+                    <m:sSub>
+                      <m:sSubPr>
+                        <m:ctrlPr>
+                          <a:rPr lang="en-US" i="1" dirty="0" smtClean="0">
+                            <a:solidFill>
+                              <a:srgbClr val="A71993"/>
+                            </a:solidFill>
+                            <a:latin typeface="Cambria Math" panose="02040503050406030204" pitchFamily="18" charset="0"/>
+                            <a:cs typeface="Times New Roman" panose="02020603050405020304" pitchFamily="18" charset="0"/>
+                          </a:rPr>
+                        </m:ctrlPr>
+                      </m:sSubPr>
+                      <m:e>
+                        <m:sSub>
+                          <m:sSubPr>
+                            <m:ctrlPr>
+                              <a:rPr lang="en-US" i="1" dirty="0" smtClean="0">
+                                <a:solidFill>
+                                  <a:srgbClr val="A71993"/>
+                                </a:solidFill>
+                                <a:latin typeface="Cambria Math" panose="02040503050406030204" pitchFamily="18" charset="0"/>
+                                <a:cs typeface="Times New Roman" panose="02020603050405020304" pitchFamily="18" charset="0"/>
+                              </a:rPr>
+                            </m:ctrlPr>
+                          </m:sSubPr>
+                          <m:e>
+                            <m:r>
+                              <a:rPr lang="en-US" i="1" dirty="0" smtClean="0">
+                                <a:solidFill>
+                                  <a:srgbClr val="A71993"/>
+                                </a:solidFill>
+                                <a:latin typeface="Cambria Math" panose="02040503050406030204" pitchFamily="18" charset="0"/>
+                                <a:cs typeface="Times New Roman" panose="02020603050405020304" pitchFamily="18" charset="0"/>
+                              </a:rPr>
+                              <m:t>𝑉</m:t>
+                            </m:r>
+                          </m:e>
+                          <m:sub>
+                            <m:r>
+                              <a:rPr lang="en-US" i="1" dirty="0" smtClean="0">
+                                <a:solidFill>
+                                  <a:srgbClr val="A71993"/>
+                                </a:solidFill>
+                                <a:latin typeface="Cambria Math" panose="02040503050406030204" pitchFamily="18" charset="0"/>
+                                <a:cs typeface="Times New Roman" panose="02020603050405020304" pitchFamily="18" charset="0"/>
+                              </a:rPr>
+                              <m:t>𝐶𝑀</m:t>
+                            </m:r>
+                          </m:sub>
+                        </m:sSub>
+                      </m:e>
+                      <m:sub>
+                        <m:r>
+                          <a:rPr lang="en-US" i="1" dirty="0" smtClean="0">
+                            <a:solidFill>
+                              <a:srgbClr val="A71993"/>
+                            </a:solidFill>
+                            <a:latin typeface="Cambria Math" panose="02040503050406030204" pitchFamily="18" charset="0"/>
+                            <a:cs typeface="Times New Roman" panose="02020603050405020304" pitchFamily="18" charset="0"/>
+                          </a:rPr>
+                          <m:t>𝑊</m:t>
+                        </m:r>
+                        <m:r>
+                          <a:rPr lang="en-US" b="0" i="1" dirty="0" smtClean="0">
+                            <a:solidFill>
+                              <a:srgbClr val="A71993"/>
+                            </a:solidFill>
+                            <a:latin typeface="Cambria Math" panose="02040503050406030204" pitchFamily="18" charset="0"/>
+                            <a:cs typeface="Times New Roman" panose="02020603050405020304" pitchFamily="18" charset="0"/>
+                          </a:rPr>
+                          <m:t>−</m:t>
+                        </m:r>
+                        <m:r>
+                          <a:rPr lang="en-US" b="0" i="1" dirty="0" smtClean="0">
+                            <a:solidFill>
+                              <a:srgbClr val="A71993"/>
+                            </a:solidFill>
+                            <a:latin typeface="Cambria Math" panose="02040503050406030204" pitchFamily="18" charset="0"/>
+                            <a:cs typeface="Times New Roman" panose="02020603050405020304" pitchFamily="18" charset="0"/>
+                          </a:rPr>
+                          <m:t>𝑅𝑀𝑆</m:t>
+                        </m:r>
+                      </m:sub>
+                    </m:sSub>
+                    <m:r>
+                      <a:rPr lang="en-US" b="0" i="1" dirty="0" smtClean="0">
+                        <a:solidFill>
+                          <a:srgbClr val="A71993"/>
+                        </a:solidFill>
+                        <a:latin typeface="Cambria Math" panose="02040503050406030204" pitchFamily="18" charset="0"/>
+                        <a:cs typeface="Times New Roman" panose="02020603050405020304" pitchFamily="18" charset="0"/>
+                      </a:rPr>
+                      <m:t> </m:t>
+                    </m:r>
+                  </m:oMath>
+                </a14:m>
+                <a:r>
+                  <a:rPr lang="en-US" dirty="0" smtClean="0">
+                    <a:solidFill>
+                      <a:srgbClr val="A71993"/>
+                    </a:solidFill>
+                    <a:latin typeface="Times New Roman" panose="02020603050405020304" pitchFamily="18" charset="0"/>
+                    <a:cs typeface="Times New Roman" panose="02020603050405020304" pitchFamily="18" charset="0"/>
+                  </a:rPr>
+                  <a:t>=0.0041</a:t>
+                </a:r>
+                <a:endParaRPr lang="sv-SE" sz="1400" dirty="0">
+                  <a:solidFill>
+                    <a:srgbClr val="A71993"/>
+                  </a:solidFill>
+                  <a:latin typeface="Times New Roman" panose="02020603050405020304" pitchFamily="18" charset="0"/>
+                  <a:cs typeface="Times New Roman" panose="02020603050405020304" pitchFamily="18" charset="0"/>
+                </a:endParaRPr>
+              </a:p>
+            </p:txBody>
+          </p:sp>
+        </mc:Choice>
+        <mc:Fallback>
+          <p:sp>
+            <p:nvSpPr>
+              <p:cNvPr id="15" name="TextBox 14"/>
+              <p:cNvSpPr txBox="1">
+                <a:spLocks noRot="1" noChangeAspect="1" noMove="1" noResize="1" noEditPoints="1" noAdjustHandles="1" noChangeArrowheads="1" noChangeShapeType="1" noTextEdit="1"/>
+              </p:cNvSpPr>
+              <p:nvPr/>
+            </p:nvSpPr>
+            <p:spPr>
+              <a:xfrm>
+                <a:off x="7449230" y="630041"/>
+                <a:ext cx="3110524" cy="397994"/>
+              </a:xfrm>
+              <a:prstGeom prst="rect">
+                <a:avLst/>
+              </a:prstGeom>
+              <a:blipFill>
+                <a:blip r:embed="rId5"/>
+                <a:stretch>
+                  <a:fillRect t="-7576" b="-15152"/>
+                </a:stretch>
+              </a:blipFill>
+            </p:spPr>
+            <p:txBody>
+              <a:bodyPr/>
+              <a:lstStyle/>
+              <a:p>
+                <a:r>
+                  <a:rPr lang="sv-SE">
+                    <a:noFill/>
+                  </a:rPr>
+                  <a:t> </a:t>
+                </a:r>
+              </a:p>
+            </p:txBody>
+          </p:sp>
+        </mc:Fallback>
+      </mc:AlternateContent>
+      <mc:AlternateContent xmlns:mc="http://schemas.openxmlformats.org/markup-compatibility/2006">
+        <mc:Choice xmlns:a14="http://schemas.microsoft.com/office/drawing/2010/main" Requires="a14">
+          <p:sp>
+            <p:nvSpPr>
+              <p:cNvPr id="16" name="TextBox 15"/>
+              <p:cNvSpPr txBox="1"/>
+              <p:nvPr/>
+            </p:nvSpPr>
+            <p:spPr>
+              <a:xfrm>
+                <a:off x="2461119" y="3479284"/>
+                <a:ext cx="1320444" cy="369332"/>
+              </a:xfrm>
+              <a:prstGeom prst="rect">
+                <a:avLst/>
+              </a:prstGeom>
+              <a:noFill/>
+            </p:spPr>
+            <p:txBody>
+              <a:bodyPr wrap="square" rtlCol="0">
+                <a:spAutoFit/>
+              </a:bodyPr>
+              <a:lstStyle/>
+              <a:p>
+                <a14:m>
+                  <m:oMath xmlns:m="http://schemas.openxmlformats.org/officeDocument/2006/math">
+                    <m:sSub>
+                      <m:sSubPr>
+                        <m:ctrlPr>
+                          <a:rPr lang="en-US" b="0" i="1" dirty="0" smtClean="0">
+                            <a:latin typeface="Cambria Math" panose="02040503050406030204" pitchFamily="18" charset="0"/>
+                            <a:cs typeface="Times New Roman" panose="02020603050405020304" pitchFamily="18" charset="0"/>
+                          </a:rPr>
+                        </m:ctrlPr>
+                      </m:sSubPr>
+                      <m:e>
+                        <m:r>
+                          <m:rPr>
+                            <m:sty m:val="p"/>
+                          </m:rPr>
+                          <a:rPr lang="en-US" b="0" i="0" dirty="0" smtClean="0">
+                            <a:latin typeface="Cambria Math" panose="02040503050406030204" pitchFamily="18" charset="0"/>
+                            <a:cs typeface="Times New Roman" panose="02020603050405020304" pitchFamily="18" charset="0"/>
+                          </a:rPr>
+                          <m:t>m</m:t>
+                        </m:r>
+                      </m:e>
+                      <m:sub>
+                        <m:r>
+                          <a:rPr lang="en-US" i="1" dirty="0" smtClean="0">
+                            <a:latin typeface="Cambria Math" panose="02040503050406030204" pitchFamily="18" charset="0"/>
+                            <a:cs typeface="Times New Roman" panose="02020603050405020304" pitchFamily="18" charset="0"/>
+                          </a:rPr>
+                          <m:t>𝑎</m:t>
+                        </m:r>
+                      </m:sub>
+                    </m:sSub>
+                    <m:r>
+                      <a:rPr lang="en-US" b="0" i="1" dirty="0" smtClean="0">
+                        <a:latin typeface="Cambria Math" panose="02040503050406030204" pitchFamily="18" charset="0"/>
+                        <a:cs typeface="Times New Roman" panose="02020603050405020304" pitchFamily="18" charset="0"/>
+                      </a:rPr>
+                      <m:t> </m:t>
+                    </m:r>
+                    <m:r>
+                      <a:rPr lang="en-US" b="0" i="1" dirty="0" smtClean="0">
+                        <a:latin typeface="Cambria Math" panose="02040503050406030204" pitchFamily="18" charset="0"/>
+                        <a:cs typeface="Times New Roman" panose="02020603050405020304" pitchFamily="18" charset="0"/>
+                      </a:rPr>
+                      <m:t> </m:t>
+                    </m:r>
+                  </m:oMath>
+                </a14:m>
+                <a:r>
+                  <a:rPr lang="en-US" dirty="0" smtClean="0">
+                    <a:latin typeface="Times New Roman" panose="02020603050405020304" pitchFamily="18" charset="0"/>
+                    <a:cs typeface="Times New Roman" panose="02020603050405020304" pitchFamily="18" charset="0"/>
+                  </a:rPr>
+                  <a:t>= 0.6</a:t>
+                </a:r>
+                <a:endParaRPr lang="sv-SE" sz="1400" dirty="0">
+                  <a:latin typeface="Times New Roman" panose="02020603050405020304" pitchFamily="18" charset="0"/>
+                  <a:cs typeface="Times New Roman" panose="02020603050405020304" pitchFamily="18" charset="0"/>
+                </a:endParaRPr>
+              </a:p>
+            </p:txBody>
+          </p:sp>
+        </mc:Choice>
+        <mc:Fallback>
+          <p:sp>
+            <p:nvSpPr>
+              <p:cNvPr id="16" name="TextBox 15"/>
+              <p:cNvSpPr txBox="1">
+                <a:spLocks noRot="1" noChangeAspect="1" noMove="1" noResize="1" noEditPoints="1" noAdjustHandles="1" noChangeArrowheads="1" noChangeShapeType="1" noTextEdit="1"/>
+              </p:cNvSpPr>
+              <p:nvPr/>
+            </p:nvSpPr>
+            <p:spPr>
+              <a:xfrm>
+                <a:off x="2461119" y="3479284"/>
+                <a:ext cx="1320444" cy="369332"/>
+              </a:xfrm>
+              <a:prstGeom prst="rect">
+                <a:avLst/>
+              </a:prstGeom>
+              <a:blipFill>
+                <a:blip r:embed="rId6"/>
+                <a:stretch>
+                  <a:fillRect t="-10000" b="-26667"/>
+                </a:stretch>
+              </a:blipFill>
+            </p:spPr>
+            <p:txBody>
+              <a:bodyPr/>
+              <a:lstStyle/>
+              <a:p>
+                <a:r>
+                  <a:rPr lang="sv-SE">
+                    <a:noFill/>
+                  </a:rPr>
+                  <a:t> </a:t>
+                </a:r>
+              </a:p>
+            </p:txBody>
+          </p:sp>
+        </mc:Fallback>
+      </mc:AlternateContent>
+      <mc:AlternateContent xmlns:mc="http://schemas.openxmlformats.org/markup-compatibility/2006">
+        <mc:Choice xmlns:a14="http://schemas.microsoft.com/office/drawing/2010/main" Requires="a14">
+          <p:sp>
+            <p:nvSpPr>
+              <p:cNvPr id="18" name="TextBox 17"/>
+              <p:cNvSpPr txBox="1"/>
+              <p:nvPr/>
+            </p:nvSpPr>
+            <p:spPr>
+              <a:xfrm>
+                <a:off x="7486218" y="1069629"/>
+                <a:ext cx="3110524" cy="398507"/>
+              </a:xfrm>
+              <a:prstGeom prst="rect">
+                <a:avLst/>
+              </a:prstGeom>
+              <a:noFill/>
+            </p:spPr>
+            <p:txBody>
+              <a:bodyPr wrap="square" rtlCol="0">
+                <a:spAutoFit/>
+              </a:bodyPr>
+              <a:lstStyle/>
+              <a:p>
+                <a14:m>
+                  <m:oMath xmlns:m="http://schemas.openxmlformats.org/officeDocument/2006/math">
+                    <m:sSub>
+                      <m:sSubPr>
+                        <m:ctrlPr>
+                          <a:rPr lang="en-US" i="1" dirty="0" smtClean="0">
+                            <a:solidFill>
+                              <a:srgbClr val="249C8E"/>
+                            </a:solidFill>
+                            <a:latin typeface="Cambria Math" panose="02040503050406030204" pitchFamily="18" charset="0"/>
+                            <a:cs typeface="Times New Roman" panose="02020603050405020304" pitchFamily="18" charset="0"/>
+                          </a:rPr>
+                        </m:ctrlPr>
+                      </m:sSubPr>
+                      <m:e>
+                        <m:sSub>
+                          <m:sSubPr>
+                            <m:ctrlPr>
+                              <a:rPr lang="en-US" i="1" dirty="0">
+                                <a:solidFill>
+                                  <a:srgbClr val="249C8E"/>
+                                </a:solidFill>
+                                <a:latin typeface="Cambria Math" panose="02040503050406030204" pitchFamily="18" charset="0"/>
+                                <a:cs typeface="Times New Roman" panose="02020603050405020304" pitchFamily="18" charset="0"/>
+                              </a:rPr>
+                            </m:ctrlPr>
+                          </m:sSubPr>
+                          <m:e>
+                            <m:r>
+                              <a:rPr lang="en-US" i="1" dirty="0">
+                                <a:solidFill>
+                                  <a:srgbClr val="249C8E"/>
+                                </a:solidFill>
+                                <a:latin typeface="Cambria Math" panose="02040503050406030204" pitchFamily="18" charset="0"/>
+                                <a:cs typeface="Times New Roman" panose="02020603050405020304" pitchFamily="18" charset="0"/>
+                              </a:rPr>
+                              <m:t>𝑉</m:t>
+                            </m:r>
+                          </m:e>
+                          <m:sub>
+                            <m:r>
+                              <a:rPr lang="en-US" i="1" dirty="0">
+                                <a:solidFill>
+                                  <a:srgbClr val="249C8E"/>
+                                </a:solidFill>
+                                <a:latin typeface="Cambria Math" panose="02040503050406030204" pitchFamily="18" charset="0"/>
+                                <a:cs typeface="Times New Roman" panose="02020603050405020304" pitchFamily="18" charset="0"/>
+                              </a:rPr>
+                              <m:t>𝐶𝑀</m:t>
+                            </m:r>
+                          </m:sub>
+                        </m:sSub>
+                      </m:e>
+                      <m:sub>
+                        <m:r>
+                          <a:rPr lang="en-US" i="1" dirty="0">
+                            <a:solidFill>
+                              <a:srgbClr val="249C8E"/>
+                            </a:solidFill>
+                            <a:latin typeface="Cambria Math" panose="02040503050406030204" pitchFamily="18" charset="0"/>
+                            <a:cs typeface="Times New Roman" panose="02020603050405020304" pitchFamily="18" charset="0"/>
+                          </a:rPr>
+                          <m:t>𝑊</m:t>
+                        </m:r>
+                        <m:r>
+                          <a:rPr lang="en-US" i="1" dirty="0">
+                            <a:solidFill>
+                              <a:srgbClr val="249C8E"/>
+                            </a:solidFill>
+                            <a:latin typeface="Cambria Math" panose="02040503050406030204" pitchFamily="18" charset="0"/>
+                            <a:cs typeface="Times New Roman" panose="02020603050405020304" pitchFamily="18" charset="0"/>
+                          </a:rPr>
+                          <m:t>−</m:t>
+                        </m:r>
+                        <m:r>
+                          <a:rPr lang="en-US" i="1" dirty="0">
+                            <a:solidFill>
+                              <a:srgbClr val="249C8E"/>
+                            </a:solidFill>
+                            <a:latin typeface="Cambria Math" panose="02040503050406030204" pitchFamily="18" charset="0"/>
+                            <a:cs typeface="Times New Roman" panose="02020603050405020304" pitchFamily="18" charset="0"/>
+                          </a:rPr>
+                          <m:t>𝑅𝑀𝑆</m:t>
+                        </m:r>
+                      </m:sub>
+                    </m:sSub>
+                  </m:oMath>
+                </a14:m>
+                <a:r>
+                  <a:rPr lang="en-US" dirty="0" smtClean="0">
+                    <a:solidFill>
+                      <a:srgbClr val="249C8E"/>
+                    </a:solidFill>
+                    <a:latin typeface="Times New Roman" panose="02020603050405020304" pitchFamily="18" charset="0"/>
+                    <a:cs typeface="Times New Roman" panose="02020603050405020304" pitchFamily="18" charset="0"/>
+                  </a:rPr>
+                  <a:t>=0.0221</a:t>
+                </a:r>
+                <a:endParaRPr lang="sv-SE" sz="1400" dirty="0">
+                  <a:solidFill>
+                    <a:srgbClr val="249C8E"/>
+                  </a:solidFill>
+                  <a:latin typeface="Times New Roman" panose="02020603050405020304" pitchFamily="18" charset="0"/>
+                  <a:cs typeface="Times New Roman" panose="02020603050405020304" pitchFamily="18" charset="0"/>
+                </a:endParaRPr>
+              </a:p>
+            </p:txBody>
+          </p:sp>
+        </mc:Choice>
+        <mc:Fallback>
+          <p:sp>
+            <p:nvSpPr>
+              <p:cNvPr id="18" name="TextBox 17"/>
+              <p:cNvSpPr txBox="1">
+                <a:spLocks noRot="1" noChangeAspect="1" noMove="1" noResize="1" noEditPoints="1" noAdjustHandles="1" noChangeArrowheads="1" noChangeShapeType="1" noTextEdit="1"/>
+              </p:cNvSpPr>
+              <p:nvPr/>
+            </p:nvSpPr>
+            <p:spPr>
+              <a:xfrm>
+                <a:off x="7486218" y="1069629"/>
+                <a:ext cx="3110524" cy="398507"/>
+              </a:xfrm>
+              <a:prstGeom prst="rect">
+                <a:avLst/>
+              </a:prstGeom>
+              <a:blipFill>
+                <a:blip r:embed="rId7"/>
+                <a:stretch>
+                  <a:fillRect t="-7576" b="-15152"/>
+                </a:stretch>
+              </a:blipFill>
+            </p:spPr>
+            <p:txBody>
+              <a:bodyPr/>
+              <a:lstStyle/>
+              <a:p>
+                <a:r>
+                  <a:rPr lang="sv-SE">
+                    <a:noFill/>
+                  </a:rPr>
+                  <a:t> </a:t>
+                </a:r>
+              </a:p>
+            </p:txBody>
+          </p:sp>
+        </mc:Fallback>
+      </mc:AlternateContent>
+      <p:pic>
+        <p:nvPicPr>
+          <p:cNvPr id="17" name="Picture 16"/>
+          <p:cNvPicPr>
+            <a:picLocks noChangeAspect="1"/>
+          </p:cNvPicPr>
+          <p:nvPr/>
+        </p:nvPicPr>
+        <p:blipFill rotWithShape="1">
+          <a:blip r:embed="rId8"/>
+          <a:srcRect l="24694" t="9287" r="11088" b="77653"/>
+          <a:stretch/>
+        </p:blipFill>
+        <p:spPr>
+          <a:xfrm>
+            <a:off x="3658384" y="4979177"/>
+            <a:ext cx="3425371" cy="522464"/>
+          </a:xfrm>
+          <a:prstGeom prst="rect">
+            <a:avLst/>
+          </a:prstGeom>
+        </p:spPr>
+      </p:pic>
+    </p:spTree>
+    <p:extLst>
+      <p:ext uri="{BB962C8B-B14F-4D97-AF65-F5344CB8AC3E}">
+        <p14:creationId xmlns:p14="http://schemas.microsoft.com/office/powerpoint/2010/main" val="3205737642"/>
+      </p:ext>
+    </p:extLst>
+  </p:cSld>
+  <p:clrMapOvr>
+    <a:masterClrMapping/>
+  </p:clrMapOvr>
+</p:sld>
+</file>
+
+<file path=ppt/slides/slide8.xml><?xml version="1.0" encoding="utf-8"?>
+<p:sld xmlns:a="http://schemas.openxmlformats.org/drawingml/2006/main" xmlns:r="http://schemas.openxmlformats.org/officeDocument/2006/relationships" xmlns:p="http://schemas.openxmlformats.org/presentationml/2006/main">
+  <p:cSld>
+    <p:spTree>
+      <p:nvGrpSpPr>
+        <p:cNvPr id="1" name=""/>
+        <p:cNvGrpSpPr/>
+        <p:nvPr/>
+      </p:nvGrpSpPr>
+      <p:grpSpPr>
+        <a:xfrm>
+          <a:off x="0" y="0"/>
+          <a:ext cx="0" cy="0"/>
+          <a:chOff x="0" y="0"/>
+          <a:chExt cx="0" cy="0"/>
+        </a:xfrm>
+      </p:grpSpPr>
+      <p:pic>
+        <p:nvPicPr>
+          <p:cNvPr id="5" name="Picture 4"/>
+          <p:cNvPicPr>
+            <a:picLocks noChangeAspect="1"/>
+          </p:cNvPicPr>
+          <p:nvPr/>
+        </p:nvPicPr>
+        <p:blipFill>
+          <a:blip r:embed="rId2"/>
+          <a:stretch>
+            <a:fillRect/>
+          </a:stretch>
+        </p:blipFill>
+        <p:spPr>
+          <a:xfrm>
+            <a:off x="5455712" y="308854"/>
+            <a:ext cx="5334000" cy="4000500"/>
+          </a:xfrm>
+          <a:prstGeom prst="rect">
+            <a:avLst/>
+          </a:prstGeom>
+        </p:spPr>
+      </p:pic>
+      <p:pic>
+        <p:nvPicPr>
+          <p:cNvPr id="2" name="Picture 1"/>
+          <p:cNvPicPr>
+            <a:picLocks noChangeAspect="1"/>
+          </p:cNvPicPr>
+          <p:nvPr/>
+        </p:nvPicPr>
+        <p:blipFill>
+          <a:blip r:embed="rId3"/>
+          <a:stretch>
+            <a:fillRect/>
+          </a:stretch>
+        </p:blipFill>
+        <p:spPr>
+          <a:xfrm>
+            <a:off x="454341" y="290509"/>
+            <a:ext cx="5334000" cy="4000500"/>
+          </a:xfrm>
+          <a:prstGeom prst="rect">
+            <a:avLst/>
+          </a:prstGeom>
+        </p:spPr>
+      </p:pic>
+      <p:sp>
+        <p:nvSpPr>
+          <p:cNvPr id="4" name="TextBox 3"/>
+          <p:cNvSpPr txBox="1"/>
+          <p:nvPr/>
+        </p:nvSpPr>
+        <p:spPr>
+          <a:xfrm>
+            <a:off x="2385067" y="3940022"/>
+            <a:ext cx="2089150" cy="369332"/>
+          </a:xfrm>
+          <a:prstGeom prst="rect">
+            <a:avLst/>
+          </a:prstGeom>
+          <a:noFill/>
+        </p:spPr>
+        <p:txBody>
+          <a:bodyPr wrap="square" rtlCol="0">
+            <a:spAutoFit/>
+          </a:bodyPr>
+          <a:lstStyle/>
+          <a:p>
+            <a:r>
+              <a:rPr lang="en-US" dirty="0" smtClean="0">
+                <a:latin typeface="Times New Roman" panose="02020603050405020304" pitchFamily="18" charset="0"/>
+                <a:cs typeface="Times New Roman" panose="02020603050405020304" pitchFamily="18" charset="0"/>
+              </a:rPr>
+              <a:t>Time: 2ms/div</a:t>
+            </a:r>
+            <a:endParaRPr lang="sv-SE" dirty="0">
+              <a:latin typeface="Times New Roman" panose="02020603050405020304" pitchFamily="18" charset="0"/>
+              <a:cs typeface="Times New Roman" panose="02020603050405020304" pitchFamily="18" charset="0"/>
+            </a:endParaRPr>
+          </a:p>
+        </p:txBody>
+      </p:sp>
+      <p:sp>
+        <p:nvSpPr>
+          <p:cNvPr id="6" name="TextBox 5"/>
+          <p:cNvSpPr txBox="1"/>
+          <p:nvPr/>
+        </p:nvSpPr>
+        <p:spPr>
+          <a:xfrm rot="16200000">
+            <a:off x="-771108" y="2106093"/>
+            <a:ext cx="3301523" cy="369332"/>
+          </a:xfrm>
+          <a:prstGeom prst="rect">
+            <a:avLst/>
+          </a:prstGeom>
+          <a:noFill/>
+        </p:spPr>
+        <p:txBody>
+          <a:bodyPr wrap="square" rtlCol="0">
+            <a:spAutoFit/>
+          </a:bodyPr>
+          <a:lstStyle/>
+          <a:p>
+            <a:r>
+              <a:rPr lang="en-US" dirty="0" smtClean="0">
+                <a:latin typeface="Times New Roman" panose="02020603050405020304" pitchFamily="18" charset="0"/>
+                <a:cs typeface="Times New Roman" panose="02020603050405020304" pitchFamily="18" charset="0"/>
+              </a:rPr>
+              <a:t>Normalized Voltage: </a:t>
+            </a:r>
+            <a:r>
+              <a:rPr lang="en-US" dirty="0" smtClean="0">
+                <a:latin typeface="Times New Roman" panose="02020603050405020304" pitchFamily="18" charset="0"/>
+                <a:cs typeface="Times New Roman" panose="02020603050405020304" pitchFamily="18" charset="0"/>
+              </a:rPr>
+              <a:t>0.16 </a:t>
+            </a:r>
+            <a:r>
+              <a:rPr lang="en-US" dirty="0" err="1" smtClean="0">
+                <a:latin typeface="Times New Roman" panose="02020603050405020304" pitchFamily="18" charset="0"/>
+                <a:cs typeface="Times New Roman" panose="02020603050405020304" pitchFamily="18" charset="0"/>
+              </a:rPr>
+              <a:t>p.u</a:t>
+            </a:r>
+            <a:r>
+              <a:rPr lang="en-US" dirty="0" smtClean="0">
+                <a:latin typeface="Times New Roman" panose="02020603050405020304" pitchFamily="18" charset="0"/>
+                <a:cs typeface="Times New Roman" panose="02020603050405020304" pitchFamily="18" charset="0"/>
+              </a:rPr>
+              <a:t>./div</a:t>
+            </a:r>
+            <a:endParaRPr lang="sv-SE" dirty="0">
+              <a:latin typeface="Times New Roman" panose="02020603050405020304" pitchFamily="18" charset="0"/>
+              <a:cs typeface="Times New Roman" panose="02020603050405020304" pitchFamily="18" charset="0"/>
+            </a:endParaRPr>
+          </a:p>
+        </p:txBody>
+      </p:sp>
+      <p:pic>
+        <p:nvPicPr>
+          <p:cNvPr id="3" name="Picture 2"/>
+          <p:cNvPicPr>
+            <a:picLocks noChangeAspect="1"/>
+          </p:cNvPicPr>
+          <p:nvPr/>
+        </p:nvPicPr>
+        <p:blipFill rotWithShape="1">
+          <a:blip r:embed="rId4"/>
+          <a:srcRect l="23691" t="8768" r="12500" b="78058"/>
+          <a:stretch/>
+        </p:blipFill>
+        <p:spPr>
+          <a:xfrm>
+            <a:off x="6450831" y="1217837"/>
+            <a:ext cx="3403600" cy="527050"/>
+          </a:xfrm>
+          <a:prstGeom prst="rect">
+            <a:avLst/>
+          </a:prstGeom>
+        </p:spPr>
+      </p:pic>
+      <p:sp>
+        <p:nvSpPr>
+          <p:cNvPr id="13" name="TextBox 12"/>
+          <p:cNvSpPr txBox="1"/>
+          <p:nvPr/>
+        </p:nvSpPr>
+        <p:spPr>
+          <a:xfrm rot="16200000">
+            <a:off x="4371461" y="1940521"/>
+            <a:ext cx="2368551" cy="369332"/>
+          </a:xfrm>
+          <a:prstGeom prst="rect">
+            <a:avLst/>
+          </a:prstGeom>
+          <a:noFill/>
+        </p:spPr>
+        <p:txBody>
+          <a:bodyPr wrap="square" rtlCol="0">
+            <a:spAutoFit/>
+          </a:bodyPr>
+          <a:lstStyle/>
+          <a:p>
+            <a:r>
+              <a:rPr lang="en-US" dirty="0" smtClean="0">
+                <a:latin typeface="Times New Roman" panose="02020603050405020304" pitchFamily="18" charset="0"/>
+                <a:cs typeface="Times New Roman" panose="02020603050405020304" pitchFamily="18" charset="0"/>
+              </a:rPr>
+              <a:t>Normalized </a:t>
+            </a:r>
+            <a:r>
+              <a:rPr lang="en-US" dirty="0" smtClean="0">
+                <a:latin typeface="Times New Roman" panose="02020603050405020304" pitchFamily="18" charset="0"/>
+                <a:cs typeface="Times New Roman" panose="02020603050405020304" pitchFamily="18" charset="0"/>
+              </a:rPr>
+              <a:t>Voltage</a:t>
+            </a:r>
+            <a:endParaRPr lang="sv-SE" dirty="0">
+              <a:latin typeface="Times New Roman" panose="02020603050405020304" pitchFamily="18" charset="0"/>
+              <a:cs typeface="Times New Roman" panose="02020603050405020304" pitchFamily="18" charset="0"/>
+            </a:endParaRPr>
+          </a:p>
+        </p:txBody>
+      </p:sp>
+      <p:sp>
+        <p:nvSpPr>
+          <p:cNvPr id="14" name="TextBox 13"/>
+          <p:cNvSpPr txBox="1"/>
+          <p:nvPr/>
+        </p:nvSpPr>
+        <p:spPr>
+          <a:xfrm>
+            <a:off x="5138469" y="3940022"/>
+            <a:ext cx="2089150" cy="369332"/>
+          </a:xfrm>
+          <a:prstGeom prst="rect">
+            <a:avLst/>
+          </a:prstGeom>
+          <a:noFill/>
+        </p:spPr>
+        <p:txBody>
+          <a:bodyPr wrap="square" rtlCol="0">
+            <a:spAutoFit/>
+          </a:bodyPr>
+          <a:lstStyle/>
+          <a:p>
+            <a:r>
+              <a:rPr lang="en-US" dirty="0" smtClean="0">
+                <a:latin typeface="Times New Roman" panose="02020603050405020304" pitchFamily="18" charset="0"/>
+                <a:cs typeface="Times New Roman" panose="02020603050405020304" pitchFamily="18" charset="0"/>
+              </a:rPr>
+              <a:t>Frequency</a:t>
+            </a:r>
+            <a:endParaRPr lang="sv-SE" dirty="0">
+              <a:latin typeface="Times New Roman" panose="02020603050405020304" pitchFamily="18" charset="0"/>
+              <a:cs typeface="Times New Roman" panose="02020603050405020304" pitchFamily="18" charset="0"/>
+            </a:endParaRPr>
+          </a:p>
+        </p:txBody>
+      </p:sp>
+      <mc:AlternateContent xmlns:mc="http://schemas.openxmlformats.org/markup-compatibility/2006">
+        <mc:Choice xmlns:a14="http://schemas.microsoft.com/office/drawing/2010/main" Requires="a14">
+          <p:sp>
+            <p:nvSpPr>
+              <p:cNvPr id="15" name="TextBox 14"/>
+              <p:cNvSpPr txBox="1"/>
+              <p:nvPr/>
+            </p:nvSpPr>
+            <p:spPr>
+              <a:xfrm>
+                <a:off x="6251659" y="639997"/>
+                <a:ext cx="3110524" cy="397994"/>
+              </a:xfrm>
+              <a:prstGeom prst="rect">
+                <a:avLst/>
+              </a:prstGeom>
+              <a:noFill/>
+            </p:spPr>
+            <p:txBody>
+              <a:bodyPr wrap="square" rtlCol="0">
+                <a:spAutoFit/>
+              </a:bodyPr>
+              <a:lstStyle/>
+              <a:p>
+                <a14:m>
+                  <m:oMath xmlns:m="http://schemas.openxmlformats.org/officeDocument/2006/math">
+                    <m:sSub>
+                      <m:sSubPr>
+                        <m:ctrlPr>
+                          <a:rPr lang="en-US" i="1" dirty="0" smtClean="0">
+                            <a:solidFill>
+                              <a:srgbClr val="A71993"/>
+                            </a:solidFill>
+                            <a:latin typeface="Cambria Math" panose="02040503050406030204" pitchFamily="18" charset="0"/>
+                            <a:cs typeface="Times New Roman" panose="02020603050405020304" pitchFamily="18" charset="0"/>
+                          </a:rPr>
+                        </m:ctrlPr>
+                      </m:sSubPr>
+                      <m:e>
+                        <m:sSub>
+                          <m:sSubPr>
+                            <m:ctrlPr>
+                              <a:rPr lang="en-US" i="1" dirty="0" smtClean="0">
+                                <a:solidFill>
+                                  <a:srgbClr val="A71993"/>
+                                </a:solidFill>
+                                <a:latin typeface="Cambria Math" panose="02040503050406030204" pitchFamily="18" charset="0"/>
+                                <a:cs typeface="Times New Roman" panose="02020603050405020304" pitchFamily="18" charset="0"/>
+                              </a:rPr>
+                            </m:ctrlPr>
+                          </m:sSubPr>
+                          <m:e>
+                            <m:r>
+                              <a:rPr lang="en-US" i="1" dirty="0" smtClean="0">
+                                <a:solidFill>
+                                  <a:srgbClr val="A71993"/>
+                                </a:solidFill>
+                                <a:latin typeface="Cambria Math" panose="02040503050406030204" pitchFamily="18" charset="0"/>
+                                <a:cs typeface="Times New Roman" panose="02020603050405020304" pitchFamily="18" charset="0"/>
+                              </a:rPr>
+                              <m:t>𝑉</m:t>
+                            </m:r>
+                          </m:e>
+                          <m:sub>
+                            <m:r>
+                              <a:rPr lang="en-US" i="1" dirty="0" smtClean="0">
+                                <a:solidFill>
+                                  <a:srgbClr val="A71993"/>
+                                </a:solidFill>
+                                <a:latin typeface="Cambria Math" panose="02040503050406030204" pitchFamily="18" charset="0"/>
+                                <a:cs typeface="Times New Roman" panose="02020603050405020304" pitchFamily="18" charset="0"/>
+                              </a:rPr>
+                              <m:t>𝐶𝑀</m:t>
+                            </m:r>
+                          </m:sub>
+                        </m:sSub>
+                      </m:e>
+                      <m:sub>
+                        <m:r>
+                          <a:rPr lang="en-US" i="1" dirty="0" smtClean="0">
+                            <a:solidFill>
+                              <a:srgbClr val="A71993"/>
+                            </a:solidFill>
+                            <a:latin typeface="Cambria Math" panose="02040503050406030204" pitchFamily="18" charset="0"/>
+                            <a:cs typeface="Times New Roman" panose="02020603050405020304" pitchFamily="18" charset="0"/>
+                          </a:rPr>
+                          <m:t>𝑊</m:t>
+                        </m:r>
+                        <m:r>
+                          <a:rPr lang="en-US" b="0" i="1" dirty="0" smtClean="0">
+                            <a:solidFill>
+                              <a:srgbClr val="A71993"/>
+                            </a:solidFill>
+                            <a:latin typeface="Cambria Math" panose="02040503050406030204" pitchFamily="18" charset="0"/>
+                            <a:cs typeface="Times New Roman" panose="02020603050405020304" pitchFamily="18" charset="0"/>
+                          </a:rPr>
+                          <m:t>−</m:t>
+                        </m:r>
+                        <m:r>
+                          <a:rPr lang="en-US" b="0" i="1" dirty="0" smtClean="0">
+                            <a:solidFill>
+                              <a:srgbClr val="A71993"/>
+                            </a:solidFill>
+                            <a:latin typeface="Cambria Math" panose="02040503050406030204" pitchFamily="18" charset="0"/>
+                            <a:cs typeface="Times New Roman" panose="02020603050405020304" pitchFamily="18" charset="0"/>
+                          </a:rPr>
+                          <m:t>𝑅𝑀𝑆</m:t>
+                        </m:r>
+                      </m:sub>
+                    </m:sSub>
+                    <m:r>
+                      <a:rPr lang="en-US" b="0" i="1" dirty="0" smtClean="0">
+                        <a:solidFill>
+                          <a:srgbClr val="A71993"/>
+                        </a:solidFill>
+                        <a:latin typeface="Cambria Math" panose="02040503050406030204" pitchFamily="18" charset="0"/>
+                        <a:cs typeface="Times New Roman" panose="02020603050405020304" pitchFamily="18" charset="0"/>
+                      </a:rPr>
+                      <m:t> </m:t>
+                    </m:r>
+                  </m:oMath>
+                </a14:m>
+                <a:r>
+                  <a:rPr lang="en-US" dirty="0" smtClean="0">
+                    <a:solidFill>
+                      <a:srgbClr val="A71993"/>
+                    </a:solidFill>
+                    <a:latin typeface="Times New Roman" panose="02020603050405020304" pitchFamily="18" charset="0"/>
+                    <a:cs typeface="Times New Roman" panose="02020603050405020304" pitchFamily="18" charset="0"/>
+                  </a:rPr>
+                  <a:t>=0.0051</a:t>
+                </a:r>
+                <a:endParaRPr lang="sv-SE" sz="1400" dirty="0">
+                  <a:solidFill>
+                    <a:srgbClr val="A71993"/>
+                  </a:solidFill>
+                  <a:latin typeface="Times New Roman" panose="02020603050405020304" pitchFamily="18" charset="0"/>
+                  <a:cs typeface="Times New Roman" panose="02020603050405020304" pitchFamily="18" charset="0"/>
+                </a:endParaRPr>
+              </a:p>
+            </p:txBody>
+          </p:sp>
+        </mc:Choice>
+        <mc:Fallback>
+          <p:sp>
+            <p:nvSpPr>
+              <p:cNvPr id="15" name="TextBox 14"/>
+              <p:cNvSpPr txBox="1">
+                <a:spLocks noRot="1" noChangeAspect="1" noMove="1" noResize="1" noEditPoints="1" noAdjustHandles="1" noChangeArrowheads="1" noChangeShapeType="1" noTextEdit="1"/>
+              </p:cNvSpPr>
+              <p:nvPr/>
+            </p:nvSpPr>
+            <p:spPr>
+              <a:xfrm>
+                <a:off x="6251659" y="639997"/>
+                <a:ext cx="3110524" cy="397994"/>
+              </a:xfrm>
+              <a:prstGeom prst="rect">
+                <a:avLst/>
+              </a:prstGeom>
+              <a:blipFill>
+                <a:blip r:embed="rId5"/>
+                <a:stretch>
+                  <a:fillRect t="-9231" b="-16923"/>
+                </a:stretch>
+              </a:blipFill>
+            </p:spPr>
+            <p:txBody>
+              <a:bodyPr/>
+              <a:lstStyle/>
+              <a:p>
+                <a:r>
+                  <a:rPr lang="sv-SE">
+                    <a:noFill/>
+                  </a:rPr>
+                  <a:t> </a:t>
+                </a:r>
+              </a:p>
+            </p:txBody>
+          </p:sp>
+        </mc:Fallback>
+      </mc:AlternateContent>
+      <mc:AlternateContent xmlns:mc="http://schemas.openxmlformats.org/markup-compatibility/2006">
+        <mc:Choice xmlns:a14="http://schemas.microsoft.com/office/drawing/2010/main" Requires="a14">
+          <p:sp>
+            <p:nvSpPr>
+              <p:cNvPr id="16" name="TextBox 15"/>
+              <p:cNvSpPr txBox="1"/>
+              <p:nvPr/>
+            </p:nvSpPr>
+            <p:spPr>
+              <a:xfrm>
+                <a:off x="7628804" y="1863567"/>
+                <a:ext cx="1320444" cy="400110"/>
+              </a:xfrm>
+              <a:prstGeom prst="rect">
+                <a:avLst/>
+              </a:prstGeom>
+              <a:noFill/>
+            </p:spPr>
+            <p:txBody>
+              <a:bodyPr wrap="square" rtlCol="0">
+                <a:spAutoFit/>
+              </a:bodyPr>
+              <a:lstStyle/>
+              <a:p>
+                <a14:m>
+                  <m:oMath xmlns:m="http://schemas.openxmlformats.org/officeDocument/2006/math">
+                    <m:sSub>
+                      <m:sSubPr>
+                        <m:ctrlPr>
+                          <a:rPr lang="en-US" sz="2000" b="0" i="1" dirty="0" smtClean="0">
+                            <a:latin typeface="Cambria Math" panose="02040503050406030204" pitchFamily="18" charset="0"/>
+                            <a:cs typeface="Times New Roman" panose="02020603050405020304" pitchFamily="18" charset="0"/>
+                          </a:rPr>
+                        </m:ctrlPr>
+                      </m:sSubPr>
+                      <m:e>
+                        <m:r>
+                          <m:rPr>
+                            <m:sty m:val="p"/>
+                          </m:rPr>
+                          <a:rPr lang="en-US" sz="2000" b="0" i="0" dirty="0" smtClean="0">
+                            <a:latin typeface="Cambria Math" panose="02040503050406030204" pitchFamily="18" charset="0"/>
+                            <a:cs typeface="Times New Roman" panose="02020603050405020304" pitchFamily="18" charset="0"/>
+                          </a:rPr>
+                          <m:t>m</m:t>
+                        </m:r>
+                      </m:e>
+                      <m:sub>
+                        <m:r>
+                          <a:rPr lang="en-US" sz="2000" i="1" dirty="0" smtClean="0">
+                            <a:latin typeface="Cambria Math" panose="02040503050406030204" pitchFamily="18" charset="0"/>
+                            <a:cs typeface="Times New Roman" panose="02020603050405020304" pitchFamily="18" charset="0"/>
+                          </a:rPr>
+                          <m:t>𝑎</m:t>
+                        </m:r>
+                      </m:sub>
+                    </m:sSub>
+                    <m:r>
+                      <a:rPr lang="en-US" sz="2000" b="0" i="1" dirty="0" smtClean="0">
+                        <a:latin typeface="Cambria Math" panose="02040503050406030204" pitchFamily="18" charset="0"/>
+                        <a:cs typeface="Times New Roman" panose="02020603050405020304" pitchFamily="18" charset="0"/>
+                      </a:rPr>
+                      <m:t> </m:t>
+                    </m:r>
+                    <m:r>
+                      <a:rPr lang="en-US" sz="2000" b="0" i="1" dirty="0" smtClean="0">
+                        <a:latin typeface="Cambria Math" panose="02040503050406030204" pitchFamily="18" charset="0"/>
+                        <a:cs typeface="Times New Roman" panose="02020603050405020304" pitchFamily="18" charset="0"/>
+                      </a:rPr>
+                      <m:t> </m:t>
+                    </m:r>
+                  </m:oMath>
+                </a14:m>
+                <a:r>
+                  <a:rPr lang="en-US" sz="2000" dirty="0" smtClean="0">
+                    <a:latin typeface="Times New Roman" panose="02020603050405020304" pitchFamily="18" charset="0"/>
+                    <a:cs typeface="Times New Roman" panose="02020603050405020304" pitchFamily="18" charset="0"/>
+                  </a:rPr>
+                  <a:t>= 0.8</a:t>
+                </a:r>
+                <a:endParaRPr lang="sv-SE" sz="1600" dirty="0">
+                  <a:latin typeface="Times New Roman" panose="02020603050405020304" pitchFamily="18" charset="0"/>
+                  <a:cs typeface="Times New Roman" panose="02020603050405020304" pitchFamily="18" charset="0"/>
+                </a:endParaRPr>
+              </a:p>
+            </p:txBody>
+          </p:sp>
+        </mc:Choice>
+        <mc:Fallback>
+          <p:sp>
+            <p:nvSpPr>
+              <p:cNvPr id="16" name="TextBox 15"/>
+              <p:cNvSpPr txBox="1">
+                <a:spLocks noRot="1" noChangeAspect="1" noMove="1" noResize="1" noEditPoints="1" noAdjustHandles="1" noChangeArrowheads="1" noChangeShapeType="1" noTextEdit="1"/>
+              </p:cNvSpPr>
+              <p:nvPr/>
+            </p:nvSpPr>
+            <p:spPr>
+              <a:xfrm>
+                <a:off x="7628804" y="1863567"/>
+                <a:ext cx="1320444" cy="400110"/>
+              </a:xfrm>
+              <a:prstGeom prst="rect">
+                <a:avLst/>
+              </a:prstGeom>
+              <a:blipFill>
+                <a:blip r:embed="rId6"/>
+                <a:stretch>
+                  <a:fillRect t="-9231" b="-27692"/>
+                </a:stretch>
+              </a:blipFill>
+            </p:spPr>
+            <p:txBody>
+              <a:bodyPr/>
+              <a:lstStyle/>
+              <a:p>
+                <a:r>
+                  <a:rPr lang="sv-SE">
+                    <a:noFill/>
+                  </a:rPr>
+                  <a:t> </a:t>
+                </a:r>
+              </a:p>
+            </p:txBody>
+          </p:sp>
+        </mc:Fallback>
+      </mc:AlternateContent>
+      <mc:AlternateContent xmlns:mc="http://schemas.openxmlformats.org/markup-compatibility/2006">
+        <mc:Choice xmlns:a14="http://schemas.microsoft.com/office/drawing/2010/main" Requires="a14">
+          <p:sp>
+            <p:nvSpPr>
+              <p:cNvPr id="18" name="TextBox 17"/>
+              <p:cNvSpPr txBox="1"/>
+              <p:nvPr/>
+            </p:nvSpPr>
+            <p:spPr>
+              <a:xfrm>
+                <a:off x="8270239" y="629020"/>
+                <a:ext cx="3110524" cy="398507"/>
+              </a:xfrm>
+              <a:prstGeom prst="rect">
+                <a:avLst/>
+              </a:prstGeom>
+              <a:noFill/>
+            </p:spPr>
+            <p:txBody>
+              <a:bodyPr wrap="square" rtlCol="0">
+                <a:spAutoFit/>
+              </a:bodyPr>
+              <a:lstStyle/>
+              <a:p>
+                <a14:m>
+                  <m:oMath xmlns:m="http://schemas.openxmlformats.org/officeDocument/2006/math">
+                    <m:sSub>
+                      <m:sSubPr>
+                        <m:ctrlPr>
+                          <a:rPr lang="en-US" i="1" dirty="0" smtClean="0">
+                            <a:solidFill>
+                              <a:srgbClr val="249C8E"/>
+                            </a:solidFill>
+                            <a:latin typeface="Cambria Math" panose="02040503050406030204" pitchFamily="18" charset="0"/>
+                            <a:cs typeface="Times New Roman" panose="02020603050405020304" pitchFamily="18" charset="0"/>
+                          </a:rPr>
+                        </m:ctrlPr>
+                      </m:sSubPr>
+                      <m:e>
+                        <m:sSub>
+                          <m:sSubPr>
+                            <m:ctrlPr>
+                              <a:rPr lang="en-US" i="1" dirty="0">
+                                <a:solidFill>
+                                  <a:srgbClr val="249C8E"/>
+                                </a:solidFill>
+                                <a:latin typeface="Cambria Math" panose="02040503050406030204" pitchFamily="18" charset="0"/>
+                                <a:cs typeface="Times New Roman" panose="02020603050405020304" pitchFamily="18" charset="0"/>
+                              </a:rPr>
+                            </m:ctrlPr>
+                          </m:sSubPr>
+                          <m:e>
+                            <m:r>
+                              <a:rPr lang="en-US" i="1" dirty="0">
+                                <a:solidFill>
+                                  <a:srgbClr val="249C8E"/>
+                                </a:solidFill>
+                                <a:latin typeface="Cambria Math" panose="02040503050406030204" pitchFamily="18" charset="0"/>
+                                <a:cs typeface="Times New Roman" panose="02020603050405020304" pitchFamily="18" charset="0"/>
+                              </a:rPr>
+                              <m:t>𝑉</m:t>
+                            </m:r>
+                          </m:e>
+                          <m:sub>
+                            <m:r>
+                              <a:rPr lang="en-US" i="1" dirty="0">
+                                <a:solidFill>
+                                  <a:srgbClr val="249C8E"/>
+                                </a:solidFill>
+                                <a:latin typeface="Cambria Math" panose="02040503050406030204" pitchFamily="18" charset="0"/>
+                                <a:cs typeface="Times New Roman" panose="02020603050405020304" pitchFamily="18" charset="0"/>
+                              </a:rPr>
+                              <m:t>𝐶𝑀</m:t>
+                            </m:r>
+                          </m:sub>
+                        </m:sSub>
+                      </m:e>
+                      <m:sub>
+                        <m:r>
+                          <a:rPr lang="en-US" i="1" dirty="0">
+                            <a:solidFill>
+                              <a:srgbClr val="249C8E"/>
+                            </a:solidFill>
+                            <a:latin typeface="Cambria Math" panose="02040503050406030204" pitchFamily="18" charset="0"/>
+                            <a:cs typeface="Times New Roman" panose="02020603050405020304" pitchFamily="18" charset="0"/>
+                          </a:rPr>
+                          <m:t>𝑊</m:t>
+                        </m:r>
+                        <m:r>
+                          <a:rPr lang="en-US" i="1" dirty="0">
+                            <a:solidFill>
+                              <a:srgbClr val="249C8E"/>
+                            </a:solidFill>
+                            <a:latin typeface="Cambria Math" panose="02040503050406030204" pitchFamily="18" charset="0"/>
+                            <a:cs typeface="Times New Roman" panose="02020603050405020304" pitchFamily="18" charset="0"/>
+                          </a:rPr>
+                          <m:t>−</m:t>
+                        </m:r>
+                        <m:r>
+                          <a:rPr lang="en-US" i="1" dirty="0">
+                            <a:solidFill>
+                              <a:srgbClr val="249C8E"/>
+                            </a:solidFill>
+                            <a:latin typeface="Cambria Math" panose="02040503050406030204" pitchFamily="18" charset="0"/>
+                            <a:cs typeface="Times New Roman" panose="02020603050405020304" pitchFamily="18" charset="0"/>
+                          </a:rPr>
+                          <m:t>𝑅𝑀𝑆</m:t>
+                        </m:r>
+                      </m:sub>
+                    </m:sSub>
+                  </m:oMath>
+                </a14:m>
+                <a:r>
+                  <a:rPr lang="en-US" dirty="0" smtClean="0">
+                    <a:solidFill>
+                      <a:srgbClr val="249C8E"/>
+                    </a:solidFill>
+                    <a:latin typeface="Times New Roman" panose="02020603050405020304" pitchFamily="18" charset="0"/>
+                    <a:cs typeface="Times New Roman" panose="02020603050405020304" pitchFamily="18" charset="0"/>
+                  </a:rPr>
+                  <a:t>=0.0014</a:t>
+                </a:r>
+                <a:endParaRPr lang="sv-SE" sz="1400" dirty="0">
+                  <a:solidFill>
+                    <a:srgbClr val="249C8E"/>
+                  </a:solidFill>
+                  <a:latin typeface="Times New Roman" panose="02020603050405020304" pitchFamily="18" charset="0"/>
+                  <a:cs typeface="Times New Roman" panose="02020603050405020304" pitchFamily="18" charset="0"/>
+                </a:endParaRPr>
+              </a:p>
+            </p:txBody>
+          </p:sp>
+        </mc:Choice>
+        <mc:Fallback>
+          <p:sp>
+            <p:nvSpPr>
+              <p:cNvPr id="18" name="TextBox 17"/>
+              <p:cNvSpPr txBox="1">
+                <a:spLocks noRot="1" noChangeAspect="1" noMove="1" noResize="1" noEditPoints="1" noAdjustHandles="1" noChangeArrowheads="1" noChangeShapeType="1" noTextEdit="1"/>
+              </p:cNvSpPr>
+              <p:nvPr/>
+            </p:nvSpPr>
+            <p:spPr>
+              <a:xfrm>
+                <a:off x="8270239" y="629020"/>
+                <a:ext cx="3110524" cy="398507"/>
+              </a:xfrm>
+              <a:prstGeom prst="rect">
+                <a:avLst/>
+              </a:prstGeom>
+              <a:blipFill>
+                <a:blip r:embed="rId7"/>
+                <a:stretch>
+                  <a:fillRect t="-7576" b="-15152"/>
+                </a:stretch>
+              </a:blipFill>
+            </p:spPr>
+            <p:txBody>
+              <a:bodyPr/>
+              <a:lstStyle/>
+              <a:p>
+                <a:r>
+                  <a:rPr lang="sv-SE">
+                    <a:noFill/>
+                  </a:rPr>
+                  <a:t> </a:t>
+                </a:r>
+              </a:p>
+            </p:txBody>
+          </p:sp>
+        </mc:Fallback>
+      </mc:AlternateContent>
+      <p:pic>
+        <p:nvPicPr>
+          <p:cNvPr id="17" name="Picture 16"/>
+          <p:cNvPicPr>
+            <a:picLocks noChangeAspect="1"/>
+          </p:cNvPicPr>
+          <p:nvPr/>
+        </p:nvPicPr>
+        <p:blipFill rotWithShape="1">
+          <a:blip r:embed="rId8"/>
+          <a:srcRect l="24694" t="9287" r="11088" b="77653"/>
+          <a:stretch/>
+        </p:blipFill>
+        <p:spPr>
+          <a:xfrm>
+            <a:off x="3658384" y="4979177"/>
+            <a:ext cx="3425371" cy="522464"/>
+          </a:xfrm>
+          <a:prstGeom prst="rect">
+            <a:avLst/>
+          </a:prstGeom>
+        </p:spPr>
+      </p:pic>
+    </p:spTree>
+    <p:extLst>
+      <p:ext uri="{BB962C8B-B14F-4D97-AF65-F5344CB8AC3E}">
+        <p14:creationId xmlns:p14="http://schemas.microsoft.com/office/powerpoint/2010/main" val="2216900987"/>
+      </p:ext>
+    </p:extLst>
+  </p:cSld>
+  <p:clrMapOvr>
+    <a:masterClrMapping/>
+  </p:clrMapOvr>
+</p:sld>
+</file>
+
+<file path=ppt/slides/slide9.xml><?xml version="1.0" encoding="utf-8"?>
+<p:sld xmlns:a="http://schemas.openxmlformats.org/drawingml/2006/main" xmlns:r="http://schemas.openxmlformats.org/officeDocument/2006/relationships" xmlns:p="http://schemas.openxmlformats.org/presentationml/2006/main">
+  <p:cSld>
+    <p:spTree>
+      <p:nvGrpSpPr>
+        <p:cNvPr id="1" name=""/>
+        <p:cNvGrpSpPr/>
+        <p:nvPr/>
+      </p:nvGrpSpPr>
+      <p:grpSpPr>
+        <a:xfrm>
+          <a:off x="0" y="0"/>
+          <a:ext cx="0" cy="0"/>
+          <a:chOff x="0" y="0"/>
+          <a:chExt cx="0" cy="0"/>
+        </a:xfrm>
+      </p:grpSpPr>
+      <p:pic>
+        <p:nvPicPr>
+          <p:cNvPr id="8" name="Picture 7"/>
+          <p:cNvPicPr>
+            <a:picLocks noChangeAspect="1"/>
+          </p:cNvPicPr>
+          <p:nvPr/>
+        </p:nvPicPr>
+        <p:blipFill>
+          <a:blip r:embed="rId2"/>
+          <a:stretch>
+            <a:fillRect/>
+          </a:stretch>
+        </p:blipFill>
+        <p:spPr>
+          <a:xfrm>
+            <a:off x="406403" y="342893"/>
+            <a:ext cx="5334000" cy="4000500"/>
+          </a:xfrm>
+          <a:prstGeom prst="rect">
+            <a:avLst/>
+          </a:prstGeom>
+        </p:spPr>
+      </p:pic>
+      <p:pic>
+        <p:nvPicPr>
+          <p:cNvPr id="7" name="Picture 6"/>
+          <p:cNvPicPr>
+            <a:picLocks noChangeAspect="1"/>
+          </p:cNvPicPr>
+          <p:nvPr/>
+        </p:nvPicPr>
+        <p:blipFill>
+          <a:blip r:embed="rId3"/>
+          <a:stretch>
+            <a:fillRect/>
+          </a:stretch>
+        </p:blipFill>
+        <p:spPr>
+          <a:xfrm>
+            <a:off x="5433527" y="290509"/>
+            <a:ext cx="5334000" cy="4000500"/>
+          </a:xfrm>
+          <a:prstGeom prst="rect">
+            <a:avLst/>
+          </a:prstGeom>
+        </p:spPr>
+      </p:pic>
+      <p:sp>
+        <p:nvSpPr>
+          <p:cNvPr id="4" name="TextBox 3"/>
+          <p:cNvSpPr txBox="1"/>
+          <p:nvPr/>
+        </p:nvSpPr>
+        <p:spPr>
+          <a:xfrm>
+            <a:off x="2385067" y="3940022"/>
+            <a:ext cx="2089150" cy="369332"/>
+          </a:xfrm>
+          <a:prstGeom prst="rect">
+            <a:avLst/>
+          </a:prstGeom>
+          <a:noFill/>
+        </p:spPr>
+        <p:txBody>
+          <a:bodyPr wrap="square" rtlCol="0">
+            <a:spAutoFit/>
+          </a:bodyPr>
+          <a:lstStyle/>
+          <a:p>
+            <a:r>
+              <a:rPr lang="en-US" dirty="0" smtClean="0">
+                <a:latin typeface="Times New Roman" panose="02020603050405020304" pitchFamily="18" charset="0"/>
+                <a:cs typeface="Times New Roman" panose="02020603050405020304" pitchFamily="18" charset="0"/>
+              </a:rPr>
+              <a:t>Time: 2ms/div</a:t>
+            </a:r>
+            <a:endParaRPr lang="sv-SE" dirty="0">
+              <a:latin typeface="Times New Roman" panose="02020603050405020304" pitchFamily="18" charset="0"/>
+              <a:cs typeface="Times New Roman" panose="02020603050405020304" pitchFamily="18" charset="0"/>
+            </a:endParaRPr>
+          </a:p>
+        </p:txBody>
+      </p:sp>
+      <p:sp>
+        <p:nvSpPr>
+          <p:cNvPr id="6" name="TextBox 5"/>
+          <p:cNvSpPr txBox="1"/>
+          <p:nvPr/>
+        </p:nvSpPr>
+        <p:spPr>
+          <a:xfrm rot="16200000">
+            <a:off x="-771108" y="2106093"/>
+            <a:ext cx="3301523" cy="369332"/>
+          </a:xfrm>
+          <a:prstGeom prst="rect">
+            <a:avLst/>
+          </a:prstGeom>
+          <a:noFill/>
+        </p:spPr>
+        <p:txBody>
+          <a:bodyPr wrap="square" rtlCol="0">
+            <a:spAutoFit/>
+          </a:bodyPr>
+          <a:lstStyle/>
+          <a:p>
+            <a:r>
+              <a:rPr lang="en-US" dirty="0" smtClean="0">
+                <a:latin typeface="Times New Roman" panose="02020603050405020304" pitchFamily="18" charset="0"/>
+                <a:cs typeface="Times New Roman" panose="02020603050405020304" pitchFamily="18" charset="0"/>
+              </a:rPr>
+              <a:t>Normalized Voltage: </a:t>
+            </a:r>
+            <a:r>
+              <a:rPr lang="en-US" dirty="0" smtClean="0">
+                <a:latin typeface="Times New Roman" panose="02020603050405020304" pitchFamily="18" charset="0"/>
+                <a:cs typeface="Times New Roman" panose="02020603050405020304" pitchFamily="18" charset="0"/>
+              </a:rPr>
+              <a:t>0.16 </a:t>
+            </a:r>
+            <a:r>
+              <a:rPr lang="en-US" dirty="0" err="1" smtClean="0">
+                <a:latin typeface="Times New Roman" panose="02020603050405020304" pitchFamily="18" charset="0"/>
+                <a:cs typeface="Times New Roman" panose="02020603050405020304" pitchFamily="18" charset="0"/>
+              </a:rPr>
+              <a:t>p.u</a:t>
+            </a:r>
+            <a:r>
+              <a:rPr lang="en-US" dirty="0" smtClean="0">
+                <a:latin typeface="Times New Roman" panose="02020603050405020304" pitchFamily="18" charset="0"/>
+                <a:cs typeface="Times New Roman" panose="02020603050405020304" pitchFamily="18" charset="0"/>
+              </a:rPr>
+              <a:t>./div</a:t>
+            </a:r>
+            <a:endParaRPr lang="sv-SE" dirty="0">
+              <a:latin typeface="Times New Roman" panose="02020603050405020304" pitchFamily="18" charset="0"/>
+              <a:cs typeface="Times New Roman" panose="02020603050405020304" pitchFamily="18" charset="0"/>
+            </a:endParaRPr>
+          </a:p>
+        </p:txBody>
+      </p:sp>
+      <p:pic>
+        <p:nvPicPr>
+          <p:cNvPr id="3" name="Picture 2"/>
+          <p:cNvPicPr>
+            <a:picLocks noChangeAspect="1"/>
+          </p:cNvPicPr>
+          <p:nvPr/>
+        </p:nvPicPr>
+        <p:blipFill rotWithShape="1">
+          <a:blip r:embed="rId4"/>
+          <a:srcRect l="23691" t="8768" r="12500" b="78058"/>
+          <a:stretch/>
+        </p:blipFill>
+        <p:spPr>
+          <a:xfrm>
+            <a:off x="6526362" y="1209675"/>
+            <a:ext cx="3403600" cy="527050"/>
+          </a:xfrm>
+          <a:prstGeom prst="rect">
+            <a:avLst/>
+          </a:prstGeom>
+        </p:spPr>
+      </p:pic>
+      <p:sp>
+        <p:nvSpPr>
+          <p:cNvPr id="13" name="TextBox 12"/>
+          <p:cNvSpPr txBox="1"/>
+          <p:nvPr/>
+        </p:nvSpPr>
+        <p:spPr>
+          <a:xfrm rot="16200000">
+            <a:off x="4371461" y="1940521"/>
+            <a:ext cx="2368551" cy="369332"/>
+          </a:xfrm>
+          <a:prstGeom prst="rect">
+            <a:avLst/>
+          </a:prstGeom>
+          <a:noFill/>
+        </p:spPr>
+        <p:txBody>
+          <a:bodyPr wrap="square" rtlCol="0">
+            <a:spAutoFit/>
+          </a:bodyPr>
+          <a:lstStyle/>
+          <a:p>
+            <a:r>
+              <a:rPr lang="en-US" dirty="0" smtClean="0">
+                <a:latin typeface="Times New Roman" panose="02020603050405020304" pitchFamily="18" charset="0"/>
+                <a:cs typeface="Times New Roman" panose="02020603050405020304" pitchFamily="18" charset="0"/>
+              </a:rPr>
+              <a:t>Normalized </a:t>
+            </a:r>
+            <a:r>
+              <a:rPr lang="en-US" dirty="0" smtClean="0">
+                <a:latin typeface="Times New Roman" panose="02020603050405020304" pitchFamily="18" charset="0"/>
+                <a:cs typeface="Times New Roman" panose="02020603050405020304" pitchFamily="18" charset="0"/>
+              </a:rPr>
+              <a:t>Voltage</a:t>
+            </a:r>
+            <a:endParaRPr lang="sv-SE" dirty="0">
+              <a:latin typeface="Times New Roman" panose="02020603050405020304" pitchFamily="18" charset="0"/>
+              <a:cs typeface="Times New Roman" panose="02020603050405020304" pitchFamily="18" charset="0"/>
+            </a:endParaRPr>
+          </a:p>
+        </p:txBody>
+      </p:sp>
+      <p:sp>
+        <p:nvSpPr>
+          <p:cNvPr id="14" name="TextBox 13"/>
+          <p:cNvSpPr txBox="1"/>
+          <p:nvPr/>
+        </p:nvSpPr>
+        <p:spPr>
+          <a:xfrm>
+            <a:off x="5138469" y="3940022"/>
+            <a:ext cx="2089150" cy="369332"/>
+          </a:xfrm>
+          <a:prstGeom prst="rect">
+            <a:avLst/>
+          </a:prstGeom>
+          <a:noFill/>
+        </p:spPr>
+        <p:txBody>
+          <a:bodyPr wrap="square" rtlCol="0">
+            <a:spAutoFit/>
+          </a:bodyPr>
+          <a:lstStyle/>
+          <a:p>
+            <a:r>
+              <a:rPr lang="en-US" dirty="0" smtClean="0">
+                <a:latin typeface="Times New Roman" panose="02020603050405020304" pitchFamily="18" charset="0"/>
+                <a:cs typeface="Times New Roman" panose="02020603050405020304" pitchFamily="18" charset="0"/>
+              </a:rPr>
+              <a:t>Frequency</a:t>
+            </a:r>
+            <a:endParaRPr lang="sv-SE" dirty="0">
+              <a:latin typeface="Times New Roman" panose="02020603050405020304" pitchFamily="18" charset="0"/>
+              <a:cs typeface="Times New Roman" panose="02020603050405020304" pitchFamily="18" charset="0"/>
+            </a:endParaRPr>
+          </a:p>
+        </p:txBody>
+      </p:sp>
+      <mc:AlternateContent xmlns:mc="http://schemas.openxmlformats.org/markup-compatibility/2006">
+        <mc:Choice xmlns:a14="http://schemas.microsoft.com/office/drawing/2010/main" Requires="a14">
+          <p:sp>
+            <p:nvSpPr>
+              <p:cNvPr id="15" name="TextBox 14"/>
+              <p:cNvSpPr txBox="1"/>
+              <p:nvPr/>
+            </p:nvSpPr>
+            <p:spPr>
+              <a:xfrm>
+                <a:off x="6183044" y="637596"/>
+                <a:ext cx="3110524" cy="397994"/>
+              </a:xfrm>
+              <a:prstGeom prst="rect">
+                <a:avLst/>
+              </a:prstGeom>
+              <a:noFill/>
+            </p:spPr>
+            <p:txBody>
+              <a:bodyPr wrap="square" rtlCol="0">
+                <a:spAutoFit/>
+              </a:bodyPr>
+              <a:lstStyle/>
+              <a:p>
+                <a14:m>
+                  <m:oMath xmlns:m="http://schemas.openxmlformats.org/officeDocument/2006/math">
+                    <m:sSub>
+                      <m:sSubPr>
+                        <m:ctrlPr>
+                          <a:rPr lang="en-US" i="1" dirty="0" smtClean="0">
+                            <a:solidFill>
+                              <a:srgbClr val="A71993"/>
+                            </a:solidFill>
+                            <a:latin typeface="Cambria Math" panose="02040503050406030204" pitchFamily="18" charset="0"/>
+                            <a:cs typeface="Times New Roman" panose="02020603050405020304" pitchFamily="18" charset="0"/>
+                          </a:rPr>
+                        </m:ctrlPr>
+                      </m:sSubPr>
+                      <m:e>
+                        <m:sSub>
+                          <m:sSubPr>
+                            <m:ctrlPr>
+                              <a:rPr lang="en-US" i="1" dirty="0" smtClean="0">
+                                <a:solidFill>
+                                  <a:srgbClr val="A71993"/>
+                                </a:solidFill>
+                                <a:latin typeface="Cambria Math" panose="02040503050406030204" pitchFamily="18" charset="0"/>
+                                <a:cs typeface="Times New Roman" panose="02020603050405020304" pitchFamily="18" charset="0"/>
+                              </a:rPr>
+                            </m:ctrlPr>
+                          </m:sSubPr>
+                          <m:e>
+                            <m:r>
+                              <a:rPr lang="en-US" i="1" dirty="0" smtClean="0">
+                                <a:solidFill>
+                                  <a:srgbClr val="A71993"/>
+                                </a:solidFill>
+                                <a:latin typeface="Cambria Math" panose="02040503050406030204" pitchFamily="18" charset="0"/>
+                                <a:cs typeface="Times New Roman" panose="02020603050405020304" pitchFamily="18" charset="0"/>
+                              </a:rPr>
+                              <m:t>𝑉</m:t>
+                            </m:r>
+                          </m:e>
+                          <m:sub>
+                            <m:r>
+                              <a:rPr lang="en-US" i="1" dirty="0" smtClean="0">
+                                <a:solidFill>
+                                  <a:srgbClr val="A71993"/>
+                                </a:solidFill>
+                                <a:latin typeface="Cambria Math" panose="02040503050406030204" pitchFamily="18" charset="0"/>
+                                <a:cs typeface="Times New Roman" panose="02020603050405020304" pitchFamily="18" charset="0"/>
+                              </a:rPr>
+                              <m:t>𝐶𝑀</m:t>
+                            </m:r>
+                          </m:sub>
+                        </m:sSub>
+                      </m:e>
+                      <m:sub>
+                        <m:r>
+                          <a:rPr lang="en-US" i="1" dirty="0" smtClean="0">
+                            <a:solidFill>
+                              <a:srgbClr val="A71993"/>
+                            </a:solidFill>
+                            <a:latin typeface="Cambria Math" panose="02040503050406030204" pitchFamily="18" charset="0"/>
+                            <a:cs typeface="Times New Roman" panose="02020603050405020304" pitchFamily="18" charset="0"/>
+                          </a:rPr>
+                          <m:t>𝑊</m:t>
+                        </m:r>
+                        <m:r>
+                          <a:rPr lang="en-US" b="0" i="1" dirty="0" smtClean="0">
+                            <a:solidFill>
+                              <a:srgbClr val="A71993"/>
+                            </a:solidFill>
+                            <a:latin typeface="Cambria Math" panose="02040503050406030204" pitchFamily="18" charset="0"/>
+                            <a:cs typeface="Times New Roman" panose="02020603050405020304" pitchFamily="18" charset="0"/>
+                          </a:rPr>
+                          <m:t>−</m:t>
+                        </m:r>
+                        <m:r>
+                          <a:rPr lang="en-US" b="0" i="1" dirty="0" smtClean="0">
+                            <a:solidFill>
+                              <a:srgbClr val="A71993"/>
+                            </a:solidFill>
+                            <a:latin typeface="Cambria Math" panose="02040503050406030204" pitchFamily="18" charset="0"/>
+                            <a:cs typeface="Times New Roman" panose="02020603050405020304" pitchFamily="18" charset="0"/>
+                          </a:rPr>
+                          <m:t>𝑅𝑀𝑆</m:t>
+                        </m:r>
+                      </m:sub>
+                    </m:sSub>
+                    <m:r>
+                      <a:rPr lang="en-US" b="0" i="1" dirty="0" smtClean="0">
+                        <a:solidFill>
+                          <a:srgbClr val="A71993"/>
+                        </a:solidFill>
+                        <a:latin typeface="Cambria Math" panose="02040503050406030204" pitchFamily="18" charset="0"/>
+                        <a:cs typeface="Times New Roman" panose="02020603050405020304" pitchFamily="18" charset="0"/>
+                      </a:rPr>
+                      <m:t> </m:t>
+                    </m:r>
+                  </m:oMath>
+                </a14:m>
+                <a:r>
+                  <a:rPr lang="en-US" dirty="0" smtClean="0">
+                    <a:solidFill>
+                      <a:srgbClr val="A71993"/>
+                    </a:solidFill>
+                    <a:latin typeface="Times New Roman" panose="02020603050405020304" pitchFamily="18" charset="0"/>
+                    <a:cs typeface="Times New Roman" panose="02020603050405020304" pitchFamily="18" charset="0"/>
+                  </a:rPr>
+                  <a:t>=0.0047</a:t>
+                </a:r>
+                <a:endParaRPr lang="sv-SE" sz="1400" dirty="0">
+                  <a:solidFill>
+                    <a:srgbClr val="A71993"/>
+                  </a:solidFill>
+                  <a:latin typeface="Times New Roman" panose="02020603050405020304" pitchFamily="18" charset="0"/>
+                  <a:cs typeface="Times New Roman" panose="02020603050405020304" pitchFamily="18" charset="0"/>
+                </a:endParaRPr>
+              </a:p>
+            </p:txBody>
+          </p:sp>
+        </mc:Choice>
+        <mc:Fallback>
+          <p:sp>
+            <p:nvSpPr>
+              <p:cNvPr id="15" name="TextBox 14"/>
+              <p:cNvSpPr txBox="1">
+                <a:spLocks noRot="1" noChangeAspect="1" noMove="1" noResize="1" noEditPoints="1" noAdjustHandles="1" noChangeArrowheads="1" noChangeShapeType="1" noTextEdit="1"/>
+              </p:cNvSpPr>
+              <p:nvPr/>
+            </p:nvSpPr>
+            <p:spPr>
+              <a:xfrm>
+                <a:off x="6183044" y="637596"/>
+                <a:ext cx="3110524" cy="397994"/>
+              </a:xfrm>
+              <a:prstGeom prst="rect">
+                <a:avLst/>
+              </a:prstGeom>
+              <a:blipFill>
+                <a:blip r:embed="rId5"/>
+                <a:stretch>
+                  <a:fillRect t="-9231" b="-16923"/>
+                </a:stretch>
+              </a:blipFill>
+            </p:spPr>
+            <p:txBody>
+              <a:bodyPr/>
+              <a:lstStyle/>
+              <a:p>
+                <a:r>
+                  <a:rPr lang="sv-SE">
+                    <a:noFill/>
+                  </a:rPr>
+                  <a:t> </a:t>
+                </a:r>
+              </a:p>
+            </p:txBody>
+          </p:sp>
+        </mc:Fallback>
+      </mc:AlternateContent>
+      <mc:AlternateContent xmlns:mc="http://schemas.openxmlformats.org/markup-compatibility/2006">
+        <mc:Choice xmlns:a14="http://schemas.microsoft.com/office/drawing/2010/main" Requires="a14">
+          <p:sp>
+            <p:nvSpPr>
+              <p:cNvPr id="16" name="TextBox 15"/>
+              <p:cNvSpPr txBox="1"/>
+              <p:nvPr/>
+            </p:nvSpPr>
+            <p:spPr>
+              <a:xfrm>
+                <a:off x="7738306" y="1796844"/>
+                <a:ext cx="1320444" cy="400110"/>
+              </a:xfrm>
+              <a:prstGeom prst="rect">
+                <a:avLst/>
+              </a:prstGeom>
+              <a:noFill/>
+            </p:spPr>
+            <p:txBody>
+              <a:bodyPr wrap="square" rtlCol="0">
+                <a:spAutoFit/>
+              </a:bodyPr>
+              <a:lstStyle/>
+              <a:p>
+                <a14:m>
+                  <m:oMath xmlns:m="http://schemas.openxmlformats.org/officeDocument/2006/math">
+                    <m:sSub>
+                      <m:sSubPr>
+                        <m:ctrlPr>
+                          <a:rPr lang="en-US" sz="2000" b="0" i="1" dirty="0" smtClean="0">
+                            <a:latin typeface="Cambria Math" panose="02040503050406030204" pitchFamily="18" charset="0"/>
+                            <a:cs typeface="Times New Roman" panose="02020603050405020304" pitchFamily="18" charset="0"/>
+                          </a:rPr>
+                        </m:ctrlPr>
+                      </m:sSubPr>
+                      <m:e>
+                        <m:r>
+                          <m:rPr>
+                            <m:sty m:val="p"/>
+                          </m:rPr>
+                          <a:rPr lang="en-US" sz="2000" b="0" i="0" dirty="0" smtClean="0">
+                            <a:latin typeface="Cambria Math" panose="02040503050406030204" pitchFamily="18" charset="0"/>
+                            <a:cs typeface="Times New Roman" panose="02020603050405020304" pitchFamily="18" charset="0"/>
+                          </a:rPr>
+                          <m:t>m</m:t>
+                        </m:r>
+                      </m:e>
+                      <m:sub>
+                        <m:r>
+                          <a:rPr lang="en-US" sz="2000" i="1" dirty="0" smtClean="0">
+                            <a:latin typeface="Cambria Math" panose="02040503050406030204" pitchFamily="18" charset="0"/>
+                            <a:cs typeface="Times New Roman" panose="02020603050405020304" pitchFamily="18" charset="0"/>
+                          </a:rPr>
+                          <m:t>𝑎</m:t>
+                        </m:r>
+                      </m:sub>
+                    </m:sSub>
+                    <m:r>
+                      <a:rPr lang="en-US" sz="2000" b="0" i="1" dirty="0" smtClean="0">
+                        <a:latin typeface="Cambria Math" panose="02040503050406030204" pitchFamily="18" charset="0"/>
+                        <a:cs typeface="Times New Roman" panose="02020603050405020304" pitchFamily="18" charset="0"/>
+                      </a:rPr>
+                      <m:t> </m:t>
+                    </m:r>
+                    <m:r>
+                      <a:rPr lang="en-US" sz="2000" b="0" i="1" dirty="0" smtClean="0">
+                        <a:latin typeface="Cambria Math" panose="02040503050406030204" pitchFamily="18" charset="0"/>
+                        <a:cs typeface="Times New Roman" panose="02020603050405020304" pitchFamily="18" charset="0"/>
+                      </a:rPr>
+                      <m:t> </m:t>
+                    </m:r>
+                  </m:oMath>
+                </a14:m>
+                <a:r>
+                  <a:rPr lang="en-US" sz="2000" dirty="0" smtClean="0">
+                    <a:latin typeface="Times New Roman" panose="02020603050405020304" pitchFamily="18" charset="0"/>
+                    <a:cs typeface="Times New Roman" panose="02020603050405020304" pitchFamily="18" charset="0"/>
+                  </a:rPr>
+                  <a:t>= 1</a:t>
+                </a:r>
+                <a:endParaRPr lang="sv-SE" sz="1600" dirty="0">
+                  <a:latin typeface="Times New Roman" panose="02020603050405020304" pitchFamily="18" charset="0"/>
+                  <a:cs typeface="Times New Roman" panose="02020603050405020304" pitchFamily="18" charset="0"/>
+                </a:endParaRPr>
+              </a:p>
+            </p:txBody>
+          </p:sp>
+        </mc:Choice>
+        <mc:Fallback>
+          <p:sp>
+            <p:nvSpPr>
+              <p:cNvPr id="16" name="TextBox 15"/>
+              <p:cNvSpPr txBox="1">
+                <a:spLocks noRot="1" noChangeAspect="1" noMove="1" noResize="1" noEditPoints="1" noAdjustHandles="1" noChangeArrowheads="1" noChangeShapeType="1" noTextEdit="1"/>
+              </p:cNvSpPr>
+              <p:nvPr/>
+            </p:nvSpPr>
+            <p:spPr>
+              <a:xfrm>
+                <a:off x="7738306" y="1796844"/>
+                <a:ext cx="1320444" cy="400110"/>
+              </a:xfrm>
+              <a:prstGeom prst="rect">
+                <a:avLst/>
+              </a:prstGeom>
+              <a:blipFill>
+                <a:blip r:embed="rId6"/>
+                <a:stretch>
+                  <a:fillRect t="-9231" b="-27692"/>
+                </a:stretch>
+              </a:blipFill>
+            </p:spPr>
+            <p:txBody>
+              <a:bodyPr/>
+              <a:lstStyle/>
+              <a:p>
+                <a:r>
+                  <a:rPr lang="sv-SE">
+                    <a:noFill/>
+                  </a:rPr>
+                  <a:t> </a:t>
+                </a:r>
+              </a:p>
+            </p:txBody>
+          </p:sp>
+        </mc:Fallback>
+      </mc:AlternateContent>
+      <mc:AlternateContent xmlns:mc="http://schemas.openxmlformats.org/markup-compatibility/2006">
+        <mc:Choice xmlns:a14="http://schemas.microsoft.com/office/drawing/2010/main" Requires="a14">
+          <p:sp>
+            <p:nvSpPr>
+              <p:cNvPr id="18" name="TextBox 17"/>
+              <p:cNvSpPr txBox="1"/>
+              <p:nvPr/>
+            </p:nvSpPr>
+            <p:spPr>
+              <a:xfrm>
+                <a:off x="8180947" y="619251"/>
+                <a:ext cx="3110524" cy="398507"/>
+              </a:xfrm>
+              <a:prstGeom prst="rect">
+                <a:avLst/>
+              </a:prstGeom>
+              <a:noFill/>
+            </p:spPr>
+            <p:txBody>
+              <a:bodyPr wrap="square" rtlCol="0">
+                <a:spAutoFit/>
+              </a:bodyPr>
+              <a:lstStyle/>
+              <a:p>
+                <a14:m>
+                  <m:oMath xmlns:m="http://schemas.openxmlformats.org/officeDocument/2006/math">
+                    <m:sSub>
+                      <m:sSubPr>
+                        <m:ctrlPr>
+                          <a:rPr lang="en-US" i="1" dirty="0" smtClean="0">
+                            <a:solidFill>
+                              <a:srgbClr val="249C8E"/>
+                            </a:solidFill>
+                            <a:latin typeface="Cambria Math" panose="02040503050406030204" pitchFamily="18" charset="0"/>
+                            <a:cs typeface="Times New Roman" panose="02020603050405020304" pitchFamily="18" charset="0"/>
+                          </a:rPr>
+                        </m:ctrlPr>
+                      </m:sSubPr>
+                      <m:e>
+                        <m:sSub>
+                          <m:sSubPr>
+                            <m:ctrlPr>
+                              <a:rPr lang="en-US" i="1" dirty="0">
+                                <a:solidFill>
+                                  <a:srgbClr val="249C8E"/>
+                                </a:solidFill>
+                                <a:latin typeface="Cambria Math" panose="02040503050406030204" pitchFamily="18" charset="0"/>
+                                <a:cs typeface="Times New Roman" panose="02020603050405020304" pitchFamily="18" charset="0"/>
+                              </a:rPr>
+                            </m:ctrlPr>
+                          </m:sSubPr>
+                          <m:e>
+                            <m:r>
+                              <a:rPr lang="en-US" i="1" dirty="0">
+                                <a:solidFill>
+                                  <a:srgbClr val="249C8E"/>
+                                </a:solidFill>
+                                <a:latin typeface="Cambria Math" panose="02040503050406030204" pitchFamily="18" charset="0"/>
+                                <a:cs typeface="Times New Roman" panose="02020603050405020304" pitchFamily="18" charset="0"/>
+                              </a:rPr>
+                              <m:t>𝑉</m:t>
+                            </m:r>
+                          </m:e>
+                          <m:sub>
+                            <m:r>
+                              <a:rPr lang="en-US" i="1" dirty="0">
+                                <a:solidFill>
+                                  <a:srgbClr val="249C8E"/>
+                                </a:solidFill>
+                                <a:latin typeface="Cambria Math" panose="02040503050406030204" pitchFamily="18" charset="0"/>
+                                <a:cs typeface="Times New Roman" panose="02020603050405020304" pitchFamily="18" charset="0"/>
+                              </a:rPr>
+                              <m:t>𝐶𝑀</m:t>
+                            </m:r>
+                          </m:sub>
+                        </m:sSub>
+                      </m:e>
+                      <m:sub>
+                        <m:r>
+                          <a:rPr lang="en-US" i="1" dirty="0">
+                            <a:solidFill>
+                              <a:srgbClr val="249C8E"/>
+                            </a:solidFill>
+                            <a:latin typeface="Cambria Math" panose="02040503050406030204" pitchFamily="18" charset="0"/>
+                            <a:cs typeface="Times New Roman" panose="02020603050405020304" pitchFamily="18" charset="0"/>
+                          </a:rPr>
+                          <m:t>𝑊</m:t>
+                        </m:r>
+                        <m:r>
+                          <a:rPr lang="en-US" i="1" dirty="0">
+                            <a:solidFill>
+                              <a:srgbClr val="249C8E"/>
+                            </a:solidFill>
+                            <a:latin typeface="Cambria Math" panose="02040503050406030204" pitchFamily="18" charset="0"/>
+                            <a:cs typeface="Times New Roman" panose="02020603050405020304" pitchFamily="18" charset="0"/>
+                          </a:rPr>
+                          <m:t>−</m:t>
+                        </m:r>
+                        <m:r>
+                          <a:rPr lang="en-US" i="1" dirty="0">
+                            <a:solidFill>
+                              <a:srgbClr val="249C8E"/>
+                            </a:solidFill>
+                            <a:latin typeface="Cambria Math" panose="02040503050406030204" pitchFamily="18" charset="0"/>
+                            <a:cs typeface="Times New Roman" panose="02020603050405020304" pitchFamily="18" charset="0"/>
+                          </a:rPr>
+                          <m:t>𝑅𝑀𝑆</m:t>
+                        </m:r>
+                      </m:sub>
+                    </m:sSub>
+                  </m:oMath>
+                </a14:m>
+                <a:r>
+                  <a:rPr lang="en-US" dirty="0" smtClean="0">
+                    <a:solidFill>
+                      <a:srgbClr val="249C8E"/>
+                    </a:solidFill>
+                    <a:latin typeface="Times New Roman" panose="02020603050405020304" pitchFamily="18" charset="0"/>
+                    <a:cs typeface="Times New Roman" panose="02020603050405020304" pitchFamily="18" charset="0"/>
+                  </a:rPr>
+                  <a:t>=0.0063</a:t>
+                </a:r>
+                <a:endParaRPr lang="sv-SE" sz="1400" dirty="0">
+                  <a:solidFill>
+                    <a:srgbClr val="249C8E"/>
+                  </a:solidFill>
+                  <a:latin typeface="Times New Roman" panose="02020603050405020304" pitchFamily="18" charset="0"/>
+                  <a:cs typeface="Times New Roman" panose="02020603050405020304" pitchFamily="18" charset="0"/>
+                </a:endParaRPr>
+              </a:p>
+            </p:txBody>
+          </p:sp>
+        </mc:Choice>
+        <mc:Fallback>
+          <p:sp>
+            <p:nvSpPr>
+              <p:cNvPr id="18" name="TextBox 17"/>
+              <p:cNvSpPr txBox="1">
+                <a:spLocks noRot="1" noChangeAspect="1" noMove="1" noResize="1" noEditPoints="1" noAdjustHandles="1" noChangeArrowheads="1" noChangeShapeType="1" noTextEdit="1"/>
+              </p:cNvSpPr>
+              <p:nvPr/>
+            </p:nvSpPr>
+            <p:spPr>
+              <a:xfrm>
+                <a:off x="8180947" y="619251"/>
+                <a:ext cx="3110524" cy="398507"/>
+              </a:xfrm>
+              <a:prstGeom prst="rect">
+                <a:avLst/>
+              </a:prstGeom>
+              <a:blipFill>
+                <a:blip r:embed="rId7"/>
+                <a:stretch>
+                  <a:fillRect t="-9231" b="-16923"/>
+                </a:stretch>
+              </a:blipFill>
+            </p:spPr>
+            <p:txBody>
+              <a:bodyPr/>
+              <a:lstStyle/>
+              <a:p>
+                <a:r>
+                  <a:rPr lang="sv-SE">
+                    <a:noFill/>
+                  </a:rPr>
+                  <a:t> </a:t>
+                </a:r>
+              </a:p>
+            </p:txBody>
+          </p:sp>
+        </mc:Fallback>
+      </mc:AlternateContent>
+    </p:spTree>
+    <p:extLst>
+      <p:ext uri="{BB962C8B-B14F-4D97-AF65-F5344CB8AC3E}">
+        <p14:creationId xmlns:p14="http://schemas.microsoft.com/office/powerpoint/2010/main" val="3410329694"/>
       </p:ext>
     </p:extLst>
   </p:cSld>

--- a/ECCE-2025/Simulation/Simulation.pptx
+++ b/ECCE-2025/Simulation/Simulation.pptx
@@ -16,6 +16,9 @@
     <p:sldId id="266" r:id="rId10"/>
     <p:sldId id="262" r:id="rId11"/>
     <p:sldId id="259" r:id="rId12"/>
+    <p:sldId id="267" r:id="rId13"/>
+    <p:sldId id="270" r:id="rId14"/>
+    <p:sldId id="269" r:id="rId15"/>
   </p:sldIdLst>
   <p:sldSz cx="12192000" cy="6858000"/>
   <p:notesSz cx="6858000" cy="9144000"/>
@@ -253,7 +256,7 @@
           <a:p>
             <a:fld id="{95061327-8FAF-49B9-B6A5-2BC6F2697F94}" type="datetimeFigureOut">
               <a:rPr lang="sv-SE" smtClean="0"/>
-              <a:t>2025-05-12</a:t>
+              <a:t>2025-05-28</a:t>
             </a:fld>
             <a:endParaRPr lang="sv-SE"/>
           </a:p>
@@ -423,7 +426,7 @@
           <a:p>
             <a:fld id="{95061327-8FAF-49B9-B6A5-2BC6F2697F94}" type="datetimeFigureOut">
               <a:rPr lang="sv-SE" smtClean="0"/>
-              <a:t>2025-05-12</a:t>
+              <a:t>2025-05-28</a:t>
             </a:fld>
             <a:endParaRPr lang="sv-SE"/>
           </a:p>
@@ -603,7 +606,7 @@
           <a:p>
             <a:fld id="{95061327-8FAF-49B9-B6A5-2BC6F2697F94}" type="datetimeFigureOut">
               <a:rPr lang="sv-SE" smtClean="0"/>
-              <a:t>2025-05-12</a:t>
+              <a:t>2025-05-28</a:t>
             </a:fld>
             <a:endParaRPr lang="sv-SE"/>
           </a:p>
@@ -773,7 +776,7 @@
           <a:p>
             <a:fld id="{95061327-8FAF-49B9-B6A5-2BC6F2697F94}" type="datetimeFigureOut">
               <a:rPr lang="sv-SE" smtClean="0"/>
-              <a:t>2025-05-12</a:t>
+              <a:t>2025-05-28</a:t>
             </a:fld>
             <a:endParaRPr lang="sv-SE"/>
           </a:p>
@@ -1019,7 +1022,7 @@
           <a:p>
             <a:fld id="{95061327-8FAF-49B9-B6A5-2BC6F2697F94}" type="datetimeFigureOut">
               <a:rPr lang="sv-SE" smtClean="0"/>
-              <a:t>2025-05-12</a:t>
+              <a:t>2025-05-28</a:t>
             </a:fld>
             <a:endParaRPr lang="sv-SE"/>
           </a:p>
@@ -1251,7 +1254,7 @@
           <a:p>
             <a:fld id="{95061327-8FAF-49B9-B6A5-2BC6F2697F94}" type="datetimeFigureOut">
               <a:rPr lang="sv-SE" smtClean="0"/>
-              <a:t>2025-05-12</a:t>
+              <a:t>2025-05-28</a:t>
             </a:fld>
             <a:endParaRPr lang="sv-SE"/>
           </a:p>
@@ -1618,7 +1621,7 @@
           <a:p>
             <a:fld id="{95061327-8FAF-49B9-B6A5-2BC6F2697F94}" type="datetimeFigureOut">
               <a:rPr lang="sv-SE" smtClean="0"/>
-              <a:t>2025-05-12</a:t>
+              <a:t>2025-05-28</a:t>
             </a:fld>
             <a:endParaRPr lang="sv-SE"/>
           </a:p>
@@ -1736,7 +1739,7 @@
           <a:p>
             <a:fld id="{95061327-8FAF-49B9-B6A5-2BC6F2697F94}" type="datetimeFigureOut">
               <a:rPr lang="sv-SE" smtClean="0"/>
-              <a:t>2025-05-12</a:t>
+              <a:t>2025-05-28</a:t>
             </a:fld>
             <a:endParaRPr lang="sv-SE"/>
           </a:p>
@@ -1831,7 +1834,7 @@
           <a:p>
             <a:fld id="{95061327-8FAF-49B9-B6A5-2BC6F2697F94}" type="datetimeFigureOut">
               <a:rPr lang="sv-SE" smtClean="0"/>
-              <a:t>2025-05-12</a:t>
+              <a:t>2025-05-28</a:t>
             </a:fld>
             <a:endParaRPr lang="sv-SE"/>
           </a:p>
@@ -2108,7 +2111,7 @@
           <a:p>
             <a:fld id="{95061327-8FAF-49B9-B6A5-2BC6F2697F94}" type="datetimeFigureOut">
               <a:rPr lang="sv-SE" smtClean="0"/>
-              <a:t>2025-05-12</a:t>
+              <a:t>2025-05-28</a:t>
             </a:fld>
             <a:endParaRPr lang="sv-SE"/>
           </a:p>
@@ -2361,7 +2364,7 @@
           <a:p>
             <a:fld id="{95061327-8FAF-49B9-B6A5-2BC6F2697F94}" type="datetimeFigureOut">
               <a:rPr lang="sv-SE" smtClean="0"/>
-              <a:t>2025-05-12</a:t>
+              <a:t>2025-05-28</a:t>
             </a:fld>
             <a:endParaRPr lang="sv-SE"/>
           </a:p>
@@ -2574,7 +2577,7 @@
           <a:p>
             <a:fld id="{95061327-8FAF-49B9-B6A5-2BC6F2697F94}" type="datetimeFigureOut">
               <a:rPr lang="sv-SE" smtClean="0"/>
-              <a:t>2025-05-12</a:t>
+              <a:t>2025-05-28</a:t>
             </a:fld>
             <a:endParaRPr lang="sv-SE"/>
           </a:p>
@@ -3735,14 +3738,7 @@
                 <a:latin typeface="Times New Roman" panose="02020603050405020304" pitchFamily="18" charset="0"/>
                 <a:cs typeface="Times New Roman" panose="02020603050405020304" pitchFamily="18" charset="0"/>
               </a:rPr>
-              <a:t>Normalized Voltage: </a:t>
-            </a:r>
-            <a:r>
-              <a:rPr lang="en-US" dirty="0" smtClean="0">
-                <a:latin typeface="Times New Roman" panose="02020603050405020304" pitchFamily="18" charset="0"/>
-                <a:cs typeface="Times New Roman" panose="02020603050405020304" pitchFamily="18" charset="0"/>
-              </a:rPr>
-              <a:t>0.16 </a:t>
+              <a:t>Normalized Voltage: 0.16 </a:t>
             </a:r>
             <a:r>
               <a:rPr lang="en-US" dirty="0" err="1" smtClean="0">
@@ -3792,14 +3788,7 @@
                 <a:latin typeface="Times New Roman" panose="02020603050405020304" pitchFamily="18" charset="0"/>
                 <a:cs typeface="Times New Roman" panose="02020603050405020304" pitchFamily="18" charset="0"/>
               </a:rPr>
-              <a:t>Normalized </a:t>
-            </a:r>
-            <a:r>
-              <a:rPr lang="en-US" dirty="0" smtClean="0">
-                <a:latin typeface="Times New Roman" panose="02020603050405020304" pitchFamily="18" charset="0"/>
-                <a:cs typeface="Times New Roman" panose="02020603050405020304" pitchFamily="18" charset="0"/>
-              </a:rPr>
-              <a:t>Voltage</a:t>
+              <a:t>Normalized Voltage</a:t>
             </a:r>
             <a:endParaRPr lang="sv-SE" dirty="0">
               <a:latin typeface="Times New Roman" panose="02020603050405020304" pitchFamily="18" charset="0"/>
@@ -3844,8 +3833,8 @@
           </a:p>
         </p:txBody>
       </p:sp>
-      <mc:AlternateContent xmlns:mc="http://schemas.openxmlformats.org/markup-compatibility/2006">
-        <mc:Choice xmlns:a14="http://schemas.microsoft.com/office/drawing/2010/main" Requires="a14">
+      <mc:AlternateContent xmlns:mc="http://schemas.openxmlformats.org/markup-compatibility/2006" xmlns:a14="http://schemas.microsoft.com/office/drawing/2010/main">
+        <mc:Choice Requires="a14">
           <p:sp>
             <p:nvSpPr>
               <p:cNvPr id="11" name="TextBox 10"/>
@@ -3987,7 +3976,7 @@
             </p:txBody>
           </p:sp>
         </mc:Choice>
-        <mc:Fallback>
+        <mc:Fallback xmlns="">
           <p:sp>
             <p:nvSpPr>
               <p:cNvPr id="11" name="TextBox 10"/>
@@ -4026,8 +4015,8 @@
           </p:sp>
         </mc:Fallback>
       </mc:AlternateContent>
-      <mc:AlternateContent xmlns:mc="http://schemas.openxmlformats.org/markup-compatibility/2006">
-        <mc:Choice xmlns:a14="http://schemas.microsoft.com/office/drawing/2010/main" Requires="a14">
+      <mc:AlternateContent xmlns:mc="http://schemas.openxmlformats.org/markup-compatibility/2006" xmlns:a14="http://schemas.microsoft.com/office/drawing/2010/main">
+        <mc:Choice Requires="a14">
           <p:sp>
             <p:nvSpPr>
               <p:cNvPr id="12" name="TextBox 11"/>
@@ -4088,14 +4077,7 @@
                         <a:latin typeface="Cambria Math" panose="02040503050406030204" pitchFamily="18" charset="0"/>
                         <a:cs typeface="Times New Roman" panose="02020603050405020304" pitchFamily="18" charset="0"/>
                       </a:rPr>
-                      <m:t> </m:t>
-                    </m:r>
-                    <m:r>
-                      <a:rPr lang="en-US" sz="2000" b="0" i="1" dirty="0" smtClean="0">
-                        <a:latin typeface="Cambria Math" panose="02040503050406030204" pitchFamily="18" charset="0"/>
-                        <a:cs typeface="Times New Roman" panose="02020603050405020304" pitchFamily="18" charset="0"/>
-                      </a:rPr>
-                      <m:t> </m:t>
+                      <m:t>  </m:t>
                     </m:r>
                   </m:oMath>
                 </a14:m>
@@ -4114,7 +4096,7 @@
             </p:txBody>
           </p:sp>
         </mc:Choice>
-        <mc:Fallback>
+        <mc:Fallback xmlns="">
           <p:sp>
             <p:nvSpPr>
               <p:cNvPr id="12" name="TextBox 11"/>
@@ -4153,8 +4135,8 @@
           </p:sp>
         </mc:Fallback>
       </mc:AlternateContent>
-      <mc:AlternateContent xmlns:mc="http://schemas.openxmlformats.org/markup-compatibility/2006">
-        <mc:Choice xmlns:a14="http://schemas.microsoft.com/office/drawing/2010/main" Requires="a14">
+      <mc:AlternateContent xmlns:mc="http://schemas.openxmlformats.org/markup-compatibility/2006" xmlns:a14="http://schemas.microsoft.com/office/drawing/2010/main">
+        <mc:Choice Requires="a14">
           <p:sp>
             <p:nvSpPr>
               <p:cNvPr id="13" name="TextBox 12"/>
@@ -4286,7 +4268,7 @@
             </p:txBody>
           </p:sp>
         </mc:Choice>
-        <mc:Fallback>
+        <mc:Fallback xmlns="">
           <p:sp>
             <p:nvSpPr>
               <p:cNvPr id="13" name="TextBox 12"/>
@@ -4435,14 +4417,7 @@
                 <a:latin typeface="Times New Roman" panose="02020603050405020304" pitchFamily="18" charset="0"/>
                 <a:cs typeface="Times New Roman" panose="02020603050405020304" pitchFamily="18" charset="0"/>
               </a:rPr>
-              <a:t>Normalized Voltage: </a:t>
-            </a:r>
-            <a:r>
-              <a:rPr lang="en-US" dirty="0" smtClean="0">
-                <a:latin typeface="Times New Roman" panose="02020603050405020304" pitchFamily="18" charset="0"/>
-                <a:cs typeface="Times New Roman" panose="02020603050405020304" pitchFamily="18" charset="0"/>
-              </a:rPr>
-              <a:t>0.16 </a:t>
+              <a:t>Normalized Voltage: 0.16 </a:t>
             </a:r>
             <a:r>
               <a:rPr lang="en-US" dirty="0" err="1" smtClean="0">
@@ -4492,14 +4467,7 @@
                 <a:latin typeface="Times New Roman" panose="02020603050405020304" pitchFamily="18" charset="0"/>
                 <a:cs typeface="Times New Roman" panose="02020603050405020304" pitchFamily="18" charset="0"/>
               </a:rPr>
-              <a:t>Normalized </a:t>
-            </a:r>
-            <a:r>
-              <a:rPr lang="en-US" dirty="0" smtClean="0">
-                <a:latin typeface="Times New Roman" panose="02020603050405020304" pitchFamily="18" charset="0"/>
-                <a:cs typeface="Times New Roman" panose="02020603050405020304" pitchFamily="18" charset="0"/>
-              </a:rPr>
-              <a:t>Voltage</a:t>
+              <a:t>Normalized Voltage</a:t>
             </a:r>
             <a:endParaRPr lang="sv-SE" dirty="0">
               <a:latin typeface="Times New Roman" panose="02020603050405020304" pitchFamily="18" charset="0"/>
@@ -4544,8 +4512,8 @@
           </a:p>
         </p:txBody>
       </p:sp>
-      <mc:AlternateContent xmlns:mc="http://schemas.openxmlformats.org/markup-compatibility/2006">
-        <mc:Choice xmlns:a14="http://schemas.microsoft.com/office/drawing/2010/main" Requires="a14">
+      <mc:AlternateContent xmlns:mc="http://schemas.openxmlformats.org/markup-compatibility/2006" xmlns:a14="http://schemas.microsoft.com/office/drawing/2010/main">
+        <mc:Choice Requires="a14">
           <p:sp>
             <p:nvSpPr>
               <p:cNvPr id="21" name="TextBox 20"/>
@@ -4687,7 +4655,7 @@
             </p:txBody>
           </p:sp>
         </mc:Choice>
-        <mc:Fallback>
+        <mc:Fallback xmlns="">
           <p:sp>
             <p:nvSpPr>
               <p:cNvPr id="21" name="TextBox 20"/>
@@ -4726,8 +4694,8 @@
           </p:sp>
         </mc:Fallback>
       </mc:AlternateContent>
-      <mc:AlternateContent xmlns:mc="http://schemas.openxmlformats.org/markup-compatibility/2006">
-        <mc:Choice xmlns:a14="http://schemas.microsoft.com/office/drawing/2010/main" Requires="a14">
+      <mc:AlternateContent xmlns:mc="http://schemas.openxmlformats.org/markup-compatibility/2006" xmlns:a14="http://schemas.microsoft.com/office/drawing/2010/main">
+        <mc:Choice Requires="a14">
           <p:sp>
             <p:nvSpPr>
               <p:cNvPr id="22" name="TextBox 21"/>
@@ -4788,14 +4756,7 @@
                         <a:latin typeface="Cambria Math" panose="02040503050406030204" pitchFamily="18" charset="0"/>
                         <a:cs typeface="Times New Roman" panose="02020603050405020304" pitchFamily="18" charset="0"/>
                       </a:rPr>
-                      <m:t> </m:t>
-                    </m:r>
-                    <m:r>
-                      <a:rPr lang="en-US" sz="2000" b="0" i="1" dirty="0" smtClean="0">
-                        <a:latin typeface="Cambria Math" panose="02040503050406030204" pitchFamily="18" charset="0"/>
-                        <a:cs typeface="Times New Roman" panose="02020603050405020304" pitchFamily="18" charset="0"/>
-                      </a:rPr>
-                      <m:t> </m:t>
+                      <m:t>  </m:t>
                     </m:r>
                   </m:oMath>
                 </a14:m>
@@ -4814,7 +4775,7 @@
             </p:txBody>
           </p:sp>
         </mc:Choice>
-        <mc:Fallback>
+        <mc:Fallback xmlns="">
           <p:sp>
             <p:nvSpPr>
               <p:cNvPr id="22" name="TextBox 21"/>
@@ -4853,8 +4814,8 @@
           </p:sp>
         </mc:Fallback>
       </mc:AlternateContent>
-      <mc:AlternateContent xmlns:mc="http://schemas.openxmlformats.org/markup-compatibility/2006">
-        <mc:Choice xmlns:a14="http://schemas.microsoft.com/office/drawing/2010/main" Requires="a14">
+      <mc:AlternateContent xmlns:mc="http://schemas.openxmlformats.org/markup-compatibility/2006" xmlns:a14="http://schemas.microsoft.com/office/drawing/2010/main">
+        <mc:Choice Requires="a14">
           <p:sp>
             <p:nvSpPr>
               <p:cNvPr id="23" name="TextBox 22"/>
@@ -4986,7 +4947,7 @@
             </p:txBody>
           </p:sp>
         </mc:Choice>
-        <mc:Fallback>
+        <mc:Fallback xmlns="">
           <p:sp>
             <p:nvSpPr>
               <p:cNvPr id="23" name="TextBox 22"/>
@@ -5135,14 +5096,7 @@
                 <a:latin typeface="Times New Roman" panose="02020603050405020304" pitchFamily="18" charset="0"/>
                 <a:cs typeface="Times New Roman" panose="02020603050405020304" pitchFamily="18" charset="0"/>
               </a:rPr>
-              <a:t>Normalized Voltage: </a:t>
-            </a:r>
-            <a:r>
-              <a:rPr lang="en-US" dirty="0" smtClean="0">
-                <a:latin typeface="Times New Roman" panose="02020603050405020304" pitchFamily="18" charset="0"/>
-                <a:cs typeface="Times New Roman" panose="02020603050405020304" pitchFamily="18" charset="0"/>
-              </a:rPr>
-              <a:t>0.16 </a:t>
+              <a:t>Normalized Voltage: 0.16 </a:t>
             </a:r>
             <a:r>
               <a:rPr lang="en-US" dirty="0" err="1" smtClean="0">
@@ -5192,14 +5146,7 @@
                 <a:latin typeface="Times New Roman" panose="02020603050405020304" pitchFamily="18" charset="0"/>
                 <a:cs typeface="Times New Roman" panose="02020603050405020304" pitchFamily="18" charset="0"/>
               </a:rPr>
-              <a:t>Normalized </a:t>
-            </a:r>
-            <a:r>
-              <a:rPr lang="en-US" dirty="0" smtClean="0">
-                <a:latin typeface="Times New Roman" panose="02020603050405020304" pitchFamily="18" charset="0"/>
-                <a:cs typeface="Times New Roman" panose="02020603050405020304" pitchFamily="18" charset="0"/>
-              </a:rPr>
-              <a:t>Voltage</a:t>
+              <a:t>Normalized Voltage</a:t>
             </a:r>
             <a:endParaRPr lang="sv-SE" dirty="0">
               <a:latin typeface="Times New Roman" panose="02020603050405020304" pitchFamily="18" charset="0"/>
@@ -5244,8 +5191,8 @@
           </a:p>
         </p:txBody>
       </p:sp>
-      <mc:AlternateContent xmlns:mc="http://schemas.openxmlformats.org/markup-compatibility/2006">
-        <mc:Choice xmlns:a14="http://schemas.microsoft.com/office/drawing/2010/main" Requires="a14">
+      <mc:AlternateContent xmlns:mc="http://schemas.openxmlformats.org/markup-compatibility/2006" xmlns:a14="http://schemas.microsoft.com/office/drawing/2010/main">
+        <mc:Choice Requires="a14">
           <p:sp>
             <p:nvSpPr>
               <p:cNvPr id="31" name="TextBox 30"/>
@@ -5387,7 +5334,7 @@
             </p:txBody>
           </p:sp>
         </mc:Choice>
-        <mc:Fallback>
+        <mc:Fallback xmlns="">
           <p:sp>
             <p:nvSpPr>
               <p:cNvPr id="31" name="TextBox 30"/>
@@ -5426,8 +5373,8 @@
           </p:sp>
         </mc:Fallback>
       </mc:AlternateContent>
-      <mc:AlternateContent xmlns:mc="http://schemas.openxmlformats.org/markup-compatibility/2006">
-        <mc:Choice xmlns:a14="http://schemas.microsoft.com/office/drawing/2010/main" Requires="a14">
+      <mc:AlternateContent xmlns:mc="http://schemas.openxmlformats.org/markup-compatibility/2006" xmlns:a14="http://schemas.microsoft.com/office/drawing/2010/main">
+        <mc:Choice Requires="a14">
           <p:sp>
             <p:nvSpPr>
               <p:cNvPr id="32" name="TextBox 31"/>
@@ -5488,14 +5435,7 @@
                         <a:latin typeface="Cambria Math" panose="02040503050406030204" pitchFamily="18" charset="0"/>
                         <a:cs typeface="Times New Roman" panose="02020603050405020304" pitchFamily="18" charset="0"/>
                       </a:rPr>
-                      <m:t> </m:t>
-                    </m:r>
-                    <m:r>
-                      <a:rPr lang="en-US" sz="2000" b="0" i="1" dirty="0" smtClean="0">
-                        <a:latin typeface="Cambria Math" panose="02040503050406030204" pitchFamily="18" charset="0"/>
-                        <a:cs typeface="Times New Roman" panose="02020603050405020304" pitchFamily="18" charset="0"/>
-                      </a:rPr>
-                      <m:t> </m:t>
+                      <m:t>  </m:t>
                     </m:r>
                   </m:oMath>
                 </a14:m>
@@ -5514,7 +5454,7 @@
             </p:txBody>
           </p:sp>
         </mc:Choice>
-        <mc:Fallback>
+        <mc:Fallback xmlns="">
           <p:sp>
             <p:nvSpPr>
               <p:cNvPr id="32" name="TextBox 31"/>
@@ -5553,8 +5493,8 @@
           </p:sp>
         </mc:Fallback>
       </mc:AlternateContent>
-      <mc:AlternateContent xmlns:mc="http://schemas.openxmlformats.org/markup-compatibility/2006">
-        <mc:Choice xmlns:a14="http://schemas.microsoft.com/office/drawing/2010/main" Requires="a14">
+      <mc:AlternateContent xmlns:mc="http://schemas.openxmlformats.org/markup-compatibility/2006" xmlns:a14="http://schemas.microsoft.com/office/drawing/2010/main">
+        <mc:Choice Requires="a14">
           <p:sp>
             <p:nvSpPr>
               <p:cNvPr id="33" name="TextBox 32"/>
@@ -5686,7 +5626,7 @@
             </p:txBody>
           </p:sp>
         </mc:Choice>
-        <mc:Fallback>
+        <mc:Fallback xmlns="">
           <p:sp>
             <p:nvSpPr>
               <p:cNvPr id="33" name="TextBox 32"/>
@@ -6675,6 +6615,786 @@
 </p:sld>
 </file>
 
+<file path=ppt/slides/slide12.xml><?xml version="1.0" encoding="utf-8"?>
+<p:sld xmlns:a="http://schemas.openxmlformats.org/drawingml/2006/main" xmlns:r="http://schemas.openxmlformats.org/officeDocument/2006/relationships" xmlns:p="http://schemas.openxmlformats.org/presentationml/2006/main">
+  <p:cSld>
+    <p:spTree>
+      <p:nvGrpSpPr>
+        <p:cNvPr id="1" name=""/>
+        <p:cNvGrpSpPr/>
+        <p:nvPr/>
+      </p:nvGrpSpPr>
+      <p:grpSpPr>
+        <a:xfrm>
+          <a:off x="0" y="0"/>
+          <a:ext cx="0" cy="0"/>
+          <a:chOff x="0" y="0"/>
+          <a:chExt cx="0" cy="0"/>
+        </a:xfrm>
+      </p:grpSpPr>
+      <p:pic>
+        <p:nvPicPr>
+          <p:cNvPr id="4" name="Picture 3"/>
+          <p:cNvPicPr>
+            <a:picLocks noChangeAspect="1"/>
+          </p:cNvPicPr>
+          <p:nvPr/>
+        </p:nvPicPr>
+        <p:blipFill rotWithShape="1">
+          <a:blip r:embed="rId2"/>
+          <a:srcRect r="7500"/>
+          <a:stretch/>
+        </p:blipFill>
+        <p:spPr>
+          <a:xfrm>
+            <a:off x="1921328" y="493488"/>
+            <a:ext cx="7048501" cy="2857500"/>
+          </a:xfrm>
+          <a:prstGeom prst="rect">
+            <a:avLst/>
+          </a:prstGeom>
+        </p:spPr>
+      </p:pic>
+      <p:pic>
+        <p:nvPicPr>
+          <p:cNvPr id="5" name="Picture 4"/>
+          <p:cNvPicPr>
+            <a:picLocks noChangeAspect="1"/>
+          </p:cNvPicPr>
+          <p:nvPr/>
+        </p:nvPicPr>
+        <p:blipFill rotWithShape="1">
+          <a:blip r:embed="rId3"/>
+          <a:srcRect r="8071"/>
+          <a:stretch/>
+        </p:blipFill>
+        <p:spPr>
+          <a:xfrm>
+            <a:off x="1921328" y="3453363"/>
+            <a:ext cx="7004958" cy="2857500"/>
+          </a:xfrm>
+          <a:prstGeom prst="rect">
+            <a:avLst/>
+          </a:prstGeom>
+        </p:spPr>
+      </p:pic>
+      <p:sp>
+        <p:nvSpPr>
+          <p:cNvPr id="7" name="TextBox 6"/>
+          <p:cNvSpPr txBox="1"/>
+          <p:nvPr/>
+        </p:nvSpPr>
+        <p:spPr>
+          <a:xfrm rot="16200000">
+            <a:off x="1017452" y="1386477"/>
+            <a:ext cx="2958193" cy="769441"/>
+          </a:xfrm>
+          <a:prstGeom prst="rect">
+            <a:avLst/>
+          </a:prstGeom>
+          <a:noFill/>
+        </p:spPr>
+        <p:txBody>
+          <a:bodyPr wrap="square" rtlCol="0">
+            <a:spAutoFit/>
+          </a:bodyPr>
+          <a:lstStyle/>
+          <a:p>
+            <a:pPr algn="ctr"/>
+            <a:r>
+              <a:rPr lang="en-US" sz="2200" dirty="0" smtClean="0">
+                <a:latin typeface="Times New Roman" panose="02020603050405020304" pitchFamily="18" charset="0"/>
+                <a:cs typeface="Times New Roman" panose="02020603050405020304" pitchFamily="18" charset="0"/>
+              </a:rPr>
+              <a:t>Normalized </a:t>
+            </a:r>
+            <a:r>
+              <a:rPr lang="en-US" sz="2200" dirty="0" smtClean="0">
+                <a:latin typeface="Times New Roman" panose="02020603050405020304" pitchFamily="18" charset="0"/>
+                <a:cs typeface="Times New Roman" panose="02020603050405020304" pitchFamily="18" charset="0"/>
+              </a:rPr>
+              <a:t>Voltage: </a:t>
+            </a:r>
+          </a:p>
+          <a:p>
+            <a:pPr algn="ctr"/>
+            <a:r>
+              <a:rPr lang="en-US" sz="2200" dirty="0" smtClean="0">
+                <a:latin typeface="Times New Roman" panose="02020603050405020304" pitchFamily="18" charset="0"/>
+                <a:cs typeface="Times New Roman" panose="02020603050405020304" pitchFamily="18" charset="0"/>
+              </a:rPr>
+              <a:t>0.16 </a:t>
+            </a:r>
+            <a:r>
+              <a:rPr lang="en-US" sz="2200" dirty="0" err="1" smtClean="0">
+                <a:latin typeface="Times New Roman" panose="02020603050405020304" pitchFamily="18" charset="0"/>
+                <a:cs typeface="Times New Roman" panose="02020603050405020304" pitchFamily="18" charset="0"/>
+              </a:rPr>
+              <a:t>p.u</a:t>
+            </a:r>
+            <a:r>
+              <a:rPr lang="en-US" sz="2200" dirty="0" smtClean="0">
+                <a:latin typeface="Times New Roman" panose="02020603050405020304" pitchFamily="18" charset="0"/>
+                <a:cs typeface="Times New Roman" panose="02020603050405020304" pitchFamily="18" charset="0"/>
+              </a:rPr>
+              <a:t>./div</a:t>
+            </a:r>
+            <a:endParaRPr lang="sv-SE" sz="2200" dirty="0">
+              <a:latin typeface="Times New Roman" panose="02020603050405020304" pitchFamily="18" charset="0"/>
+              <a:cs typeface="Times New Roman" panose="02020603050405020304" pitchFamily="18" charset="0"/>
+            </a:endParaRPr>
+          </a:p>
+        </p:txBody>
+      </p:sp>
+      <p:sp>
+        <p:nvSpPr>
+          <p:cNvPr id="8" name="TextBox 7"/>
+          <p:cNvSpPr txBox="1"/>
+          <p:nvPr/>
+        </p:nvSpPr>
+        <p:spPr>
+          <a:xfrm rot="16200000">
+            <a:off x="1106893" y="4525559"/>
+            <a:ext cx="2440757" cy="430887"/>
+          </a:xfrm>
+          <a:prstGeom prst="rect">
+            <a:avLst/>
+          </a:prstGeom>
+          <a:noFill/>
+        </p:spPr>
+        <p:txBody>
+          <a:bodyPr wrap="square" rtlCol="0">
+            <a:spAutoFit/>
+          </a:bodyPr>
+          <a:lstStyle/>
+          <a:p>
+            <a:pPr algn="ctr"/>
+            <a:r>
+              <a:rPr lang="en-US" sz="2200" dirty="0" smtClean="0">
+                <a:latin typeface="Times New Roman" panose="02020603050405020304" pitchFamily="18" charset="0"/>
+                <a:cs typeface="Times New Roman" panose="02020603050405020304" pitchFamily="18" charset="0"/>
+              </a:rPr>
+              <a:t>Normalized </a:t>
+            </a:r>
+            <a:r>
+              <a:rPr lang="en-US" sz="2200" dirty="0" smtClean="0">
+                <a:latin typeface="Times New Roman" panose="02020603050405020304" pitchFamily="18" charset="0"/>
+                <a:cs typeface="Times New Roman" panose="02020603050405020304" pitchFamily="18" charset="0"/>
+              </a:rPr>
+              <a:t>Voltage</a:t>
+            </a:r>
+            <a:endParaRPr lang="sv-SE" sz="2200" dirty="0">
+              <a:latin typeface="Times New Roman" panose="02020603050405020304" pitchFamily="18" charset="0"/>
+              <a:cs typeface="Times New Roman" panose="02020603050405020304" pitchFamily="18" charset="0"/>
+            </a:endParaRPr>
+          </a:p>
+        </p:txBody>
+      </p:sp>
+      <p:sp>
+        <p:nvSpPr>
+          <p:cNvPr id="9" name="TextBox 8"/>
+          <p:cNvSpPr txBox="1"/>
+          <p:nvPr/>
+        </p:nvSpPr>
+        <p:spPr>
+          <a:xfrm>
+            <a:off x="4903389" y="3089737"/>
+            <a:ext cx="2089150" cy="430887"/>
+          </a:xfrm>
+          <a:prstGeom prst="rect">
+            <a:avLst/>
+          </a:prstGeom>
+          <a:noFill/>
+        </p:spPr>
+        <p:txBody>
+          <a:bodyPr wrap="square" rtlCol="0">
+            <a:spAutoFit/>
+          </a:bodyPr>
+          <a:lstStyle/>
+          <a:p>
+            <a:r>
+              <a:rPr lang="en-US" sz="2200" dirty="0" smtClean="0">
+                <a:latin typeface="Times New Roman" panose="02020603050405020304" pitchFamily="18" charset="0"/>
+                <a:cs typeface="Times New Roman" panose="02020603050405020304" pitchFamily="18" charset="0"/>
+              </a:rPr>
+              <a:t>Time: 2ms/div</a:t>
+            </a:r>
+            <a:endParaRPr lang="sv-SE" sz="2200" dirty="0">
+              <a:latin typeface="Times New Roman" panose="02020603050405020304" pitchFamily="18" charset="0"/>
+              <a:cs typeface="Times New Roman" panose="02020603050405020304" pitchFamily="18" charset="0"/>
+            </a:endParaRPr>
+          </a:p>
+        </p:txBody>
+      </p:sp>
+      <p:sp>
+        <p:nvSpPr>
+          <p:cNvPr id="10" name="TextBox 9"/>
+          <p:cNvSpPr txBox="1"/>
+          <p:nvPr/>
+        </p:nvSpPr>
+        <p:spPr>
+          <a:xfrm>
+            <a:off x="5091503" y="6229939"/>
+            <a:ext cx="2089150" cy="430887"/>
+          </a:xfrm>
+          <a:prstGeom prst="rect">
+            <a:avLst/>
+          </a:prstGeom>
+          <a:noFill/>
+        </p:spPr>
+        <p:txBody>
+          <a:bodyPr wrap="square" rtlCol="0">
+            <a:spAutoFit/>
+          </a:bodyPr>
+          <a:lstStyle/>
+          <a:p>
+            <a:r>
+              <a:rPr lang="en-US" sz="2200" dirty="0" smtClean="0">
+                <a:latin typeface="Times New Roman" panose="02020603050405020304" pitchFamily="18" charset="0"/>
+                <a:cs typeface="Times New Roman" panose="02020603050405020304" pitchFamily="18" charset="0"/>
+              </a:rPr>
+              <a:t>Frequency</a:t>
+            </a:r>
+            <a:endParaRPr lang="sv-SE" sz="2200" dirty="0">
+              <a:latin typeface="Times New Roman" panose="02020603050405020304" pitchFamily="18" charset="0"/>
+              <a:cs typeface="Times New Roman" panose="02020603050405020304" pitchFamily="18" charset="0"/>
+            </a:endParaRPr>
+          </a:p>
+        </p:txBody>
+      </p:sp>
+    </p:spTree>
+    <p:extLst>
+      <p:ext uri="{BB962C8B-B14F-4D97-AF65-F5344CB8AC3E}">
+        <p14:creationId xmlns:p14="http://schemas.microsoft.com/office/powerpoint/2010/main" val="735019734"/>
+      </p:ext>
+    </p:extLst>
+  </p:cSld>
+  <p:clrMapOvr>
+    <a:masterClrMapping/>
+  </p:clrMapOvr>
+</p:sld>
+</file>
+
+<file path=ppt/slides/slide13.xml><?xml version="1.0" encoding="utf-8"?>
+<p:sld xmlns:a="http://schemas.openxmlformats.org/drawingml/2006/main" xmlns:r="http://schemas.openxmlformats.org/officeDocument/2006/relationships" xmlns:p="http://schemas.openxmlformats.org/presentationml/2006/main">
+  <p:cSld>
+    <p:spTree>
+      <p:nvGrpSpPr>
+        <p:cNvPr id="1" name=""/>
+        <p:cNvGrpSpPr/>
+        <p:nvPr/>
+      </p:nvGrpSpPr>
+      <p:grpSpPr>
+        <a:xfrm>
+          <a:off x="0" y="0"/>
+          <a:ext cx="0" cy="0"/>
+          <a:chOff x="0" y="0"/>
+          <a:chExt cx="0" cy="0"/>
+        </a:xfrm>
+      </p:grpSpPr>
+      <p:sp>
+        <p:nvSpPr>
+          <p:cNvPr id="7" name="TextBox 6"/>
+          <p:cNvSpPr txBox="1"/>
+          <p:nvPr/>
+        </p:nvSpPr>
+        <p:spPr>
+          <a:xfrm rot="16200000">
+            <a:off x="1017452" y="1386477"/>
+            <a:ext cx="2958193" cy="769441"/>
+          </a:xfrm>
+          <a:prstGeom prst="rect">
+            <a:avLst/>
+          </a:prstGeom>
+          <a:noFill/>
+        </p:spPr>
+        <p:txBody>
+          <a:bodyPr wrap="square" rtlCol="0">
+            <a:spAutoFit/>
+          </a:bodyPr>
+          <a:lstStyle/>
+          <a:p>
+            <a:pPr algn="ctr"/>
+            <a:r>
+              <a:rPr lang="en-US" sz="2200" dirty="0" smtClean="0">
+                <a:latin typeface="Times New Roman" panose="02020603050405020304" pitchFamily="18" charset="0"/>
+                <a:cs typeface="Times New Roman" panose="02020603050405020304" pitchFamily="18" charset="0"/>
+              </a:rPr>
+              <a:t>Normalized </a:t>
+            </a:r>
+            <a:r>
+              <a:rPr lang="en-US" sz="2200" dirty="0" smtClean="0">
+                <a:latin typeface="Times New Roman" panose="02020603050405020304" pitchFamily="18" charset="0"/>
+                <a:cs typeface="Times New Roman" panose="02020603050405020304" pitchFamily="18" charset="0"/>
+              </a:rPr>
+              <a:t>Voltage: </a:t>
+            </a:r>
+          </a:p>
+          <a:p>
+            <a:pPr algn="ctr"/>
+            <a:r>
+              <a:rPr lang="en-US" sz="2200" dirty="0" smtClean="0">
+                <a:latin typeface="Times New Roman" panose="02020603050405020304" pitchFamily="18" charset="0"/>
+                <a:cs typeface="Times New Roman" panose="02020603050405020304" pitchFamily="18" charset="0"/>
+              </a:rPr>
+              <a:t>0.16 </a:t>
+            </a:r>
+            <a:r>
+              <a:rPr lang="en-US" sz="2200" dirty="0" err="1" smtClean="0">
+                <a:latin typeface="Times New Roman" panose="02020603050405020304" pitchFamily="18" charset="0"/>
+                <a:cs typeface="Times New Roman" panose="02020603050405020304" pitchFamily="18" charset="0"/>
+              </a:rPr>
+              <a:t>p.u</a:t>
+            </a:r>
+            <a:r>
+              <a:rPr lang="en-US" sz="2200" dirty="0" smtClean="0">
+                <a:latin typeface="Times New Roman" panose="02020603050405020304" pitchFamily="18" charset="0"/>
+                <a:cs typeface="Times New Roman" panose="02020603050405020304" pitchFamily="18" charset="0"/>
+              </a:rPr>
+              <a:t>./div</a:t>
+            </a:r>
+            <a:endParaRPr lang="sv-SE" sz="2200" dirty="0">
+              <a:latin typeface="Times New Roman" panose="02020603050405020304" pitchFamily="18" charset="0"/>
+              <a:cs typeface="Times New Roman" panose="02020603050405020304" pitchFamily="18" charset="0"/>
+            </a:endParaRPr>
+          </a:p>
+        </p:txBody>
+      </p:sp>
+      <p:sp>
+        <p:nvSpPr>
+          <p:cNvPr id="8" name="TextBox 7"/>
+          <p:cNvSpPr txBox="1"/>
+          <p:nvPr/>
+        </p:nvSpPr>
+        <p:spPr>
+          <a:xfrm rot="16200000">
+            <a:off x="1106893" y="4525559"/>
+            <a:ext cx="2440757" cy="430887"/>
+          </a:xfrm>
+          <a:prstGeom prst="rect">
+            <a:avLst/>
+          </a:prstGeom>
+          <a:noFill/>
+        </p:spPr>
+        <p:txBody>
+          <a:bodyPr wrap="square" rtlCol="0">
+            <a:spAutoFit/>
+          </a:bodyPr>
+          <a:lstStyle/>
+          <a:p>
+            <a:pPr algn="ctr"/>
+            <a:r>
+              <a:rPr lang="en-US" sz="2200" dirty="0" smtClean="0">
+                <a:latin typeface="Times New Roman" panose="02020603050405020304" pitchFamily="18" charset="0"/>
+                <a:cs typeface="Times New Roman" panose="02020603050405020304" pitchFamily="18" charset="0"/>
+              </a:rPr>
+              <a:t>Normalized </a:t>
+            </a:r>
+            <a:r>
+              <a:rPr lang="en-US" sz="2200" dirty="0" smtClean="0">
+                <a:latin typeface="Times New Roman" panose="02020603050405020304" pitchFamily="18" charset="0"/>
+                <a:cs typeface="Times New Roman" panose="02020603050405020304" pitchFamily="18" charset="0"/>
+              </a:rPr>
+              <a:t>Voltage</a:t>
+            </a:r>
+            <a:endParaRPr lang="sv-SE" sz="2200" dirty="0">
+              <a:latin typeface="Times New Roman" panose="02020603050405020304" pitchFamily="18" charset="0"/>
+              <a:cs typeface="Times New Roman" panose="02020603050405020304" pitchFamily="18" charset="0"/>
+            </a:endParaRPr>
+          </a:p>
+        </p:txBody>
+      </p:sp>
+      <p:sp>
+        <p:nvSpPr>
+          <p:cNvPr id="9" name="TextBox 8"/>
+          <p:cNvSpPr txBox="1"/>
+          <p:nvPr/>
+        </p:nvSpPr>
+        <p:spPr>
+          <a:xfrm>
+            <a:off x="4923800" y="3034850"/>
+            <a:ext cx="2089150" cy="430887"/>
+          </a:xfrm>
+          <a:prstGeom prst="rect">
+            <a:avLst/>
+          </a:prstGeom>
+          <a:noFill/>
+        </p:spPr>
+        <p:txBody>
+          <a:bodyPr wrap="square" rtlCol="0">
+            <a:spAutoFit/>
+          </a:bodyPr>
+          <a:lstStyle/>
+          <a:p>
+            <a:r>
+              <a:rPr lang="en-US" sz="2200" dirty="0" smtClean="0">
+                <a:latin typeface="Times New Roman" panose="02020603050405020304" pitchFamily="18" charset="0"/>
+                <a:cs typeface="Times New Roman" panose="02020603050405020304" pitchFamily="18" charset="0"/>
+              </a:rPr>
+              <a:t>Time: 2ms/div</a:t>
+            </a:r>
+            <a:endParaRPr lang="sv-SE" sz="2200" dirty="0">
+              <a:latin typeface="Times New Roman" panose="02020603050405020304" pitchFamily="18" charset="0"/>
+              <a:cs typeface="Times New Roman" panose="02020603050405020304" pitchFamily="18" charset="0"/>
+            </a:endParaRPr>
+          </a:p>
+        </p:txBody>
+      </p:sp>
+      <p:sp>
+        <p:nvSpPr>
+          <p:cNvPr id="10" name="TextBox 9"/>
+          <p:cNvSpPr txBox="1"/>
+          <p:nvPr/>
+        </p:nvSpPr>
+        <p:spPr>
+          <a:xfrm>
+            <a:off x="5111914" y="6175052"/>
+            <a:ext cx="2089150" cy="430887"/>
+          </a:xfrm>
+          <a:prstGeom prst="rect">
+            <a:avLst/>
+          </a:prstGeom>
+          <a:noFill/>
+        </p:spPr>
+        <p:txBody>
+          <a:bodyPr wrap="square" rtlCol="0">
+            <a:spAutoFit/>
+          </a:bodyPr>
+          <a:lstStyle/>
+          <a:p>
+            <a:r>
+              <a:rPr lang="en-US" sz="2200" dirty="0" smtClean="0">
+                <a:latin typeface="Times New Roman" panose="02020603050405020304" pitchFamily="18" charset="0"/>
+                <a:cs typeface="Times New Roman" panose="02020603050405020304" pitchFamily="18" charset="0"/>
+              </a:rPr>
+              <a:t>Frequency</a:t>
+            </a:r>
+            <a:endParaRPr lang="sv-SE" sz="2200" dirty="0">
+              <a:latin typeface="Times New Roman" panose="02020603050405020304" pitchFamily="18" charset="0"/>
+              <a:cs typeface="Times New Roman" panose="02020603050405020304" pitchFamily="18" charset="0"/>
+            </a:endParaRPr>
+          </a:p>
+        </p:txBody>
+      </p:sp>
+      <p:pic>
+        <p:nvPicPr>
+          <p:cNvPr id="11" name="Picture 10"/>
+          <p:cNvPicPr>
+            <a:picLocks noChangeAspect="1"/>
+          </p:cNvPicPr>
+          <p:nvPr/>
+        </p:nvPicPr>
+        <p:blipFill rotWithShape="1">
+          <a:blip r:embed="rId2"/>
+          <a:srcRect r="7846"/>
+          <a:stretch/>
+        </p:blipFill>
+        <p:spPr>
+          <a:xfrm>
+            <a:off x="1962150" y="450618"/>
+            <a:ext cx="7022193" cy="2857500"/>
+          </a:xfrm>
+          <a:prstGeom prst="rect">
+            <a:avLst/>
+          </a:prstGeom>
+        </p:spPr>
+      </p:pic>
+      <p:pic>
+        <p:nvPicPr>
+          <p:cNvPr id="12" name="Picture 11"/>
+          <p:cNvPicPr>
+            <a:picLocks noChangeAspect="1"/>
+          </p:cNvPicPr>
+          <p:nvPr/>
+        </p:nvPicPr>
+        <p:blipFill rotWithShape="1">
+          <a:blip r:embed="rId3"/>
+          <a:srcRect r="7846"/>
+          <a:stretch/>
+        </p:blipFill>
+        <p:spPr>
+          <a:xfrm>
+            <a:off x="1962150" y="3316387"/>
+            <a:ext cx="7022193" cy="2857500"/>
+          </a:xfrm>
+          <a:prstGeom prst="rect">
+            <a:avLst/>
+          </a:prstGeom>
+        </p:spPr>
+      </p:pic>
+    </p:spTree>
+    <p:extLst>
+      <p:ext uri="{BB962C8B-B14F-4D97-AF65-F5344CB8AC3E}">
+        <p14:creationId xmlns:p14="http://schemas.microsoft.com/office/powerpoint/2010/main" val="808139165"/>
+      </p:ext>
+    </p:extLst>
+  </p:cSld>
+  <p:clrMapOvr>
+    <a:masterClrMapping/>
+  </p:clrMapOvr>
+</p:sld>
+</file>
+
+<file path=ppt/slides/slide14.xml><?xml version="1.0" encoding="utf-8"?>
+<p:sld xmlns:a="http://schemas.openxmlformats.org/drawingml/2006/main" xmlns:r="http://schemas.openxmlformats.org/officeDocument/2006/relationships" xmlns:p="http://schemas.openxmlformats.org/presentationml/2006/main">
+  <p:cSld>
+    <p:spTree>
+      <p:nvGrpSpPr>
+        <p:cNvPr id="1" name=""/>
+        <p:cNvGrpSpPr/>
+        <p:nvPr/>
+      </p:nvGrpSpPr>
+      <p:grpSpPr>
+        <a:xfrm>
+          <a:off x="0" y="0"/>
+          <a:ext cx="0" cy="0"/>
+          <a:chOff x="0" y="0"/>
+          <a:chExt cx="0" cy="0"/>
+        </a:xfrm>
+      </p:grpSpPr>
+      <p:sp>
+        <p:nvSpPr>
+          <p:cNvPr id="7" name="TextBox 6"/>
+          <p:cNvSpPr txBox="1"/>
+          <p:nvPr/>
+        </p:nvSpPr>
+        <p:spPr>
+          <a:xfrm rot="16200000">
+            <a:off x="1017452" y="1386477"/>
+            <a:ext cx="2958193" cy="769441"/>
+          </a:xfrm>
+          <a:prstGeom prst="rect">
+            <a:avLst/>
+          </a:prstGeom>
+          <a:noFill/>
+        </p:spPr>
+        <p:txBody>
+          <a:bodyPr wrap="square" rtlCol="0">
+            <a:spAutoFit/>
+          </a:bodyPr>
+          <a:lstStyle/>
+          <a:p>
+            <a:pPr algn="ctr"/>
+            <a:r>
+              <a:rPr lang="en-US" sz="2200" dirty="0" smtClean="0">
+                <a:latin typeface="Times New Roman" panose="02020603050405020304" pitchFamily="18" charset="0"/>
+                <a:cs typeface="Times New Roman" panose="02020603050405020304" pitchFamily="18" charset="0"/>
+              </a:rPr>
+              <a:t>Normalized </a:t>
+            </a:r>
+            <a:r>
+              <a:rPr lang="en-US" sz="2200" dirty="0" smtClean="0">
+                <a:latin typeface="Times New Roman" panose="02020603050405020304" pitchFamily="18" charset="0"/>
+                <a:cs typeface="Times New Roman" panose="02020603050405020304" pitchFamily="18" charset="0"/>
+              </a:rPr>
+              <a:t>Voltage: </a:t>
+            </a:r>
+          </a:p>
+          <a:p>
+            <a:pPr algn="ctr"/>
+            <a:r>
+              <a:rPr lang="en-US" sz="2200" dirty="0" smtClean="0">
+                <a:latin typeface="Times New Roman" panose="02020603050405020304" pitchFamily="18" charset="0"/>
+                <a:cs typeface="Times New Roman" panose="02020603050405020304" pitchFamily="18" charset="0"/>
+              </a:rPr>
+              <a:t>0.16 </a:t>
+            </a:r>
+            <a:r>
+              <a:rPr lang="en-US" sz="2200" dirty="0" err="1" smtClean="0">
+                <a:latin typeface="Times New Roman" panose="02020603050405020304" pitchFamily="18" charset="0"/>
+                <a:cs typeface="Times New Roman" panose="02020603050405020304" pitchFamily="18" charset="0"/>
+              </a:rPr>
+              <a:t>p.u</a:t>
+            </a:r>
+            <a:r>
+              <a:rPr lang="en-US" sz="2200" dirty="0" smtClean="0">
+                <a:latin typeface="Times New Roman" panose="02020603050405020304" pitchFamily="18" charset="0"/>
+                <a:cs typeface="Times New Roman" panose="02020603050405020304" pitchFamily="18" charset="0"/>
+              </a:rPr>
+              <a:t>./div</a:t>
+            </a:r>
+            <a:endParaRPr lang="sv-SE" sz="2200" dirty="0">
+              <a:latin typeface="Times New Roman" panose="02020603050405020304" pitchFamily="18" charset="0"/>
+              <a:cs typeface="Times New Roman" panose="02020603050405020304" pitchFamily="18" charset="0"/>
+            </a:endParaRPr>
+          </a:p>
+        </p:txBody>
+      </p:sp>
+      <p:sp>
+        <p:nvSpPr>
+          <p:cNvPr id="8" name="TextBox 7"/>
+          <p:cNvSpPr txBox="1"/>
+          <p:nvPr/>
+        </p:nvSpPr>
+        <p:spPr>
+          <a:xfrm rot="16200000">
+            <a:off x="1106893" y="4525559"/>
+            <a:ext cx="2440757" cy="430887"/>
+          </a:xfrm>
+          <a:prstGeom prst="rect">
+            <a:avLst/>
+          </a:prstGeom>
+          <a:noFill/>
+        </p:spPr>
+        <p:txBody>
+          <a:bodyPr wrap="square" rtlCol="0">
+            <a:spAutoFit/>
+          </a:bodyPr>
+          <a:lstStyle/>
+          <a:p>
+            <a:pPr algn="ctr"/>
+            <a:r>
+              <a:rPr lang="en-US" sz="2200" dirty="0" smtClean="0">
+                <a:latin typeface="Times New Roman" panose="02020603050405020304" pitchFamily="18" charset="0"/>
+                <a:cs typeface="Times New Roman" panose="02020603050405020304" pitchFamily="18" charset="0"/>
+              </a:rPr>
+              <a:t>Normalized </a:t>
+            </a:r>
+            <a:r>
+              <a:rPr lang="en-US" sz="2200" dirty="0" smtClean="0">
+                <a:latin typeface="Times New Roman" panose="02020603050405020304" pitchFamily="18" charset="0"/>
+                <a:cs typeface="Times New Roman" panose="02020603050405020304" pitchFamily="18" charset="0"/>
+              </a:rPr>
+              <a:t>Voltage</a:t>
+            </a:r>
+            <a:endParaRPr lang="sv-SE" sz="2200" dirty="0">
+              <a:latin typeface="Times New Roman" panose="02020603050405020304" pitchFamily="18" charset="0"/>
+              <a:cs typeface="Times New Roman" panose="02020603050405020304" pitchFamily="18" charset="0"/>
+            </a:endParaRPr>
+          </a:p>
+        </p:txBody>
+      </p:sp>
+      <p:sp>
+        <p:nvSpPr>
+          <p:cNvPr id="9" name="TextBox 8"/>
+          <p:cNvSpPr txBox="1"/>
+          <p:nvPr/>
+        </p:nvSpPr>
+        <p:spPr>
+          <a:xfrm>
+            <a:off x="4923800" y="3034850"/>
+            <a:ext cx="2089150" cy="430887"/>
+          </a:xfrm>
+          <a:prstGeom prst="rect">
+            <a:avLst/>
+          </a:prstGeom>
+          <a:noFill/>
+        </p:spPr>
+        <p:txBody>
+          <a:bodyPr wrap="square" rtlCol="0">
+            <a:spAutoFit/>
+          </a:bodyPr>
+          <a:lstStyle/>
+          <a:p>
+            <a:r>
+              <a:rPr lang="en-US" sz="2200" dirty="0" smtClean="0">
+                <a:latin typeface="Times New Roman" panose="02020603050405020304" pitchFamily="18" charset="0"/>
+                <a:cs typeface="Times New Roman" panose="02020603050405020304" pitchFamily="18" charset="0"/>
+              </a:rPr>
+              <a:t>Time: 2ms/div</a:t>
+            </a:r>
+            <a:endParaRPr lang="sv-SE" sz="2200" dirty="0">
+              <a:latin typeface="Times New Roman" panose="02020603050405020304" pitchFamily="18" charset="0"/>
+              <a:cs typeface="Times New Roman" panose="02020603050405020304" pitchFamily="18" charset="0"/>
+            </a:endParaRPr>
+          </a:p>
+        </p:txBody>
+      </p:sp>
+      <p:sp>
+        <p:nvSpPr>
+          <p:cNvPr id="10" name="TextBox 9"/>
+          <p:cNvSpPr txBox="1"/>
+          <p:nvPr/>
+        </p:nvSpPr>
+        <p:spPr>
+          <a:xfrm>
+            <a:off x="5111914" y="6175052"/>
+            <a:ext cx="2089150" cy="430887"/>
+          </a:xfrm>
+          <a:prstGeom prst="rect">
+            <a:avLst/>
+          </a:prstGeom>
+          <a:noFill/>
+        </p:spPr>
+        <p:txBody>
+          <a:bodyPr wrap="square" rtlCol="0">
+            <a:spAutoFit/>
+          </a:bodyPr>
+          <a:lstStyle/>
+          <a:p>
+            <a:r>
+              <a:rPr lang="en-US" sz="2200" dirty="0" smtClean="0">
+                <a:latin typeface="Times New Roman" panose="02020603050405020304" pitchFamily="18" charset="0"/>
+                <a:cs typeface="Times New Roman" panose="02020603050405020304" pitchFamily="18" charset="0"/>
+              </a:rPr>
+              <a:t>Frequency</a:t>
+            </a:r>
+            <a:endParaRPr lang="sv-SE" sz="2200" dirty="0">
+              <a:latin typeface="Times New Roman" panose="02020603050405020304" pitchFamily="18" charset="0"/>
+              <a:cs typeface="Times New Roman" panose="02020603050405020304" pitchFamily="18" charset="0"/>
+            </a:endParaRPr>
+          </a:p>
+        </p:txBody>
+      </p:sp>
+      <p:pic>
+        <p:nvPicPr>
+          <p:cNvPr id="4" name="Picture 3"/>
+          <p:cNvPicPr>
+            <a:picLocks noChangeAspect="1"/>
+          </p:cNvPicPr>
+          <p:nvPr/>
+        </p:nvPicPr>
+        <p:blipFill rotWithShape="1">
+          <a:blip r:embed="rId2"/>
+          <a:srcRect r="8036"/>
+          <a:stretch/>
+        </p:blipFill>
+        <p:spPr>
+          <a:xfrm>
+            <a:off x="1962150" y="533562"/>
+            <a:ext cx="7007679" cy="2857500"/>
+          </a:xfrm>
+          <a:prstGeom prst="rect">
+            <a:avLst/>
+          </a:prstGeom>
+        </p:spPr>
+      </p:pic>
+      <p:pic>
+        <p:nvPicPr>
+          <p:cNvPr id="5" name="Picture 4"/>
+          <p:cNvPicPr>
+            <a:picLocks noChangeAspect="1"/>
+          </p:cNvPicPr>
+          <p:nvPr/>
+        </p:nvPicPr>
+        <p:blipFill rotWithShape="1">
+          <a:blip r:embed="rId3"/>
+          <a:srcRect r="8036"/>
+          <a:stretch/>
+        </p:blipFill>
+        <p:spPr>
+          <a:xfrm>
+            <a:off x="1962150" y="3391062"/>
+            <a:ext cx="7007679" cy="2857500"/>
+          </a:xfrm>
+          <a:prstGeom prst="rect">
+            <a:avLst/>
+          </a:prstGeom>
+        </p:spPr>
+      </p:pic>
+    </p:spTree>
+    <p:extLst>
+      <p:ext uri="{BB962C8B-B14F-4D97-AF65-F5344CB8AC3E}">
+        <p14:creationId xmlns:p14="http://schemas.microsoft.com/office/powerpoint/2010/main" val="652068475"/>
+      </p:ext>
+    </p:extLst>
+  </p:cSld>
+  <p:clrMapOvr>
+    <a:masterClrMapping/>
+  </p:clrMapOvr>
+</p:sld>
+</file>
+
 <file path=ppt/slides/slide2.xml><?xml version="1.0" encoding="utf-8"?>
 <p:sld xmlns:a="http://schemas.openxmlformats.org/drawingml/2006/main" xmlns:r="http://schemas.openxmlformats.org/officeDocument/2006/relationships" xmlns:p="http://schemas.openxmlformats.org/presentationml/2006/main">
   <p:cSld>
@@ -7787,14 +8507,7 @@
                 <a:latin typeface="Times New Roman" panose="02020603050405020304" pitchFamily="18" charset="0"/>
                 <a:cs typeface="Times New Roman" panose="02020603050405020304" pitchFamily="18" charset="0"/>
               </a:rPr>
-              <a:t>Normalized Voltage: </a:t>
-            </a:r>
-            <a:r>
-              <a:rPr lang="en-US" sz="1400" dirty="0" smtClean="0">
-                <a:latin typeface="Times New Roman" panose="02020603050405020304" pitchFamily="18" charset="0"/>
-                <a:cs typeface="Times New Roman" panose="02020603050405020304" pitchFamily="18" charset="0"/>
-              </a:rPr>
-              <a:t>0.16 </a:t>
+              <a:t>Normalized Voltage: 0.16 </a:t>
             </a:r>
             <a:r>
               <a:rPr lang="en-US" sz="1400" dirty="0" err="1" smtClean="0">
@@ -7867,14 +8580,7 @@
                 <a:latin typeface="Times New Roman" panose="02020603050405020304" pitchFamily="18" charset="0"/>
                 <a:cs typeface="Times New Roman" panose="02020603050405020304" pitchFamily="18" charset="0"/>
               </a:rPr>
-              <a:t>Normalized </a:t>
-            </a:r>
-            <a:r>
-              <a:rPr lang="en-US" sz="1400" dirty="0" smtClean="0">
-                <a:latin typeface="Times New Roman" panose="02020603050405020304" pitchFamily="18" charset="0"/>
-                <a:cs typeface="Times New Roman" panose="02020603050405020304" pitchFamily="18" charset="0"/>
-              </a:rPr>
-              <a:t>Voltage</a:t>
+              <a:t>Normalized Voltage</a:t>
             </a:r>
             <a:endParaRPr lang="sv-SE" sz="1400" dirty="0">
               <a:latin typeface="Times New Roman" panose="02020603050405020304" pitchFamily="18" charset="0"/>
@@ -8203,14 +8909,7 @@
                 <a:latin typeface="Times New Roman" panose="02020603050405020304" pitchFamily="18" charset="0"/>
                 <a:cs typeface="Times New Roman" panose="02020603050405020304" pitchFamily="18" charset="0"/>
               </a:rPr>
-              <a:t>Normalized Voltage: </a:t>
-            </a:r>
-            <a:r>
-              <a:rPr lang="en-US" dirty="0" smtClean="0">
-                <a:latin typeface="Times New Roman" panose="02020603050405020304" pitchFamily="18" charset="0"/>
-                <a:cs typeface="Times New Roman" panose="02020603050405020304" pitchFamily="18" charset="0"/>
-              </a:rPr>
-              <a:t>0.16 </a:t>
+              <a:t>Normalized Voltage: 0.16 </a:t>
             </a:r>
             <a:r>
               <a:rPr lang="en-US" dirty="0" err="1" smtClean="0">
@@ -8283,14 +8982,7 @@
                 <a:latin typeface="Times New Roman" panose="02020603050405020304" pitchFamily="18" charset="0"/>
                 <a:cs typeface="Times New Roman" panose="02020603050405020304" pitchFamily="18" charset="0"/>
               </a:rPr>
-              <a:t>Normalized </a:t>
-            </a:r>
-            <a:r>
-              <a:rPr lang="en-US" dirty="0" smtClean="0">
-                <a:latin typeface="Times New Roman" panose="02020603050405020304" pitchFamily="18" charset="0"/>
-                <a:cs typeface="Times New Roman" panose="02020603050405020304" pitchFamily="18" charset="0"/>
-              </a:rPr>
-              <a:t>Voltage</a:t>
+              <a:t>Normalized Voltage</a:t>
             </a:r>
             <a:endParaRPr lang="sv-SE" dirty="0">
               <a:latin typeface="Times New Roman" panose="02020603050405020304" pitchFamily="18" charset="0"/>
@@ -8335,8 +9027,8 @@
           </a:p>
         </p:txBody>
       </p:sp>
-      <mc:AlternateContent xmlns:mc="http://schemas.openxmlformats.org/markup-compatibility/2006">
-        <mc:Choice xmlns:a14="http://schemas.microsoft.com/office/drawing/2010/main" Requires="a14">
+      <mc:AlternateContent xmlns:mc="http://schemas.openxmlformats.org/markup-compatibility/2006" xmlns:a14="http://schemas.microsoft.com/office/drawing/2010/main">
+        <mc:Choice Requires="a14">
           <p:sp>
             <p:nvSpPr>
               <p:cNvPr id="15" name="TextBox 14"/>
@@ -8478,7 +9170,7 @@
             </p:txBody>
           </p:sp>
         </mc:Choice>
-        <mc:Fallback>
+        <mc:Fallback xmlns="">
           <p:sp>
             <p:nvSpPr>
               <p:cNvPr id="15" name="TextBox 14"/>
@@ -8517,8 +9209,8 @@
           </p:sp>
         </mc:Fallback>
       </mc:AlternateContent>
-      <mc:AlternateContent xmlns:mc="http://schemas.openxmlformats.org/markup-compatibility/2006">
-        <mc:Choice xmlns:a14="http://schemas.microsoft.com/office/drawing/2010/main" Requires="a14">
+      <mc:AlternateContent xmlns:mc="http://schemas.openxmlformats.org/markup-compatibility/2006" xmlns:a14="http://schemas.microsoft.com/office/drawing/2010/main">
+        <mc:Choice Requires="a14">
           <p:sp>
             <p:nvSpPr>
               <p:cNvPr id="16" name="TextBox 15"/>
@@ -8579,14 +9271,7 @@
                         <a:latin typeface="Cambria Math" panose="02040503050406030204" pitchFamily="18" charset="0"/>
                         <a:cs typeface="Times New Roman" panose="02020603050405020304" pitchFamily="18" charset="0"/>
                       </a:rPr>
-                      <m:t> </m:t>
-                    </m:r>
-                    <m:r>
-                      <a:rPr lang="en-US" b="0" i="1" dirty="0" smtClean="0">
-                        <a:latin typeface="Cambria Math" panose="02040503050406030204" pitchFamily="18" charset="0"/>
-                        <a:cs typeface="Times New Roman" panose="02020603050405020304" pitchFamily="18" charset="0"/>
-                      </a:rPr>
-                      <m:t> </m:t>
+                      <m:t>  </m:t>
                     </m:r>
                   </m:oMath>
                 </a14:m>
@@ -8605,7 +9290,7 @@
             </p:txBody>
           </p:sp>
         </mc:Choice>
-        <mc:Fallback>
+        <mc:Fallback xmlns="">
           <p:sp>
             <p:nvSpPr>
               <p:cNvPr id="16" name="TextBox 15"/>
@@ -8644,8 +9329,8 @@
           </p:sp>
         </mc:Fallback>
       </mc:AlternateContent>
-      <mc:AlternateContent xmlns:mc="http://schemas.openxmlformats.org/markup-compatibility/2006">
-        <mc:Choice xmlns:a14="http://schemas.microsoft.com/office/drawing/2010/main" Requires="a14">
+      <mc:AlternateContent xmlns:mc="http://schemas.openxmlformats.org/markup-compatibility/2006" xmlns:a14="http://schemas.microsoft.com/office/drawing/2010/main">
+        <mc:Choice Requires="a14">
           <p:sp>
             <p:nvSpPr>
               <p:cNvPr id="18" name="TextBox 17"/>
@@ -8777,7 +9462,7 @@
             </p:txBody>
           </p:sp>
         </mc:Choice>
-        <mc:Fallback>
+        <mc:Fallback xmlns="">
           <p:sp>
             <p:nvSpPr>
               <p:cNvPr id="18" name="TextBox 17"/>
@@ -8980,14 +9665,7 @@
                 <a:latin typeface="Times New Roman" panose="02020603050405020304" pitchFamily="18" charset="0"/>
                 <a:cs typeface="Times New Roman" panose="02020603050405020304" pitchFamily="18" charset="0"/>
               </a:rPr>
-              <a:t>Normalized Voltage: </a:t>
-            </a:r>
-            <a:r>
-              <a:rPr lang="en-US" dirty="0" smtClean="0">
-                <a:latin typeface="Times New Roman" panose="02020603050405020304" pitchFamily="18" charset="0"/>
-                <a:cs typeface="Times New Roman" panose="02020603050405020304" pitchFamily="18" charset="0"/>
-              </a:rPr>
-              <a:t>0.16 </a:t>
+              <a:t>Normalized Voltage: 0.16 </a:t>
             </a:r>
             <a:r>
               <a:rPr lang="en-US" dirty="0" err="1" smtClean="0">
@@ -9060,14 +9738,7 @@
                 <a:latin typeface="Times New Roman" panose="02020603050405020304" pitchFamily="18" charset="0"/>
                 <a:cs typeface="Times New Roman" panose="02020603050405020304" pitchFamily="18" charset="0"/>
               </a:rPr>
-              <a:t>Normalized </a:t>
-            </a:r>
-            <a:r>
-              <a:rPr lang="en-US" dirty="0" smtClean="0">
-                <a:latin typeface="Times New Roman" panose="02020603050405020304" pitchFamily="18" charset="0"/>
-                <a:cs typeface="Times New Roman" panose="02020603050405020304" pitchFamily="18" charset="0"/>
-              </a:rPr>
-              <a:t>Voltage</a:t>
+              <a:t>Normalized Voltage</a:t>
             </a:r>
             <a:endParaRPr lang="sv-SE" dirty="0">
               <a:latin typeface="Times New Roman" panose="02020603050405020304" pitchFamily="18" charset="0"/>
@@ -9112,8 +9783,8 @@
           </a:p>
         </p:txBody>
       </p:sp>
-      <mc:AlternateContent xmlns:mc="http://schemas.openxmlformats.org/markup-compatibility/2006">
-        <mc:Choice xmlns:a14="http://schemas.microsoft.com/office/drawing/2010/main" Requires="a14">
+      <mc:AlternateContent xmlns:mc="http://schemas.openxmlformats.org/markup-compatibility/2006" xmlns:a14="http://schemas.microsoft.com/office/drawing/2010/main">
+        <mc:Choice Requires="a14">
           <p:sp>
             <p:nvSpPr>
               <p:cNvPr id="15" name="TextBox 14"/>
@@ -9255,7 +9926,7 @@
             </p:txBody>
           </p:sp>
         </mc:Choice>
-        <mc:Fallback>
+        <mc:Fallback xmlns="">
           <p:sp>
             <p:nvSpPr>
               <p:cNvPr id="15" name="TextBox 14"/>
@@ -9294,8 +9965,8 @@
           </p:sp>
         </mc:Fallback>
       </mc:AlternateContent>
-      <mc:AlternateContent xmlns:mc="http://schemas.openxmlformats.org/markup-compatibility/2006">
-        <mc:Choice xmlns:a14="http://schemas.microsoft.com/office/drawing/2010/main" Requires="a14">
+      <mc:AlternateContent xmlns:mc="http://schemas.openxmlformats.org/markup-compatibility/2006" xmlns:a14="http://schemas.microsoft.com/office/drawing/2010/main">
+        <mc:Choice Requires="a14">
           <p:sp>
             <p:nvSpPr>
               <p:cNvPr id="16" name="TextBox 15"/>
@@ -9356,14 +10027,7 @@
                         <a:latin typeface="Cambria Math" panose="02040503050406030204" pitchFamily="18" charset="0"/>
                         <a:cs typeface="Times New Roman" panose="02020603050405020304" pitchFamily="18" charset="0"/>
                       </a:rPr>
-                      <m:t> </m:t>
-                    </m:r>
-                    <m:r>
-                      <a:rPr lang="en-US" sz="2000" b="0" i="1" dirty="0" smtClean="0">
-                        <a:latin typeface="Cambria Math" panose="02040503050406030204" pitchFamily="18" charset="0"/>
-                        <a:cs typeface="Times New Roman" panose="02020603050405020304" pitchFamily="18" charset="0"/>
-                      </a:rPr>
-                      <m:t> </m:t>
+                      <m:t>  </m:t>
                     </m:r>
                   </m:oMath>
                 </a14:m>
@@ -9382,7 +10046,7 @@
             </p:txBody>
           </p:sp>
         </mc:Choice>
-        <mc:Fallback>
+        <mc:Fallback xmlns="">
           <p:sp>
             <p:nvSpPr>
               <p:cNvPr id="16" name="TextBox 15"/>
@@ -9421,8 +10085,8 @@
           </p:sp>
         </mc:Fallback>
       </mc:AlternateContent>
-      <mc:AlternateContent xmlns:mc="http://schemas.openxmlformats.org/markup-compatibility/2006">
-        <mc:Choice xmlns:a14="http://schemas.microsoft.com/office/drawing/2010/main" Requires="a14">
+      <mc:AlternateContent xmlns:mc="http://schemas.openxmlformats.org/markup-compatibility/2006" xmlns:a14="http://schemas.microsoft.com/office/drawing/2010/main">
+        <mc:Choice Requires="a14">
           <p:sp>
             <p:nvSpPr>
               <p:cNvPr id="18" name="TextBox 17"/>
@@ -9554,7 +10218,7 @@
             </p:txBody>
           </p:sp>
         </mc:Choice>
-        <mc:Fallback>
+        <mc:Fallback xmlns="">
           <p:sp>
             <p:nvSpPr>
               <p:cNvPr id="18" name="TextBox 17"/>
@@ -9757,14 +10421,7 @@
                 <a:latin typeface="Times New Roman" panose="02020603050405020304" pitchFamily="18" charset="0"/>
                 <a:cs typeface="Times New Roman" panose="02020603050405020304" pitchFamily="18" charset="0"/>
               </a:rPr>
-              <a:t>Normalized Voltage: </a:t>
-            </a:r>
-            <a:r>
-              <a:rPr lang="en-US" dirty="0" smtClean="0">
-                <a:latin typeface="Times New Roman" panose="02020603050405020304" pitchFamily="18" charset="0"/>
-                <a:cs typeface="Times New Roman" panose="02020603050405020304" pitchFamily="18" charset="0"/>
-              </a:rPr>
-              <a:t>0.16 </a:t>
+              <a:t>Normalized Voltage: 0.16 </a:t>
             </a:r>
             <a:r>
               <a:rPr lang="en-US" dirty="0" err="1" smtClean="0">
@@ -9837,14 +10494,7 @@
                 <a:latin typeface="Times New Roman" panose="02020603050405020304" pitchFamily="18" charset="0"/>
                 <a:cs typeface="Times New Roman" panose="02020603050405020304" pitchFamily="18" charset="0"/>
               </a:rPr>
-              <a:t>Normalized </a:t>
-            </a:r>
-            <a:r>
-              <a:rPr lang="en-US" dirty="0" smtClean="0">
-                <a:latin typeface="Times New Roman" panose="02020603050405020304" pitchFamily="18" charset="0"/>
-                <a:cs typeface="Times New Roman" panose="02020603050405020304" pitchFamily="18" charset="0"/>
-              </a:rPr>
-              <a:t>Voltage</a:t>
+              <a:t>Normalized Voltage</a:t>
             </a:r>
             <a:endParaRPr lang="sv-SE" dirty="0">
               <a:latin typeface="Times New Roman" panose="02020603050405020304" pitchFamily="18" charset="0"/>
@@ -9889,8 +10539,8 @@
           </a:p>
         </p:txBody>
       </p:sp>
-      <mc:AlternateContent xmlns:mc="http://schemas.openxmlformats.org/markup-compatibility/2006">
-        <mc:Choice xmlns:a14="http://schemas.microsoft.com/office/drawing/2010/main" Requires="a14">
+      <mc:AlternateContent xmlns:mc="http://schemas.openxmlformats.org/markup-compatibility/2006" xmlns:a14="http://schemas.microsoft.com/office/drawing/2010/main">
+        <mc:Choice Requires="a14">
           <p:sp>
             <p:nvSpPr>
               <p:cNvPr id="15" name="TextBox 14"/>
@@ -10032,7 +10682,7 @@
             </p:txBody>
           </p:sp>
         </mc:Choice>
-        <mc:Fallback>
+        <mc:Fallback xmlns="">
           <p:sp>
             <p:nvSpPr>
               <p:cNvPr id="15" name="TextBox 14"/>
@@ -10071,8 +10721,8 @@
           </p:sp>
         </mc:Fallback>
       </mc:AlternateContent>
-      <mc:AlternateContent xmlns:mc="http://schemas.openxmlformats.org/markup-compatibility/2006">
-        <mc:Choice xmlns:a14="http://schemas.microsoft.com/office/drawing/2010/main" Requires="a14">
+      <mc:AlternateContent xmlns:mc="http://schemas.openxmlformats.org/markup-compatibility/2006" xmlns:a14="http://schemas.microsoft.com/office/drawing/2010/main">
+        <mc:Choice Requires="a14">
           <p:sp>
             <p:nvSpPr>
               <p:cNvPr id="16" name="TextBox 15"/>
@@ -10133,14 +10783,7 @@
                         <a:latin typeface="Cambria Math" panose="02040503050406030204" pitchFamily="18" charset="0"/>
                         <a:cs typeface="Times New Roman" panose="02020603050405020304" pitchFamily="18" charset="0"/>
                       </a:rPr>
-                      <m:t> </m:t>
-                    </m:r>
-                    <m:r>
-                      <a:rPr lang="en-US" b="0" i="1" dirty="0" smtClean="0">
-                        <a:latin typeface="Cambria Math" panose="02040503050406030204" pitchFamily="18" charset="0"/>
-                        <a:cs typeface="Times New Roman" panose="02020603050405020304" pitchFamily="18" charset="0"/>
-                      </a:rPr>
-                      <m:t> </m:t>
+                      <m:t>  </m:t>
                     </m:r>
                   </m:oMath>
                 </a14:m>
@@ -10159,7 +10802,7 @@
             </p:txBody>
           </p:sp>
         </mc:Choice>
-        <mc:Fallback>
+        <mc:Fallback xmlns="">
           <p:sp>
             <p:nvSpPr>
               <p:cNvPr id="16" name="TextBox 15"/>
@@ -10198,8 +10841,8 @@
           </p:sp>
         </mc:Fallback>
       </mc:AlternateContent>
-      <mc:AlternateContent xmlns:mc="http://schemas.openxmlformats.org/markup-compatibility/2006">
-        <mc:Choice xmlns:a14="http://schemas.microsoft.com/office/drawing/2010/main" Requires="a14">
+      <mc:AlternateContent xmlns:mc="http://schemas.openxmlformats.org/markup-compatibility/2006" xmlns:a14="http://schemas.microsoft.com/office/drawing/2010/main">
+        <mc:Choice Requires="a14">
           <p:sp>
             <p:nvSpPr>
               <p:cNvPr id="18" name="TextBox 17"/>
@@ -10331,7 +10974,7 @@
             </p:txBody>
           </p:sp>
         </mc:Choice>
-        <mc:Fallback>
+        <mc:Fallback xmlns="">
           <p:sp>
             <p:nvSpPr>
               <p:cNvPr id="18" name="TextBox 17"/>
@@ -10534,14 +11177,7 @@
                 <a:latin typeface="Times New Roman" panose="02020603050405020304" pitchFamily="18" charset="0"/>
                 <a:cs typeface="Times New Roman" panose="02020603050405020304" pitchFamily="18" charset="0"/>
               </a:rPr>
-              <a:t>Normalized Voltage: </a:t>
-            </a:r>
-            <a:r>
-              <a:rPr lang="en-US" dirty="0" smtClean="0">
-                <a:latin typeface="Times New Roman" panose="02020603050405020304" pitchFamily="18" charset="0"/>
-                <a:cs typeface="Times New Roman" panose="02020603050405020304" pitchFamily="18" charset="0"/>
-              </a:rPr>
-              <a:t>0.16 </a:t>
+              <a:t>Normalized Voltage: 0.16 </a:t>
             </a:r>
             <a:r>
               <a:rPr lang="en-US" dirty="0" err="1" smtClean="0">
@@ -10614,14 +11250,7 @@
                 <a:latin typeface="Times New Roman" panose="02020603050405020304" pitchFamily="18" charset="0"/>
                 <a:cs typeface="Times New Roman" panose="02020603050405020304" pitchFamily="18" charset="0"/>
               </a:rPr>
-              <a:t>Normalized </a:t>
-            </a:r>
-            <a:r>
-              <a:rPr lang="en-US" dirty="0" smtClean="0">
-                <a:latin typeface="Times New Roman" panose="02020603050405020304" pitchFamily="18" charset="0"/>
-                <a:cs typeface="Times New Roman" panose="02020603050405020304" pitchFamily="18" charset="0"/>
-              </a:rPr>
-              <a:t>Voltage</a:t>
+              <a:t>Normalized Voltage</a:t>
             </a:r>
             <a:endParaRPr lang="sv-SE" dirty="0">
               <a:latin typeface="Times New Roman" panose="02020603050405020304" pitchFamily="18" charset="0"/>
@@ -10666,8 +11295,8 @@
           </a:p>
         </p:txBody>
       </p:sp>
-      <mc:AlternateContent xmlns:mc="http://schemas.openxmlformats.org/markup-compatibility/2006">
-        <mc:Choice xmlns:a14="http://schemas.microsoft.com/office/drawing/2010/main" Requires="a14">
+      <mc:AlternateContent xmlns:mc="http://schemas.openxmlformats.org/markup-compatibility/2006" xmlns:a14="http://schemas.microsoft.com/office/drawing/2010/main">
+        <mc:Choice Requires="a14">
           <p:sp>
             <p:nvSpPr>
               <p:cNvPr id="15" name="TextBox 14"/>
@@ -10809,7 +11438,7 @@
             </p:txBody>
           </p:sp>
         </mc:Choice>
-        <mc:Fallback>
+        <mc:Fallback xmlns="">
           <p:sp>
             <p:nvSpPr>
               <p:cNvPr id="15" name="TextBox 14"/>
@@ -10848,8 +11477,8 @@
           </p:sp>
         </mc:Fallback>
       </mc:AlternateContent>
-      <mc:AlternateContent xmlns:mc="http://schemas.openxmlformats.org/markup-compatibility/2006">
-        <mc:Choice xmlns:a14="http://schemas.microsoft.com/office/drawing/2010/main" Requires="a14">
+      <mc:AlternateContent xmlns:mc="http://schemas.openxmlformats.org/markup-compatibility/2006" xmlns:a14="http://schemas.microsoft.com/office/drawing/2010/main">
+        <mc:Choice Requires="a14">
           <p:sp>
             <p:nvSpPr>
               <p:cNvPr id="16" name="TextBox 15"/>
@@ -10910,14 +11539,7 @@
                         <a:latin typeface="Cambria Math" panose="02040503050406030204" pitchFamily="18" charset="0"/>
                         <a:cs typeface="Times New Roman" panose="02020603050405020304" pitchFamily="18" charset="0"/>
                       </a:rPr>
-                      <m:t> </m:t>
-                    </m:r>
-                    <m:r>
-                      <a:rPr lang="en-US" sz="2000" b="0" i="1" dirty="0" smtClean="0">
-                        <a:latin typeface="Cambria Math" panose="02040503050406030204" pitchFamily="18" charset="0"/>
-                        <a:cs typeface="Times New Roman" panose="02020603050405020304" pitchFamily="18" charset="0"/>
-                      </a:rPr>
-                      <m:t> </m:t>
+                      <m:t>  </m:t>
                     </m:r>
                   </m:oMath>
                 </a14:m>
@@ -10936,7 +11558,7 @@
             </p:txBody>
           </p:sp>
         </mc:Choice>
-        <mc:Fallback>
+        <mc:Fallback xmlns="">
           <p:sp>
             <p:nvSpPr>
               <p:cNvPr id="16" name="TextBox 15"/>
@@ -10975,8 +11597,8 @@
           </p:sp>
         </mc:Fallback>
       </mc:AlternateContent>
-      <mc:AlternateContent xmlns:mc="http://schemas.openxmlformats.org/markup-compatibility/2006">
-        <mc:Choice xmlns:a14="http://schemas.microsoft.com/office/drawing/2010/main" Requires="a14">
+      <mc:AlternateContent xmlns:mc="http://schemas.openxmlformats.org/markup-compatibility/2006" xmlns:a14="http://schemas.microsoft.com/office/drawing/2010/main">
+        <mc:Choice Requires="a14">
           <p:sp>
             <p:nvSpPr>
               <p:cNvPr id="18" name="TextBox 17"/>
@@ -11108,7 +11730,7 @@
             </p:txBody>
           </p:sp>
         </mc:Choice>
-        <mc:Fallback>
+        <mc:Fallback xmlns="">
           <p:sp>
             <p:nvSpPr>
               <p:cNvPr id="18" name="TextBox 17"/>
@@ -11311,14 +11933,7 @@
                 <a:latin typeface="Times New Roman" panose="02020603050405020304" pitchFamily="18" charset="0"/>
                 <a:cs typeface="Times New Roman" panose="02020603050405020304" pitchFamily="18" charset="0"/>
               </a:rPr>
-              <a:t>Normalized Voltage: </a:t>
-            </a:r>
-            <a:r>
-              <a:rPr lang="en-US" dirty="0" smtClean="0">
-                <a:latin typeface="Times New Roman" panose="02020603050405020304" pitchFamily="18" charset="0"/>
-                <a:cs typeface="Times New Roman" panose="02020603050405020304" pitchFamily="18" charset="0"/>
-              </a:rPr>
-              <a:t>0.16 </a:t>
+              <a:t>Normalized Voltage: 0.16 </a:t>
             </a:r>
             <a:r>
               <a:rPr lang="en-US" dirty="0" err="1" smtClean="0">
@@ -11391,14 +12006,7 @@
                 <a:latin typeface="Times New Roman" panose="02020603050405020304" pitchFamily="18" charset="0"/>
                 <a:cs typeface="Times New Roman" panose="02020603050405020304" pitchFamily="18" charset="0"/>
               </a:rPr>
-              <a:t>Normalized </a:t>
-            </a:r>
-            <a:r>
-              <a:rPr lang="en-US" dirty="0" smtClean="0">
-                <a:latin typeface="Times New Roman" panose="02020603050405020304" pitchFamily="18" charset="0"/>
-                <a:cs typeface="Times New Roman" panose="02020603050405020304" pitchFamily="18" charset="0"/>
-              </a:rPr>
-              <a:t>Voltage</a:t>
+              <a:t>Normalized Voltage</a:t>
             </a:r>
             <a:endParaRPr lang="sv-SE" dirty="0">
               <a:latin typeface="Times New Roman" panose="02020603050405020304" pitchFamily="18" charset="0"/>
@@ -11443,8 +12051,8 @@
           </a:p>
         </p:txBody>
       </p:sp>
-      <mc:AlternateContent xmlns:mc="http://schemas.openxmlformats.org/markup-compatibility/2006">
-        <mc:Choice xmlns:a14="http://schemas.microsoft.com/office/drawing/2010/main" Requires="a14">
+      <mc:AlternateContent xmlns:mc="http://schemas.openxmlformats.org/markup-compatibility/2006" xmlns:a14="http://schemas.microsoft.com/office/drawing/2010/main">
+        <mc:Choice Requires="a14">
           <p:sp>
             <p:nvSpPr>
               <p:cNvPr id="15" name="TextBox 14"/>
@@ -11586,7 +12194,7 @@
             </p:txBody>
           </p:sp>
         </mc:Choice>
-        <mc:Fallback>
+        <mc:Fallback xmlns="">
           <p:sp>
             <p:nvSpPr>
               <p:cNvPr id="15" name="TextBox 14"/>
@@ -11625,8 +12233,8 @@
           </p:sp>
         </mc:Fallback>
       </mc:AlternateContent>
-      <mc:AlternateContent xmlns:mc="http://schemas.openxmlformats.org/markup-compatibility/2006">
-        <mc:Choice xmlns:a14="http://schemas.microsoft.com/office/drawing/2010/main" Requires="a14">
+      <mc:AlternateContent xmlns:mc="http://schemas.openxmlformats.org/markup-compatibility/2006" xmlns:a14="http://schemas.microsoft.com/office/drawing/2010/main">
+        <mc:Choice Requires="a14">
           <p:sp>
             <p:nvSpPr>
               <p:cNvPr id="16" name="TextBox 15"/>
@@ -11687,14 +12295,7 @@
                         <a:latin typeface="Cambria Math" panose="02040503050406030204" pitchFamily="18" charset="0"/>
                         <a:cs typeface="Times New Roman" panose="02020603050405020304" pitchFamily="18" charset="0"/>
                       </a:rPr>
-                      <m:t> </m:t>
-                    </m:r>
-                    <m:r>
-                      <a:rPr lang="en-US" sz="2000" b="0" i="1" dirty="0" smtClean="0">
-                        <a:latin typeface="Cambria Math" panose="02040503050406030204" pitchFamily="18" charset="0"/>
-                        <a:cs typeface="Times New Roman" panose="02020603050405020304" pitchFamily="18" charset="0"/>
-                      </a:rPr>
-                      <m:t> </m:t>
+                      <m:t>  </m:t>
                     </m:r>
                   </m:oMath>
                 </a14:m>
@@ -11713,7 +12314,7 @@
             </p:txBody>
           </p:sp>
         </mc:Choice>
-        <mc:Fallback>
+        <mc:Fallback xmlns="">
           <p:sp>
             <p:nvSpPr>
               <p:cNvPr id="16" name="TextBox 15"/>
@@ -11752,8 +12353,8 @@
           </p:sp>
         </mc:Fallback>
       </mc:AlternateContent>
-      <mc:AlternateContent xmlns:mc="http://schemas.openxmlformats.org/markup-compatibility/2006">
-        <mc:Choice xmlns:a14="http://schemas.microsoft.com/office/drawing/2010/main" Requires="a14">
+      <mc:AlternateContent xmlns:mc="http://schemas.openxmlformats.org/markup-compatibility/2006" xmlns:a14="http://schemas.microsoft.com/office/drawing/2010/main">
+        <mc:Choice Requires="a14">
           <p:sp>
             <p:nvSpPr>
               <p:cNvPr id="18" name="TextBox 17"/>
@@ -11885,7 +12486,7 @@
             </p:txBody>
           </p:sp>
         </mc:Choice>
-        <mc:Fallback>
+        <mc:Fallback xmlns="">
           <p:sp>
             <p:nvSpPr>
               <p:cNvPr id="18" name="TextBox 17"/>
